--- a/demo/TaskBoard-DevSecOps-Capstone.pptx
+++ b/demo/TaskBoard-DevSecOps-Capstone.pptx
@@ -21,9 +21,10 @@
     <p:sldId id="269" r:id="rId15"/>
     <p:sldId id="270" r:id="rId16"/>
     <p:sldId id="271" r:id="rId17"/>
+    <p:sldId id="272" r:id="rId18"/>
   </p:sldIdLst>
   <p:notesMasterIdLst>
-    <p:notesMasterId r:id="rId18"/>
+    <p:notesMasterId r:id="rId19"/>
   </p:notesMasterIdLst>
   <p:sldSz cx="12192000" cy="6858000"/>
   <p:notesSz cx="6858000" cy="12192000"/>
@@ -122,44 +123,45 @@
   <p:extLst>
     <p:ext uri="{521415D9-36F7-43E2-AB2F-B90AF26B5E84}">
       <p14:sectionLst xmlns:p14="http://schemas.microsoft.com/office/powerpoint/2010/main">
-        <p14:section name="Introduction" id="{bc5dbbfc-d076-902b-d02f-c3943710aa3e}">
+        <p14:section name="Introduction" id="{96f4f4f8-3579-4469-6ac4-6e4979d4c20d}">
           <p14:sldIdLst>
             <p14:sldId id="256"/>
             <p14:sldId id="257"/>
           </p14:sldIdLst>
         </p14:section>
-        <p14:section name="Application" id="{434c9af6-3c68-67f2-358b-b93c23123dcb}">
+        <p14:section name="Application" id="{7d9ead86-f8c9-90a9-bc47-9b0e95316413}">
           <p14:sldIdLst>
             <p14:sldId id="258"/>
             <p14:sldId id="259"/>
           </p14:sldIdLst>
         </p14:section>
-        <p14:section name="Architecture" id="{8da2abcf-7132-5756-9060-c53b829a97f3}">
+        <p14:section name="Architecture" id="{1fa83653-1428-7f1b-1ae5-3850d904af5e}">
           <p14:sldIdLst>
             <p14:sldId id="260"/>
           </p14:sldIdLst>
         </p14:section>
-        <p14:section name="Pipeline" id="{1fa13539-f187-4ce4-08e2-8593e3bbac63}">
+        <p14:section name="Pipeline" id="{199c6b95-5b84-f90d-bd71-e5ce8ec91264}">
           <p14:sldIdLst>
             <p14:sldId id="261"/>
             <p14:sldId id="262"/>
             <p14:sldId id="263"/>
           </p14:sldIdLst>
         </p14:section>
-        <p14:section name="Infrastructure" id="{5bda4e35-f53d-df95-ef29-eec8d9825b5b}">
+        <p14:section name="Infrastructure" id="{8705b8ec-2e1f-5ebb-52ed-c8cab0be671f}">
           <p14:sldIdLst>
             <p14:sldId id="264"/>
             <p14:sldId id="265"/>
             <p14:sldId id="266"/>
+            <p14:sldId id="267"/>
           </p14:sldIdLst>
         </p14:section>
-        <p14:section name="Operations" id="{34d97c83-40c1-10c5-3bda-a17edb634b1c}">
+        <p14:section name="Operations" id="{91075b5e-b320-692e-8027-6eb8dba709dc}">
           <p14:sldIdLst>
-            <p14:sldId id="267"/>
             <p14:sldId id="268"/>
             <p14:sldId id="269"/>
             <p14:sldId id="270"/>
             <p14:sldId id="271"/>
+            <p14:sldId id="272"/>
           </p14:sldIdLst>
         </p14:section>
       </p14:sectionLst>
@@ -830,7 +832,7 @@
           <a:p>
             <a:r>
               <a:rPr lang="en-US" dirty="0"/>
-              <a:t>The backend exposes Prometheus metrics. A ServiceMonitor in the Helm chart tells the Prometheus Operator to scrape every backend pod — when the autoscaler added pods, they appeared as targets automatically. The Grafana dashboard is code inside the chart, loaded by Grafana's sidecar. During the demo, run the load test and watch request rate and latency move live.</a:t>
+              <a:t>Real evidence from the public repo: the first pipeline run with every stage green, and Argo CD synced to the commit the pipeline wrote. The image tag in GHCR is the commit SHA. Self-heal was tested by scaling a deployment by hand; Argo CD put it back.</a:t>
             </a:r>
             <a:endParaRPr lang="en-US" dirty="0"/>
           </a:p>
@@ -918,7 +920,7 @@
           <a:p>
             <a:r>
               <a:rPr lang="en-US" dirty="0"/>
-              <a:t>These are the real HPA events from the local cluster. Under the load test, CPU crossed the 60 percent target and the autoscaler added a third and then a fourth backend pod. Show kubectl get hpa during the demo.</a:t>
+              <a:t>The backend exposes Prometheus metrics. A ServiceMonitor in the Helm chart tells the Prometheus Operator to scrape every backend pod — when the autoscaler added pods, they appeared as targets automatically. The Grafana dashboard is code inside the chart, loaded by Grafana's sidecar. During the demo, run the load test and watch request rate and latency move live.</a:t>
             </a:r>
             <a:endParaRPr lang="en-US" dirty="0"/>
           </a:p>
@@ -1006,7 +1008,7 @@
           <a:p>
             <a:r>
               <a:rPr lang="en-US" dirty="0"/>
-              <a:t>The starting repository looked complete but would not have run end to end. These are twelve concrete defects I found by actually running every layer, each with its fix. Pick two or three to tell as stories — for example the init container that waited forever because the container user had no passwd entry, or the React modal that never closed because the event's currentTarget is cleared after an await.</a:t>
+              <a:t>These are the real HPA events from the local cluster. Under the load test, CPU crossed the 60 percent target and the autoscaler added a third and then a fourth backend pod. Show kubectl get hpa during the demo.</a:t>
             </a:r>
             <a:endParaRPr lang="en-US" dirty="0"/>
           </a:p>
@@ -1094,7 +1096,7 @@
           <a:p>
             <a:r>
               <a:rPr lang="en-US" dirty="0"/>
-              <a:t>Close with what I'd take to a real team, and what I'd do next to make this production-grade.</a:t>
+              <a:t>The starting repository looked complete but would not have run end to end. These are twelve concrete defects I found by actually running every layer, each with its fix. Pick two or three to tell as stories — for example the init container that waited forever because the container user had no passwd entry, or the React modal that never closed because the event's currentTarget is cleared after an await.</a:t>
             </a:r>
             <a:endParaRPr lang="en-US" dirty="0"/>
           </a:p>
@@ -1182,7 +1184,7 @@
           <a:p>
             <a:r>
               <a:rPr lang="en-US" dirty="0"/>
-              <a:t>Switch to the live walkthrough in this order: push a commit and show the Actions run, then terraform plan and the AWS console, Argo CD, kubectl, Prometheus targets and Grafana with the load test running.</a:t>
+              <a:t>Close with what I'd take to a real team, and what I'd do next to make this production-grade.</a:t>
             </a:r>
             <a:endParaRPr lang="en-US" dirty="0"/>
           </a:p>
@@ -1206,6 +1208,94 @@
             <a:fld id="{F7021451-1387-4CA6-816F-3879F97B5CBC}" type="slidenum">
               <a:rPr lang="en-US"/>
               <a:t>16</a:t>
+            </a:fld>
+            <a:endParaRPr lang="en-US"/>
+          </a:p>
+        </p:txBody>
+      </p:sp>
+    </p:spTree>
+    <p:extLst>
+      <p:ext uri="{BB962C8B-B14F-4D97-AF65-F5344CB8AC3E}">
+        <p14:creationId xmlns:p14="http://schemas.microsoft.com/office/powerpoint/2010/main" val="1024086991"/>
+      </p:ext>
+    </p:extLst>
+  </p:cSld>
+  <p:clrMapOvr>
+    <a:masterClrMapping/>
+  </p:clrMapOvr>
+</p:notes>
+</file>
+
+<file path=ppt/notesSlides/notesSlide17.xml><?xml version="1.0" encoding="utf-8"?>
+<p:notes xmlns:a="http://schemas.openxmlformats.org/drawingml/2006/main" xmlns:r="http://schemas.openxmlformats.org/officeDocument/2006/relationships" xmlns:p="http://schemas.openxmlformats.org/presentationml/2006/main">
+  <p:cSld>
+    <p:spTree>
+      <p:nvGrpSpPr>
+        <p:cNvPr id="1" name=""/>
+        <p:cNvGrpSpPr/>
+        <p:nvPr/>
+      </p:nvGrpSpPr>
+      <p:grpSpPr>
+        <a:xfrm>
+          <a:off x="0" y="0"/>
+          <a:ext cx="0" cy="0"/>
+          <a:chOff x="0" y="0"/>
+          <a:chExt cx="0" cy="0"/>
+        </a:xfrm>
+      </p:grpSpPr>
+      <p:sp>
+        <p:nvSpPr>
+          <p:cNvPr id="2" name="Slide Image Placeholder 1"/>
+          <p:cNvSpPr>
+            <a:spLocks noGrp="1" noRot="1" noChangeAspect="1"/>
+          </p:cNvSpPr>
+          <p:nvPr>
+            <p:ph type="sldImg"/>
+          </p:nvPr>
+        </p:nvSpPr>
+        <p:spPr/>
+      </p:sp>
+      <p:sp>
+        <p:nvSpPr>
+          <p:cNvPr id="3" name="Notes Placeholder 2"/>
+          <p:cNvSpPr>
+            <a:spLocks noGrp="1"/>
+          </p:cNvSpPr>
+          <p:nvPr>
+            <p:ph type="body" idx="1"/>
+          </p:nvPr>
+        </p:nvSpPr>
+        <p:spPr/>
+        <p:txBody>
+          <a:bodyPr/>
+          <a:lstStyle/>
+          <a:p>
+            <a:r>
+              <a:rPr lang="en-US" dirty="0"/>
+              <a:t>Switch to the live walkthrough in this order: push a commit and show the Actions run, then terraform plan and the AWS console, Argo CD, kubectl, Prometheus targets and Grafana with the load test running.</a:t>
+            </a:r>
+            <a:endParaRPr lang="en-US" dirty="0"/>
+          </a:p>
+        </p:txBody>
+      </p:sp>
+      <p:sp>
+        <p:nvSpPr>
+          <p:cNvPr id="4" name="Slide Number Placeholder 3"/>
+          <p:cNvSpPr>
+            <a:spLocks noGrp="1"/>
+          </p:cNvSpPr>
+          <p:nvPr>
+            <p:ph type="sldNum" sz="quarter" idx="10"/>
+          </p:nvPr>
+        </p:nvSpPr>
+        <p:spPr/>
+        <p:txBody>
+          <a:bodyPr/>
+          <a:lstStyle/>
+          <a:p>
+            <a:fld id="{F7021451-1387-4CA6-816F-3879F97B5CBC}" type="slidenum">
+              <a:rPr lang="en-US"/>
+              <a:t>17</a:t>
             </a:fld>
             <a:endParaRPr lang="en-US"/>
           </a:p>
@@ -5113,7 +5203,7 @@
                   <a:schemeClr val="tx1"/>
                 </a:solidFill>
               </a:rPr>
-              <a:t>Observability: Prometheus + Grafana</a:t>
+              <a:t>Proof: green pipeline, Argo CD in sync</a:t>
             </a:r>
             <a:endParaRPr lang="en-US" sz="3400" dirty="0"/>
           </a:p>
@@ -5121,7 +5211,7 @@
       </p:sp>
       <p:pic>
         <p:nvPicPr>
-          <p:cNvPr id="3" name="grafana-screenshot" descr="/Users/healthbay/Desktop/capstone/devsecops-python/demo/screenshots/grafana-dashboard.png">    </p:cNvPr>
+          <p:cNvPr id="3" name="actions-screenshot" descr="/Users/healthbay/Desktop/capstone/devsecops-python/demo/screenshots/github-actions-run.png">    </p:cNvPr>
           <p:cNvPicPr>
             <a:picLocks noChangeAspect="1"/>
           </p:cNvPicPr>
@@ -5136,7 +5226,7 @@
         <p:spPr>
           <a:xfrm>
             <a:off x="548640" y="1371600"/>
-            <a:ext cx="6949440" cy="4343400"/>
+            <a:ext cx="5349240" cy="3343275"/>
           </a:xfrm>
           <a:prstGeom prst="rect">
             <a:avLst/>
@@ -5150,34 +5240,9 @@
           </a:effectLst>
         </p:spPr>
       </p:pic>
-      <p:sp>
-        <p:nvSpPr>
-          <p:cNvPr id="4" name="obs-badge-0-circle"/>
-          <p:cNvSpPr/>
-          <p:nvPr/>
-        </p:nvSpPr>
-        <p:spPr>
-          <a:xfrm>
-            <a:off x="7863840" y="1371600"/>
-            <a:ext cx="502920" cy="502920"/>
-          </a:xfrm>
-          <a:prstGeom prst="ellipse">
-            <a:avLst/>
-          </a:prstGeom>
-          <a:solidFill>
-            <a:schemeClr val="accent2"/>
-          </a:solidFill>
-          <a:ln w="12700">
-            <a:solidFill>
-              <a:schemeClr val="accent2"/>
-            </a:solidFill>
-            <a:prstDash val="solid"/>
-          </a:ln>
-        </p:spPr>
-      </p:sp>
       <p:pic>
         <p:nvPicPr>
-          <p:cNvPr id="5" name="obs-badge-0-icon" descr="preencoded.png">    </p:cNvPr>
+          <p:cNvPr id="4" name="argocd-screenshot" descr="/Users/healthbay/Desktop/capstone/devsecops-python/demo/screenshots/argocd-app.png">    </p:cNvPr>
           <p:cNvPicPr>
             <a:picLocks noChangeAspect="1"/>
           </p:cNvPicPr>
@@ -5191,24 +5256,78 @@
         </p:blipFill>
         <p:spPr>
           <a:xfrm>
-            <a:off x="7989570" y="1497330"/>
-            <a:ext cx="251460" cy="251460"/>
-          </a:xfrm>
-          <a:prstGeom prst="rect">
-            <a:avLst/>
-          </a:prstGeom>
+            <a:off x="6291072" y="1371600"/>
+            <a:ext cx="5349240" cy="3343275"/>
+          </a:xfrm>
+          <a:prstGeom prst="rect">
+            <a:avLst/>
+          </a:prstGeom>
+          <a:effectLst>
+            <a:outerShdw sx="100000" sy="100000" kx="0" ky="0" algn="bl" rotWithShape="0" blurRad="152400" dist="38100" dir="5400000">
+              <a:srgbClr val="101828">
+                <a:alpha val="25000"/>
+              </a:srgbClr>
+            </a:outerShdw>
+          </a:effectLst>
         </p:spPr>
       </p:pic>
       <p:sp>
         <p:nvSpPr>
+          <p:cNvPr id="5" name="Text 1"/>
+          <p:cNvSpPr txBox="1"/>
+          <p:nvPr/>
+        </p:nvSpPr>
+        <p:spPr>
+          <a:xfrm>
+            <a:off x="548640" y="4846320"/>
+            <a:ext cx="5349240" cy="640080"/>
+          </a:xfrm>
+          <a:prstGeom prst="rect">
+            <a:avLst/>
+          </a:prstGeom>
+          <a:noFill/>
+          <a:ln/>
+        </p:spPr>
+        <p:txBody>
+          <a:bodyPr wrap="square" lIns="0" tIns="0" rIns="0" bIns="0" rtlCol="0" anchor="t"/>
+          <a:lstStyle/>
+          <a:p>
+            <a:pPr indent="0" marL="0">
+              <a:buNone/>
+            </a:pPr>
+            <a:r>
+              <a:rPr lang="en-US" sz="1300" b="1" dirty="0">
+                <a:solidFill>
+                  <a:schemeClr val="tx1"/>
+                </a:solidFill>
+              </a:rPr>
+              <a:t>GitHub Actions: </a:t>
+            </a:r>
+            <a:pPr indent="0" marL="0">
+              <a:buNone/>
+            </a:pPr>
+            <a:r>
+              <a:rPr lang="en-US" sz="1300" dirty="0">
+                <a:solidFill>
+                  <a:schemeClr val="tx2"/>
+                </a:solidFill>
+              </a:rPr>
+              <a:t>all 5 jobs green; images pushed to GHCR tagged with the commit SHA</a:t>
+            </a:r>
+            <a:endParaRPr lang="en-US" sz="1300" dirty="0"/>
+          </a:p>
+        </p:txBody>
+      </p:sp>
+      <p:sp>
+        <p:nvSpPr>
           <p:cNvPr id="6" name="Text 2"/>
           <p:cNvSpPr txBox="1"/>
           <p:nvPr/>
         </p:nvSpPr>
         <p:spPr>
           <a:xfrm>
-            <a:off x="8549640" y="1353312"/>
-            <a:ext cx="3108960" cy="320040"/>
+            <a:off x="6291072" y="4846320"/>
+            <a:ext cx="5349240" cy="640080"/>
           </a:xfrm>
           <a:prstGeom prst="rect">
             <a:avLst/>
@@ -5224,328 +5343,25 @@
               <a:buNone/>
             </a:pPr>
             <a:r>
-              <a:rPr lang="en-US" sz="1500" b="1" dirty="0">
+              <a:rPr lang="en-US" sz="1300" b="1" dirty="0">
                 <a:solidFill>
                   <a:schemeClr val="tx1"/>
                 </a:solidFill>
               </a:rPr>
-              <a:t>/metrics</a:t>
-            </a:r>
-            <a:endParaRPr lang="en-US" sz="1500" dirty="0"/>
-          </a:p>
-        </p:txBody>
-      </p:sp>
-      <p:sp>
-        <p:nvSpPr>
-          <p:cNvPr id="7" name="Text 3"/>
-          <p:cNvSpPr txBox="1"/>
-          <p:nvPr/>
-        </p:nvSpPr>
-        <p:spPr>
-          <a:xfrm>
-            <a:off x="8549640" y="1700784"/>
-            <a:ext cx="3108960" cy="1005840"/>
-          </a:xfrm>
-          <a:prstGeom prst="rect">
-            <a:avLst/>
-          </a:prstGeom>
-          <a:noFill/>
-          <a:ln/>
-        </p:spPr>
-        <p:txBody>
-          <a:bodyPr wrap="square" lIns="0" tIns="0" rIns="0" bIns="0" rtlCol="0" anchor="t"/>
-          <a:lstStyle/>
-          <a:p>
-            <a:pPr indent="0" marL="0">
-              <a:buNone/>
-            </a:pPr>
-            <a:r>
-              <a:rPr lang="en-US" sz="1250" dirty="0">
+              <a:t>Argo CD: </a:t>
+            </a:r>
+            <a:pPr indent="0" marL="0">
+              <a:buNone/>
+            </a:pPr>
+            <a:r>
+              <a:rPr lang="en-US" sz="1300" dirty="0">
                 <a:solidFill>
                   <a:schemeClr val="tx2"/>
                 </a:solidFill>
               </a:rPr>
-              <a:t>request count + latency histograms, and a business counter taskboard_task_events_total</a:t>
-            </a:r>
-            <a:endParaRPr lang="en-US" sz="1250" dirty="0"/>
-          </a:p>
-        </p:txBody>
-      </p:sp>
-      <p:sp>
-        <p:nvSpPr>
-          <p:cNvPr id="8" name="obs-badge-1-circle"/>
-          <p:cNvSpPr/>
-          <p:nvPr/>
-        </p:nvSpPr>
-        <p:spPr>
-          <a:xfrm>
-            <a:off x="7863840" y="2834640"/>
-            <a:ext cx="502920" cy="502920"/>
-          </a:xfrm>
-          <a:prstGeom prst="ellipse">
-            <a:avLst/>
-          </a:prstGeom>
-          <a:solidFill>
-            <a:schemeClr val="accent2"/>
-          </a:solidFill>
-          <a:ln w="12700">
-            <a:solidFill>
-              <a:schemeClr val="accent2"/>
-            </a:solidFill>
-            <a:prstDash val="solid"/>
-          </a:ln>
-        </p:spPr>
-      </p:sp>
-      <p:pic>
-        <p:nvPicPr>
-          <p:cNvPr id="9" name="obs-badge-1-icon" descr="preencoded.png">    </p:cNvPr>
-          <p:cNvPicPr>
-            <a:picLocks noChangeAspect="1"/>
-          </p:cNvPicPr>
-          <p:nvPr/>
-        </p:nvPicPr>
-        <p:blipFill>
-          <a:blip r:embed="rId3"/>
-          <a:stretch>
-            <a:fillRect/>
-          </a:stretch>
-        </p:blipFill>
-        <p:spPr>
-          <a:xfrm>
-            <a:off x="7989570" y="2960370"/>
-            <a:ext cx="251460" cy="251460"/>
-          </a:xfrm>
-          <a:prstGeom prst="rect">
-            <a:avLst/>
-          </a:prstGeom>
-        </p:spPr>
-      </p:pic>
-      <p:sp>
-        <p:nvSpPr>
-          <p:cNvPr id="10" name="Text 5"/>
-          <p:cNvSpPr txBox="1"/>
-          <p:nvPr/>
-        </p:nvSpPr>
-        <p:spPr>
-          <a:xfrm>
-            <a:off x="8549640" y="2816352"/>
-            <a:ext cx="3108960" cy="320040"/>
-          </a:xfrm>
-          <a:prstGeom prst="rect">
-            <a:avLst/>
-          </a:prstGeom>
-          <a:noFill/>
-          <a:ln/>
-        </p:spPr>
-        <p:txBody>
-          <a:bodyPr wrap="square" lIns="0" tIns="0" rIns="0" bIns="0" rtlCol="0" anchor="t"/>
-          <a:lstStyle/>
-          <a:p>
-            <a:pPr indent="0" marL="0">
-              <a:buNone/>
-            </a:pPr>
-            <a:r>
-              <a:rPr lang="en-US" sz="1500" b="1" dirty="0">
-                <a:solidFill>
-                  <a:schemeClr val="tx1"/>
-                </a:solidFill>
-              </a:rPr>
-              <a:t>ServiceMonitor</a:t>
-            </a:r>
-            <a:endParaRPr lang="en-US" sz="1500" dirty="0"/>
-          </a:p>
-        </p:txBody>
-      </p:sp>
-      <p:sp>
-        <p:nvSpPr>
-          <p:cNvPr id="11" name="Text 6"/>
-          <p:cNvSpPr txBox="1"/>
-          <p:nvPr/>
-        </p:nvSpPr>
-        <p:spPr>
-          <a:xfrm>
-            <a:off x="8549640" y="3163824"/>
-            <a:ext cx="3108960" cy="1005840"/>
-          </a:xfrm>
-          <a:prstGeom prst="rect">
-            <a:avLst/>
-          </a:prstGeom>
-          <a:noFill/>
-          <a:ln/>
-        </p:spPr>
-        <p:txBody>
-          <a:bodyPr wrap="square" lIns="0" tIns="0" rIns="0" bIns="0" rtlCol="0" anchor="t"/>
-          <a:lstStyle/>
-          <a:p>
-            <a:pPr indent="0" marL="0">
-              <a:buNone/>
-            </a:pPr>
-            <a:r>
-              <a:rPr lang="en-US" sz="1250" dirty="0">
-                <a:solidFill>
-                  <a:schemeClr val="tx2"/>
-                </a:solidFill>
-              </a:rPr>
-              <a:t>Prometheus Operator discovers every backend pod automatically — 4/4 targets UP after scaling</a:t>
-            </a:r>
-            <a:endParaRPr lang="en-US" sz="1250" dirty="0"/>
-          </a:p>
-        </p:txBody>
-      </p:sp>
-      <p:sp>
-        <p:nvSpPr>
-          <p:cNvPr id="12" name="obs-badge-2-circle"/>
-          <p:cNvSpPr/>
-          <p:nvPr/>
-        </p:nvSpPr>
-        <p:spPr>
-          <a:xfrm>
-            <a:off x="7863840" y="4297680"/>
-            <a:ext cx="502920" cy="502920"/>
-          </a:xfrm>
-          <a:prstGeom prst="ellipse">
-            <a:avLst/>
-          </a:prstGeom>
-          <a:solidFill>
-            <a:schemeClr val="accent2"/>
-          </a:solidFill>
-          <a:ln w="12700">
-            <a:solidFill>
-              <a:schemeClr val="accent2"/>
-            </a:solidFill>
-            <a:prstDash val="solid"/>
-          </a:ln>
-        </p:spPr>
-      </p:sp>
-      <p:pic>
-        <p:nvPicPr>
-          <p:cNvPr id="13" name="obs-badge-2-icon" descr="preencoded.png">    </p:cNvPr>
-          <p:cNvPicPr>
-            <a:picLocks noChangeAspect="1"/>
-          </p:cNvPicPr>
-          <p:nvPr/>
-        </p:nvPicPr>
-        <p:blipFill>
-          <a:blip r:embed="rId4"/>
-          <a:stretch>
-            <a:fillRect/>
-          </a:stretch>
-        </p:blipFill>
-        <p:spPr>
-          <a:xfrm>
-            <a:off x="7989570" y="4423410"/>
-            <a:ext cx="251460" cy="251460"/>
-          </a:xfrm>
-          <a:prstGeom prst="rect">
-            <a:avLst/>
-          </a:prstGeom>
-        </p:spPr>
-      </p:pic>
-      <p:sp>
-        <p:nvSpPr>
-          <p:cNvPr id="14" name="Text 8"/>
-          <p:cNvSpPr txBox="1"/>
-          <p:nvPr/>
-        </p:nvSpPr>
-        <p:spPr>
-          <a:xfrm>
-            <a:off x="8549640" y="4279392"/>
-            <a:ext cx="3108960" cy="320040"/>
-          </a:xfrm>
-          <a:prstGeom prst="rect">
-            <a:avLst/>
-          </a:prstGeom>
-          <a:noFill/>
-          <a:ln/>
-        </p:spPr>
-        <p:txBody>
-          <a:bodyPr wrap="square" lIns="0" tIns="0" rIns="0" bIns="0" rtlCol="0" anchor="t"/>
-          <a:lstStyle/>
-          <a:p>
-            <a:pPr indent="0" marL="0">
-              <a:buNone/>
-            </a:pPr>
-            <a:r>
-              <a:rPr lang="en-US" sz="1500" b="1" dirty="0">
-                <a:solidFill>
-                  <a:schemeClr val="tx1"/>
-                </a:solidFill>
-              </a:rPr>
-              <a:t>Dashboard as code</a:t>
-            </a:r>
-            <a:endParaRPr lang="en-US" sz="1500" dirty="0"/>
-          </a:p>
-        </p:txBody>
-      </p:sp>
-      <p:sp>
-        <p:nvSpPr>
-          <p:cNvPr id="15" name="Text 9"/>
-          <p:cNvSpPr txBox="1"/>
-          <p:nvPr/>
-        </p:nvSpPr>
-        <p:spPr>
-          <a:xfrm>
-            <a:off x="8549640" y="4626864"/>
-            <a:ext cx="3108960" cy="1005840"/>
-          </a:xfrm>
-          <a:prstGeom prst="rect">
-            <a:avLst/>
-          </a:prstGeom>
-          <a:noFill/>
-          <a:ln/>
-        </p:spPr>
-        <p:txBody>
-          <a:bodyPr wrap="square" lIns="0" tIns="0" rIns="0" bIns="0" rtlCol="0" anchor="t"/>
-          <a:lstStyle/>
-          <a:p>
-            <a:pPr indent="0" marL="0">
-              <a:buNone/>
-            </a:pPr>
-            <a:r>
-              <a:rPr lang="en-US" sz="1250" dirty="0">
-                <a:solidFill>
-                  <a:schemeClr val="tx2"/>
-                </a:solidFill>
-              </a:rPr>
-              <a:t>Grafana JSON ships in the Helm chart; the sidecar loads it, no clicking</a:t>
-            </a:r>
-            <a:endParaRPr lang="en-US" sz="1250" dirty="0"/>
-          </a:p>
-        </p:txBody>
-      </p:sp>
-      <p:sp>
-        <p:nvSpPr>
-          <p:cNvPr id="16" name="Text 10"/>
-          <p:cNvSpPr txBox="1"/>
-          <p:nvPr/>
-        </p:nvSpPr>
-        <p:spPr>
-          <a:xfrm>
-            <a:off x="548640" y="5806440"/>
-            <a:ext cx="6949440" cy="411480"/>
-          </a:xfrm>
-          <a:prstGeom prst="rect">
-            <a:avLst/>
-          </a:prstGeom>
-          <a:noFill/>
-          <a:ln/>
-        </p:spPr>
-        <p:txBody>
-          <a:bodyPr wrap="square" lIns="0" tIns="0" rIns="0" bIns="0" rtlCol="0" anchor="t"/>
-          <a:lstStyle/>
-          <a:p>
-            <a:pPr indent="0" marL="0">
-              <a:buNone/>
-            </a:pPr>
-            <a:r>
-              <a:rPr lang="en-US" sz="1100" i="1" dirty="0">
-                <a:solidFill>
-                  <a:schemeClr val="tx2"/>
-                </a:solidFill>
-              </a:rPr>
-              <a:t>Live panels: request rate, p95 latency, 5xx ratio, targets UP, per-endpoint traffic, status classes, CPU per pod</a:t>
-            </a:r>
-            <a:endParaRPr lang="en-US" sz="1100" dirty="0"/>
+              <a:t>Synced + Healthy at the bot's chore(gitops) commit; manual scale-down reverted in ~6 s</a:t>
+            </a:r>
+            <a:endParaRPr lang="en-US" sz="1300" dirty="0"/>
           </a:p>
         </p:txBody>
       </p:sp>
@@ -5651,106 +5467,223 @@
                   <a:schemeClr val="tx1"/>
                 </a:solidFill>
               </a:rPr>
-              <a:t>Autoscaling in action: 2 → 4 pods under load</a:t>
+              <a:t>Observability: Prometheus + Grafana</a:t>
             </a:r>
             <a:endParaRPr lang="en-US" sz="3400" dirty="0"/>
           </a:p>
         </p:txBody>
       </p:sp>
-      <p:sp>
-        <p:nvSpPr>
-          <p:cNvPr id="3" name="timeline"/>
+      <p:pic>
+        <p:nvPicPr>
+          <p:cNvPr id="3" name="grafana-screenshot" descr="/Users/healthbay/Desktop/capstone/devsecops-python/demo/screenshots/grafana-dashboard.png">    </p:cNvPr>
+          <p:cNvPicPr>
+            <a:picLocks noChangeAspect="1"/>
+          </p:cNvPicPr>
+          <p:nvPr/>
+        </p:nvPicPr>
+        <p:blipFill>
+          <a:blip r:embed="rId1"/>
+          <a:stretch>
+            <a:fillRect/>
+          </a:stretch>
+        </p:blipFill>
+        <p:spPr>
+          <a:xfrm>
+            <a:off x="548640" y="1371600"/>
+            <a:ext cx="6949440" cy="4343400"/>
+          </a:xfrm>
+          <a:prstGeom prst="rect">
+            <a:avLst/>
+          </a:prstGeom>
+          <a:effectLst>
+            <a:outerShdw sx="100000" sy="100000" kx="0" ky="0" algn="bl" rotWithShape="0" blurRad="152400" dist="38100" dir="5400000">
+              <a:srgbClr val="101828">
+                <a:alpha val="25000"/>
+              </a:srgbClr>
+            </a:outerShdw>
+          </a:effectLst>
+        </p:spPr>
+      </p:pic>
+      <p:sp>
+        <p:nvSpPr>
+          <p:cNvPr id="4" name="obs-badge-0-circle"/>
           <p:cNvSpPr/>
           <p:nvPr/>
         </p:nvSpPr>
         <p:spPr>
           <a:xfrm>
-            <a:off x="960120" y="2057400"/>
-            <a:ext cx="0" cy="3017520"/>
-          </a:xfrm>
-          <a:prstGeom prst="line">
-            <a:avLst/>
-          </a:prstGeom>
-          <a:noFill/>
-          <a:ln w="25400">
+            <a:off x="7863840" y="1371600"/>
+            <a:ext cx="502920" cy="502920"/>
+          </a:xfrm>
+          <a:prstGeom prst="ellipse">
+            <a:avLst/>
+          </a:prstGeom>
+          <a:solidFill>
+            <a:schemeClr val="accent2"/>
+          </a:solidFill>
+          <a:ln w="12700">
             <a:solidFill>
-              <a:schemeClr val="accent6"/>
+              <a:schemeClr val="accent2"/>
             </a:solidFill>
             <a:prstDash val="solid"/>
           </a:ln>
         </p:spPr>
       </p:sp>
-      <p:sp>
-        <p:nvSpPr>
-          <p:cNvPr id="4" name="replica-dot-0"/>
+      <p:pic>
+        <p:nvPicPr>
+          <p:cNvPr id="5" name="obs-badge-0-icon" descr="preencoded.png">    </p:cNvPr>
+          <p:cNvPicPr>
+            <a:picLocks noChangeAspect="1"/>
+          </p:cNvPicPr>
+          <p:nvPr/>
+        </p:nvPicPr>
+        <p:blipFill>
+          <a:blip r:embed="rId2"/>
+          <a:stretch>
+            <a:fillRect/>
+          </a:stretch>
+        </p:blipFill>
+        <p:spPr>
+          <a:xfrm>
+            <a:off x="7989570" y="1497330"/>
+            <a:ext cx="251460" cy="251460"/>
+          </a:xfrm>
+          <a:prstGeom prst="rect">
+            <a:avLst/>
+          </a:prstGeom>
+        </p:spPr>
+      </p:pic>
+      <p:sp>
+        <p:nvSpPr>
+          <p:cNvPr id="6" name="Text 2"/>
+          <p:cNvSpPr txBox="1"/>
+          <p:nvPr/>
+        </p:nvSpPr>
+        <p:spPr>
+          <a:xfrm>
+            <a:off x="8549640" y="1353312"/>
+            <a:ext cx="3108960" cy="320040"/>
+          </a:xfrm>
+          <a:prstGeom prst="rect">
+            <a:avLst/>
+          </a:prstGeom>
+          <a:noFill/>
+          <a:ln/>
+        </p:spPr>
+        <p:txBody>
+          <a:bodyPr wrap="square" lIns="0" tIns="0" rIns="0" bIns="0" rtlCol="0" anchor="t"/>
+          <a:lstStyle/>
+          <a:p>
+            <a:pPr indent="0" marL="0">
+              <a:buNone/>
+            </a:pPr>
+            <a:r>
+              <a:rPr lang="en-US" sz="1500" b="1" dirty="0">
+                <a:solidFill>
+                  <a:schemeClr val="tx1"/>
+                </a:solidFill>
+              </a:rPr>
+              <a:t>/metrics</a:t>
+            </a:r>
+            <a:endParaRPr lang="en-US" sz="1500" dirty="0"/>
+          </a:p>
+        </p:txBody>
+      </p:sp>
+      <p:sp>
+        <p:nvSpPr>
+          <p:cNvPr id="7" name="Text 3"/>
+          <p:cNvSpPr txBox="1"/>
+          <p:nvPr/>
+        </p:nvSpPr>
+        <p:spPr>
+          <a:xfrm>
+            <a:off x="8549640" y="1700784"/>
+            <a:ext cx="3108960" cy="1005840"/>
+          </a:xfrm>
+          <a:prstGeom prst="rect">
+            <a:avLst/>
+          </a:prstGeom>
+          <a:noFill/>
+          <a:ln/>
+        </p:spPr>
+        <p:txBody>
+          <a:bodyPr wrap="square" lIns="0" tIns="0" rIns="0" bIns="0" rtlCol="0" anchor="t"/>
+          <a:lstStyle/>
+          <a:p>
+            <a:pPr indent="0" marL="0">
+              <a:buNone/>
+            </a:pPr>
+            <a:r>
+              <a:rPr lang="en-US" sz="1250" dirty="0">
+                <a:solidFill>
+                  <a:schemeClr val="tx2"/>
+                </a:solidFill>
+              </a:rPr>
+              <a:t>request count + latency histograms, and a business counter taskboard_task_events_total</a:t>
+            </a:r>
+            <a:endParaRPr lang="en-US" sz="1250" dirty="0"/>
+          </a:p>
+        </p:txBody>
+      </p:sp>
+      <p:sp>
+        <p:nvSpPr>
+          <p:cNvPr id="8" name="obs-badge-1-circle"/>
           <p:cNvSpPr/>
           <p:nvPr/>
         </p:nvSpPr>
         <p:spPr>
           <a:xfrm>
-            <a:off x="548640" y="1463040"/>
-            <a:ext cx="822960" cy="822960"/>
+            <a:off x="7863840" y="2834640"/>
+            <a:ext cx="502920" cy="502920"/>
           </a:xfrm>
           <a:prstGeom prst="ellipse">
             <a:avLst/>
           </a:prstGeom>
           <a:solidFill>
-            <a:schemeClr val="accent6"/>
+            <a:schemeClr val="accent2"/>
           </a:solidFill>
-          <a:ln w="38100">
+          <a:ln w="12700">
             <a:solidFill>
-              <a:schemeClr val="bg1"/>
+              <a:schemeClr val="accent2"/>
             </a:solidFill>
             <a:prstDash val="solid"/>
           </a:ln>
         </p:spPr>
       </p:sp>
-      <p:sp>
-        <p:nvSpPr>
-          <p:cNvPr id="5" name="Text 3"/>
-          <p:cNvSpPr txBox="1"/>
-          <p:nvPr/>
-        </p:nvSpPr>
-        <p:spPr>
-          <a:xfrm>
-            <a:off x="548640" y="1463040"/>
-            <a:ext cx="822960" cy="822960"/>
-          </a:xfrm>
-          <a:prstGeom prst="rect">
-            <a:avLst/>
-          </a:prstGeom>
-          <a:noFill/>
-          <a:ln/>
-        </p:spPr>
-        <p:txBody>
-          <a:bodyPr wrap="square" lIns="0" tIns="0" rIns="0" bIns="0" rtlCol="0" anchor="ctr"/>
-          <a:lstStyle/>
-          <a:p>
-            <a:pPr algn="ctr" indent="0" marL="0">
-              <a:buNone/>
-            </a:pPr>
-            <a:r>
-              <a:rPr lang="en-US" sz="2600" b="1" dirty="0">
-                <a:solidFill>
-                  <a:schemeClr val="bg1"/>
-                </a:solidFill>
-              </a:rPr>
-              <a:t>2</a:t>
-            </a:r>
-            <a:endParaRPr lang="en-US" sz="2600" dirty="0"/>
-          </a:p>
-        </p:txBody>
-      </p:sp>
-      <p:sp>
-        <p:nvSpPr>
-          <p:cNvPr id="6" name="Text 4"/>
-          <p:cNvSpPr txBox="1"/>
-          <p:nvPr/>
-        </p:nvSpPr>
-        <p:spPr>
-          <a:xfrm>
-            <a:off x="1600200" y="1508760"/>
-            <a:ext cx="2743200" cy="320040"/>
+      <p:pic>
+        <p:nvPicPr>
+          <p:cNvPr id="9" name="obs-badge-1-icon" descr="preencoded.png">    </p:cNvPr>
+          <p:cNvPicPr>
+            <a:picLocks noChangeAspect="1"/>
+          </p:cNvPicPr>
+          <p:nvPr/>
+        </p:nvPicPr>
+        <p:blipFill>
+          <a:blip r:embed="rId3"/>
+          <a:stretch>
+            <a:fillRect/>
+          </a:stretch>
+        </p:blipFill>
+        <p:spPr>
+          <a:xfrm>
+            <a:off x="7989570" y="2960370"/>
+            <a:ext cx="251460" cy="251460"/>
+          </a:xfrm>
+          <a:prstGeom prst="rect">
+            <a:avLst/>
+          </a:prstGeom>
+        </p:spPr>
+      </p:pic>
+      <p:sp>
+        <p:nvSpPr>
+          <p:cNvPr id="10" name="Text 5"/>
+          <p:cNvSpPr txBox="1"/>
+          <p:nvPr/>
+        </p:nvSpPr>
+        <p:spPr>
+          <a:xfrm>
+            <a:off x="8549640" y="2816352"/>
+            <a:ext cx="3108960" cy="320040"/>
           </a:xfrm>
           <a:prstGeom prst="rect">
             <a:avLst/>
@@ -5771,7 +5704,7 @@
                   <a:schemeClr val="tx1"/>
                 </a:solidFill>
               </a:rPr>
-              <a:t>baseline</a:t>
+              <a:t>ServiceMonitor</a:t>
             </a:r>
             <a:endParaRPr lang="en-US" sz="1500" dirty="0"/>
           </a:p>
@@ -5779,14 +5712,14 @@
       </p:sp>
       <p:sp>
         <p:nvSpPr>
-          <p:cNvPr id="7" name="Text 5"/>
-          <p:cNvSpPr txBox="1"/>
-          <p:nvPr/>
-        </p:nvSpPr>
-        <p:spPr>
-          <a:xfrm>
-            <a:off x="1600200" y="1847088"/>
-            <a:ext cx="4754880" cy="365760"/>
+          <p:cNvPr id="11" name="Text 6"/>
+          <p:cNvSpPr txBox="1"/>
+          <p:nvPr/>
+        </p:nvSpPr>
+        <p:spPr>
+          <a:xfrm>
+            <a:off x="8549640" y="3163824"/>
+            <a:ext cx="3108960" cy="1005840"/>
           </a:xfrm>
           <a:prstGeom prst="rect">
             <a:avLst/>
@@ -5806,11 +5739,8 @@
                 <a:solidFill>
                   <a:schemeClr val="tx2"/>
                 </a:solidFill>
-                <a:latin typeface="Courier New" pitchFamily="34" charset="0"/>
-                <a:ea typeface="Courier New" pitchFamily="34" charset="-122"/>
-                <a:cs typeface="Courier New" pitchFamily="34" charset="-120"/>
-              </a:rPr>
-              <a:t>New size: 2; replicas below Spec.MinReplicas</a:t>
+              </a:rPr>
+              <a:t>Prometheus Operator discovers every backend pod automatically — 4/4 targets UP after scaling</a:t>
             </a:r>
             <a:endParaRPr lang="en-US" sz="1250" dirty="0"/>
           </a:p>
@@ -5818,14 +5748,14 @@
       </p:sp>
       <p:sp>
         <p:nvSpPr>
-          <p:cNvPr id="8" name="replica-dot-1"/>
+          <p:cNvPr id="12" name="obs-badge-2-circle"/>
           <p:cNvSpPr/>
           <p:nvPr/>
         </p:nvSpPr>
         <p:spPr>
           <a:xfrm>
-            <a:off x="548640" y="2880360"/>
-            <a:ext cx="822960" cy="822960"/>
+            <a:off x="7863840" y="4297680"/>
+            <a:ext cx="502920" cy="502920"/>
           </a:xfrm>
           <a:prstGeom prst="ellipse">
             <a:avLst/>
@@ -5833,60 +5763,48 @@
           <a:solidFill>
             <a:schemeClr val="accent2"/>
           </a:solidFill>
-          <a:ln w="38100">
+          <a:ln w="12700">
             <a:solidFill>
-              <a:schemeClr val="bg1"/>
+              <a:schemeClr val="accent2"/>
             </a:solidFill>
             <a:prstDash val="solid"/>
           </a:ln>
         </p:spPr>
       </p:sp>
-      <p:sp>
-        <p:nvSpPr>
-          <p:cNvPr id="9" name="Text 7"/>
-          <p:cNvSpPr txBox="1"/>
-          <p:nvPr/>
-        </p:nvSpPr>
-        <p:spPr>
-          <a:xfrm>
-            <a:off x="548640" y="2880360"/>
-            <a:ext cx="822960" cy="822960"/>
-          </a:xfrm>
-          <a:prstGeom prst="rect">
-            <a:avLst/>
-          </a:prstGeom>
-          <a:noFill/>
-          <a:ln/>
-        </p:spPr>
-        <p:txBody>
-          <a:bodyPr wrap="square" lIns="0" tIns="0" rIns="0" bIns="0" rtlCol="0" anchor="ctr"/>
-          <a:lstStyle/>
-          <a:p>
-            <a:pPr algn="ctr" indent="0" marL="0">
-              <a:buNone/>
-            </a:pPr>
-            <a:r>
-              <a:rPr lang="en-US" sz="2600" b="1" dirty="0">
-                <a:solidFill>
-                  <a:schemeClr val="bg1"/>
-                </a:solidFill>
-              </a:rPr>
-              <a:t>3</a:t>
-            </a:r>
-            <a:endParaRPr lang="en-US" sz="2600" dirty="0"/>
-          </a:p>
-        </p:txBody>
-      </p:sp>
-      <p:sp>
-        <p:nvSpPr>
-          <p:cNvPr id="10" name="Text 8"/>
-          <p:cNvSpPr txBox="1"/>
-          <p:nvPr/>
-        </p:nvSpPr>
-        <p:spPr>
-          <a:xfrm>
-            <a:off x="1600200" y="2926080"/>
-            <a:ext cx="2743200" cy="320040"/>
+      <p:pic>
+        <p:nvPicPr>
+          <p:cNvPr id="13" name="obs-badge-2-icon" descr="preencoded.png">    </p:cNvPr>
+          <p:cNvPicPr>
+            <a:picLocks noChangeAspect="1"/>
+          </p:cNvPicPr>
+          <p:nvPr/>
+        </p:nvPicPr>
+        <p:blipFill>
+          <a:blip r:embed="rId4"/>
+          <a:stretch>
+            <a:fillRect/>
+          </a:stretch>
+        </p:blipFill>
+        <p:spPr>
+          <a:xfrm>
+            <a:off x="7989570" y="4423410"/>
+            <a:ext cx="251460" cy="251460"/>
+          </a:xfrm>
+          <a:prstGeom prst="rect">
+            <a:avLst/>
+          </a:prstGeom>
+        </p:spPr>
+      </p:pic>
+      <p:sp>
+        <p:nvSpPr>
+          <p:cNvPr id="14" name="Text 8"/>
+          <p:cNvSpPr txBox="1"/>
+          <p:nvPr/>
+        </p:nvSpPr>
+        <p:spPr>
+          <a:xfrm>
+            <a:off x="8549640" y="4279392"/>
+            <a:ext cx="3108960" cy="320040"/>
           </a:xfrm>
           <a:prstGeom prst="rect">
             <a:avLst/>
@@ -5907,7 +5825,7 @@
                   <a:schemeClr val="tx1"/>
                 </a:solidFill>
               </a:rPr>
-              <a:t>+4m45s</a:t>
+              <a:t>Dashboard as code</a:t>
             </a:r>
             <a:endParaRPr lang="en-US" sz="1500" dirty="0"/>
           </a:p>
@@ -5915,14 +5833,14 @@
       </p:sp>
       <p:sp>
         <p:nvSpPr>
-          <p:cNvPr id="11" name="Text 9"/>
-          <p:cNvSpPr txBox="1"/>
-          <p:nvPr/>
-        </p:nvSpPr>
-        <p:spPr>
-          <a:xfrm>
-            <a:off x="1600200" y="3264408"/>
-            <a:ext cx="4754880" cy="365760"/>
+          <p:cNvPr id="15" name="Text 9"/>
+          <p:cNvSpPr txBox="1"/>
+          <p:nvPr/>
+        </p:nvSpPr>
+        <p:spPr>
+          <a:xfrm>
+            <a:off x="8549640" y="4626864"/>
+            <a:ext cx="3108960" cy="1005840"/>
           </a:xfrm>
           <a:prstGeom prst="rect">
             <a:avLst/>
@@ -5942,11 +5860,8 @@
                 <a:solidFill>
                   <a:schemeClr val="tx2"/>
                 </a:solidFill>
-                <a:latin typeface="Courier New" pitchFamily="34" charset="0"/>
-                <a:ea typeface="Courier New" pitchFamily="34" charset="-122"/>
-                <a:cs typeface="Courier New" pitchFamily="34" charset="-120"/>
-              </a:rPr>
-              <a:t>New size: 3; cpu utilization above target</a:t>
+              </a:rPr>
+              <a:t>Grafana JSON ships in the Helm chart; the sidecar loads it, no clicking</a:t>
             </a:r>
             <a:endParaRPr lang="en-US" sz="1250" dirty="0"/>
           </a:p>
@@ -5954,75 +5869,14 @@
       </p:sp>
       <p:sp>
         <p:nvSpPr>
-          <p:cNvPr id="12" name="replica-dot-2"/>
-          <p:cNvSpPr/>
-          <p:nvPr/>
-        </p:nvSpPr>
-        <p:spPr>
-          <a:xfrm>
-            <a:off x="548640" y="4297680"/>
-            <a:ext cx="822960" cy="822960"/>
-          </a:xfrm>
-          <a:prstGeom prst="ellipse">
-            <a:avLst/>
-          </a:prstGeom>
-          <a:solidFill>
-            <a:schemeClr val="accent1"/>
-          </a:solidFill>
-          <a:ln w="38100">
-            <a:solidFill>
-              <a:schemeClr val="bg1"/>
-            </a:solidFill>
-            <a:prstDash val="solid"/>
-          </a:ln>
-        </p:spPr>
-      </p:sp>
-      <p:sp>
-        <p:nvSpPr>
-          <p:cNvPr id="13" name="Text 11"/>
-          <p:cNvSpPr txBox="1"/>
-          <p:nvPr/>
-        </p:nvSpPr>
-        <p:spPr>
-          <a:xfrm>
-            <a:off x="548640" y="4297680"/>
-            <a:ext cx="822960" cy="822960"/>
-          </a:xfrm>
-          <a:prstGeom prst="rect">
-            <a:avLst/>
-          </a:prstGeom>
-          <a:noFill/>
-          <a:ln/>
-        </p:spPr>
-        <p:txBody>
-          <a:bodyPr wrap="square" lIns="0" tIns="0" rIns="0" bIns="0" rtlCol="0" anchor="ctr"/>
-          <a:lstStyle/>
-          <a:p>
-            <a:pPr algn="ctr" indent="0" marL="0">
-              <a:buNone/>
-            </a:pPr>
-            <a:r>
-              <a:rPr lang="en-US" sz="2600" b="1" dirty="0">
-                <a:solidFill>
-                  <a:schemeClr val="bg1"/>
-                </a:solidFill>
-              </a:rPr>
-              <a:t>4</a:t>
-            </a:r>
-            <a:endParaRPr lang="en-US" sz="2600" dirty="0"/>
-          </a:p>
-        </p:txBody>
-      </p:sp>
-      <p:sp>
-        <p:nvSpPr>
-          <p:cNvPr id="14" name="Text 12"/>
-          <p:cNvSpPr txBox="1"/>
-          <p:nvPr/>
-        </p:nvSpPr>
-        <p:spPr>
-          <a:xfrm>
-            <a:off x="1600200" y="4343400"/>
-            <a:ext cx="2743200" cy="320040"/>
+          <p:cNvPr id="16" name="Text 10"/>
+          <p:cNvSpPr txBox="1"/>
+          <p:nvPr/>
+        </p:nvSpPr>
+        <p:spPr>
+          <a:xfrm>
+            <a:off x="548640" y="5806440"/>
+            <a:ext cx="6949440" cy="411480"/>
           </a:xfrm>
           <a:prstGeom prst="rect">
             <a:avLst/>
@@ -6038,246 +5892,12 @@
               <a:buNone/>
             </a:pPr>
             <a:r>
-              <a:rPr lang="en-US" sz="1500" b="1" dirty="0">
-                <a:solidFill>
-                  <a:schemeClr val="tx1"/>
-                </a:solidFill>
-              </a:rPr>
-              <a:t>+6m31s</a:t>
-            </a:r>
-            <a:endParaRPr lang="en-US" sz="1500" dirty="0"/>
-          </a:p>
-        </p:txBody>
-      </p:sp>
-      <p:sp>
-        <p:nvSpPr>
-          <p:cNvPr id="15" name="Text 13"/>
-          <p:cNvSpPr txBox="1"/>
-          <p:nvPr/>
-        </p:nvSpPr>
-        <p:spPr>
-          <a:xfrm>
-            <a:off x="1600200" y="4681728"/>
-            <a:ext cx="4754880" cy="365760"/>
-          </a:xfrm>
-          <a:prstGeom prst="rect">
-            <a:avLst/>
-          </a:prstGeom>
-          <a:noFill/>
-          <a:ln/>
-        </p:spPr>
-        <p:txBody>
-          <a:bodyPr wrap="square" lIns="0" tIns="0" rIns="0" bIns="0" rtlCol="0" anchor="t"/>
-          <a:lstStyle/>
-          <a:p>
-            <a:pPr indent="0" marL="0">
-              <a:buNone/>
-            </a:pPr>
-            <a:r>
-              <a:rPr lang="en-US" sz="1250" dirty="0">
+              <a:rPr lang="en-US" sz="1100" i="1" dirty="0">
                 <a:solidFill>
                   <a:schemeClr val="tx2"/>
                 </a:solidFill>
-                <a:latin typeface="Courier New" pitchFamily="34" charset="0"/>
-                <a:ea typeface="Courier New" pitchFamily="34" charset="-122"/>
-                <a:cs typeface="Courier New" pitchFamily="34" charset="-120"/>
-              </a:rPr>
-              <a:t>New size: 4; cpu utilization above target</a:t>
-            </a:r>
-            <a:endParaRPr lang="en-US" sz="1250" dirty="0"/>
-          </a:p>
-        </p:txBody>
-      </p:sp>
-      <p:sp>
-        <p:nvSpPr>
-          <p:cNvPr id="16" name="hpa-card"/>
-          <p:cNvSpPr/>
-          <p:nvPr/>
-        </p:nvSpPr>
-        <p:spPr>
-          <a:xfrm>
-            <a:off x="6766560" y="1463040"/>
-            <a:ext cx="4873752" cy="4023360"/>
-          </a:xfrm>
-          <a:prstGeom prst="roundRect">
-            <a:avLst>
-              <a:gd name="adj" fmla="val 2727"/>
-            </a:avLst>
-          </a:prstGeom>
-          <a:solidFill>
-            <a:schemeClr val="bg2"/>
-          </a:solidFill>
-          <a:ln w="12700">
-            <a:solidFill>
-              <a:schemeClr val="bg2"/>
-            </a:solidFill>
-            <a:prstDash val="solid"/>
-          </a:ln>
-        </p:spPr>
-      </p:sp>
-      <p:sp>
-        <p:nvSpPr>
-          <p:cNvPr id="17" name="Text 15"/>
-          <p:cNvSpPr txBox="1"/>
-          <p:nvPr/>
-        </p:nvSpPr>
-        <p:spPr>
-          <a:xfrm>
-            <a:off x="7086600" y="1737360"/>
-            <a:ext cx="4297680" cy="3566160"/>
-          </a:xfrm>
-          <a:prstGeom prst="rect">
-            <a:avLst/>
-          </a:prstGeom>
-          <a:noFill/>
-          <a:ln/>
-        </p:spPr>
-        <p:txBody>
-          <a:bodyPr wrap="square" lIns="0" tIns="0" rIns="0" bIns="0" rtlCol="0" anchor="t"/>
-          <a:lstStyle/>
-          <a:p>
-            <a:pPr indent="0" marL="0">
-              <a:spcAft>
-                <a:spcPts val="800"/>
-              </a:spcAft>
-              <a:buNone/>
-            </a:pPr>
-            <a:r>
-              <a:rPr lang="en-US" sz="1800" b="1" dirty="0">
-                <a:solidFill>
-                  <a:schemeClr val="tx1"/>
-                </a:solidFill>
-              </a:rPr>
-              <a:t>How it works</a:t>
-            </a:r>
-            <a:endParaRPr lang="en-US" sz="1400" dirty="0"/>
-          </a:p>
-          <a:p>
-            <a:pPr marL="342900" indent="-342900">
-              <a:spcAft>
-                <a:spcPts val="800"/>
-              </a:spcAft>
-              <a:buSzPct val="100000"/>
-              <a:buChar char="•"/>
-            </a:pPr>
-            <a:r>
-              <a:rPr lang="en-US" sz="1400" dirty="0">
-                <a:solidFill>
-                  <a:schemeClr val="tx2"/>
-                </a:solidFill>
-              </a:rPr>
-              <a:t>metrics-server reports pod CPU against the 100m request</a:t>
-            </a:r>
-            <a:endParaRPr lang="en-US" sz="1400" dirty="0"/>
-          </a:p>
-          <a:p>
-            <a:pPr marL="342900" indent="-342900">
-              <a:spcAft>
-                <a:spcPts val="800"/>
-              </a:spcAft>
-              <a:buSzPct val="100000"/>
-              <a:buChar char="•"/>
-            </a:pPr>
-            <a:r>
-              <a:rPr lang="en-US" sz="1400" dirty="0">
-                <a:solidFill>
-                  <a:schemeClr val="tx2"/>
-                </a:solidFill>
-              </a:rPr>
-              <a:t>HPA targets 60 % average utilisation, min 2, max 6</a:t>
-            </a:r>
-            <a:endParaRPr lang="en-US" sz="1400" dirty="0"/>
-          </a:p>
-          <a:p>
-            <a:pPr marL="342900" indent="-342900">
-              <a:spcAft>
-                <a:spcPts val="800"/>
-              </a:spcAft>
-              <a:buSzPct val="100000"/>
-              <a:buChar char="•"/>
-            </a:pPr>
-            <a:r>
-              <a:rPr lang="en-US" sz="1400" dirty="0">
-                <a:solidFill>
-                  <a:schemeClr val="tx2"/>
-                </a:solidFill>
-              </a:rPr>
-              <a:t>scripts/load-test.sh drives /api traffic through the Ingress</a:t>
-            </a:r>
-            <a:endParaRPr lang="en-US" sz="1400" dirty="0"/>
-          </a:p>
-          <a:p>
-            <a:pPr marL="342900" indent="-342900">
-              <a:spcAft>
-                <a:spcPts val="800"/>
-              </a:spcAft>
-              <a:buSzPct val="100000"/>
-              <a:buChar char="•"/>
-            </a:pPr>
-            <a:r>
-              <a:rPr lang="en-US" sz="1400" dirty="0">
-                <a:solidFill>
-                  <a:schemeClr val="tx2"/>
-                </a:solidFill>
-              </a:rPr>
-              <a:t>Prometheus picked up each new pod as a target with no config change</a:t>
-            </a:r>
-            <a:endParaRPr lang="en-US" sz="1400" dirty="0"/>
-          </a:p>
-          <a:p>
-            <a:pPr marL="342900" indent="-342900">
-              <a:spcAft>
-                <a:spcPts val="800"/>
-              </a:spcAft>
-              <a:buSzPct val="100000"/>
-              <a:buChar char="•"/>
-            </a:pPr>
-            <a:r>
-              <a:rPr lang="en-US" sz="1400" dirty="0">
-                <a:solidFill>
-                  <a:schemeClr val="tx2"/>
-                </a:solidFill>
-              </a:rPr>
-              <a:t>Scale-down waits 5 minutes (stabilisation window)</a:t>
-            </a:r>
-            <a:endParaRPr lang="en-US" sz="1400" dirty="0"/>
-          </a:p>
-        </p:txBody>
-      </p:sp>
-      <p:sp>
-        <p:nvSpPr>
-          <p:cNvPr id="18" name="Text 16"/>
-          <p:cNvSpPr txBox="1"/>
-          <p:nvPr/>
-        </p:nvSpPr>
-        <p:spPr>
-          <a:xfrm>
-            <a:off x="548640" y="5760720"/>
-            <a:ext cx="8229600" cy="320040"/>
-          </a:xfrm>
-          <a:prstGeom prst="rect">
-            <a:avLst/>
-          </a:prstGeom>
-          <a:noFill/>
-          <a:ln/>
-        </p:spPr>
-        <p:txBody>
-          <a:bodyPr wrap="square" lIns="0" tIns="0" rIns="0" bIns="0" rtlCol="0" anchor="t"/>
-          <a:lstStyle/>
-          <a:p>
-            <a:pPr indent="0" marL="0">
-              <a:buNone/>
-            </a:pPr>
-            <a:r>
-              <a:rPr lang="en-US" sz="1100" i="1" dirty="0">
-                <a:solidFill>
-                  <a:schemeClr val="tx2"/>
-                </a:solidFill>
-                <a:latin typeface="Courier New" pitchFamily="34" charset="0"/>
-                <a:ea typeface="Courier New" pitchFamily="34" charset="-122"/>
-                <a:cs typeface="Courier New" pitchFamily="34" charset="-120"/>
-              </a:rPr>
-              <a:t>kubectl get events -n taskboard --field-selector reason=SuccessfulRescale</a:t>
+              </a:rPr>
+              <a:t>Live panels: request rate, p95 latency, 5xx ratio, targets UP, per-endpoint traffic, status classes, CPU per pod</a:t>
             </a:r>
             <a:endParaRPr lang="en-US" sz="1100" dirty="0"/>
           </a:p>
@@ -6385,7 +6005,7 @@
                   <a:schemeClr val="tx1"/>
                 </a:solidFill>
               </a:rPr>
-              <a:t>Making it work: 12 defects found and fixed</a:t>
+              <a:t>Autoscaling in action: 2 → 4 pods under load</a:t>
             </a:r>
             <a:endParaRPr lang="en-US" sz="3400" dirty="0"/>
           </a:p>
@@ -6393,18 +6013,449 @@
       </p:sp>
       <p:sp>
         <p:nvSpPr>
-          <p:cNvPr id="3" name="bug-card-0"/>
+          <p:cNvPr id="3" name="timeline"/>
           <p:cNvSpPr/>
           <p:nvPr/>
         </p:nvSpPr>
         <p:spPr>
           <a:xfrm>
-            <a:off x="548640" y="1371600"/>
-            <a:ext cx="3566160" cy="1005840"/>
+            <a:off x="960120" y="2057400"/>
+            <a:ext cx="0" cy="3017520"/>
+          </a:xfrm>
+          <a:prstGeom prst="line">
+            <a:avLst/>
+          </a:prstGeom>
+          <a:noFill/>
+          <a:ln w="25400">
+            <a:solidFill>
+              <a:schemeClr val="accent6"/>
+            </a:solidFill>
+            <a:prstDash val="solid"/>
+          </a:ln>
+        </p:spPr>
+      </p:sp>
+      <p:sp>
+        <p:nvSpPr>
+          <p:cNvPr id="4" name="replica-dot-0"/>
+          <p:cNvSpPr/>
+          <p:nvPr/>
+        </p:nvSpPr>
+        <p:spPr>
+          <a:xfrm>
+            <a:off x="548640" y="1463040"/>
+            <a:ext cx="822960" cy="822960"/>
+          </a:xfrm>
+          <a:prstGeom prst="ellipse">
+            <a:avLst/>
+          </a:prstGeom>
+          <a:solidFill>
+            <a:schemeClr val="accent6"/>
+          </a:solidFill>
+          <a:ln w="38100">
+            <a:solidFill>
+              <a:schemeClr val="bg1"/>
+            </a:solidFill>
+            <a:prstDash val="solid"/>
+          </a:ln>
+        </p:spPr>
+      </p:sp>
+      <p:sp>
+        <p:nvSpPr>
+          <p:cNvPr id="5" name="Text 3"/>
+          <p:cNvSpPr txBox="1"/>
+          <p:nvPr/>
+        </p:nvSpPr>
+        <p:spPr>
+          <a:xfrm>
+            <a:off x="548640" y="1463040"/>
+            <a:ext cx="822960" cy="822960"/>
+          </a:xfrm>
+          <a:prstGeom prst="rect">
+            <a:avLst/>
+          </a:prstGeom>
+          <a:noFill/>
+          <a:ln/>
+        </p:spPr>
+        <p:txBody>
+          <a:bodyPr wrap="square" lIns="0" tIns="0" rIns="0" bIns="0" rtlCol="0" anchor="ctr"/>
+          <a:lstStyle/>
+          <a:p>
+            <a:pPr algn="ctr" indent="0" marL="0">
+              <a:buNone/>
+            </a:pPr>
+            <a:r>
+              <a:rPr lang="en-US" sz="2600" b="1" dirty="0">
+                <a:solidFill>
+                  <a:schemeClr val="bg1"/>
+                </a:solidFill>
+              </a:rPr>
+              <a:t>2</a:t>
+            </a:r>
+            <a:endParaRPr lang="en-US" sz="2600" dirty="0"/>
+          </a:p>
+        </p:txBody>
+      </p:sp>
+      <p:sp>
+        <p:nvSpPr>
+          <p:cNvPr id="6" name="Text 4"/>
+          <p:cNvSpPr txBox="1"/>
+          <p:nvPr/>
+        </p:nvSpPr>
+        <p:spPr>
+          <a:xfrm>
+            <a:off x="1600200" y="1508760"/>
+            <a:ext cx="2743200" cy="320040"/>
+          </a:xfrm>
+          <a:prstGeom prst="rect">
+            <a:avLst/>
+          </a:prstGeom>
+          <a:noFill/>
+          <a:ln/>
+        </p:spPr>
+        <p:txBody>
+          <a:bodyPr wrap="square" lIns="0" tIns="0" rIns="0" bIns="0" rtlCol="0" anchor="t"/>
+          <a:lstStyle/>
+          <a:p>
+            <a:pPr indent="0" marL="0">
+              <a:buNone/>
+            </a:pPr>
+            <a:r>
+              <a:rPr lang="en-US" sz="1500" b="1" dirty="0">
+                <a:solidFill>
+                  <a:schemeClr val="tx1"/>
+                </a:solidFill>
+              </a:rPr>
+              <a:t>baseline</a:t>
+            </a:r>
+            <a:endParaRPr lang="en-US" sz="1500" dirty="0"/>
+          </a:p>
+        </p:txBody>
+      </p:sp>
+      <p:sp>
+        <p:nvSpPr>
+          <p:cNvPr id="7" name="Text 5"/>
+          <p:cNvSpPr txBox="1"/>
+          <p:nvPr/>
+        </p:nvSpPr>
+        <p:spPr>
+          <a:xfrm>
+            <a:off x="1600200" y="1847088"/>
+            <a:ext cx="4754880" cy="365760"/>
+          </a:xfrm>
+          <a:prstGeom prst="rect">
+            <a:avLst/>
+          </a:prstGeom>
+          <a:noFill/>
+          <a:ln/>
+        </p:spPr>
+        <p:txBody>
+          <a:bodyPr wrap="square" lIns="0" tIns="0" rIns="0" bIns="0" rtlCol="0" anchor="t"/>
+          <a:lstStyle/>
+          <a:p>
+            <a:pPr indent="0" marL="0">
+              <a:buNone/>
+            </a:pPr>
+            <a:r>
+              <a:rPr lang="en-US" sz="1250" dirty="0">
+                <a:solidFill>
+                  <a:schemeClr val="tx2"/>
+                </a:solidFill>
+                <a:latin typeface="Courier New" pitchFamily="34" charset="0"/>
+                <a:ea typeface="Courier New" pitchFamily="34" charset="-122"/>
+                <a:cs typeface="Courier New" pitchFamily="34" charset="-120"/>
+              </a:rPr>
+              <a:t>New size: 2; replicas below Spec.MinReplicas</a:t>
+            </a:r>
+            <a:endParaRPr lang="en-US" sz="1250" dirty="0"/>
+          </a:p>
+        </p:txBody>
+      </p:sp>
+      <p:sp>
+        <p:nvSpPr>
+          <p:cNvPr id="8" name="replica-dot-1"/>
+          <p:cNvSpPr/>
+          <p:nvPr/>
+        </p:nvSpPr>
+        <p:spPr>
+          <a:xfrm>
+            <a:off x="548640" y="2880360"/>
+            <a:ext cx="822960" cy="822960"/>
+          </a:xfrm>
+          <a:prstGeom prst="ellipse">
+            <a:avLst/>
+          </a:prstGeom>
+          <a:solidFill>
+            <a:schemeClr val="accent2"/>
+          </a:solidFill>
+          <a:ln w="38100">
+            <a:solidFill>
+              <a:schemeClr val="bg1"/>
+            </a:solidFill>
+            <a:prstDash val="solid"/>
+          </a:ln>
+        </p:spPr>
+      </p:sp>
+      <p:sp>
+        <p:nvSpPr>
+          <p:cNvPr id="9" name="Text 7"/>
+          <p:cNvSpPr txBox="1"/>
+          <p:nvPr/>
+        </p:nvSpPr>
+        <p:spPr>
+          <a:xfrm>
+            <a:off x="548640" y="2880360"/>
+            <a:ext cx="822960" cy="822960"/>
+          </a:xfrm>
+          <a:prstGeom prst="rect">
+            <a:avLst/>
+          </a:prstGeom>
+          <a:noFill/>
+          <a:ln/>
+        </p:spPr>
+        <p:txBody>
+          <a:bodyPr wrap="square" lIns="0" tIns="0" rIns="0" bIns="0" rtlCol="0" anchor="ctr"/>
+          <a:lstStyle/>
+          <a:p>
+            <a:pPr algn="ctr" indent="0" marL="0">
+              <a:buNone/>
+            </a:pPr>
+            <a:r>
+              <a:rPr lang="en-US" sz="2600" b="1" dirty="0">
+                <a:solidFill>
+                  <a:schemeClr val="bg1"/>
+                </a:solidFill>
+              </a:rPr>
+              <a:t>3</a:t>
+            </a:r>
+            <a:endParaRPr lang="en-US" sz="2600" dirty="0"/>
+          </a:p>
+        </p:txBody>
+      </p:sp>
+      <p:sp>
+        <p:nvSpPr>
+          <p:cNvPr id="10" name="Text 8"/>
+          <p:cNvSpPr txBox="1"/>
+          <p:nvPr/>
+        </p:nvSpPr>
+        <p:spPr>
+          <a:xfrm>
+            <a:off x="1600200" y="2926080"/>
+            <a:ext cx="2743200" cy="320040"/>
+          </a:xfrm>
+          <a:prstGeom prst="rect">
+            <a:avLst/>
+          </a:prstGeom>
+          <a:noFill/>
+          <a:ln/>
+        </p:spPr>
+        <p:txBody>
+          <a:bodyPr wrap="square" lIns="0" tIns="0" rIns="0" bIns="0" rtlCol="0" anchor="t"/>
+          <a:lstStyle/>
+          <a:p>
+            <a:pPr indent="0" marL="0">
+              <a:buNone/>
+            </a:pPr>
+            <a:r>
+              <a:rPr lang="en-US" sz="1500" b="1" dirty="0">
+                <a:solidFill>
+                  <a:schemeClr val="tx1"/>
+                </a:solidFill>
+              </a:rPr>
+              <a:t>+4m45s</a:t>
+            </a:r>
+            <a:endParaRPr lang="en-US" sz="1500" dirty="0"/>
+          </a:p>
+        </p:txBody>
+      </p:sp>
+      <p:sp>
+        <p:nvSpPr>
+          <p:cNvPr id="11" name="Text 9"/>
+          <p:cNvSpPr txBox="1"/>
+          <p:nvPr/>
+        </p:nvSpPr>
+        <p:spPr>
+          <a:xfrm>
+            <a:off x="1600200" y="3264408"/>
+            <a:ext cx="4754880" cy="365760"/>
+          </a:xfrm>
+          <a:prstGeom prst="rect">
+            <a:avLst/>
+          </a:prstGeom>
+          <a:noFill/>
+          <a:ln/>
+        </p:spPr>
+        <p:txBody>
+          <a:bodyPr wrap="square" lIns="0" tIns="0" rIns="0" bIns="0" rtlCol="0" anchor="t"/>
+          <a:lstStyle/>
+          <a:p>
+            <a:pPr indent="0" marL="0">
+              <a:buNone/>
+            </a:pPr>
+            <a:r>
+              <a:rPr lang="en-US" sz="1250" dirty="0">
+                <a:solidFill>
+                  <a:schemeClr val="tx2"/>
+                </a:solidFill>
+                <a:latin typeface="Courier New" pitchFamily="34" charset="0"/>
+                <a:ea typeface="Courier New" pitchFamily="34" charset="-122"/>
+                <a:cs typeface="Courier New" pitchFamily="34" charset="-120"/>
+              </a:rPr>
+              <a:t>New size: 3; cpu utilization above target</a:t>
+            </a:r>
+            <a:endParaRPr lang="en-US" sz="1250" dirty="0"/>
+          </a:p>
+        </p:txBody>
+      </p:sp>
+      <p:sp>
+        <p:nvSpPr>
+          <p:cNvPr id="12" name="replica-dot-2"/>
+          <p:cNvSpPr/>
+          <p:nvPr/>
+        </p:nvSpPr>
+        <p:spPr>
+          <a:xfrm>
+            <a:off x="548640" y="4297680"/>
+            <a:ext cx="822960" cy="822960"/>
+          </a:xfrm>
+          <a:prstGeom prst="ellipse">
+            <a:avLst/>
+          </a:prstGeom>
+          <a:solidFill>
+            <a:schemeClr val="accent1"/>
+          </a:solidFill>
+          <a:ln w="38100">
+            <a:solidFill>
+              <a:schemeClr val="bg1"/>
+            </a:solidFill>
+            <a:prstDash val="solid"/>
+          </a:ln>
+        </p:spPr>
+      </p:sp>
+      <p:sp>
+        <p:nvSpPr>
+          <p:cNvPr id="13" name="Text 11"/>
+          <p:cNvSpPr txBox="1"/>
+          <p:nvPr/>
+        </p:nvSpPr>
+        <p:spPr>
+          <a:xfrm>
+            <a:off x="548640" y="4297680"/>
+            <a:ext cx="822960" cy="822960"/>
+          </a:xfrm>
+          <a:prstGeom prst="rect">
+            <a:avLst/>
+          </a:prstGeom>
+          <a:noFill/>
+          <a:ln/>
+        </p:spPr>
+        <p:txBody>
+          <a:bodyPr wrap="square" lIns="0" tIns="0" rIns="0" bIns="0" rtlCol="0" anchor="ctr"/>
+          <a:lstStyle/>
+          <a:p>
+            <a:pPr algn="ctr" indent="0" marL="0">
+              <a:buNone/>
+            </a:pPr>
+            <a:r>
+              <a:rPr lang="en-US" sz="2600" b="1" dirty="0">
+                <a:solidFill>
+                  <a:schemeClr val="bg1"/>
+                </a:solidFill>
+              </a:rPr>
+              <a:t>4</a:t>
+            </a:r>
+            <a:endParaRPr lang="en-US" sz="2600" dirty="0"/>
+          </a:p>
+        </p:txBody>
+      </p:sp>
+      <p:sp>
+        <p:nvSpPr>
+          <p:cNvPr id="14" name="Text 12"/>
+          <p:cNvSpPr txBox="1"/>
+          <p:nvPr/>
+        </p:nvSpPr>
+        <p:spPr>
+          <a:xfrm>
+            <a:off x="1600200" y="4343400"/>
+            <a:ext cx="2743200" cy="320040"/>
+          </a:xfrm>
+          <a:prstGeom prst="rect">
+            <a:avLst/>
+          </a:prstGeom>
+          <a:noFill/>
+          <a:ln/>
+        </p:spPr>
+        <p:txBody>
+          <a:bodyPr wrap="square" lIns="0" tIns="0" rIns="0" bIns="0" rtlCol="0" anchor="t"/>
+          <a:lstStyle/>
+          <a:p>
+            <a:pPr indent="0" marL="0">
+              <a:buNone/>
+            </a:pPr>
+            <a:r>
+              <a:rPr lang="en-US" sz="1500" b="1" dirty="0">
+                <a:solidFill>
+                  <a:schemeClr val="tx1"/>
+                </a:solidFill>
+              </a:rPr>
+              <a:t>+6m31s</a:t>
+            </a:r>
+            <a:endParaRPr lang="en-US" sz="1500" dirty="0"/>
+          </a:p>
+        </p:txBody>
+      </p:sp>
+      <p:sp>
+        <p:nvSpPr>
+          <p:cNvPr id="15" name="Text 13"/>
+          <p:cNvSpPr txBox="1"/>
+          <p:nvPr/>
+        </p:nvSpPr>
+        <p:spPr>
+          <a:xfrm>
+            <a:off x="1600200" y="4681728"/>
+            <a:ext cx="4754880" cy="365760"/>
+          </a:xfrm>
+          <a:prstGeom prst="rect">
+            <a:avLst/>
+          </a:prstGeom>
+          <a:noFill/>
+          <a:ln/>
+        </p:spPr>
+        <p:txBody>
+          <a:bodyPr wrap="square" lIns="0" tIns="0" rIns="0" bIns="0" rtlCol="0" anchor="t"/>
+          <a:lstStyle/>
+          <a:p>
+            <a:pPr indent="0" marL="0">
+              <a:buNone/>
+            </a:pPr>
+            <a:r>
+              <a:rPr lang="en-US" sz="1250" dirty="0">
+                <a:solidFill>
+                  <a:schemeClr val="tx2"/>
+                </a:solidFill>
+                <a:latin typeface="Courier New" pitchFamily="34" charset="0"/>
+                <a:ea typeface="Courier New" pitchFamily="34" charset="-122"/>
+                <a:cs typeface="Courier New" pitchFamily="34" charset="-120"/>
+              </a:rPr>
+              <a:t>New size: 4; cpu utilization above target</a:t>
+            </a:r>
+            <a:endParaRPr lang="en-US" sz="1250" dirty="0"/>
+          </a:p>
+        </p:txBody>
+      </p:sp>
+      <p:sp>
+        <p:nvSpPr>
+          <p:cNvPr id="16" name="hpa-card"/>
+          <p:cNvSpPr/>
+          <p:nvPr/>
+        </p:nvSpPr>
+        <p:spPr>
+          <a:xfrm>
+            <a:off x="6766560" y="1463040"/>
+            <a:ext cx="4873752" cy="4023360"/>
           </a:xfrm>
           <a:prstGeom prst="roundRect">
             <a:avLst>
-              <a:gd name="adj" fmla="val 10909"/>
+              <a:gd name="adj" fmla="val 2727"/>
             </a:avLst>
           </a:prstGeom>
           <a:solidFill>
@@ -6420,63 +6471,14 @@
       </p:sp>
       <p:sp>
         <p:nvSpPr>
-          <p:cNvPr id="4" name="bug-badge-0-circle"/>
-          <p:cNvSpPr/>
-          <p:nvPr/>
-        </p:nvSpPr>
-        <p:spPr>
-          <a:xfrm>
-            <a:off x="731520" y="1645920"/>
-            <a:ext cx="411480" cy="411480"/>
-          </a:xfrm>
-          <a:prstGeom prst="ellipse">
-            <a:avLst/>
-          </a:prstGeom>
-          <a:solidFill>
-            <a:schemeClr val="accent1"/>
-          </a:solidFill>
-          <a:ln w="12700">
-            <a:solidFill>
-              <a:schemeClr val="accent1"/>
-            </a:solidFill>
-            <a:prstDash val="solid"/>
-          </a:ln>
-        </p:spPr>
-      </p:sp>
-      <p:pic>
-        <p:nvPicPr>
-          <p:cNvPr id="5" name="bug-badge-0-icon" descr="preencoded.png">    </p:cNvPr>
-          <p:cNvPicPr>
-            <a:picLocks noChangeAspect="1"/>
-          </p:cNvPicPr>
-          <p:nvPr/>
-        </p:nvPicPr>
-        <p:blipFill>
-          <a:blip r:embed="rId1"/>
-          <a:stretch>
-            <a:fillRect/>
-          </a:stretch>
-        </p:blipFill>
-        <p:spPr>
-          <a:xfrm>
-            <a:off x="834390" y="1748790"/>
-            <a:ext cx="205740" cy="205740"/>
-          </a:xfrm>
-          <a:prstGeom prst="rect">
-            <a:avLst/>
-          </a:prstGeom>
-        </p:spPr>
-      </p:pic>
-      <p:sp>
-        <p:nvSpPr>
-          <p:cNvPr id="6" name="Text 3"/>
-          <p:cNvSpPr txBox="1"/>
-          <p:nvPr/>
-        </p:nvSpPr>
-        <p:spPr>
-          <a:xfrm>
-            <a:off x="1280160" y="1527048"/>
-            <a:ext cx="2697480" cy="347472"/>
+          <p:cNvPr id="17" name="Text 15"/>
+          <p:cNvSpPr txBox="1"/>
+          <p:nvPr/>
+        </p:nvSpPr>
+        <p:spPr>
+          <a:xfrm>
+            <a:off x="7086600" y="1737360"/>
+            <a:ext cx="4297680" cy="3566160"/>
           </a:xfrm>
           <a:prstGeom prst="rect">
             <a:avLst/>
@@ -6489,30 +6491,123 @@
           <a:lstStyle/>
           <a:p>
             <a:pPr indent="0" marL="0">
-              <a:buNone/>
-            </a:pPr>
-            <a:r>
-              <a:rPr lang="en-US" sz="1300" b="1" dirty="0">
+              <a:spcAft>
+                <a:spcPts val="800"/>
+              </a:spcAft>
+              <a:buNone/>
+            </a:pPr>
+            <a:r>
+              <a:rPr lang="en-US" sz="1800" b="1" dirty="0">
                 <a:solidFill>
                   <a:schemeClr val="tx1"/>
                 </a:solidFill>
               </a:rPr>
-              <a:t>Terraform HCL did not parse</a:t>
-            </a:r>
-            <a:endParaRPr lang="en-US" sz="1300" dirty="0"/>
-          </a:p>
-        </p:txBody>
-      </p:sp>
-      <p:sp>
-        <p:nvSpPr>
-          <p:cNvPr id="7" name="Text 4"/>
-          <p:cNvSpPr txBox="1"/>
-          <p:nvPr/>
-        </p:nvSpPr>
-        <p:spPr>
-          <a:xfrm>
-            <a:off x="1280160" y="1892808"/>
-            <a:ext cx="2697480" cy="347472"/>
+              <a:t>How it works</a:t>
+            </a:r>
+            <a:endParaRPr lang="en-US" sz="1400" dirty="0"/>
+          </a:p>
+          <a:p>
+            <a:pPr marL="342900" indent="-342900">
+              <a:spcAft>
+                <a:spcPts val="800"/>
+              </a:spcAft>
+              <a:buSzPct val="100000"/>
+              <a:buChar char="•"/>
+            </a:pPr>
+            <a:r>
+              <a:rPr lang="en-US" sz="1400" dirty="0">
+                <a:solidFill>
+                  <a:schemeClr val="tx2"/>
+                </a:solidFill>
+              </a:rPr>
+              <a:t>metrics-server reports pod CPU against the 100m request</a:t>
+            </a:r>
+            <a:endParaRPr lang="en-US" sz="1400" dirty="0"/>
+          </a:p>
+          <a:p>
+            <a:pPr marL="342900" indent="-342900">
+              <a:spcAft>
+                <a:spcPts val="800"/>
+              </a:spcAft>
+              <a:buSzPct val="100000"/>
+              <a:buChar char="•"/>
+            </a:pPr>
+            <a:r>
+              <a:rPr lang="en-US" sz="1400" dirty="0">
+                <a:solidFill>
+                  <a:schemeClr val="tx2"/>
+                </a:solidFill>
+              </a:rPr>
+              <a:t>HPA targets 60 % average utilisation, min 2, max 6</a:t>
+            </a:r>
+            <a:endParaRPr lang="en-US" sz="1400" dirty="0"/>
+          </a:p>
+          <a:p>
+            <a:pPr marL="342900" indent="-342900">
+              <a:spcAft>
+                <a:spcPts val="800"/>
+              </a:spcAft>
+              <a:buSzPct val="100000"/>
+              <a:buChar char="•"/>
+            </a:pPr>
+            <a:r>
+              <a:rPr lang="en-US" sz="1400" dirty="0">
+                <a:solidFill>
+                  <a:schemeClr val="tx2"/>
+                </a:solidFill>
+              </a:rPr>
+              <a:t>scripts/load-test.sh drives /api traffic through the Ingress</a:t>
+            </a:r>
+            <a:endParaRPr lang="en-US" sz="1400" dirty="0"/>
+          </a:p>
+          <a:p>
+            <a:pPr marL="342900" indent="-342900">
+              <a:spcAft>
+                <a:spcPts val="800"/>
+              </a:spcAft>
+              <a:buSzPct val="100000"/>
+              <a:buChar char="•"/>
+            </a:pPr>
+            <a:r>
+              <a:rPr lang="en-US" sz="1400" dirty="0">
+                <a:solidFill>
+                  <a:schemeClr val="tx2"/>
+                </a:solidFill>
+              </a:rPr>
+              <a:t>Prometheus picked up each new pod as a target with no config change</a:t>
+            </a:r>
+            <a:endParaRPr lang="en-US" sz="1400" dirty="0"/>
+          </a:p>
+          <a:p>
+            <a:pPr marL="342900" indent="-342900">
+              <a:spcAft>
+                <a:spcPts val="800"/>
+              </a:spcAft>
+              <a:buSzPct val="100000"/>
+              <a:buChar char="•"/>
+            </a:pPr>
+            <a:r>
+              <a:rPr lang="en-US" sz="1400" dirty="0">
+                <a:solidFill>
+                  <a:schemeClr val="tx2"/>
+                </a:solidFill>
+              </a:rPr>
+              <a:t>Scale-down waits 5 minutes (stabilisation window)</a:t>
+            </a:r>
+            <a:endParaRPr lang="en-US" sz="1400" dirty="0"/>
+          </a:p>
+        </p:txBody>
+      </p:sp>
+      <p:sp>
+        <p:nvSpPr>
+          <p:cNvPr id="18" name="Text 16"/>
+          <p:cNvSpPr txBox="1"/>
+          <p:nvPr/>
+        </p:nvSpPr>
+        <p:spPr>
+          <a:xfrm>
+            <a:off x="548640" y="5760720"/>
+            <a:ext cx="8229600" cy="320040"/>
           </a:xfrm>
           <a:prstGeom prst="rect">
             <a:avLst/>
@@ -6528,1642 +6623,17 @@
               <a:buNone/>
             </a:pPr>
             <a:r>
-              <a:rPr lang="en-US" sz="1150" dirty="0">
+              <a:rPr lang="en-US" sz="1100" i="1" dirty="0">
                 <a:solidFill>
                   <a:schemeClr val="tx2"/>
                 </a:solidFill>
-              </a:rPr>
-              <a:t>multi-attribute one-line blocks</a:t>
-            </a:r>
-            <a:endParaRPr lang="en-US" sz="1150" dirty="0"/>
-          </a:p>
-        </p:txBody>
-      </p:sp>
-      <p:sp>
-        <p:nvSpPr>
-          <p:cNvPr id="8" name="bug-card-1"/>
-          <p:cNvSpPr/>
-          <p:nvPr/>
-        </p:nvSpPr>
-        <p:spPr>
-          <a:xfrm>
-            <a:off x="4297680" y="1371600"/>
-            <a:ext cx="3566160" cy="1005840"/>
-          </a:xfrm>
-          <a:prstGeom prst="roundRect">
-            <a:avLst>
-              <a:gd name="adj" fmla="val 10909"/>
-            </a:avLst>
-          </a:prstGeom>
-          <a:solidFill>
-            <a:schemeClr val="bg2"/>
-          </a:solidFill>
-          <a:ln w="12700">
-            <a:solidFill>
-              <a:schemeClr val="bg2"/>
-            </a:solidFill>
-            <a:prstDash val="solid"/>
-          </a:ln>
-        </p:spPr>
-      </p:sp>
-      <p:sp>
-        <p:nvSpPr>
-          <p:cNvPr id="9" name="bug-badge-1-circle"/>
-          <p:cNvSpPr/>
-          <p:nvPr/>
-        </p:nvSpPr>
-        <p:spPr>
-          <a:xfrm>
-            <a:off x="4480560" y="1645920"/>
-            <a:ext cx="411480" cy="411480"/>
-          </a:xfrm>
-          <a:prstGeom prst="ellipse">
-            <a:avLst/>
-          </a:prstGeom>
-          <a:solidFill>
-            <a:schemeClr val="accent1"/>
-          </a:solidFill>
-          <a:ln w="12700">
-            <a:solidFill>
-              <a:schemeClr val="accent1"/>
-            </a:solidFill>
-            <a:prstDash val="solid"/>
-          </a:ln>
-        </p:spPr>
-      </p:sp>
-      <p:pic>
-        <p:nvPicPr>
-          <p:cNvPr id="10" name="bug-badge-1-icon" descr="preencoded.png">    </p:cNvPr>
-          <p:cNvPicPr>
-            <a:picLocks noChangeAspect="1"/>
-          </p:cNvPicPr>
-          <p:nvPr/>
-        </p:nvPicPr>
-        <p:blipFill>
-          <a:blip r:embed="rId2"/>
-          <a:stretch>
-            <a:fillRect/>
-          </a:stretch>
-        </p:blipFill>
-        <p:spPr>
-          <a:xfrm>
-            <a:off x="4583430" y="1748790"/>
-            <a:ext cx="205740" cy="205740"/>
-          </a:xfrm>
-          <a:prstGeom prst="rect">
-            <a:avLst/>
-          </a:prstGeom>
-        </p:spPr>
-      </p:pic>
-      <p:sp>
-        <p:nvSpPr>
-          <p:cNvPr id="11" name="Text 7"/>
-          <p:cNvSpPr txBox="1"/>
-          <p:nvPr/>
-        </p:nvSpPr>
-        <p:spPr>
-          <a:xfrm>
-            <a:off x="5029200" y="1527048"/>
-            <a:ext cx="2697480" cy="347472"/>
-          </a:xfrm>
-          <a:prstGeom prst="rect">
-            <a:avLst/>
-          </a:prstGeom>
-          <a:noFill/>
-          <a:ln/>
-        </p:spPr>
-        <p:txBody>
-          <a:bodyPr wrap="square" lIns="0" tIns="0" rIns="0" bIns="0" rtlCol="0" anchor="t"/>
-          <a:lstStyle/>
-          <a:p>
-            <a:pPr indent="0" marL="0">
-              <a:buNone/>
-            </a:pPr>
-            <a:r>
-              <a:rPr lang="en-US" sz="1300" b="1" dirty="0">
-                <a:solidFill>
-                  <a:schemeClr val="tx1"/>
-                </a:solidFill>
-              </a:rPr>
-              <a:t>EKS 1.31 no longer offered</a:t>
-            </a:r>
-            <a:endParaRPr lang="en-US" sz="1300" dirty="0"/>
-          </a:p>
-        </p:txBody>
-      </p:sp>
-      <p:sp>
-        <p:nvSpPr>
-          <p:cNvPr id="12" name="Text 8"/>
-          <p:cNvSpPr txBox="1"/>
-          <p:nvPr/>
-        </p:nvSpPr>
-        <p:spPr>
-          <a:xfrm>
-            <a:off x="5029200" y="1892808"/>
-            <a:ext cx="2697480" cy="347472"/>
-          </a:xfrm>
-          <a:prstGeom prst="rect">
-            <a:avLst/>
-          </a:prstGeom>
-          <a:noFill/>
-          <a:ln/>
-        </p:spPr>
-        <p:txBody>
-          <a:bodyPr wrap="square" lIns="0" tIns="0" rIns="0" bIns="0" rtlCol="0" anchor="t"/>
-          <a:lstStyle/>
-          <a:p>
-            <a:pPr indent="0" marL="0">
-              <a:buNone/>
-            </a:pPr>
-            <a:r>
-              <a:rPr lang="en-US" sz="1150" dirty="0">
-                <a:solidFill>
-                  <a:schemeClr val="tx2"/>
-                </a:solidFill>
-              </a:rPr>
-              <a:t>moved to 1.35 + AL2023 nodes</a:t>
-            </a:r>
-            <a:endParaRPr lang="en-US" sz="1150" dirty="0"/>
-          </a:p>
-        </p:txBody>
-      </p:sp>
-      <p:sp>
-        <p:nvSpPr>
-          <p:cNvPr id="13" name="bug-card-2"/>
-          <p:cNvSpPr/>
-          <p:nvPr/>
-        </p:nvSpPr>
-        <p:spPr>
-          <a:xfrm>
-            <a:off x="8046720" y="1371600"/>
-            <a:ext cx="3566160" cy="1005840"/>
-          </a:xfrm>
-          <a:prstGeom prst="roundRect">
-            <a:avLst>
-              <a:gd name="adj" fmla="val 10909"/>
-            </a:avLst>
-          </a:prstGeom>
-          <a:solidFill>
-            <a:schemeClr val="bg2"/>
-          </a:solidFill>
-          <a:ln w="12700">
-            <a:solidFill>
-              <a:schemeClr val="bg2"/>
-            </a:solidFill>
-            <a:prstDash val="solid"/>
-          </a:ln>
-        </p:spPr>
-      </p:sp>
-      <p:sp>
-        <p:nvSpPr>
-          <p:cNvPr id="14" name="bug-badge-2-circle"/>
-          <p:cNvSpPr/>
-          <p:nvPr/>
-        </p:nvSpPr>
-        <p:spPr>
-          <a:xfrm>
-            <a:off x="8229600" y="1645920"/>
-            <a:ext cx="411480" cy="411480"/>
-          </a:xfrm>
-          <a:prstGeom prst="ellipse">
-            <a:avLst/>
-          </a:prstGeom>
-          <a:solidFill>
-            <a:schemeClr val="accent1"/>
-          </a:solidFill>
-          <a:ln w="12700">
-            <a:solidFill>
-              <a:schemeClr val="accent1"/>
-            </a:solidFill>
-            <a:prstDash val="solid"/>
-          </a:ln>
-        </p:spPr>
-      </p:sp>
-      <p:pic>
-        <p:nvPicPr>
-          <p:cNvPr id="15" name="bug-badge-2-icon" descr="preencoded.png">    </p:cNvPr>
-          <p:cNvPicPr>
-            <a:picLocks noChangeAspect="1"/>
-          </p:cNvPicPr>
-          <p:nvPr/>
-        </p:nvPicPr>
-        <p:blipFill>
-          <a:blip r:embed="rId3"/>
-          <a:stretch>
-            <a:fillRect/>
-          </a:stretch>
-        </p:blipFill>
-        <p:spPr>
-          <a:xfrm>
-            <a:off x="8332470" y="1748790"/>
-            <a:ext cx="205740" cy="205740"/>
-          </a:xfrm>
-          <a:prstGeom prst="rect">
-            <a:avLst/>
-          </a:prstGeom>
-        </p:spPr>
-      </p:pic>
-      <p:sp>
-        <p:nvSpPr>
-          <p:cNvPr id="16" name="Text 11"/>
-          <p:cNvSpPr txBox="1"/>
-          <p:nvPr/>
-        </p:nvSpPr>
-        <p:spPr>
-          <a:xfrm>
-            <a:off x="8778240" y="1527048"/>
-            <a:ext cx="2697480" cy="347472"/>
-          </a:xfrm>
-          <a:prstGeom prst="rect">
-            <a:avLst/>
-          </a:prstGeom>
-          <a:noFill/>
-          <a:ln/>
-        </p:spPr>
-        <p:txBody>
-          <a:bodyPr wrap="square" lIns="0" tIns="0" rIns="0" bIns="0" rtlCol="0" anchor="t"/>
-          <a:lstStyle/>
-          <a:p>
-            <a:pPr indent="0" marL="0">
-              <a:buNone/>
-            </a:pPr>
-            <a:r>
-              <a:rPr lang="en-US" sz="1300" b="1" dirty="0">
-                <a:solidFill>
-                  <a:schemeClr val="tx1"/>
-                </a:solidFill>
-              </a:rPr>
-              <a:t>Ingress → wrong Service and port</a:t>
-            </a:r>
-            <a:endParaRPr lang="en-US" sz="1300" dirty="0"/>
-          </a:p>
-        </p:txBody>
-      </p:sp>
-      <p:sp>
-        <p:nvSpPr>
-          <p:cNvPr id="17" name="Text 12"/>
-          <p:cNvSpPr txBox="1"/>
-          <p:nvPr/>
-        </p:nvSpPr>
-        <p:spPr>
-          <a:xfrm>
-            <a:off x="8778240" y="1892808"/>
-            <a:ext cx="2697480" cy="347472"/>
-          </a:xfrm>
-          <a:prstGeom prst="rect">
-            <a:avLst/>
-          </a:prstGeom>
-          <a:noFill/>
-          <a:ln/>
-        </p:spPr>
-        <p:txBody>
-          <a:bodyPr wrap="square" lIns="0" tIns="0" rIns="0" bIns="0" rtlCol="0" anchor="t"/>
-          <a:lstStyle/>
-          <a:p>
-            <a:pPr indent="0" marL="0">
-              <a:buNone/>
-            </a:pPr>
-            <a:r>
-              <a:rPr lang="en-US" sz="1150" dirty="0">
-                <a:solidFill>
-                  <a:schemeClr val="tx2"/>
-                </a:solidFill>
-              </a:rPr>
-              <a:t>taskboard-backend:8080 didn't exist</a:t>
-            </a:r>
-            <a:endParaRPr lang="en-US" sz="1150" dirty="0"/>
-          </a:p>
-        </p:txBody>
-      </p:sp>
-      <p:sp>
-        <p:nvSpPr>
-          <p:cNvPr id="18" name="bug-card-3"/>
-          <p:cNvSpPr/>
-          <p:nvPr/>
-        </p:nvSpPr>
-        <p:spPr>
-          <a:xfrm>
-            <a:off x="548640" y="2542032"/>
-            <a:ext cx="3566160" cy="1005840"/>
-          </a:xfrm>
-          <a:prstGeom prst="roundRect">
-            <a:avLst>
-              <a:gd name="adj" fmla="val 10909"/>
-            </a:avLst>
-          </a:prstGeom>
-          <a:solidFill>
-            <a:schemeClr val="bg2"/>
-          </a:solidFill>
-          <a:ln w="12700">
-            <a:solidFill>
-              <a:schemeClr val="bg2"/>
-            </a:solidFill>
-            <a:prstDash val="solid"/>
-          </a:ln>
-        </p:spPr>
-      </p:sp>
-      <p:sp>
-        <p:nvSpPr>
-          <p:cNvPr id="19" name="bug-badge-3-circle"/>
-          <p:cNvSpPr/>
-          <p:nvPr/>
-        </p:nvSpPr>
-        <p:spPr>
-          <a:xfrm>
-            <a:off x="731520" y="2816352"/>
-            <a:ext cx="411480" cy="411480"/>
-          </a:xfrm>
-          <a:prstGeom prst="ellipse">
-            <a:avLst/>
-          </a:prstGeom>
-          <a:solidFill>
-            <a:schemeClr val="accent1"/>
-          </a:solidFill>
-          <a:ln w="12700">
-            <a:solidFill>
-              <a:schemeClr val="accent1"/>
-            </a:solidFill>
-            <a:prstDash val="solid"/>
-          </a:ln>
-        </p:spPr>
-      </p:sp>
-      <p:pic>
-        <p:nvPicPr>
-          <p:cNvPr id="20" name="bug-badge-3-icon" descr="preencoded.png">    </p:cNvPr>
-          <p:cNvPicPr>
-            <a:picLocks noChangeAspect="1"/>
-          </p:cNvPicPr>
-          <p:nvPr/>
-        </p:nvPicPr>
-        <p:blipFill>
-          <a:blip r:embed="rId4"/>
-          <a:stretch>
-            <a:fillRect/>
-          </a:stretch>
-        </p:blipFill>
-        <p:spPr>
-          <a:xfrm>
-            <a:off x="834390" y="2919222"/>
-            <a:ext cx="205740" cy="205740"/>
-          </a:xfrm>
-          <a:prstGeom prst="rect">
-            <a:avLst/>
-          </a:prstGeom>
-        </p:spPr>
-      </p:pic>
-      <p:sp>
-        <p:nvSpPr>
-          <p:cNvPr id="21" name="Text 15"/>
-          <p:cNvSpPr txBox="1"/>
-          <p:nvPr/>
-        </p:nvSpPr>
-        <p:spPr>
-          <a:xfrm>
-            <a:off x="1280160" y="2697480"/>
-            <a:ext cx="2697480" cy="347472"/>
-          </a:xfrm>
-          <a:prstGeom prst="rect">
-            <a:avLst/>
-          </a:prstGeom>
-          <a:noFill/>
-          <a:ln/>
-        </p:spPr>
-        <p:txBody>
-          <a:bodyPr wrap="square" lIns="0" tIns="0" rIns="0" bIns="0" rtlCol="0" anchor="t"/>
-          <a:lstStyle/>
-          <a:p>
-            <a:pPr indent="0" marL="0">
-              <a:buNone/>
-            </a:pPr>
-            <a:r>
-              <a:rPr lang="en-US" sz="1300" b="1" dirty="0">
-                <a:solidFill>
-                  <a:schemeClr val="tx1"/>
-                </a:solidFill>
-              </a:rPr>
-              <a:t>Nginx proxied to host 'backend'</a:t>
-            </a:r>
-            <a:endParaRPr lang="en-US" sz="1300" dirty="0"/>
-          </a:p>
-        </p:txBody>
-      </p:sp>
-      <p:sp>
-        <p:nvSpPr>
-          <p:cNvPr id="22" name="Text 16"/>
-          <p:cNvSpPr txBox="1"/>
-          <p:nvPr/>
-        </p:nvSpPr>
-        <p:spPr>
-          <a:xfrm>
-            <a:off x="1280160" y="3063240"/>
-            <a:ext cx="2697480" cy="347472"/>
-          </a:xfrm>
-          <a:prstGeom prst="rect">
-            <a:avLst/>
-          </a:prstGeom>
-          <a:noFill/>
-          <a:ln/>
-        </p:spPr>
-        <p:txBody>
-          <a:bodyPr wrap="square" lIns="0" tIns="0" rIns="0" bIns="0" rtlCol="0" anchor="t"/>
-          <a:lstStyle/>
-          <a:p>
-            <a:pPr indent="0" marL="0">
-              <a:buNone/>
-            </a:pPr>
-            <a:r>
-              <a:rPr lang="en-US" sz="1150" dirty="0">
-                <a:solidFill>
-                  <a:schemeClr val="tx2"/>
-                </a:solidFill>
-              </a:rPr>
-              <a:t>templated BACKEND_URL per environment</a:t>
-            </a:r>
-            <a:endParaRPr lang="en-US" sz="1150" dirty="0"/>
-          </a:p>
-        </p:txBody>
-      </p:sp>
-      <p:sp>
-        <p:nvSpPr>
-          <p:cNvPr id="23" name="bug-card-4"/>
-          <p:cNvSpPr/>
-          <p:nvPr/>
-        </p:nvSpPr>
-        <p:spPr>
-          <a:xfrm>
-            <a:off x="4297680" y="2542032"/>
-            <a:ext cx="3566160" cy="1005840"/>
-          </a:xfrm>
-          <a:prstGeom prst="roundRect">
-            <a:avLst>
-              <a:gd name="adj" fmla="val 10909"/>
-            </a:avLst>
-          </a:prstGeom>
-          <a:solidFill>
-            <a:schemeClr val="bg2"/>
-          </a:solidFill>
-          <a:ln w="12700">
-            <a:solidFill>
-              <a:schemeClr val="bg2"/>
-            </a:solidFill>
-            <a:prstDash val="solid"/>
-          </a:ln>
-        </p:spPr>
-      </p:sp>
-      <p:sp>
-        <p:nvSpPr>
-          <p:cNvPr id="24" name="bug-badge-4-circle"/>
-          <p:cNvSpPr/>
-          <p:nvPr/>
-        </p:nvSpPr>
-        <p:spPr>
-          <a:xfrm>
-            <a:off x="4480560" y="2816352"/>
-            <a:ext cx="411480" cy="411480"/>
-          </a:xfrm>
-          <a:prstGeom prst="ellipse">
-            <a:avLst/>
-          </a:prstGeom>
-          <a:solidFill>
-            <a:schemeClr val="accent1"/>
-          </a:solidFill>
-          <a:ln w="12700">
-            <a:solidFill>
-              <a:schemeClr val="accent1"/>
-            </a:solidFill>
-            <a:prstDash val="solid"/>
-          </a:ln>
-        </p:spPr>
-      </p:sp>
-      <p:pic>
-        <p:nvPicPr>
-          <p:cNvPr id="25" name="bug-badge-4-icon" descr="preencoded.png">    </p:cNvPr>
-          <p:cNvPicPr>
-            <a:picLocks noChangeAspect="1"/>
-          </p:cNvPicPr>
-          <p:nvPr/>
-        </p:nvPicPr>
-        <p:blipFill>
-          <a:blip r:embed="rId5"/>
-          <a:stretch>
-            <a:fillRect/>
-          </a:stretch>
-        </p:blipFill>
-        <p:spPr>
-          <a:xfrm>
-            <a:off x="4583430" y="2919222"/>
-            <a:ext cx="205740" cy="205740"/>
-          </a:xfrm>
-          <a:prstGeom prst="rect">
-            <a:avLst/>
-          </a:prstGeom>
-        </p:spPr>
-      </p:pic>
-      <p:sp>
-        <p:nvSpPr>
-          <p:cNvPr id="26" name="Text 19"/>
-          <p:cNvSpPr txBox="1"/>
-          <p:nvPr/>
-        </p:nvSpPr>
-        <p:spPr>
-          <a:xfrm>
-            <a:off x="5029200" y="2697480"/>
-            <a:ext cx="2697480" cy="347472"/>
-          </a:xfrm>
-          <a:prstGeom prst="rect">
-            <a:avLst/>
-          </a:prstGeom>
-          <a:noFill/>
-          <a:ln/>
-        </p:spPr>
-        <p:txBody>
-          <a:bodyPr wrap="square" lIns="0" tIns="0" rIns="0" bIns="0" rtlCol="0" anchor="t"/>
-          <a:lstStyle/>
-          <a:p>
-            <a:pPr indent="0" marL="0">
-              <a:buNone/>
-            </a:pPr>
-            <a:r>
-              <a:rPr lang="en-US" sz="1300" b="1" dirty="0">
-                <a:solidFill>
-                  <a:schemeClr val="tx1"/>
-                </a:solidFill>
-              </a:rPr>
-              <a:t>Pipeline never pushed to GHCR</a:t>
-            </a:r>
-            <a:endParaRPr lang="en-US" sz="1300" dirty="0"/>
-          </a:p>
-        </p:txBody>
-      </p:sp>
-      <p:sp>
-        <p:nvSpPr>
-          <p:cNvPr id="27" name="Text 20"/>
-          <p:cNvSpPr txBox="1"/>
-          <p:nvPr/>
-        </p:nvSpPr>
-        <p:spPr>
-          <a:xfrm>
-            <a:off x="5029200" y="3063240"/>
-            <a:ext cx="2697480" cy="347472"/>
-          </a:xfrm>
-          <a:prstGeom prst="rect">
-            <a:avLst/>
-          </a:prstGeom>
-          <a:noFill/>
-          <a:ln/>
-        </p:spPr>
-        <p:txBody>
-          <a:bodyPr wrap="square" lIns="0" tIns="0" rIns="0" bIns="0" rtlCol="0" anchor="t"/>
-          <a:lstStyle/>
-          <a:p>
-            <a:pPr indent="0" marL="0">
-              <a:buNone/>
-            </a:pPr>
-            <a:r>
-              <a:rPr lang="en-US" sz="1150" dirty="0">
-                <a:solidFill>
-                  <a:schemeClr val="tx2"/>
-                </a:solidFill>
-              </a:rPr>
-              <a:t>Docker Hub, :latest tags, 3 rebuilds</a:t>
-            </a:r>
-            <a:endParaRPr lang="en-US" sz="1150" dirty="0"/>
-          </a:p>
-        </p:txBody>
-      </p:sp>
-      <p:sp>
-        <p:nvSpPr>
-          <p:cNvPr id="28" name="bug-card-5"/>
-          <p:cNvSpPr/>
-          <p:nvPr/>
-        </p:nvSpPr>
-        <p:spPr>
-          <a:xfrm>
-            <a:off x="8046720" y="2542032"/>
-            <a:ext cx="3566160" cy="1005840"/>
-          </a:xfrm>
-          <a:prstGeom prst="roundRect">
-            <a:avLst>
-              <a:gd name="adj" fmla="val 10909"/>
-            </a:avLst>
-          </a:prstGeom>
-          <a:solidFill>
-            <a:schemeClr val="bg2"/>
-          </a:solidFill>
-          <a:ln w="12700">
-            <a:solidFill>
-              <a:schemeClr val="bg2"/>
-            </a:solidFill>
-            <a:prstDash val="solid"/>
-          </a:ln>
-        </p:spPr>
-      </p:sp>
-      <p:sp>
-        <p:nvSpPr>
-          <p:cNvPr id="29" name="bug-badge-5-circle"/>
-          <p:cNvSpPr/>
-          <p:nvPr/>
-        </p:nvSpPr>
-        <p:spPr>
-          <a:xfrm>
-            <a:off x="8229600" y="2816352"/>
-            <a:ext cx="411480" cy="411480"/>
-          </a:xfrm>
-          <a:prstGeom prst="ellipse">
-            <a:avLst/>
-          </a:prstGeom>
-          <a:solidFill>
-            <a:schemeClr val="accent1"/>
-          </a:solidFill>
-          <a:ln w="12700">
-            <a:solidFill>
-              <a:schemeClr val="accent1"/>
-            </a:solidFill>
-            <a:prstDash val="solid"/>
-          </a:ln>
-        </p:spPr>
-      </p:sp>
-      <p:pic>
-        <p:nvPicPr>
-          <p:cNvPr id="30" name="bug-badge-5-icon" descr="preencoded.png">    </p:cNvPr>
-          <p:cNvPicPr>
-            <a:picLocks noChangeAspect="1"/>
-          </p:cNvPicPr>
-          <p:nvPr/>
-        </p:nvPicPr>
-        <p:blipFill>
-          <a:blip r:embed="rId6"/>
-          <a:stretch>
-            <a:fillRect/>
-          </a:stretch>
-        </p:blipFill>
-        <p:spPr>
-          <a:xfrm>
-            <a:off x="8332470" y="2919222"/>
-            <a:ext cx="205740" cy="205740"/>
-          </a:xfrm>
-          <a:prstGeom prst="rect">
-            <a:avLst/>
-          </a:prstGeom>
-        </p:spPr>
-      </p:pic>
-      <p:sp>
-        <p:nvSpPr>
-          <p:cNvPr id="31" name="Text 23"/>
-          <p:cNvSpPr txBox="1"/>
-          <p:nvPr/>
-        </p:nvSpPr>
-        <p:spPr>
-          <a:xfrm>
-            <a:off x="8778240" y="2697480"/>
-            <a:ext cx="2697480" cy="347472"/>
-          </a:xfrm>
-          <a:prstGeom prst="rect">
-            <a:avLst/>
-          </a:prstGeom>
-          <a:noFill/>
-          <a:ln/>
-        </p:spPr>
-        <p:txBody>
-          <a:bodyPr wrap="square" lIns="0" tIns="0" rIns="0" bIns="0" rtlCol="0" anchor="t"/>
-          <a:lstStyle/>
-          <a:p>
-            <a:pPr indent="0" marL="0">
-              <a:buNone/>
-            </a:pPr>
-            <a:r>
-              <a:rPr lang="en-US" sz="1300" b="1" dirty="0">
-                <a:solidFill>
-                  <a:schemeClr val="tx1"/>
-                </a:solidFill>
-              </a:rPr>
-              <a:t>Trivy could never fail the build</a:t>
-            </a:r>
-            <a:endParaRPr lang="en-US" sz="1300" dirty="0"/>
-          </a:p>
-        </p:txBody>
-      </p:sp>
-      <p:sp>
-        <p:nvSpPr>
-          <p:cNvPr id="32" name="Text 24"/>
-          <p:cNvSpPr txBox="1"/>
-          <p:nvPr/>
-        </p:nvSpPr>
-        <p:spPr>
-          <a:xfrm>
-            <a:off x="8778240" y="3063240"/>
-            <a:ext cx="2697480" cy="347472"/>
-          </a:xfrm>
-          <a:prstGeom prst="rect">
-            <a:avLst/>
-          </a:prstGeom>
-          <a:noFill/>
-          <a:ln/>
-        </p:spPr>
-        <p:txBody>
-          <a:bodyPr wrap="square" lIns="0" tIns="0" rIns="0" bIns="0" rtlCol="0" anchor="t"/>
-          <a:lstStyle/>
-          <a:p>
-            <a:pPr indent="0" marL="0">
-              <a:buNone/>
-            </a:pPr>
-            <a:r>
-              <a:rPr lang="en-US" sz="1150" dirty="0">
-                <a:solidFill>
-                  <a:schemeClr val="tx2"/>
-                </a:solidFill>
-              </a:rPr>
-              <a:t>added --exit-code 1</a:t>
-            </a:r>
-            <a:endParaRPr lang="en-US" sz="1150" dirty="0"/>
-          </a:p>
-        </p:txBody>
-      </p:sp>
-      <p:sp>
-        <p:nvSpPr>
-          <p:cNvPr id="33" name="bug-card-6"/>
-          <p:cNvSpPr/>
-          <p:nvPr/>
-        </p:nvSpPr>
-        <p:spPr>
-          <a:xfrm>
-            <a:off x="548640" y="3712464"/>
-            <a:ext cx="3566160" cy="1005840"/>
-          </a:xfrm>
-          <a:prstGeom prst="roundRect">
-            <a:avLst>
-              <a:gd name="adj" fmla="val 10909"/>
-            </a:avLst>
-          </a:prstGeom>
-          <a:solidFill>
-            <a:schemeClr val="bg2"/>
-          </a:solidFill>
-          <a:ln w="12700">
-            <a:solidFill>
-              <a:schemeClr val="bg2"/>
-            </a:solidFill>
-            <a:prstDash val="solid"/>
-          </a:ln>
-        </p:spPr>
-      </p:sp>
-      <p:sp>
-        <p:nvSpPr>
-          <p:cNvPr id="34" name="bug-badge-6-circle"/>
-          <p:cNvSpPr/>
-          <p:nvPr/>
-        </p:nvSpPr>
-        <p:spPr>
-          <a:xfrm>
-            <a:off x="731520" y="3986784"/>
-            <a:ext cx="411480" cy="411480"/>
-          </a:xfrm>
-          <a:prstGeom prst="ellipse">
-            <a:avLst/>
-          </a:prstGeom>
-          <a:solidFill>
-            <a:schemeClr val="accent1"/>
-          </a:solidFill>
-          <a:ln w="12700">
-            <a:solidFill>
-              <a:schemeClr val="accent1"/>
-            </a:solidFill>
-            <a:prstDash val="solid"/>
-          </a:ln>
-        </p:spPr>
-      </p:sp>
-      <p:pic>
-        <p:nvPicPr>
-          <p:cNvPr id="35" name="bug-badge-6-icon" descr="preencoded.png">    </p:cNvPr>
-          <p:cNvPicPr>
-            <a:picLocks noChangeAspect="1"/>
-          </p:cNvPicPr>
-          <p:nvPr/>
-        </p:nvPicPr>
-        <p:blipFill>
-          <a:blip r:embed="rId7"/>
-          <a:stretch>
-            <a:fillRect/>
-          </a:stretch>
-        </p:blipFill>
-        <p:spPr>
-          <a:xfrm>
-            <a:off x="834390" y="4089654"/>
-            <a:ext cx="205740" cy="205740"/>
-          </a:xfrm>
-          <a:prstGeom prst="rect">
-            <a:avLst/>
-          </a:prstGeom>
-        </p:spPr>
-      </p:pic>
-      <p:sp>
-        <p:nvSpPr>
-          <p:cNvPr id="36" name="Text 27"/>
-          <p:cNvSpPr txBox="1"/>
-          <p:nvPr/>
-        </p:nvSpPr>
-        <p:spPr>
-          <a:xfrm>
-            <a:off x="1280160" y="3867912"/>
-            <a:ext cx="2697480" cy="347472"/>
-          </a:xfrm>
-          <a:prstGeom prst="rect">
-            <a:avLst/>
-          </a:prstGeom>
-          <a:noFill/>
-          <a:ln/>
-        </p:spPr>
-        <p:txBody>
-          <a:bodyPr wrap="square" lIns="0" tIns="0" rIns="0" bIns="0" rtlCol="0" anchor="t"/>
-          <a:lstStyle/>
-          <a:p>
-            <a:pPr indent="0" marL="0">
-              <a:buNone/>
-            </a:pPr>
-            <a:r>
-              <a:rPr lang="en-US" sz="1300" b="1" dirty="0">
-                <a:solidFill>
-                  <a:schemeClr val="tx1"/>
-                </a:solidFill>
-              </a:rPr>
-              <a:t>Frontend ran Nginx as root</a:t>
-            </a:r>
-            <a:endParaRPr lang="en-US" sz="1300" dirty="0"/>
-          </a:p>
-        </p:txBody>
-      </p:sp>
-      <p:sp>
-        <p:nvSpPr>
-          <p:cNvPr id="37" name="Text 28"/>
-          <p:cNvSpPr txBox="1"/>
-          <p:nvPr/>
-        </p:nvSpPr>
-        <p:spPr>
-          <a:xfrm>
-            <a:off x="1280160" y="4233672"/>
-            <a:ext cx="2697480" cy="347472"/>
-          </a:xfrm>
-          <a:prstGeom prst="rect">
-            <a:avLst/>
-          </a:prstGeom>
-          <a:noFill/>
-          <a:ln/>
-        </p:spPr>
-        <p:txBody>
-          <a:bodyPr wrap="square" lIns="0" tIns="0" rIns="0" bIns="0" rtlCol="0" anchor="t"/>
-          <a:lstStyle/>
-          <a:p>
-            <a:pPr indent="0" marL="0">
-              <a:buNone/>
-            </a:pPr>
-            <a:r>
-              <a:rPr lang="en-US" sz="1150" dirty="0">
-                <a:solidFill>
-                  <a:schemeClr val="tx2"/>
-                </a:solidFill>
-              </a:rPr>
-              <a:t>unprivileged image on :8080</a:t>
-            </a:r>
-            <a:endParaRPr lang="en-US" sz="1150" dirty="0"/>
-          </a:p>
-        </p:txBody>
-      </p:sp>
-      <p:sp>
-        <p:nvSpPr>
-          <p:cNvPr id="38" name="bug-card-7"/>
-          <p:cNvSpPr/>
-          <p:nvPr/>
-        </p:nvSpPr>
-        <p:spPr>
-          <a:xfrm>
-            <a:off x="4297680" y="3712464"/>
-            <a:ext cx="3566160" cy="1005840"/>
-          </a:xfrm>
-          <a:prstGeom prst="roundRect">
-            <a:avLst>
-              <a:gd name="adj" fmla="val 10909"/>
-            </a:avLst>
-          </a:prstGeom>
-          <a:solidFill>
-            <a:schemeClr val="bg2"/>
-          </a:solidFill>
-          <a:ln w="12700">
-            <a:solidFill>
-              <a:schemeClr val="bg2"/>
-            </a:solidFill>
-            <a:prstDash val="solid"/>
-          </a:ln>
-        </p:spPr>
-      </p:sp>
-      <p:sp>
-        <p:nvSpPr>
-          <p:cNvPr id="39" name="bug-badge-7-circle"/>
-          <p:cNvSpPr/>
-          <p:nvPr/>
-        </p:nvSpPr>
-        <p:spPr>
-          <a:xfrm>
-            <a:off x="4480560" y="3986784"/>
-            <a:ext cx="411480" cy="411480"/>
-          </a:xfrm>
-          <a:prstGeom prst="ellipse">
-            <a:avLst/>
-          </a:prstGeom>
-          <a:solidFill>
-            <a:schemeClr val="accent1"/>
-          </a:solidFill>
-          <a:ln w="12700">
-            <a:solidFill>
-              <a:schemeClr val="accent1"/>
-            </a:solidFill>
-            <a:prstDash val="solid"/>
-          </a:ln>
-        </p:spPr>
-      </p:sp>
-      <p:pic>
-        <p:nvPicPr>
-          <p:cNvPr id="40" name="bug-badge-7-icon" descr="preencoded.png">    </p:cNvPr>
-          <p:cNvPicPr>
-            <a:picLocks noChangeAspect="1"/>
-          </p:cNvPicPr>
-          <p:nvPr/>
-        </p:nvPicPr>
-        <p:blipFill>
-          <a:blip r:embed="rId8"/>
-          <a:stretch>
-            <a:fillRect/>
-          </a:stretch>
-        </p:blipFill>
-        <p:spPr>
-          <a:xfrm>
-            <a:off x="4583430" y="4089654"/>
-            <a:ext cx="205740" cy="205740"/>
-          </a:xfrm>
-          <a:prstGeom prst="rect">
-            <a:avLst/>
-          </a:prstGeom>
-        </p:spPr>
-      </p:pic>
-      <p:sp>
-        <p:nvSpPr>
-          <p:cNvPr id="41" name="Text 31"/>
-          <p:cNvSpPr txBox="1"/>
-          <p:nvPr/>
-        </p:nvSpPr>
-        <p:spPr>
-          <a:xfrm>
-            <a:off x="5029200" y="3867912"/>
-            <a:ext cx="2697480" cy="347472"/>
-          </a:xfrm>
-          <a:prstGeom prst="rect">
-            <a:avLst/>
-          </a:prstGeom>
-          <a:noFill/>
-          <a:ln/>
-        </p:spPr>
-        <p:txBody>
-          <a:bodyPr wrap="square" lIns="0" tIns="0" rIns="0" bIns="0" rtlCol="0" anchor="t"/>
-          <a:lstStyle/>
-          <a:p>
-            <a:pPr indent="0" marL="0">
-              <a:buNone/>
-            </a:pPr>
-            <a:r>
-              <a:rPr lang="en-US" sz="1300" b="1" dirty="0">
-                <a:solidFill>
-                  <a:schemeClr val="tx1"/>
-                </a:solidFill>
-              </a:rPr>
-              <a:t>Init container waited forever</a:t>
-            </a:r>
-            <a:endParaRPr lang="en-US" sz="1300" dirty="0"/>
-          </a:p>
-        </p:txBody>
-      </p:sp>
-      <p:sp>
-        <p:nvSpPr>
-          <p:cNvPr id="42" name="Text 32"/>
-          <p:cNvSpPr txBox="1"/>
-          <p:nvPr/>
-        </p:nvSpPr>
-        <p:spPr>
-          <a:xfrm>
-            <a:off x="5029200" y="4233672"/>
-            <a:ext cx="2697480" cy="347472"/>
-          </a:xfrm>
-          <a:prstGeom prst="rect">
-            <a:avLst/>
-          </a:prstGeom>
-          <a:noFill/>
-          <a:ln/>
-        </p:spPr>
-        <p:txBody>
-          <a:bodyPr wrap="square" lIns="0" tIns="0" rIns="0" bIns="0" rtlCol="0" anchor="t"/>
-          <a:lstStyle/>
-          <a:p>
-            <a:pPr indent="0" marL="0">
-              <a:buNone/>
-            </a:pPr>
-            <a:r>
-              <a:rPr lang="en-US" sz="1150" dirty="0">
-                <a:solidFill>
-                  <a:schemeClr val="tx2"/>
-                </a:solidFill>
-              </a:rPr>
-              <a:t>pg_isready as uid 10001: pass -U/-d</a:t>
-            </a:r>
-            <a:endParaRPr lang="en-US" sz="1150" dirty="0"/>
-          </a:p>
-        </p:txBody>
-      </p:sp>
-      <p:sp>
-        <p:nvSpPr>
-          <p:cNvPr id="43" name="bug-card-8"/>
-          <p:cNvSpPr/>
-          <p:nvPr/>
-        </p:nvSpPr>
-        <p:spPr>
-          <a:xfrm>
-            <a:off x="8046720" y="3712464"/>
-            <a:ext cx="3566160" cy="1005840"/>
-          </a:xfrm>
-          <a:prstGeom prst="roundRect">
-            <a:avLst>
-              <a:gd name="adj" fmla="val 10909"/>
-            </a:avLst>
-          </a:prstGeom>
-          <a:solidFill>
-            <a:schemeClr val="bg2"/>
-          </a:solidFill>
-          <a:ln w="12700">
-            <a:solidFill>
-              <a:schemeClr val="bg2"/>
-            </a:solidFill>
-            <a:prstDash val="solid"/>
-          </a:ln>
-        </p:spPr>
-      </p:sp>
-      <p:sp>
-        <p:nvSpPr>
-          <p:cNvPr id="44" name="bug-badge-8-circle"/>
-          <p:cNvSpPr/>
-          <p:nvPr/>
-        </p:nvSpPr>
-        <p:spPr>
-          <a:xfrm>
-            <a:off x="8229600" y="3986784"/>
-            <a:ext cx="411480" cy="411480"/>
-          </a:xfrm>
-          <a:prstGeom prst="ellipse">
-            <a:avLst/>
-          </a:prstGeom>
-          <a:solidFill>
-            <a:schemeClr val="accent1"/>
-          </a:solidFill>
-          <a:ln w="12700">
-            <a:solidFill>
-              <a:schemeClr val="accent1"/>
-            </a:solidFill>
-            <a:prstDash val="solid"/>
-          </a:ln>
-        </p:spPr>
-      </p:sp>
-      <p:pic>
-        <p:nvPicPr>
-          <p:cNvPr id="45" name="bug-badge-8-icon" descr="preencoded.png">    </p:cNvPr>
-          <p:cNvPicPr>
-            <a:picLocks noChangeAspect="1"/>
-          </p:cNvPicPr>
-          <p:nvPr/>
-        </p:nvPicPr>
-        <p:blipFill>
-          <a:blip r:embed="rId9"/>
-          <a:stretch>
-            <a:fillRect/>
-          </a:stretch>
-        </p:blipFill>
-        <p:spPr>
-          <a:xfrm>
-            <a:off x="8332470" y="4089654"/>
-            <a:ext cx="205740" cy="205740"/>
-          </a:xfrm>
-          <a:prstGeom prst="rect">
-            <a:avLst/>
-          </a:prstGeom>
-        </p:spPr>
-      </p:pic>
-      <p:sp>
-        <p:nvSpPr>
-          <p:cNvPr id="46" name="Text 35"/>
-          <p:cNvSpPr txBox="1"/>
-          <p:nvPr/>
-        </p:nvSpPr>
-        <p:spPr>
-          <a:xfrm>
-            <a:off x="8778240" y="3867912"/>
-            <a:ext cx="2697480" cy="347472"/>
-          </a:xfrm>
-          <a:prstGeom prst="rect">
-            <a:avLst/>
-          </a:prstGeom>
-          <a:noFill/>
-          <a:ln/>
-        </p:spPr>
-        <p:txBody>
-          <a:bodyPr wrap="square" lIns="0" tIns="0" rIns="0" bIns="0" rtlCol="0" anchor="t"/>
-          <a:lstStyle/>
-          <a:p>
-            <a:pPr indent="0" marL="0">
-              <a:buNone/>
-            </a:pPr>
-            <a:r>
-              <a:rPr lang="en-US" sz="1300" b="1" dirty="0">
-                <a:solidFill>
-                  <a:schemeClr val="tx1"/>
-                </a:solidFill>
-              </a:rPr>
-              <a:t>Create-task modal never closed</a:t>
-            </a:r>
-            <a:endParaRPr lang="en-US" sz="1300" dirty="0"/>
-          </a:p>
-        </p:txBody>
-      </p:sp>
-      <p:sp>
-        <p:nvSpPr>
-          <p:cNvPr id="47" name="Text 36"/>
-          <p:cNvSpPr txBox="1"/>
-          <p:nvPr/>
-        </p:nvSpPr>
-        <p:spPr>
-          <a:xfrm>
-            <a:off x="8778240" y="4233672"/>
-            <a:ext cx="2697480" cy="347472"/>
-          </a:xfrm>
-          <a:prstGeom prst="rect">
-            <a:avLst/>
-          </a:prstGeom>
-          <a:noFill/>
-          <a:ln/>
-        </p:spPr>
-        <p:txBody>
-          <a:bodyPr wrap="square" lIns="0" tIns="0" rIns="0" bIns="0" rtlCol="0" anchor="t"/>
-          <a:lstStyle/>
-          <a:p>
-            <a:pPr indent="0" marL="0">
-              <a:buNone/>
-            </a:pPr>
-            <a:r>
-              <a:rPr lang="en-US" sz="1150" dirty="0">
-                <a:solidFill>
-                  <a:schemeClr val="tx2"/>
-                </a:solidFill>
-              </a:rPr>
-              <a:t>React currentTarget is null after await</a:t>
-            </a:r>
-            <a:endParaRPr lang="en-US" sz="1150" dirty="0"/>
-          </a:p>
-        </p:txBody>
-      </p:sp>
-      <p:sp>
-        <p:nvSpPr>
-          <p:cNvPr id="48" name="bug-card-9"/>
-          <p:cNvSpPr/>
-          <p:nvPr/>
-        </p:nvSpPr>
-        <p:spPr>
-          <a:xfrm>
-            <a:off x="548640" y="4882896"/>
-            <a:ext cx="3566160" cy="1005840"/>
-          </a:xfrm>
-          <a:prstGeom prst="roundRect">
-            <a:avLst>
-              <a:gd name="adj" fmla="val 10909"/>
-            </a:avLst>
-          </a:prstGeom>
-          <a:solidFill>
-            <a:schemeClr val="bg2"/>
-          </a:solidFill>
-          <a:ln w="12700">
-            <a:solidFill>
-              <a:schemeClr val="bg2"/>
-            </a:solidFill>
-            <a:prstDash val="solid"/>
-          </a:ln>
-        </p:spPr>
-      </p:sp>
-      <p:sp>
-        <p:nvSpPr>
-          <p:cNvPr id="49" name="bug-badge-9-circle"/>
-          <p:cNvSpPr/>
-          <p:nvPr/>
-        </p:nvSpPr>
-        <p:spPr>
-          <a:xfrm>
-            <a:off x="731520" y="5157216"/>
-            <a:ext cx="411480" cy="411480"/>
-          </a:xfrm>
-          <a:prstGeom prst="ellipse">
-            <a:avLst/>
-          </a:prstGeom>
-          <a:solidFill>
-            <a:schemeClr val="accent1"/>
-          </a:solidFill>
-          <a:ln w="12700">
-            <a:solidFill>
-              <a:schemeClr val="accent1"/>
-            </a:solidFill>
-            <a:prstDash val="solid"/>
-          </a:ln>
-        </p:spPr>
-      </p:sp>
-      <p:pic>
-        <p:nvPicPr>
-          <p:cNvPr id="50" name="bug-badge-9-icon" descr="preencoded.png">    </p:cNvPr>
-          <p:cNvPicPr>
-            <a:picLocks noChangeAspect="1"/>
-          </p:cNvPicPr>
-          <p:nvPr/>
-        </p:nvPicPr>
-        <p:blipFill>
-          <a:blip r:embed="rId10"/>
-          <a:stretch>
-            <a:fillRect/>
-          </a:stretch>
-        </p:blipFill>
-        <p:spPr>
-          <a:xfrm>
-            <a:off x="834390" y="5260086"/>
-            <a:ext cx="205740" cy="205740"/>
-          </a:xfrm>
-          <a:prstGeom prst="rect">
-            <a:avLst/>
-          </a:prstGeom>
-        </p:spPr>
-      </p:pic>
-      <p:sp>
-        <p:nvSpPr>
-          <p:cNvPr id="51" name="Text 39"/>
-          <p:cNvSpPr txBox="1"/>
-          <p:nvPr/>
-        </p:nvSpPr>
-        <p:spPr>
-          <a:xfrm>
-            <a:off x="1280160" y="5038344"/>
-            <a:ext cx="2697480" cy="347472"/>
-          </a:xfrm>
-          <a:prstGeom prst="rect">
-            <a:avLst/>
-          </a:prstGeom>
-          <a:noFill/>
-          <a:ln/>
-        </p:spPr>
-        <p:txBody>
-          <a:bodyPr wrap="square" lIns="0" tIns="0" rIns="0" bIns="0" rtlCol="0" anchor="t"/>
-          <a:lstStyle/>
-          <a:p>
-            <a:pPr indent="0" marL="0">
-              <a:buNone/>
-            </a:pPr>
-            <a:r>
-              <a:rPr lang="en-US" sz="1300" b="1" dirty="0">
-                <a:solidFill>
-                  <a:schemeClr val="tx1"/>
-                </a:solidFill>
-              </a:rPr>
-              <a:t>Postgres initdb fails on EBS</a:t>
-            </a:r>
-            <a:endParaRPr lang="en-US" sz="1300" dirty="0"/>
-          </a:p>
-        </p:txBody>
-      </p:sp>
-      <p:sp>
-        <p:nvSpPr>
-          <p:cNvPr id="52" name="Text 40"/>
-          <p:cNvSpPr txBox="1"/>
-          <p:nvPr/>
-        </p:nvSpPr>
-        <p:spPr>
-          <a:xfrm>
-            <a:off x="1280160" y="5404104"/>
-            <a:ext cx="2697480" cy="347472"/>
-          </a:xfrm>
-          <a:prstGeom prst="rect">
-            <a:avLst/>
-          </a:prstGeom>
-          <a:noFill/>
-          <a:ln/>
-        </p:spPr>
-        <p:txBody>
-          <a:bodyPr wrap="square" lIns="0" tIns="0" rIns="0" bIns="0" rtlCol="0" anchor="t"/>
-          <a:lstStyle/>
-          <a:p>
-            <a:pPr indent="0" marL="0">
-              <a:buNone/>
-            </a:pPr>
-            <a:r>
-              <a:rPr lang="en-US" sz="1150" dirty="0">
-                <a:solidFill>
-                  <a:schemeClr val="tx2"/>
-                </a:solidFill>
-              </a:rPr>
-              <a:t>lost+found → PGDATA subdirectory</a:t>
-            </a:r>
-            <a:endParaRPr lang="en-US" sz="1150" dirty="0"/>
-          </a:p>
-        </p:txBody>
-      </p:sp>
-      <p:sp>
-        <p:nvSpPr>
-          <p:cNvPr id="53" name="bug-card-10"/>
-          <p:cNvSpPr/>
-          <p:nvPr/>
-        </p:nvSpPr>
-        <p:spPr>
-          <a:xfrm>
-            <a:off x="4297680" y="4882896"/>
-            <a:ext cx="3566160" cy="1005840"/>
-          </a:xfrm>
-          <a:prstGeom prst="roundRect">
-            <a:avLst>
-              <a:gd name="adj" fmla="val 10909"/>
-            </a:avLst>
-          </a:prstGeom>
-          <a:solidFill>
-            <a:schemeClr val="bg2"/>
-          </a:solidFill>
-          <a:ln w="12700">
-            <a:solidFill>
-              <a:schemeClr val="bg2"/>
-            </a:solidFill>
-            <a:prstDash val="solid"/>
-          </a:ln>
-        </p:spPr>
-      </p:sp>
-      <p:sp>
-        <p:nvSpPr>
-          <p:cNvPr id="54" name="bug-badge-10-circle"/>
-          <p:cNvSpPr/>
-          <p:nvPr/>
-        </p:nvSpPr>
-        <p:spPr>
-          <a:xfrm>
-            <a:off x="4480560" y="5157216"/>
-            <a:ext cx="411480" cy="411480"/>
-          </a:xfrm>
-          <a:prstGeom prst="ellipse">
-            <a:avLst/>
-          </a:prstGeom>
-          <a:solidFill>
-            <a:schemeClr val="accent1"/>
-          </a:solidFill>
-          <a:ln w="12700">
-            <a:solidFill>
-              <a:schemeClr val="accent1"/>
-            </a:solidFill>
-            <a:prstDash val="solid"/>
-          </a:ln>
-        </p:spPr>
-      </p:sp>
-      <p:pic>
-        <p:nvPicPr>
-          <p:cNvPr id="55" name="bug-badge-10-icon" descr="preencoded.png">    </p:cNvPr>
-          <p:cNvPicPr>
-            <a:picLocks noChangeAspect="1"/>
-          </p:cNvPicPr>
-          <p:nvPr/>
-        </p:nvPicPr>
-        <p:blipFill>
-          <a:blip r:embed="rId11"/>
-          <a:stretch>
-            <a:fillRect/>
-          </a:stretch>
-        </p:blipFill>
-        <p:spPr>
-          <a:xfrm>
-            <a:off x="4583430" y="5260086"/>
-            <a:ext cx="205740" cy="205740"/>
-          </a:xfrm>
-          <a:prstGeom prst="rect">
-            <a:avLst/>
-          </a:prstGeom>
-        </p:spPr>
-      </p:pic>
-      <p:sp>
-        <p:nvSpPr>
-          <p:cNvPr id="56" name="Text 43"/>
-          <p:cNvSpPr txBox="1"/>
-          <p:nvPr/>
-        </p:nvSpPr>
-        <p:spPr>
-          <a:xfrm>
-            <a:off x="5029200" y="5038344"/>
-            <a:ext cx="2697480" cy="347472"/>
-          </a:xfrm>
-          <a:prstGeom prst="rect">
-            <a:avLst/>
-          </a:prstGeom>
-          <a:noFill/>
-          <a:ln/>
-        </p:spPr>
-        <p:txBody>
-          <a:bodyPr wrap="square" lIns="0" tIns="0" rIns="0" bIns="0" rtlCol="0" anchor="t"/>
-          <a:lstStyle/>
-          <a:p>
-            <a:pPr indent="0" marL="0">
-              <a:buNone/>
-            </a:pPr>
-            <a:r>
-              <a:rPr lang="en-US" sz="1300" b="1" dirty="0">
-                <a:solidFill>
-                  <a:schemeClr val="tx1"/>
-                </a:solidFill>
-              </a:rPr>
-              <a:t>Compose start-up races</a:t>
-            </a:r>
-            <a:endParaRPr lang="en-US" sz="1300" dirty="0"/>
-          </a:p>
-        </p:txBody>
-      </p:sp>
-      <p:sp>
-        <p:nvSpPr>
-          <p:cNvPr id="57" name="Text 44"/>
-          <p:cNvSpPr txBox="1"/>
-          <p:nvPr/>
-        </p:nvSpPr>
-        <p:spPr>
-          <a:xfrm>
-            <a:off x="5029200" y="5404104"/>
-            <a:ext cx="2697480" cy="347472"/>
-          </a:xfrm>
-          <a:prstGeom prst="rect">
-            <a:avLst/>
-          </a:prstGeom>
-          <a:noFill/>
-          <a:ln/>
-        </p:spPr>
-        <p:txBody>
-          <a:bodyPr wrap="square" lIns="0" tIns="0" rIns="0" bIns="0" rtlCol="0" anchor="t"/>
-          <a:lstStyle/>
-          <a:p>
-            <a:pPr indent="0" marL="0">
-              <a:buNone/>
-            </a:pPr>
-            <a:r>
-              <a:rPr lang="en-US" sz="1150" dirty="0">
-                <a:solidFill>
-                  <a:schemeClr val="tx2"/>
-                </a:solidFill>
-              </a:rPr>
-              <a:t>health-gated depends_on</a:t>
-            </a:r>
-            <a:endParaRPr lang="en-US" sz="1150" dirty="0"/>
-          </a:p>
-        </p:txBody>
-      </p:sp>
-      <p:sp>
-        <p:nvSpPr>
-          <p:cNvPr id="58" name="bug-card-11"/>
-          <p:cNvSpPr/>
-          <p:nvPr/>
-        </p:nvSpPr>
-        <p:spPr>
-          <a:xfrm>
-            <a:off x="8046720" y="4882896"/>
-            <a:ext cx="3566160" cy="1005840"/>
-          </a:xfrm>
-          <a:prstGeom prst="roundRect">
-            <a:avLst>
-              <a:gd name="adj" fmla="val 10909"/>
-            </a:avLst>
-          </a:prstGeom>
-          <a:solidFill>
-            <a:schemeClr val="bg2"/>
-          </a:solidFill>
-          <a:ln w="12700">
-            <a:solidFill>
-              <a:schemeClr val="bg2"/>
-            </a:solidFill>
-            <a:prstDash val="solid"/>
-          </a:ln>
-        </p:spPr>
-      </p:sp>
-      <p:sp>
-        <p:nvSpPr>
-          <p:cNvPr id="59" name="bug-badge-11-circle"/>
-          <p:cNvSpPr/>
-          <p:nvPr/>
-        </p:nvSpPr>
-        <p:spPr>
-          <a:xfrm>
-            <a:off x="8229600" y="5157216"/>
-            <a:ext cx="411480" cy="411480"/>
-          </a:xfrm>
-          <a:prstGeom prst="ellipse">
-            <a:avLst/>
-          </a:prstGeom>
-          <a:solidFill>
-            <a:schemeClr val="accent1"/>
-          </a:solidFill>
-          <a:ln w="12700">
-            <a:solidFill>
-              <a:schemeClr val="accent1"/>
-            </a:solidFill>
-            <a:prstDash val="solid"/>
-          </a:ln>
-        </p:spPr>
-      </p:sp>
-      <p:pic>
-        <p:nvPicPr>
-          <p:cNvPr id="60" name="bug-badge-11-icon" descr="preencoded.png">    </p:cNvPr>
-          <p:cNvPicPr>
-            <a:picLocks noChangeAspect="1"/>
-          </p:cNvPicPr>
-          <p:nvPr/>
-        </p:nvPicPr>
-        <p:blipFill>
-          <a:blip r:embed="rId12"/>
-          <a:stretch>
-            <a:fillRect/>
-          </a:stretch>
-        </p:blipFill>
-        <p:spPr>
-          <a:xfrm>
-            <a:off x="8332470" y="5260086"/>
-            <a:ext cx="205740" cy="205740"/>
-          </a:xfrm>
-          <a:prstGeom prst="rect">
-            <a:avLst/>
-          </a:prstGeom>
-        </p:spPr>
-      </p:pic>
-      <p:sp>
-        <p:nvSpPr>
-          <p:cNvPr id="61" name="Text 47"/>
-          <p:cNvSpPr txBox="1"/>
-          <p:nvPr/>
-        </p:nvSpPr>
-        <p:spPr>
-          <a:xfrm>
-            <a:off x="8778240" y="5038344"/>
-            <a:ext cx="2697480" cy="347472"/>
-          </a:xfrm>
-          <a:prstGeom prst="rect">
-            <a:avLst/>
-          </a:prstGeom>
-          <a:noFill/>
-          <a:ln/>
-        </p:spPr>
-        <p:txBody>
-          <a:bodyPr wrap="square" lIns="0" tIns="0" rIns="0" bIns="0" rtlCol="0" anchor="t"/>
-          <a:lstStyle/>
-          <a:p>
-            <a:pPr indent="0" marL="0">
-              <a:buNone/>
-            </a:pPr>
-            <a:r>
-              <a:rPr lang="en-US" sz="1300" b="1" dirty="0">
-                <a:solidFill>
-                  <a:schemeClr val="tx1"/>
-                </a:solidFill>
-              </a:rPr>
-              <a:t>ingress-nginx retired (2026)</a:t>
-            </a:r>
-            <a:endParaRPr lang="en-US" sz="1300" dirty="0"/>
-          </a:p>
-        </p:txBody>
-      </p:sp>
-      <p:sp>
-        <p:nvSpPr>
-          <p:cNvPr id="62" name="Text 48"/>
-          <p:cNvSpPr txBox="1"/>
-          <p:nvPr/>
-        </p:nvSpPr>
-        <p:spPr>
-          <a:xfrm>
-            <a:off x="8778240" y="5404104"/>
-            <a:ext cx="2697480" cy="347472"/>
-          </a:xfrm>
-          <a:prstGeom prst="rect">
-            <a:avLst/>
-          </a:prstGeom>
-          <a:noFill/>
-          <a:ln/>
-        </p:spPr>
-        <p:txBody>
-          <a:bodyPr wrap="square" lIns="0" tIns="0" rIns="0" bIns="0" rtlCol="0" anchor="t"/>
-          <a:lstStyle/>
-          <a:p>
-            <a:pPr indent="0" marL="0">
-              <a:buNone/>
-            </a:pPr>
-            <a:r>
-              <a:rPr lang="en-US" sz="1150" dirty="0">
-                <a:solidFill>
-                  <a:schemeClr val="tx2"/>
-                </a:solidFill>
-              </a:rPr>
-              <a:t>switched to Traefik</a:t>
-            </a:r>
-            <a:endParaRPr lang="en-US" sz="1150" dirty="0"/>
+                <a:latin typeface="Courier New" pitchFamily="34" charset="0"/>
+                <a:ea typeface="Courier New" pitchFamily="34" charset="-122"/>
+                <a:cs typeface="Courier New" pitchFamily="34" charset="-120"/>
+              </a:rPr>
+              <a:t>kubectl get events -n taskboard --field-selector reason=SuccessfulRescale</a:t>
+            </a:r>
+            <a:endParaRPr lang="en-US" sz="1100" dirty="0"/>
           </a:p>
         </p:txBody>
       </p:sp>
@@ -8269,7 +6739,7 @@
                   <a:schemeClr val="tx1"/>
                 </a:solidFill>
               </a:rPr>
-              <a:t>Key learnings and next steps</a:t>
+              <a:t>Making it work: 12 defects found and fixed</a:t>
             </a:r>
             <a:endParaRPr lang="en-US" sz="3400" dirty="0"/>
           </a:p>
@@ -8277,18 +6747,18 @@
       </p:sp>
       <p:sp>
         <p:nvSpPr>
-          <p:cNvPr id="3" name="learn-card-0"/>
+          <p:cNvPr id="3" name="bug-card-0"/>
           <p:cNvSpPr/>
           <p:nvPr/>
         </p:nvSpPr>
         <p:spPr>
           <a:xfrm>
             <a:off x="548640" y="1371600"/>
-            <a:ext cx="5394960" cy="4526280"/>
+            <a:ext cx="3566160" cy="1005840"/>
           </a:xfrm>
           <a:prstGeom prst="roundRect">
             <a:avLst>
-              <a:gd name="adj" fmla="val 2424"/>
+              <a:gd name="adj" fmla="val 10909"/>
             </a:avLst>
           </a:prstGeom>
           <a:solidFill>
@@ -8304,14 +6774,14 @@
       </p:sp>
       <p:sp>
         <p:nvSpPr>
-          <p:cNvPr id="4" name="learn-badge-0-circle"/>
+          <p:cNvPr id="4" name="bug-badge-0-circle"/>
           <p:cNvSpPr/>
           <p:nvPr/>
         </p:nvSpPr>
         <p:spPr>
           <a:xfrm>
-            <a:off x="822960" y="1645920"/>
-            <a:ext cx="548640" cy="548640"/>
+            <a:off x="731520" y="1645920"/>
+            <a:ext cx="411480" cy="411480"/>
           </a:xfrm>
           <a:prstGeom prst="ellipse">
             <a:avLst/>
@@ -8329,7 +6799,7 @@
       </p:sp>
       <p:pic>
         <p:nvPicPr>
-          <p:cNvPr id="5" name="learn-badge-0-icon" descr="preencoded.png">    </p:cNvPr>
+          <p:cNvPr id="5" name="bug-badge-0-icon" descr="preencoded.png">    </p:cNvPr>
           <p:cNvPicPr>
             <a:picLocks noChangeAspect="1"/>
           </p:cNvPicPr>
@@ -8343,8 +6813,8 @@
         </p:blipFill>
         <p:spPr>
           <a:xfrm>
-            <a:off x="960120" y="1783080"/>
-            <a:ext cx="274320" cy="274320"/>
+            <a:off x="834390" y="1748790"/>
+            <a:ext cx="205740" cy="205740"/>
           </a:xfrm>
           <a:prstGeom prst="rect">
             <a:avLst/>
@@ -8359,8 +6829,8 @@
         </p:nvSpPr>
         <p:spPr>
           <a:xfrm>
-            <a:off x="1554480" y="1719072"/>
-            <a:ext cx="3657600" cy="411480"/>
+            <a:off x="1280160" y="1527048"/>
+            <a:ext cx="2697480" cy="347472"/>
           </a:xfrm>
           <a:prstGeom prst="rect">
             <a:avLst/>
@@ -8376,14 +6846,14 @@
               <a:buNone/>
             </a:pPr>
             <a:r>
-              <a:rPr lang="en-US" sz="2000" b="1" dirty="0">
+              <a:rPr lang="en-US" sz="1300" b="1" dirty="0">
                 <a:solidFill>
                   <a:schemeClr val="tx1"/>
                 </a:solidFill>
               </a:rPr>
-              <a:t>Learnings</a:t>
-            </a:r>
-            <a:endParaRPr lang="en-US" sz="2000" dirty="0"/>
+              <a:t>Terraform HCL did not parse</a:t>
+            </a:r>
+            <a:endParaRPr lang="en-US" sz="1300" dirty="0"/>
           </a:p>
         </p:txBody>
       </p:sp>
@@ -8395,8 +6865,8 @@
         </p:nvSpPr>
         <p:spPr>
           <a:xfrm>
-            <a:off x="822960" y="2423160"/>
-            <a:ext cx="4846320" cy="3291840"/>
+            <a:off x="1280160" y="1892808"/>
+            <a:ext cx="2697480" cy="347472"/>
           </a:xfrm>
           <a:prstGeom prst="rect">
             <a:avLst/>
@@ -8408,111 +6878,35 @@
           <a:bodyPr wrap="square" lIns="0" tIns="0" rIns="0" bIns="0" rtlCol="0" anchor="t"/>
           <a:lstStyle/>
           <a:p>
-            <a:pPr marL="342900" indent="-342900">
-              <a:spcAft>
-                <a:spcPts val="1000"/>
-              </a:spcAft>
-              <a:buSzPct val="100000"/>
-              <a:buChar char="•"/>
-            </a:pPr>
-            <a:r>
-              <a:rPr lang="en-US" sz="1500" dirty="0">
-                <a:solidFill>
-                  <a:schemeClr val="tx1"/>
-                </a:solidFill>
-              </a:rPr>
-              <a:t>Run every layer for real; reading YAML hides broken wiring</a:t>
-            </a:r>
-            <a:endParaRPr lang="en-US" sz="1500" dirty="0"/>
-          </a:p>
-          <a:p>
-            <a:pPr marL="342900" indent="-342900">
-              <a:spcAft>
-                <a:spcPts val="1000"/>
-              </a:spcAft>
-              <a:buSzPct val="100000"/>
-              <a:buChar char="•"/>
-            </a:pPr>
-            <a:r>
-              <a:rPr lang="en-US" sz="1500" dirty="0">
-                <a:solidFill>
-                  <a:schemeClr val="tx1"/>
-                </a:solidFill>
-              </a:rPr>
-              <a:t>Gates must be able to fail: a scanner without --exit-code is decoration</a:t>
-            </a:r>
-            <a:endParaRPr lang="en-US" sz="1500" dirty="0"/>
-          </a:p>
-          <a:p>
-            <a:pPr marL="342900" indent="-342900">
-              <a:spcAft>
-                <a:spcPts val="1000"/>
-              </a:spcAft>
-              <a:buSzPct val="100000"/>
-              <a:buChar char="•"/>
-            </a:pPr>
-            <a:r>
-              <a:rPr lang="en-US" sz="1500" dirty="0">
-                <a:solidFill>
-                  <a:schemeClr val="tx1"/>
-                </a:solidFill>
-              </a:rPr>
-              <a:t>Liveness ≠ readiness: a DB outage should drain pods, not restart them</a:t>
-            </a:r>
-            <a:endParaRPr lang="en-US" sz="1500" dirty="0"/>
-          </a:p>
-          <a:p>
-            <a:pPr marL="342900" indent="-342900">
-              <a:spcAft>
-                <a:spcPts val="1000"/>
-              </a:spcAft>
-              <a:buSzPct val="100000"/>
-              <a:buChar char="•"/>
-            </a:pPr>
-            <a:r>
-              <a:rPr lang="en-US" sz="1500" dirty="0">
-                <a:solidFill>
-                  <a:schemeClr val="tx1"/>
-                </a:solidFill>
-              </a:rPr>
-              <a:t>Pin versions and keep them current: EKS, AMIs and Ingress controllers retire</a:t>
-            </a:r>
-            <a:endParaRPr lang="en-US" sz="1500" dirty="0"/>
-          </a:p>
-          <a:p>
-            <a:pPr marL="342900" indent="-342900">
-              <a:spcAft>
-                <a:spcPts val="1000"/>
-              </a:spcAft>
-              <a:buSzPct val="100000"/>
-              <a:buChar char="•"/>
-            </a:pPr>
-            <a:r>
-              <a:rPr lang="en-US" sz="1500" dirty="0">
-                <a:solidFill>
-                  <a:schemeClr val="tx1"/>
-                </a:solidFill>
-              </a:rPr>
-              <a:t>Git as the deployment API makes rollback a git revert</a:t>
-            </a:r>
-            <a:endParaRPr lang="en-US" sz="1500" dirty="0"/>
-          </a:p>
-        </p:txBody>
-      </p:sp>
-      <p:sp>
-        <p:nvSpPr>
-          <p:cNvPr id="8" name="learn-card-1"/>
+            <a:pPr indent="0" marL="0">
+              <a:buNone/>
+            </a:pPr>
+            <a:r>
+              <a:rPr lang="en-US" sz="1150" dirty="0">
+                <a:solidFill>
+                  <a:schemeClr val="tx2"/>
+                </a:solidFill>
+              </a:rPr>
+              <a:t>multi-attribute one-line blocks</a:t>
+            </a:r>
+            <a:endParaRPr lang="en-US" sz="1150" dirty="0"/>
+          </a:p>
+        </p:txBody>
+      </p:sp>
+      <p:sp>
+        <p:nvSpPr>
+          <p:cNvPr id="8" name="bug-card-1"/>
           <p:cNvSpPr/>
           <p:nvPr/>
         </p:nvSpPr>
         <p:spPr>
           <a:xfrm>
-            <a:off x="6217920" y="1371600"/>
-            <a:ext cx="5394960" cy="4526280"/>
+            <a:off x="4297680" y="1371600"/>
+            <a:ext cx="3566160" cy="1005840"/>
           </a:xfrm>
           <a:prstGeom prst="roundRect">
             <a:avLst>
-              <a:gd name="adj" fmla="val 2424"/>
+              <a:gd name="adj" fmla="val 10909"/>
             </a:avLst>
           </a:prstGeom>
           <a:solidFill>
@@ -8528,24 +6922,24 @@
       </p:sp>
       <p:sp>
         <p:nvSpPr>
-          <p:cNvPr id="9" name="learn-badge-1-circle"/>
+          <p:cNvPr id="9" name="bug-badge-1-circle"/>
           <p:cNvSpPr/>
           <p:nvPr/>
         </p:nvSpPr>
         <p:spPr>
           <a:xfrm>
-            <a:off x="6492240" y="1645920"/>
-            <a:ext cx="548640" cy="548640"/>
+            <a:off x="4480560" y="1645920"/>
+            <a:ext cx="411480" cy="411480"/>
           </a:xfrm>
           <a:prstGeom prst="ellipse">
             <a:avLst/>
           </a:prstGeom>
           <a:solidFill>
-            <a:schemeClr val="accent3"/>
+            <a:schemeClr val="accent1"/>
           </a:solidFill>
           <a:ln w="12700">
             <a:solidFill>
-              <a:schemeClr val="accent3"/>
+              <a:schemeClr val="accent1"/>
             </a:solidFill>
             <a:prstDash val="solid"/>
           </a:ln>
@@ -8553,7 +6947,7 @@
       </p:sp>
       <p:pic>
         <p:nvPicPr>
-          <p:cNvPr id="10" name="learn-badge-1-icon" descr="preencoded.png">    </p:cNvPr>
+          <p:cNvPr id="10" name="bug-badge-1-icon" descr="preencoded.png">    </p:cNvPr>
           <p:cNvPicPr>
             <a:picLocks noChangeAspect="1"/>
           </p:cNvPicPr>
@@ -8567,8 +6961,8 @@
         </p:blipFill>
         <p:spPr>
           <a:xfrm>
-            <a:off x="6629400" y="1783080"/>
-            <a:ext cx="274320" cy="274320"/>
+            <a:off x="4583430" y="1748790"/>
+            <a:ext cx="205740" cy="205740"/>
           </a:xfrm>
           <a:prstGeom prst="rect">
             <a:avLst/>
@@ -8583,8 +6977,8 @@
         </p:nvSpPr>
         <p:spPr>
           <a:xfrm>
-            <a:off x="7223760" y="1719072"/>
-            <a:ext cx="3657600" cy="411480"/>
+            <a:off x="5029200" y="1527048"/>
+            <a:ext cx="2697480" cy="347472"/>
           </a:xfrm>
           <a:prstGeom prst="rect">
             <a:avLst/>
@@ -8600,14 +6994,14 @@
               <a:buNone/>
             </a:pPr>
             <a:r>
-              <a:rPr lang="en-US" sz="2000" b="1" dirty="0">
+              <a:rPr lang="en-US" sz="1300" b="1" dirty="0">
                 <a:solidFill>
                   <a:schemeClr val="tx1"/>
                 </a:solidFill>
               </a:rPr>
-              <a:t>Next steps</a:t>
-            </a:r>
-            <a:endParaRPr lang="en-US" sz="2000" dirty="0"/>
+              <a:t>EKS 1.31 no longer offered</a:t>
+            </a:r>
+            <a:endParaRPr lang="en-US" sz="1300" dirty="0"/>
           </a:p>
         </p:txBody>
       </p:sp>
@@ -8619,8 +7013,8 @@
         </p:nvSpPr>
         <p:spPr>
           <a:xfrm>
-            <a:off x="6492240" y="2423160"/>
-            <a:ext cx="4846320" cy="3291840"/>
+            <a:off x="5029200" y="1892808"/>
+            <a:ext cx="2697480" cy="347472"/>
           </a:xfrm>
           <a:prstGeom prst="rect">
             <a:avLst/>
@@ -8632,94 +7026,1498 @@
           <a:bodyPr wrap="square" lIns="0" tIns="0" rIns="0" bIns="0" rtlCol="0" anchor="t"/>
           <a:lstStyle/>
           <a:p>
-            <a:pPr marL="342900" indent="-342900">
-              <a:spcAft>
-                <a:spcPts val="1000"/>
-              </a:spcAft>
-              <a:buSzPct val="100000"/>
-              <a:buChar char="•"/>
-            </a:pPr>
-            <a:r>
-              <a:rPr lang="en-US" sz="1500" dirty="0">
+            <a:pPr indent="0" marL="0">
+              <a:buNone/>
+            </a:pPr>
+            <a:r>
+              <a:rPr lang="en-US" sz="1150" dirty="0">
+                <a:solidFill>
+                  <a:schemeClr val="tx2"/>
+                </a:solidFill>
+              </a:rPr>
+              <a:t>moved to 1.35 + AL2023 nodes</a:t>
+            </a:r>
+            <a:endParaRPr lang="en-US" sz="1150" dirty="0"/>
+          </a:p>
+        </p:txBody>
+      </p:sp>
+      <p:sp>
+        <p:nvSpPr>
+          <p:cNvPr id="13" name="bug-card-2"/>
+          <p:cNvSpPr/>
+          <p:nvPr/>
+        </p:nvSpPr>
+        <p:spPr>
+          <a:xfrm>
+            <a:off x="8046720" y="1371600"/>
+            <a:ext cx="3566160" cy="1005840"/>
+          </a:xfrm>
+          <a:prstGeom prst="roundRect">
+            <a:avLst>
+              <a:gd name="adj" fmla="val 10909"/>
+            </a:avLst>
+          </a:prstGeom>
+          <a:solidFill>
+            <a:schemeClr val="bg2"/>
+          </a:solidFill>
+          <a:ln w="12700">
+            <a:solidFill>
+              <a:schemeClr val="bg2"/>
+            </a:solidFill>
+            <a:prstDash val="solid"/>
+          </a:ln>
+        </p:spPr>
+      </p:sp>
+      <p:sp>
+        <p:nvSpPr>
+          <p:cNvPr id="14" name="bug-badge-2-circle"/>
+          <p:cNvSpPr/>
+          <p:nvPr/>
+        </p:nvSpPr>
+        <p:spPr>
+          <a:xfrm>
+            <a:off x="8229600" y="1645920"/>
+            <a:ext cx="411480" cy="411480"/>
+          </a:xfrm>
+          <a:prstGeom prst="ellipse">
+            <a:avLst/>
+          </a:prstGeom>
+          <a:solidFill>
+            <a:schemeClr val="accent1"/>
+          </a:solidFill>
+          <a:ln w="12700">
+            <a:solidFill>
+              <a:schemeClr val="accent1"/>
+            </a:solidFill>
+            <a:prstDash val="solid"/>
+          </a:ln>
+        </p:spPr>
+      </p:sp>
+      <p:pic>
+        <p:nvPicPr>
+          <p:cNvPr id="15" name="bug-badge-2-icon" descr="preencoded.png">    </p:cNvPr>
+          <p:cNvPicPr>
+            <a:picLocks noChangeAspect="1"/>
+          </p:cNvPicPr>
+          <p:nvPr/>
+        </p:nvPicPr>
+        <p:blipFill>
+          <a:blip r:embed="rId3"/>
+          <a:stretch>
+            <a:fillRect/>
+          </a:stretch>
+        </p:blipFill>
+        <p:spPr>
+          <a:xfrm>
+            <a:off x="8332470" y="1748790"/>
+            <a:ext cx="205740" cy="205740"/>
+          </a:xfrm>
+          <a:prstGeom prst="rect">
+            <a:avLst/>
+          </a:prstGeom>
+        </p:spPr>
+      </p:pic>
+      <p:sp>
+        <p:nvSpPr>
+          <p:cNvPr id="16" name="Text 11"/>
+          <p:cNvSpPr txBox="1"/>
+          <p:nvPr/>
+        </p:nvSpPr>
+        <p:spPr>
+          <a:xfrm>
+            <a:off x="8778240" y="1527048"/>
+            <a:ext cx="2697480" cy="347472"/>
+          </a:xfrm>
+          <a:prstGeom prst="rect">
+            <a:avLst/>
+          </a:prstGeom>
+          <a:noFill/>
+          <a:ln/>
+        </p:spPr>
+        <p:txBody>
+          <a:bodyPr wrap="square" lIns="0" tIns="0" rIns="0" bIns="0" rtlCol="0" anchor="t"/>
+          <a:lstStyle/>
+          <a:p>
+            <a:pPr indent="0" marL="0">
+              <a:buNone/>
+            </a:pPr>
+            <a:r>
+              <a:rPr lang="en-US" sz="1300" b="1" dirty="0">
                 <a:solidFill>
                   <a:schemeClr val="tx1"/>
                 </a:solidFill>
               </a:rPr>
-              <a:t>Amazon RDS instead of in-cluster Postgres</a:t>
-            </a:r>
-            <a:endParaRPr lang="en-US" sz="1500" dirty="0"/>
-          </a:p>
-          <a:p>
-            <a:pPr marL="342900" indent="-342900">
-              <a:spcAft>
-                <a:spcPts val="1000"/>
-              </a:spcAft>
-              <a:buSzPct val="100000"/>
-              <a:buChar char="•"/>
-            </a:pPr>
-            <a:r>
-              <a:rPr lang="en-US" sz="1500" dirty="0">
+              <a:t>Ingress → wrong Service and port</a:t>
+            </a:r>
+            <a:endParaRPr lang="en-US" sz="1300" dirty="0"/>
+          </a:p>
+        </p:txBody>
+      </p:sp>
+      <p:sp>
+        <p:nvSpPr>
+          <p:cNvPr id="17" name="Text 12"/>
+          <p:cNvSpPr txBox="1"/>
+          <p:nvPr/>
+        </p:nvSpPr>
+        <p:spPr>
+          <a:xfrm>
+            <a:off x="8778240" y="1892808"/>
+            <a:ext cx="2697480" cy="347472"/>
+          </a:xfrm>
+          <a:prstGeom prst="rect">
+            <a:avLst/>
+          </a:prstGeom>
+          <a:noFill/>
+          <a:ln/>
+        </p:spPr>
+        <p:txBody>
+          <a:bodyPr wrap="square" lIns="0" tIns="0" rIns="0" bIns="0" rtlCol="0" anchor="t"/>
+          <a:lstStyle/>
+          <a:p>
+            <a:pPr indent="0" marL="0">
+              <a:buNone/>
+            </a:pPr>
+            <a:r>
+              <a:rPr lang="en-US" sz="1150" dirty="0">
+                <a:solidFill>
+                  <a:schemeClr val="tx2"/>
+                </a:solidFill>
+              </a:rPr>
+              <a:t>taskboard-backend:8080 didn't exist</a:t>
+            </a:r>
+            <a:endParaRPr lang="en-US" sz="1150" dirty="0"/>
+          </a:p>
+        </p:txBody>
+      </p:sp>
+      <p:sp>
+        <p:nvSpPr>
+          <p:cNvPr id="18" name="bug-card-3"/>
+          <p:cNvSpPr/>
+          <p:nvPr/>
+        </p:nvSpPr>
+        <p:spPr>
+          <a:xfrm>
+            <a:off x="548640" y="2542032"/>
+            <a:ext cx="3566160" cy="1005840"/>
+          </a:xfrm>
+          <a:prstGeom prst="roundRect">
+            <a:avLst>
+              <a:gd name="adj" fmla="val 10909"/>
+            </a:avLst>
+          </a:prstGeom>
+          <a:solidFill>
+            <a:schemeClr val="bg2"/>
+          </a:solidFill>
+          <a:ln w="12700">
+            <a:solidFill>
+              <a:schemeClr val="bg2"/>
+            </a:solidFill>
+            <a:prstDash val="solid"/>
+          </a:ln>
+        </p:spPr>
+      </p:sp>
+      <p:sp>
+        <p:nvSpPr>
+          <p:cNvPr id="19" name="bug-badge-3-circle"/>
+          <p:cNvSpPr/>
+          <p:nvPr/>
+        </p:nvSpPr>
+        <p:spPr>
+          <a:xfrm>
+            <a:off x="731520" y="2816352"/>
+            <a:ext cx="411480" cy="411480"/>
+          </a:xfrm>
+          <a:prstGeom prst="ellipse">
+            <a:avLst/>
+          </a:prstGeom>
+          <a:solidFill>
+            <a:schemeClr val="accent1"/>
+          </a:solidFill>
+          <a:ln w="12700">
+            <a:solidFill>
+              <a:schemeClr val="accent1"/>
+            </a:solidFill>
+            <a:prstDash val="solid"/>
+          </a:ln>
+        </p:spPr>
+      </p:sp>
+      <p:pic>
+        <p:nvPicPr>
+          <p:cNvPr id="20" name="bug-badge-3-icon" descr="preencoded.png">    </p:cNvPr>
+          <p:cNvPicPr>
+            <a:picLocks noChangeAspect="1"/>
+          </p:cNvPicPr>
+          <p:nvPr/>
+        </p:nvPicPr>
+        <p:blipFill>
+          <a:blip r:embed="rId4"/>
+          <a:stretch>
+            <a:fillRect/>
+          </a:stretch>
+        </p:blipFill>
+        <p:spPr>
+          <a:xfrm>
+            <a:off x="834390" y="2919222"/>
+            <a:ext cx="205740" cy="205740"/>
+          </a:xfrm>
+          <a:prstGeom prst="rect">
+            <a:avLst/>
+          </a:prstGeom>
+        </p:spPr>
+      </p:pic>
+      <p:sp>
+        <p:nvSpPr>
+          <p:cNvPr id="21" name="Text 15"/>
+          <p:cNvSpPr txBox="1"/>
+          <p:nvPr/>
+        </p:nvSpPr>
+        <p:spPr>
+          <a:xfrm>
+            <a:off x="1280160" y="2697480"/>
+            <a:ext cx="2697480" cy="347472"/>
+          </a:xfrm>
+          <a:prstGeom prst="rect">
+            <a:avLst/>
+          </a:prstGeom>
+          <a:noFill/>
+          <a:ln/>
+        </p:spPr>
+        <p:txBody>
+          <a:bodyPr wrap="square" lIns="0" tIns="0" rIns="0" bIns="0" rtlCol="0" anchor="t"/>
+          <a:lstStyle/>
+          <a:p>
+            <a:pPr indent="0" marL="0">
+              <a:buNone/>
+            </a:pPr>
+            <a:r>
+              <a:rPr lang="en-US" sz="1300" b="1" dirty="0">
                 <a:solidFill>
                   <a:schemeClr val="tx1"/>
                 </a:solidFill>
               </a:rPr>
-              <a:t>External Secrets + AWS Secrets Manager</a:t>
-            </a:r>
-            <a:endParaRPr lang="en-US" sz="1500" dirty="0"/>
-          </a:p>
-          <a:p>
-            <a:pPr marL="342900" indent="-342900">
-              <a:spcAft>
-                <a:spcPts val="1000"/>
-              </a:spcAft>
-              <a:buSzPct val="100000"/>
-              <a:buChar char="•"/>
-            </a:pPr>
-            <a:r>
-              <a:rPr lang="en-US" sz="1500" dirty="0">
+              <a:t>Nginx proxied to host 'backend'</a:t>
+            </a:r>
+            <a:endParaRPr lang="en-US" sz="1300" dirty="0"/>
+          </a:p>
+        </p:txBody>
+      </p:sp>
+      <p:sp>
+        <p:nvSpPr>
+          <p:cNvPr id="22" name="Text 16"/>
+          <p:cNvSpPr txBox="1"/>
+          <p:nvPr/>
+        </p:nvSpPr>
+        <p:spPr>
+          <a:xfrm>
+            <a:off x="1280160" y="3063240"/>
+            <a:ext cx="2697480" cy="347472"/>
+          </a:xfrm>
+          <a:prstGeom prst="rect">
+            <a:avLst/>
+          </a:prstGeom>
+          <a:noFill/>
+          <a:ln/>
+        </p:spPr>
+        <p:txBody>
+          <a:bodyPr wrap="square" lIns="0" tIns="0" rIns="0" bIns="0" rtlCol="0" anchor="t"/>
+          <a:lstStyle/>
+          <a:p>
+            <a:pPr indent="0" marL="0">
+              <a:buNone/>
+            </a:pPr>
+            <a:r>
+              <a:rPr lang="en-US" sz="1150" dirty="0">
+                <a:solidFill>
+                  <a:schemeClr val="tx2"/>
+                </a:solidFill>
+              </a:rPr>
+              <a:t>templated BACKEND_URL per environment</a:t>
+            </a:r>
+            <a:endParaRPr lang="en-US" sz="1150" dirty="0"/>
+          </a:p>
+        </p:txBody>
+      </p:sp>
+      <p:sp>
+        <p:nvSpPr>
+          <p:cNvPr id="23" name="bug-card-4"/>
+          <p:cNvSpPr/>
+          <p:nvPr/>
+        </p:nvSpPr>
+        <p:spPr>
+          <a:xfrm>
+            <a:off x="4297680" y="2542032"/>
+            <a:ext cx="3566160" cy="1005840"/>
+          </a:xfrm>
+          <a:prstGeom prst="roundRect">
+            <a:avLst>
+              <a:gd name="adj" fmla="val 10909"/>
+            </a:avLst>
+          </a:prstGeom>
+          <a:solidFill>
+            <a:schemeClr val="bg2"/>
+          </a:solidFill>
+          <a:ln w="12700">
+            <a:solidFill>
+              <a:schemeClr val="bg2"/>
+            </a:solidFill>
+            <a:prstDash val="solid"/>
+          </a:ln>
+        </p:spPr>
+      </p:sp>
+      <p:sp>
+        <p:nvSpPr>
+          <p:cNvPr id="24" name="bug-badge-4-circle"/>
+          <p:cNvSpPr/>
+          <p:nvPr/>
+        </p:nvSpPr>
+        <p:spPr>
+          <a:xfrm>
+            <a:off x="4480560" y="2816352"/>
+            <a:ext cx="411480" cy="411480"/>
+          </a:xfrm>
+          <a:prstGeom prst="ellipse">
+            <a:avLst/>
+          </a:prstGeom>
+          <a:solidFill>
+            <a:schemeClr val="accent1"/>
+          </a:solidFill>
+          <a:ln w="12700">
+            <a:solidFill>
+              <a:schemeClr val="accent1"/>
+            </a:solidFill>
+            <a:prstDash val="solid"/>
+          </a:ln>
+        </p:spPr>
+      </p:sp>
+      <p:pic>
+        <p:nvPicPr>
+          <p:cNvPr id="25" name="bug-badge-4-icon" descr="preencoded.png">    </p:cNvPr>
+          <p:cNvPicPr>
+            <a:picLocks noChangeAspect="1"/>
+          </p:cNvPicPr>
+          <p:nvPr/>
+        </p:nvPicPr>
+        <p:blipFill>
+          <a:blip r:embed="rId5"/>
+          <a:stretch>
+            <a:fillRect/>
+          </a:stretch>
+        </p:blipFill>
+        <p:spPr>
+          <a:xfrm>
+            <a:off x="4583430" y="2919222"/>
+            <a:ext cx="205740" cy="205740"/>
+          </a:xfrm>
+          <a:prstGeom prst="rect">
+            <a:avLst/>
+          </a:prstGeom>
+        </p:spPr>
+      </p:pic>
+      <p:sp>
+        <p:nvSpPr>
+          <p:cNvPr id="26" name="Text 19"/>
+          <p:cNvSpPr txBox="1"/>
+          <p:nvPr/>
+        </p:nvSpPr>
+        <p:spPr>
+          <a:xfrm>
+            <a:off x="5029200" y="2697480"/>
+            <a:ext cx="2697480" cy="347472"/>
+          </a:xfrm>
+          <a:prstGeom prst="rect">
+            <a:avLst/>
+          </a:prstGeom>
+          <a:noFill/>
+          <a:ln/>
+        </p:spPr>
+        <p:txBody>
+          <a:bodyPr wrap="square" lIns="0" tIns="0" rIns="0" bIns="0" rtlCol="0" anchor="t"/>
+          <a:lstStyle/>
+          <a:p>
+            <a:pPr indent="0" marL="0">
+              <a:buNone/>
+            </a:pPr>
+            <a:r>
+              <a:rPr lang="en-US" sz="1300" b="1" dirty="0">
                 <a:solidFill>
                   <a:schemeClr val="tx1"/>
                 </a:solidFill>
               </a:rPr>
-              <a:t>cert-manager TLS on the Ingress</a:t>
-            </a:r>
-            <a:endParaRPr lang="en-US" sz="1500" dirty="0"/>
-          </a:p>
-          <a:p>
-            <a:pPr marL="342900" indent="-342900">
-              <a:spcAft>
-                <a:spcPts val="1000"/>
-              </a:spcAft>
-              <a:buSzPct val="100000"/>
-              <a:buChar char="•"/>
-            </a:pPr>
-            <a:r>
-              <a:rPr lang="en-US" sz="1500" dirty="0">
+              <a:t>Pipeline never pushed to GHCR</a:t>
+            </a:r>
+            <a:endParaRPr lang="en-US" sz="1300" dirty="0"/>
+          </a:p>
+        </p:txBody>
+      </p:sp>
+      <p:sp>
+        <p:nvSpPr>
+          <p:cNvPr id="27" name="Text 20"/>
+          <p:cNvSpPr txBox="1"/>
+          <p:nvPr/>
+        </p:nvSpPr>
+        <p:spPr>
+          <a:xfrm>
+            <a:off x="5029200" y="3063240"/>
+            <a:ext cx="2697480" cy="347472"/>
+          </a:xfrm>
+          <a:prstGeom prst="rect">
+            <a:avLst/>
+          </a:prstGeom>
+          <a:noFill/>
+          <a:ln/>
+        </p:spPr>
+        <p:txBody>
+          <a:bodyPr wrap="square" lIns="0" tIns="0" rIns="0" bIns="0" rtlCol="0" anchor="t"/>
+          <a:lstStyle/>
+          <a:p>
+            <a:pPr indent="0" marL="0">
+              <a:buNone/>
+            </a:pPr>
+            <a:r>
+              <a:rPr lang="en-US" sz="1150" dirty="0">
+                <a:solidFill>
+                  <a:schemeClr val="tx2"/>
+                </a:solidFill>
+              </a:rPr>
+              <a:t>Docker Hub, :latest tags, 3 rebuilds</a:t>
+            </a:r>
+            <a:endParaRPr lang="en-US" sz="1150" dirty="0"/>
+          </a:p>
+        </p:txBody>
+      </p:sp>
+      <p:sp>
+        <p:nvSpPr>
+          <p:cNvPr id="28" name="bug-card-5"/>
+          <p:cNvSpPr/>
+          <p:nvPr/>
+        </p:nvSpPr>
+        <p:spPr>
+          <a:xfrm>
+            <a:off x="8046720" y="2542032"/>
+            <a:ext cx="3566160" cy="1005840"/>
+          </a:xfrm>
+          <a:prstGeom prst="roundRect">
+            <a:avLst>
+              <a:gd name="adj" fmla="val 10909"/>
+            </a:avLst>
+          </a:prstGeom>
+          <a:solidFill>
+            <a:schemeClr val="bg2"/>
+          </a:solidFill>
+          <a:ln w="12700">
+            <a:solidFill>
+              <a:schemeClr val="bg2"/>
+            </a:solidFill>
+            <a:prstDash val="solid"/>
+          </a:ln>
+        </p:spPr>
+      </p:sp>
+      <p:sp>
+        <p:nvSpPr>
+          <p:cNvPr id="29" name="bug-badge-5-circle"/>
+          <p:cNvSpPr/>
+          <p:nvPr/>
+        </p:nvSpPr>
+        <p:spPr>
+          <a:xfrm>
+            <a:off x="8229600" y="2816352"/>
+            <a:ext cx="411480" cy="411480"/>
+          </a:xfrm>
+          <a:prstGeom prst="ellipse">
+            <a:avLst/>
+          </a:prstGeom>
+          <a:solidFill>
+            <a:schemeClr val="accent1"/>
+          </a:solidFill>
+          <a:ln w="12700">
+            <a:solidFill>
+              <a:schemeClr val="accent1"/>
+            </a:solidFill>
+            <a:prstDash val="solid"/>
+          </a:ln>
+        </p:spPr>
+      </p:sp>
+      <p:pic>
+        <p:nvPicPr>
+          <p:cNvPr id="30" name="bug-badge-5-icon" descr="preencoded.png">    </p:cNvPr>
+          <p:cNvPicPr>
+            <a:picLocks noChangeAspect="1"/>
+          </p:cNvPicPr>
+          <p:nvPr/>
+        </p:nvPicPr>
+        <p:blipFill>
+          <a:blip r:embed="rId6"/>
+          <a:stretch>
+            <a:fillRect/>
+          </a:stretch>
+        </p:blipFill>
+        <p:spPr>
+          <a:xfrm>
+            <a:off x="8332470" y="2919222"/>
+            <a:ext cx="205740" cy="205740"/>
+          </a:xfrm>
+          <a:prstGeom prst="rect">
+            <a:avLst/>
+          </a:prstGeom>
+        </p:spPr>
+      </p:pic>
+      <p:sp>
+        <p:nvSpPr>
+          <p:cNvPr id="31" name="Text 23"/>
+          <p:cNvSpPr txBox="1"/>
+          <p:nvPr/>
+        </p:nvSpPr>
+        <p:spPr>
+          <a:xfrm>
+            <a:off x="8778240" y="2697480"/>
+            <a:ext cx="2697480" cy="347472"/>
+          </a:xfrm>
+          <a:prstGeom prst="rect">
+            <a:avLst/>
+          </a:prstGeom>
+          <a:noFill/>
+          <a:ln/>
+        </p:spPr>
+        <p:txBody>
+          <a:bodyPr wrap="square" lIns="0" tIns="0" rIns="0" bIns="0" rtlCol="0" anchor="t"/>
+          <a:lstStyle/>
+          <a:p>
+            <a:pPr indent="0" marL="0">
+              <a:buNone/>
+            </a:pPr>
+            <a:r>
+              <a:rPr lang="en-US" sz="1300" b="1" dirty="0">
                 <a:solidFill>
                   <a:schemeClr val="tx1"/>
                 </a:solidFill>
               </a:rPr>
-              <a:t>S3 remote state with locking for Terraform</a:t>
-            </a:r>
-            <a:endParaRPr lang="en-US" sz="1500" dirty="0"/>
-          </a:p>
-          <a:p>
-            <a:pPr marL="342900" indent="-342900">
-              <a:spcAft>
-                <a:spcPts val="1000"/>
-              </a:spcAft>
-              <a:buSzPct val="100000"/>
-              <a:buChar char="•"/>
-            </a:pPr>
-            <a:r>
-              <a:rPr lang="en-US" sz="1500" dirty="0">
+              <a:t>Trivy could never fail the build</a:t>
+            </a:r>
+            <a:endParaRPr lang="en-US" sz="1300" dirty="0"/>
+          </a:p>
+        </p:txBody>
+      </p:sp>
+      <p:sp>
+        <p:nvSpPr>
+          <p:cNvPr id="32" name="Text 24"/>
+          <p:cNvSpPr txBox="1"/>
+          <p:nvPr/>
+        </p:nvSpPr>
+        <p:spPr>
+          <a:xfrm>
+            <a:off x="8778240" y="3063240"/>
+            <a:ext cx="2697480" cy="347472"/>
+          </a:xfrm>
+          <a:prstGeom prst="rect">
+            <a:avLst/>
+          </a:prstGeom>
+          <a:noFill/>
+          <a:ln/>
+        </p:spPr>
+        <p:txBody>
+          <a:bodyPr wrap="square" lIns="0" tIns="0" rIns="0" bIns="0" rtlCol="0" anchor="t"/>
+          <a:lstStyle/>
+          <a:p>
+            <a:pPr indent="0" marL="0">
+              <a:buNone/>
+            </a:pPr>
+            <a:r>
+              <a:rPr lang="en-US" sz="1150" dirty="0">
+                <a:solidFill>
+                  <a:schemeClr val="tx2"/>
+                </a:solidFill>
+              </a:rPr>
+              <a:t>added --exit-code 1</a:t>
+            </a:r>
+            <a:endParaRPr lang="en-US" sz="1150" dirty="0"/>
+          </a:p>
+        </p:txBody>
+      </p:sp>
+      <p:sp>
+        <p:nvSpPr>
+          <p:cNvPr id="33" name="bug-card-6"/>
+          <p:cNvSpPr/>
+          <p:nvPr/>
+        </p:nvSpPr>
+        <p:spPr>
+          <a:xfrm>
+            <a:off x="548640" y="3712464"/>
+            <a:ext cx="3566160" cy="1005840"/>
+          </a:xfrm>
+          <a:prstGeom prst="roundRect">
+            <a:avLst>
+              <a:gd name="adj" fmla="val 10909"/>
+            </a:avLst>
+          </a:prstGeom>
+          <a:solidFill>
+            <a:schemeClr val="bg2"/>
+          </a:solidFill>
+          <a:ln w="12700">
+            <a:solidFill>
+              <a:schemeClr val="bg2"/>
+            </a:solidFill>
+            <a:prstDash val="solid"/>
+          </a:ln>
+        </p:spPr>
+      </p:sp>
+      <p:sp>
+        <p:nvSpPr>
+          <p:cNvPr id="34" name="bug-badge-6-circle"/>
+          <p:cNvSpPr/>
+          <p:nvPr/>
+        </p:nvSpPr>
+        <p:spPr>
+          <a:xfrm>
+            <a:off x="731520" y="3986784"/>
+            <a:ext cx="411480" cy="411480"/>
+          </a:xfrm>
+          <a:prstGeom prst="ellipse">
+            <a:avLst/>
+          </a:prstGeom>
+          <a:solidFill>
+            <a:schemeClr val="accent1"/>
+          </a:solidFill>
+          <a:ln w="12700">
+            <a:solidFill>
+              <a:schemeClr val="accent1"/>
+            </a:solidFill>
+            <a:prstDash val="solid"/>
+          </a:ln>
+        </p:spPr>
+      </p:sp>
+      <p:pic>
+        <p:nvPicPr>
+          <p:cNvPr id="35" name="bug-badge-6-icon" descr="preencoded.png">    </p:cNvPr>
+          <p:cNvPicPr>
+            <a:picLocks noChangeAspect="1"/>
+          </p:cNvPicPr>
+          <p:nvPr/>
+        </p:nvPicPr>
+        <p:blipFill>
+          <a:blip r:embed="rId7"/>
+          <a:stretch>
+            <a:fillRect/>
+          </a:stretch>
+        </p:blipFill>
+        <p:spPr>
+          <a:xfrm>
+            <a:off x="834390" y="4089654"/>
+            <a:ext cx="205740" cy="205740"/>
+          </a:xfrm>
+          <a:prstGeom prst="rect">
+            <a:avLst/>
+          </a:prstGeom>
+        </p:spPr>
+      </p:pic>
+      <p:sp>
+        <p:nvSpPr>
+          <p:cNvPr id="36" name="Text 27"/>
+          <p:cNvSpPr txBox="1"/>
+          <p:nvPr/>
+        </p:nvSpPr>
+        <p:spPr>
+          <a:xfrm>
+            <a:off x="1280160" y="3867912"/>
+            <a:ext cx="2697480" cy="347472"/>
+          </a:xfrm>
+          <a:prstGeom prst="rect">
+            <a:avLst/>
+          </a:prstGeom>
+          <a:noFill/>
+          <a:ln/>
+        </p:spPr>
+        <p:txBody>
+          <a:bodyPr wrap="square" lIns="0" tIns="0" rIns="0" bIns="0" rtlCol="0" anchor="t"/>
+          <a:lstStyle/>
+          <a:p>
+            <a:pPr indent="0" marL="0">
+              <a:buNone/>
+            </a:pPr>
+            <a:r>
+              <a:rPr lang="en-US" sz="1300" b="1" dirty="0">
                 <a:solidFill>
                   <a:schemeClr val="tx1"/>
                 </a:solidFill>
               </a:rPr>
-              <a:t>App authentication; alerting rules in Alertmanager</a:t>
-            </a:r>
-            <a:endParaRPr lang="en-US" sz="1500" dirty="0"/>
+              <a:t>Frontend ran Nginx as root</a:t>
+            </a:r>
+            <a:endParaRPr lang="en-US" sz="1300" dirty="0"/>
+          </a:p>
+        </p:txBody>
+      </p:sp>
+      <p:sp>
+        <p:nvSpPr>
+          <p:cNvPr id="37" name="Text 28"/>
+          <p:cNvSpPr txBox="1"/>
+          <p:nvPr/>
+        </p:nvSpPr>
+        <p:spPr>
+          <a:xfrm>
+            <a:off x="1280160" y="4233672"/>
+            <a:ext cx="2697480" cy="347472"/>
+          </a:xfrm>
+          <a:prstGeom prst="rect">
+            <a:avLst/>
+          </a:prstGeom>
+          <a:noFill/>
+          <a:ln/>
+        </p:spPr>
+        <p:txBody>
+          <a:bodyPr wrap="square" lIns="0" tIns="0" rIns="0" bIns="0" rtlCol="0" anchor="t"/>
+          <a:lstStyle/>
+          <a:p>
+            <a:pPr indent="0" marL="0">
+              <a:buNone/>
+            </a:pPr>
+            <a:r>
+              <a:rPr lang="en-US" sz="1150" dirty="0">
+                <a:solidFill>
+                  <a:schemeClr val="tx2"/>
+                </a:solidFill>
+              </a:rPr>
+              <a:t>unprivileged image on :8080</a:t>
+            </a:r>
+            <a:endParaRPr lang="en-US" sz="1150" dirty="0"/>
+          </a:p>
+        </p:txBody>
+      </p:sp>
+      <p:sp>
+        <p:nvSpPr>
+          <p:cNvPr id="38" name="bug-card-7"/>
+          <p:cNvSpPr/>
+          <p:nvPr/>
+        </p:nvSpPr>
+        <p:spPr>
+          <a:xfrm>
+            <a:off x="4297680" y="3712464"/>
+            <a:ext cx="3566160" cy="1005840"/>
+          </a:xfrm>
+          <a:prstGeom prst="roundRect">
+            <a:avLst>
+              <a:gd name="adj" fmla="val 10909"/>
+            </a:avLst>
+          </a:prstGeom>
+          <a:solidFill>
+            <a:schemeClr val="bg2"/>
+          </a:solidFill>
+          <a:ln w="12700">
+            <a:solidFill>
+              <a:schemeClr val="bg2"/>
+            </a:solidFill>
+            <a:prstDash val="solid"/>
+          </a:ln>
+        </p:spPr>
+      </p:sp>
+      <p:sp>
+        <p:nvSpPr>
+          <p:cNvPr id="39" name="bug-badge-7-circle"/>
+          <p:cNvSpPr/>
+          <p:nvPr/>
+        </p:nvSpPr>
+        <p:spPr>
+          <a:xfrm>
+            <a:off x="4480560" y="3986784"/>
+            <a:ext cx="411480" cy="411480"/>
+          </a:xfrm>
+          <a:prstGeom prst="ellipse">
+            <a:avLst/>
+          </a:prstGeom>
+          <a:solidFill>
+            <a:schemeClr val="accent1"/>
+          </a:solidFill>
+          <a:ln w="12700">
+            <a:solidFill>
+              <a:schemeClr val="accent1"/>
+            </a:solidFill>
+            <a:prstDash val="solid"/>
+          </a:ln>
+        </p:spPr>
+      </p:sp>
+      <p:pic>
+        <p:nvPicPr>
+          <p:cNvPr id="40" name="bug-badge-7-icon" descr="preencoded.png">    </p:cNvPr>
+          <p:cNvPicPr>
+            <a:picLocks noChangeAspect="1"/>
+          </p:cNvPicPr>
+          <p:nvPr/>
+        </p:nvPicPr>
+        <p:blipFill>
+          <a:blip r:embed="rId8"/>
+          <a:stretch>
+            <a:fillRect/>
+          </a:stretch>
+        </p:blipFill>
+        <p:spPr>
+          <a:xfrm>
+            <a:off x="4583430" y="4089654"/>
+            <a:ext cx="205740" cy="205740"/>
+          </a:xfrm>
+          <a:prstGeom prst="rect">
+            <a:avLst/>
+          </a:prstGeom>
+        </p:spPr>
+      </p:pic>
+      <p:sp>
+        <p:nvSpPr>
+          <p:cNvPr id="41" name="Text 31"/>
+          <p:cNvSpPr txBox="1"/>
+          <p:nvPr/>
+        </p:nvSpPr>
+        <p:spPr>
+          <a:xfrm>
+            <a:off x="5029200" y="3867912"/>
+            <a:ext cx="2697480" cy="347472"/>
+          </a:xfrm>
+          <a:prstGeom prst="rect">
+            <a:avLst/>
+          </a:prstGeom>
+          <a:noFill/>
+          <a:ln/>
+        </p:spPr>
+        <p:txBody>
+          <a:bodyPr wrap="square" lIns="0" tIns="0" rIns="0" bIns="0" rtlCol="0" anchor="t"/>
+          <a:lstStyle/>
+          <a:p>
+            <a:pPr indent="0" marL="0">
+              <a:buNone/>
+            </a:pPr>
+            <a:r>
+              <a:rPr lang="en-US" sz="1300" b="1" dirty="0">
+                <a:solidFill>
+                  <a:schemeClr val="tx1"/>
+                </a:solidFill>
+              </a:rPr>
+              <a:t>Init container waited forever</a:t>
+            </a:r>
+            <a:endParaRPr lang="en-US" sz="1300" dirty="0"/>
+          </a:p>
+        </p:txBody>
+      </p:sp>
+      <p:sp>
+        <p:nvSpPr>
+          <p:cNvPr id="42" name="Text 32"/>
+          <p:cNvSpPr txBox="1"/>
+          <p:nvPr/>
+        </p:nvSpPr>
+        <p:spPr>
+          <a:xfrm>
+            <a:off x="5029200" y="4233672"/>
+            <a:ext cx="2697480" cy="347472"/>
+          </a:xfrm>
+          <a:prstGeom prst="rect">
+            <a:avLst/>
+          </a:prstGeom>
+          <a:noFill/>
+          <a:ln/>
+        </p:spPr>
+        <p:txBody>
+          <a:bodyPr wrap="square" lIns="0" tIns="0" rIns="0" bIns="0" rtlCol="0" anchor="t"/>
+          <a:lstStyle/>
+          <a:p>
+            <a:pPr indent="0" marL="0">
+              <a:buNone/>
+            </a:pPr>
+            <a:r>
+              <a:rPr lang="en-US" sz="1150" dirty="0">
+                <a:solidFill>
+                  <a:schemeClr val="tx2"/>
+                </a:solidFill>
+              </a:rPr>
+              <a:t>pg_isready as uid 10001: pass -U/-d</a:t>
+            </a:r>
+            <a:endParaRPr lang="en-US" sz="1150" dirty="0"/>
+          </a:p>
+        </p:txBody>
+      </p:sp>
+      <p:sp>
+        <p:nvSpPr>
+          <p:cNvPr id="43" name="bug-card-8"/>
+          <p:cNvSpPr/>
+          <p:nvPr/>
+        </p:nvSpPr>
+        <p:spPr>
+          <a:xfrm>
+            <a:off x="8046720" y="3712464"/>
+            <a:ext cx="3566160" cy="1005840"/>
+          </a:xfrm>
+          <a:prstGeom prst="roundRect">
+            <a:avLst>
+              <a:gd name="adj" fmla="val 10909"/>
+            </a:avLst>
+          </a:prstGeom>
+          <a:solidFill>
+            <a:schemeClr val="bg2"/>
+          </a:solidFill>
+          <a:ln w="12700">
+            <a:solidFill>
+              <a:schemeClr val="bg2"/>
+            </a:solidFill>
+            <a:prstDash val="solid"/>
+          </a:ln>
+        </p:spPr>
+      </p:sp>
+      <p:sp>
+        <p:nvSpPr>
+          <p:cNvPr id="44" name="bug-badge-8-circle"/>
+          <p:cNvSpPr/>
+          <p:nvPr/>
+        </p:nvSpPr>
+        <p:spPr>
+          <a:xfrm>
+            <a:off x="8229600" y="3986784"/>
+            <a:ext cx="411480" cy="411480"/>
+          </a:xfrm>
+          <a:prstGeom prst="ellipse">
+            <a:avLst/>
+          </a:prstGeom>
+          <a:solidFill>
+            <a:schemeClr val="accent1"/>
+          </a:solidFill>
+          <a:ln w="12700">
+            <a:solidFill>
+              <a:schemeClr val="accent1"/>
+            </a:solidFill>
+            <a:prstDash val="solid"/>
+          </a:ln>
+        </p:spPr>
+      </p:sp>
+      <p:pic>
+        <p:nvPicPr>
+          <p:cNvPr id="45" name="bug-badge-8-icon" descr="preencoded.png">    </p:cNvPr>
+          <p:cNvPicPr>
+            <a:picLocks noChangeAspect="1"/>
+          </p:cNvPicPr>
+          <p:nvPr/>
+        </p:nvPicPr>
+        <p:blipFill>
+          <a:blip r:embed="rId9"/>
+          <a:stretch>
+            <a:fillRect/>
+          </a:stretch>
+        </p:blipFill>
+        <p:spPr>
+          <a:xfrm>
+            <a:off x="8332470" y="4089654"/>
+            <a:ext cx="205740" cy="205740"/>
+          </a:xfrm>
+          <a:prstGeom prst="rect">
+            <a:avLst/>
+          </a:prstGeom>
+        </p:spPr>
+      </p:pic>
+      <p:sp>
+        <p:nvSpPr>
+          <p:cNvPr id="46" name="Text 35"/>
+          <p:cNvSpPr txBox="1"/>
+          <p:nvPr/>
+        </p:nvSpPr>
+        <p:spPr>
+          <a:xfrm>
+            <a:off x="8778240" y="3867912"/>
+            <a:ext cx="2697480" cy="347472"/>
+          </a:xfrm>
+          <a:prstGeom prst="rect">
+            <a:avLst/>
+          </a:prstGeom>
+          <a:noFill/>
+          <a:ln/>
+        </p:spPr>
+        <p:txBody>
+          <a:bodyPr wrap="square" lIns="0" tIns="0" rIns="0" bIns="0" rtlCol="0" anchor="t"/>
+          <a:lstStyle/>
+          <a:p>
+            <a:pPr indent="0" marL="0">
+              <a:buNone/>
+            </a:pPr>
+            <a:r>
+              <a:rPr lang="en-US" sz="1300" b="1" dirty="0">
+                <a:solidFill>
+                  <a:schemeClr val="tx1"/>
+                </a:solidFill>
+              </a:rPr>
+              <a:t>Create-task modal never closed</a:t>
+            </a:r>
+            <a:endParaRPr lang="en-US" sz="1300" dirty="0"/>
+          </a:p>
+        </p:txBody>
+      </p:sp>
+      <p:sp>
+        <p:nvSpPr>
+          <p:cNvPr id="47" name="Text 36"/>
+          <p:cNvSpPr txBox="1"/>
+          <p:nvPr/>
+        </p:nvSpPr>
+        <p:spPr>
+          <a:xfrm>
+            <a:off x="8778240" y="4233672"/>
+            <a:ext cx="2697480" cy="347472"/>
+          </a:xfrm>
+          <a:prstGeom prst="rect">
+            <a:avLst/>
+          </a:prstGeom>
+          <a:noFill/>
+          <a:ln/>
+        </p:spPr>
+        <p:txBody>
+          <a:bodyPr wrap="square" lIns="0" tIns="0" rIns="0" bIns="0" rtlCol="0" anchor="t"/>
+          <a:lstStyle/>
+          <a:p>
+            <a:pPr indent="0" marL="0">
+              <a:buNone/>
+            </a:pPr>
+            <a:r>
+              <a:rPr lang="en-US" sz="1150" dirty="0">
+                <a:solidFill>
+                  <a:schemeClr val="tx2"/>
+                </a:solidFill>
+              </a:rPr>
+              <a:t>React currentTarget is null after await</a:t>
+            </a:r>
+            <a:endParaRPr lang="en-US" sz="1150" dirty="0"/>
+          </a:p>
+        </p:txBody>
+      </p:sp>
+      <p:sp>
+        <p:nvSpPr>
+          <p:cNvPr id="48" name="bug-card-9"/>
+          <p:cNvSpPr/>
+          <p:nvPr/>
+        </p:nvSpPr>
+        <p:spPr>
+          <a:xfrm>
+            <a:off x="548640" y="4882896"/>
+            <a:ext cx="3566160" cy="1005840"/>
+          </a:xfrm>
+          <a:prstGeom prst="roundRect">
+            <a:avLst>
+              <a:gd name="adj" fmla="val 10909"/>
+            </a:avLst>
+          </a:prstGeom>
+          <a:solidFill>
+            <a:schemeClr val="bg2"/>
+          </a:solidFill>
+          <a:ln w="12700">
+            <a:solidFill>
+              <a:schemeClr val="bg2"/>
+            </a:solidFill>
+            <a:prstDash val="solid"/>
+          </a:ln>
+        </p:spPr>
+      </p:sp>
+      <p:sp>
+        <p:nvSpPr>
+          <p:cNvPr id="49" name="bug-badge-9-circle"/>
+          <p:cNvSpPr/>
+          <p:nvPr/>
+        </p:nvSpPr>
+        <p:spPr>
+          <a:xfrm>
+            <a:off x="731520" y="5157216"/>
+            <a:ext cx="411480" cy="411480"/>
+          </a:xfrm>
+          <a:prstGeom prst="ellipse">
+            <a:avLst/>
+          </a:prstGeom>
+          <a:solidFill>
+            <a:schemeClr val="accent1"/>
+          </a:solidFill>
+          <a:ln w="12700">
+            <a:solidFill>
+              <a:schemeClr val="accent1"/>
+            </a:solidFill>
+            <a:prstDash val="solid"/>
+          </a:ln>
+        </p:spPr>
+      </p:sp>
+      <p:pic>
+        <p:nvPicPr>
+          <p:cNvPr id="50" name="bug-badge-9-icon" descr="preencoded.png">    </p:cNvPr>
+          <p:cNvPicPr>
+            <a:picLocks noChangeAspect="1"/>
+          </p:cNvPicPr>
+          <p:nvPr/>
+        </p:nvPicPr>
+        <p:blipFill>
+          <a:blip r:embed="rId10"/>
+          <a:stretch>
+            <a:fillRect/>
+          </a:stretch>
+        </p:blipFill>
+        <p:spPr>
+          <a:xfrm>
+            <a:off x="834390" y="5260086"/>
+            <a:ext cx="205740" cy="205740"/>
+          </a:xfrm>
+          <a:prstGeom prst="rect">
+            <a:avLst/>
+          </a:prstGeom>
+        </p:spPr>
+      </p:pic>
+      <p:sp>
+        <p:nvSpPr>
+          <p:cNvPr id="51" name="Text 39"/>
+          <p:cNvSpPr txBox="1"/>
+          <p:nvPr/>
+        </p:nvSpPr>
+        <p:spPr>
+          <a:xfrm>
+            <a:off x="1280160" y="5038344"/>
+            <a:ext cx="2697480" cy="347472"/>
+          </a:xfrm>
+          <a:prstGeom prst="rect">
+            <a:avLst/>
+          </a:prstGeom>
+          <a:noFill/>
+          <a:ln/>
+        </p:spPr>
+        <p:txBody>
+          <a:bodyPr wrap="square" lIns="0" tIns="0" rIns="0" bIns="0" rtlCol="0" anchor="t"/>
+          <a:lstStyle/>
+          <a:p>
+            <a:pPr indent="0" marL="0">
+              <a:buNone/>
+            </a:pPr>
+            <a:r>
+              <a:rPr lang="en-US" sz="1300" b="1" dirty="0">
+                <a:solidFill>
+                  <a:schemeClr val="tx1"/>
+                </a:solidFill>
+              </a:rPr>
+              <a:t>Postgres initdb fails on EBS</a:t>
+            </a:r>
+            <a:endParaRPr lang="en-US" sz="1300" dirty="0"/>
+          </a:p>
+        </p:txBody>
+      </p:sp>
+      <p:sp>
+        <p:nvSpPr>
+          <p:cNvPr id="52" name="Text 40"/>
+          <p:cNvSpPr txBox="1"/>
+          <p:nvPr/>
+        </p:nvSpPr>
+        <p:spPr>
+          <a:xfrm>
+            <a:off x="1280160" y="5404104"/>
+            <a:ext cx="2697480" cy="347472"/>
+          </a:xfrm>
+          <a:prstGeom prst="rect">
+            <a:avLst/>
+          </a:prstGeom>
+          <a:noFill/>
+          <a:ln/>
+        </p:spPr>
+        <p:txBody>
+          <a:bodyPr wrap="square" lIns="0" tIns="0" rIns="0" bIns="0" rtlCol="0" anchor="t"/>
+          <a:lstStyle/>
+          <a:p>
+            <a:pPr indent="0" marL="0">
+              <a:buNone/>
+            </a:pPr>
+            <a:r>
+              <a:rPr lang="en-US" sz="1150" dirty="0">
+                <a:solidFill>
+                  <a:schemeClr val="tx2"/>
+                </a:solidFill>
+              </a:rPr>
+              <a:t>lost+found → PGDATA subdirectory</a:t>
+            </a:r>
+            <a:endParaRPr lang="en-US" sz="1150" dirty="0"/>
+          </a:p>
+        </p:txBody>
+      </p:sp>
+      <p:sp>
+        <p:nvSpPr>
+          <p:cNvPr id="53" name="bug-card-10"/>
+          <p:cNvSpPr/>
+          <p:nvPr/>
+        </p:nvSpPr>
+        <p:spPr>
+          <a:xfrm>
+            <a:off x="4297680" y="4882896"/>
+            <a:ext cx="3566160" cy="1005840"/>
+          </a:xfrm>
+          <a:prstGeom prst="roundRect">
+            <a:avLst>
+              <a:gd name="adj" fmla="val 10909"/>
+            </a:avLst>
+          </a:prstGeom>
+          <a:solidFill>
+            <a:schemeClr val="bg2"/>
+          </a:solidFill>
+          <a:ln w="12700">
+            <a:solidFill>
+              <a:schemeClr val="bg2"/>
+            </a:solidFill>
+            <a:prstDash val="solid"/>
+          </a:ln>
+        </p:spPr>
+      </p:sp>
+      <p:sp>
+        <p:nvSpPr>
+          <p:cNvPr id="54" name="bug-badge-10-circle"/>
+          <p:cNvSpPr/>
+          <p:nvPr/>
+        </p:nvSpPr>
+        <p:spPr>
+          <a:xfrm>
+            <a:off x="4480560" y="5157216"/>
+            <a:ext cx="411480" cy="411480"/>
+          </a:xfrm>
+          <a:prstGeom prst="ellipse">
+            <a:avLst/>
+          </a:prstGeom>
+          <a:solidFill>
+            <a:schemeClr val="accent1"/>
+          </a:solidFill>
+          <a:ln w="12700">
+            <a:solidFill>
+              <a:schemeClr val="accent1"/>
+            </a:solidFill>
+            <a:prstDash val="solid"/>
+          </a:ln>
+        </p:spPr>
+      </p:sp>
+      <p:pic>
+        <p:nvPicPr>
+          <p:cNvPr id="55" name="bug-badge-10-icon" descr="preencoded.png">    </p:cNvPr>
+          <p:cNvPicPr>
+            <a:picLocks noChangeAspect="1"/>
+          </p:cNvPicPr>
+          <p:nvPr/>
+        </p:nvPicPr>
+        <p:blipFill>
+          <a:blip r:embed="rId11"/>
+          <a:stretch>
+            <a:fillRect/>
+          </a:stretch>
+        </p:blipFill>
+        <p:spPr>
+          <a:xfrm>
+            <a:off x="4583430" y="5260086"/>
+            <a:ext cx="205740" cy="205740"/>
+          </a:xfrm>
+          <a:prstGeom prst="rect">
+            <a:avLst/>
+          </a:prstGeom>
+        </p:spPr>
+      </p:pic>
+      <p:sp>
+        <p:nvSpPr>
+          <p:cNvPr id="56" name="Text 43"/>
+          <p:cNvSpPr txBox="1"/>
+          <p:nvPr/>
+        </p:nvSpPr>
+        <p:spPr>
+          <a:xfrm>
+            <a:off x="5029200" y="5038344"/>
+            <a:ext cx="2697480" cy="347472"/>
+          </a:xfrm>
+          <a:prstGeom prst="rect">
+            <a:avLst/>
+          </a:prstGeom>
+          <a:noFill/>
+          <a:ln/>
+        </p:spPr>
+        <p:txBody>
+          <a:bodyPr wrap="square" lIns="0" tIns="0" rIns="0" bIns="0" rtlCol="0" anchor="t"/>
+          <a:lstStyle/>
+          <a:p>
+            <a:pPr indent="0" marL="0">
+              <a:buNone/>
+            </a:pPr>
+            <a:r>
+              <a:rPr lang="en-US" sz="1300" b="1" dirty="0">
+                <a:solidFill>
+                  <a:schemeClr val="tx1"/>
+                </a:solidFill>
+              </a:rPr>
+              <a:t>Compose start-up races</a:t>
+            </a:r>
+            <a:endParaRPr lang="en-US" sz="1300" dirty="0"/>
+          </a:p>
+        </p:txBody>
+      </p:sp>
+      <p:sp>
+        <p:nvSpPr>
+          <p:cNvPr id="57" name="Text 44"/>
+          <p:cNvSpPr txBox="1"/>
+          <p:nvPr/>
+        </p:nvSpPr>
+        <p:spPr>
+          <a:xfrm>
+            <a:off x="5029200" y="5404104"/>
+            <a:ext cx="2697480" cy="347472"/>
+          </a:xfrm>
+          <a:prstGeom prst="rect">
+            <a:avLst/>
+          </a:prstGeom>
+          <a:noFill/>
+          <a:ln/>
+        </p:spPr>
+        <p:txBody>
+          <a:bodyPr wrap="square" lIns="0" tIns="0" rIns="0" bIns="0" rtlCol="0" anchor="t"/>
+          <a:lstStyle/>
+          <a:p>
+            <a:pPr indent="0" marL="0">
+              <a:buNone/>
+            </a:pPr>
+            <a:r>
+              <a:rPr lang="en-US" sz="1150" dirty="0">
+                <a:solidFill>
+                  <a:schemeClr val="tx2"/>
+                </a:solidFill>
+              </a:rPr>
+              <a:t>health-gated depends_on</a:t>
+            </a:r>
+            <a:endParaRPr lang="en-US" sz="1150" dirty="0"/>
+          </a:p>
+        </p:txBody>
+      </p:sp>
+      <p:sp>
+        <p:nvSpPr>
+          <p:cNvPr id="58" name="bug-card-11"/>
+          <p:cNvSpPr/>
+          <p:nvPr/>
+        </p:nvSpPr>
+        <p:spPr>
+          <a:xfrm>
+            <a:off x="8046720" y="4882896"/>
+            <a:ext cx="3566160" cy="1005840"/>
+          </a:xfrm>
+          <a:prstGeom prst="roundRect">
+            <a:avLst>
+              <a:gd name="adj" fmla="val 10909"/>
+            </a:avLst>
+          </a:prstGeom>
+          <a:solidFill>
+            <a:schemeClr val="bg2"/>
+          </a:solidFill>
+          <a:ln w="12700">
+            <a:solidFill>
+              <a:schemeClr val="bg2"/>
+            </a:solidFill>
+            <a:prstDash val="solid"/>
+          </a:ln>
+        </p:spPr>
+      </p:sp>
+      <p:sp>
+        <p:nvSpPr>
+          <p:cNvPr id="59" name="bug-badge-11-circle"/>
+          <p:cNvSpPr/>
+          <p:nvPr/>
+        </p:nvSpPr>
+        <p:spPr>
+          <a:xfrm>
+            <a:off x="8229600" y="5157216"/>
+            <a:ext cx="411480" cy="411480"/>
+          </a:xfrm>
+          <a:prstGeom prst="ellipse">
+            <a:avLst/>
+          </a:prstGeom>
+          <a:solidFill>
+            <a:schemeClr val="accent1"/>
+          </a:solidFill>
+          <a:ln w="12700">
+            <a:solidFill>
+              <a:schemeClr val="accent1"/>
+            </a:solidFill>
+            <a:prstDash val="solid"/>
+          </a:ln>
+        </p:spPr>
+      </p:sp>
+      <p:pic>
+        <p:nvPicPr>
+          <p:cNvPr id="60" name="bug-badge-11-icon" descr="preencoded.png">    </p:cNvPr>
+          <p:cNvPicPr>
+            <a:picLocks noChangeAspect="1"/>
+          </p:cNvPicPr>
+          <p:nvPr/>
+        </p:nvPicPr>
+        <p:blipFill>
+          <a:blip r:embed="rId12"/>
+          <a:stretch>
+            <a:fillRect/>
+          </a:stretch>
+        </p:blipFill>
+        <p:spPr>
+          <a:xfrm>
+            <a:off x="8332470" y="5260086"/>
+            <a:ext cx="205740" cy="205740"/>
+          </a:xfrm>
+          <a:prstGeom prst="rect">
+            <a:avLst/>
+          </a:prstGeom>
+        </p:spPr>
+      </p:pic>
+      <p:sp>
+        <p:nvSpPr>
+          <p:cNvPr id="61" name="Text 47"/>
+          <p:cNvSpPr txBox="1"/>
+          <p:nvPr/>
+        </p:nvSpPr>
+        <p:spPr>
+          <a:xfrm>
+            <a:off x="8778240" y="5038344"/>
+            <a:ext cx="2697480" cy="347472"/>
+          </a:xfrm>
+          <a:prstGeom prst="rect">
+            <a:avLst/>
+          </a:prstGeom>
+          <a:noFill/>
+          <a:ln/>
+        </p:spPr>
+        <p:txBody>
+          <a:bodyPr wrap="square" lIns="0" tIns="0" rIns="0" bIns="0" rtlCol="0" anchor="t"/>
+          <a:lstStyle/>
+          <a:p>
+            <a:pPr indent="0" marL="0">
+              <a:buNone/>
+            </a:pPr>
+            <a:r>
+              <a:rPr lang="en-US" sz="1300" b="1" dirty="0">
+                <a:solidFill>
+                  <a:schemeClr val="tx1"/>
+                </a:solidFill>
+              </a:rPr>
+              <a:t>ingress-nginx retired (2026)</a:t>
+            </a:r>
+            <a:endParaRPr lang="en-US" sz="1300" dirty="0"/>
+          </a:p>
+        </p:txBody>
+      </p:sp>
+      <p:sp>
+        <p:nvSpPr>
+          <p:cNvPr id="62" name="Text 48"/>
+          <p:cNvSpPr txBox="1"/>
+          <p:nvPr/>
+        </p:nvSpPr>
+        <p:spPr>
+          <a:xfrm>
+            <a:off x="8778240" y="5404104"/>
+            <a:ext cx="2697480" cy="347472"/>
+          </a:xfrm>
+          <a:prstGeom prst="rect">
+            <a:avLst/>
+          </a:prstGeom>
+          <a:noFill/>
+          <a:ln/>
+        </p:spPr>
+        <p:txBody>
+          <a:bodyPr wrap="square" lIns="0" tIns="0" rIns="0" bIns="0" rtlCol="0" anchor="t"/>
+          <a:lstStyle/>
+          <a:p>
+            <a:pPr indent="0" marL="0">
+              <a:buNone/>
+            </a:pPr>
+            <a:r>
+              <a:rPr lang="en-US" sz="1150" dirty="0">
+                <a:solidFill>
+                  <a:schemeClr val="tx2"/>
+                </a:solidFill>
+              </a:rPr>
+              <a:t>switched to Traefik</a:t>
+            </a:r>
+            <a:endParaRPr lang="en-US" sz="1150" dirty="0"/>
           </a:p>
         </p:txBody>
       </p:sp>
@@ -8779,6 +8577,562 @@
 <file path=ppt/slides/slide16.xml><?xml version="1.0" encoding="utf-8"?>
 <p:sld xmlns:a="http://schemas.openxmlformats.org/drawingml/2006/main" xmlns:r="http://schemas.openxmlformats.org/officeDocument/2006/relationships" xmlns:p="http://schemas.openxmlformats.org/presentationml/2006/main">
   <p:cSld name="Slide 16">
+    <p:spTree>
+      <p:nvGrpSpPr>
+        <p:cNvPr id="1" name=""/>
+        <p:cNvGrpSpPr/>
+        <p:nvPr/>
+      </p:nvGrpSpPr>
+      <p:grpSpPr>
+        <a:xfrm>
+          <a:off x="0" y="0"/>
+          <a:ext cx="0" cy="0"/>
+          <a:chOff x="0" y="0"/>
+          <a:chExt cx="0" cy="0"/>
+        </a:xfrm>
+      </p:grpSpPr>
+      <p:sp>
+        <p:nvSpPr>
+          <p:cNvPr id="2" name="Text 0"/>
+          <p:cNvSpPr/>
+          <p:nvPr>
+            <p:ph idx="100" type="title" hasCustomPrompt="1"/>
+          </p:nvPr>
+        </p:nvSpPr>
+        <p:spPr>
+          <a:xfrm>
+            <a:off x="548640" y="365760"/>
+            <a:ext cx="11094415" cy="777240"/>
+          </a:xfrm>
+          <a:prstGeom prst="rect">
+            <a:avLst/>
+          </a:prstGeom>
+          <a:noFill/>
+          <a:ln/>
+        </p:spPr>
+        <p:txBody>
+          <a:bodyPr wrap="square" lIns="0" tIns="0" rIns="0" bIns="0" rtlCol="0" anchor="ctr"/>
+          <a:lstStyle/>
+          <a:p>
+            <a:pPr algn="l" indent="0" marL="0">
+              <a:buNone/>
+            </a:pPr>
+            <a:r>
+              <a:rPr lang="en-US" sz="3400" b="1" dirty="0">
+                <a:solidFill>
+                  <a:schemeClr val="tx1"/>
+                </a:solidFill>
+              </a:rPr>
+              <a:t>Key learnings and next steps</a:t>
+            </a:r>
+            <a:endParaRPr lang="en-US" sz="3400" dirty="0"/>
+          </a:p>
+        </p:txBody>
+      </p:sp>
+      <p:sp>
+        <p:nvSpPr>
+          <p:cNvPr id="3" name="learn-card-0"/>
+          <p:cNvSpPr/>
+          <p:nvPr/>
+        </p:nvSpPr>
+        <p:spPr>
+          <a:xfrm>
+            <a:off x="548640" y="1371600"/>
+            <a:ext cx="5394960" cy="4526280"/>
+          </a:xfrm>
+          <a:prstGeom prst="roundRect">
+            <a:avLst>
+              <a:gd name="adj" fmla="val 2424"/>
+            </a:avLst>
+          </a:prstGeom>
+          <a:solidFill>
+            <a:schemeClr val="bg2"/>
+          </a:solidFill>
+          <a:ln w="12700">
+            <a:solidFill>
+              <a:schemeClr val="bg2"/>
+            </a:solidFill>
+            <a:prstDash val="solid"/>
+          </a:ln>
+        </p:spPr>
+      </p:sp>
+      <p:sp>
+        <p:nvSpPr>
+          <p:cNvPr id="4" name="learn-badge-0-circle"/>
+          <p:cNvSpPr/>
+          <p:nvPr/>
+        </p:nvSpPr>
+        <p:spPr>
+          <a:xfrm>
+            <a:off x="822960" y="1645920"/>
+            <a:ext cx="548640" cy="548640"/>
+          </a:xfrm>
+          <a:prstGeom prst="ellipse">
+            <a:avLst/>
+          </a:prstGeom>
+          <a:solidFill>
+            <a:schemeClr val="accent1"/>
+          </a:solidFill>
+          <a:ln w="12700">
+            <a:solidFill>
+              <a:schemeClr val="accent1"/>
+            </a:solidFill>
+            <a:prstDash val="solid"/>
+          </a:ln>
+        </p:spPr>
+      </p:sp>
+      <p:pic>
+        <p:nvPicPr>
+          <p:cNvPr id="5" name="learn-badge-0-icon" descr="preencoded.png">    </p:cNvPr>
+          <p:cNvPicPr>
+            <a:picLocks noChangeAspect="1"/>
+          </p:cNvPicPr>
+          <p:nvPr/>
+        </p:nvPicPr>
+        <p:blipFill>
+          <a:blip r:embed="rId1"/>
+          <a:stretch>
+            <a:fillRect/>
+          </a:stretch>
+        </p:blipFill>
+        <p:spPr>
+          <a:xfrm>
+            <a:off x="960120" y="1783080"/>
+            <a:ext cx="274320" cy="274320"/>
+          </a:xfrm>
+          <a:prstGeom prst="rect">
+            <a:avLst/>
+          </a:prstGeom>
+        </p:spPr>
+      </p:pic>
+      <p:sp>
+        <p:nvSpPr>
+          <p:cNvPr id="6" name="Text 3"/>
+          <p:cNvSpPr txBox="1"/>
+          <p:nvPr/>
+        </p:nvSpPr>
+        <p:spPr>
+          <a:xfrm>
+            <a:off x="1554480" y="1719072"/>
+            <a:ext cx="3657600" cy="411480"/>
+          </a:xfrm>
+          <a:prstGeom prst="rect">
+            <a:avLst/>
+          </a:prstGeom>
+          <a:noFill/>
+          <a:ln/>
+        </p:spPr>
+        <p:txBody>
+          <a:bodyPr wrap="square" lIns="0" tIns="0" rIns="0" bIns="0" rtlCol="0" anchor="t"/>
+          <a:lstStyle/>
+          <a:p>
+            <a:pPr indent="0" marL="0">
+              <a:buNone/>
+            </a:pPr>
+            <a:r>
+              <a:rPr lang="en-US" sz="2000" b="1" dirty="0">
+                <a:solidFill>
+                  <a:schemeClr val="tx1"/>
+                </a:solidFill>
+              </a:rPr>
+              <a:t>Learnings</a:t>
+            </a:r>
+            <a:endParaRPr lang="en-US" sz="2000" dirty="0"/>
+          </a:p>
+        </p:txBody>
+      </p:sp>
+      <p:sp>
+        <p:nvSpPr>
+          <p:cNvPr id="7" name="Text 4"/>
+          <p:cNvSpPr txBox="1"/>
+          <p:nvPr/>
+        </p:nvSpPr>
+        <p:spPr>
+          <a:xfrm>
+            <a:off x="822960" y="2423160"/>
+            <a:ext cx="4846320" cy="3291840"/>
+          </a:xfrm>
+          <a:prstGeom prst="rect">
+            <a:avLst/>
+          </a:prstGeom>
+          <a:noFill/>
+          <a:ln/>
+        </p:spPr>
+        <p:txBody>
+          <a:bodyPr wrap="square" lIns="0" tIns="0" rIns="0" bIns="0" rtlCol="0" anchor="t"/>
+          <a:lstStyle/>
+          <a:p>
+            <a:pPr marL="342900" indent="-342900">
+              <a:spcAft>
+                <a:spcPts val="1000"/>
+              </a:spcAft>
+              <a:buSzPct val="100000"/>
+              <a:buChar char="•"/>
+            </a:pPr>
+            <a:r>
+              <a:rPr lang="en-US" sz="1500" dirty="0">
+                <a:solidFill>
+                  <a:schemeClr val="tx1"/>
+                </a:solidFill>
+              </a:rPr>
+              <a:t>Run every layer for real; reading YAML hides broken wiring</a:t>
+            </a:r>
+            <a:endParaRPr lang="en-US" sz="1500" dirty="0"/>
+          </a:p>
+          <a:p>
+            <a:pPr marL="342900" indent="-342900">
+              <a:spcAft>
+                <a:spcPts val="1000"/>
+              </a:spcAft>
+              <a:buSzPct val="100000"/>
+              <a:buChar char="•"/>
+            </a:pPr>
+            <a:r>
+              <a:rPr lang="en-US" sz="1500" dirty="0">
+                <a:solidFill>
+                  <a:schemeClr val="tx1"/>
+                </a:solidFill>
+              </a:rPr>
+              <a:t>Gates must be able to fail: a scanner without --exit-code is decoration</a:t>
+            </a:r>
+            <a:endParaRPr lang="en-US" sz="1500" dirty="0"/>
+          </a:p>
+          <a:p>
+            <a:pPr marL="342900" indent="-342900">
+              <a:spcAft>
+                <a:spcPts val="1000"/>
+              </a:spcAft>
+              <a:buSzPct val="100000"/>
+              <a:buChar char="•"/>
+            </a:pPr>
+            <a:r>
+              <a:rPr lang="en-US" sz="1500" dirty="0">
+                <a:solidFill>
+                  <a:schemeClr val="tx1"/>
+                </a:solidFill>
+              </a:rPr>
+              <a:t>Liveness ≠ readiness: a DB outage should drain pods, not restart them</a:t>
+            </a:r>
+            <a:endParaRPr lang="en-US" sz="1500" dirty="0"/>
+          </a:p>
+          <a:p>
+            <a:pPr marL="342900" indent="-342900">
+              <a:spcAft>
+                <a:spcPts val="1000"/>
+              </a:spcAft>
+              <a:buSzPct val="100000"/>
+              <a:buChar char="•"/>
+            </a:pPr>
+            <a:r>
+              <a:rPr lang="en-US" sz="1500" dirty="0">
+                <a:solidFill>
+                  <a:schemeClr val="tx1"/>
+                </a:solidFill>
+              </a:rPr>
+              <a:t>Pin versions and keep them current: EKS, AMIs and Ingress controllers retire</a:t>
+            </a:r>
+            <a:endParaRPr lang="en-US" sz="1500" dirty="0"/>
+          </a:p>
+          <a:p>
+            <a:pPr marL="342900" indent="-342900">
+              <a:spcAft>
+                <a:spcPts val="1000"/>
+              </a:spcAft>
+              <a:buSzPct val="100000"/>
+              <a:buChar char="•"/>
+            </a:pPr>
+            <a:r>
+              <a:rPr lang="en-US" sz="1500" dirty="0">
+                <a:solidFill>
+                  <a:schemeClr val="tx1"/>
+                </a:solidFill>
+              </a:rPr>
+              <a:t>Git as the deployment API makes rollback a git revert</a:t>
+            </a:r>
+            <a:endParaRPr lang="en-US" sz="1500" dirty="0"/>
+          </a:p>
+        </p:txBody>
+      </p:sp>
+      <p:sp>
+        <p:nvSpPr>
+          <p:cNvPr id="8" name="learn-card-1"/>
+          <p:cNvSpPr/>
+          <p:nvPr/>
+        </p:nvSpPr>
+        <p:spPr>
+          <a:xfrm>
+            <a:off x="6217920" y="1371600"/>
+            <a:ext cx="5394960" cy="4526280"/>
+          </a:xfrm>
+          <a:prstGeom prst="roundRect">
+            <a:avLst>
+              <a:gd name="adj" fmla="val 2424"/>
+            </a:avLst>
+          </a:prstGeom>
+          <a:solidFill>
+            <a:schemeClr val="bg2"/>
+          </a:solidFill>
+          <a:ln w="12700">
+            <a:solidFill>
+              <a:schemeClr val="bg2"/>
+            </a:solidFill>
+            <a:prstDash val="solid"/>
+          </a:ln>
+        </p:spPr>
+      </p:sp>
+      <p:sp>
+        <p:nvSpPr>
+          <p:cNvPr id="9" name="learn-badge-1-circle"/>
+          <p:cNvSpPr/>
+          <p:nvPr/>
+        </p:nvSpPr>
+        <p:spPr>
+          <a:xfrm>
+            <a:off x="6492240" y="1645920"/>
+            <a:ext cx="548640" cy="548640"/>
+          </a:xfrm>
+          <a:prstGeom prst="ellipse">
+            <a:avLst/>
+          </a:prstGeom>
+          <a:solidFill>
+            <a:schemeClr val="accent3"/>
+          </a:solidFill>
+          <a:ln w="12700">
+            <a:solidFill>
+              <a:schemeClr val="accent3"/>
+            </a:solidFill>
+            <a:prstDash val="solid"/>
+          </a:ln>
+        </p:spPr>
+      </p:sp>
+      <p:pic>
+        <p:nvPicPr>
+          <p:cNvPr id="10" name="learn-badge-1-icon" descr="preencoded.png">    </p:cNvPr>
+          <p:cNvPicPr>
+            <a:picLocks noChangeAspect="1"/>
+          </p:cNvPicPr>
+          <p:nvPr/>
+        </p:nvPicPr>
+        <p:blipFill>
+          <a:blip r:embed="rId2"/>
+          <a:stretch>
+            <a:fillRect/>
+          </a:stretch>
+        </p:blipFill>
+        <p:spPr>
+          <a:xfrm>
+            <a:off x="6629400" y="1783080"/>
+            <a:ext cx="274320" cy="274320"/>
+          </a:xfrm>
+          <a:prstGeom prst="rect">
+            <a:avLst/>
+          </a:prstGeom>
+        </p:spPr>
+      </p:pic>
+      <p:sp>
+        <p:nvSpPr>
+          <p:cNvPr id="11" name="Text 7"/>
+          <p:cNvSpPr txBox="1"/>
+          <p:nvPr/>
+        </p:nvSpPr>
+        <p:spPr>
+          <a:xfrm>
+            <a:off x="7223760" y="1719072"/>
+            <a:ext cx="3657600" cy="411480"/>
+          </a:xfrm>
+          <a:prstGeom prst="rect">
+            <a:avLst/>
+          </a:prstGeom>
+          <a:noFill/>
+          <a:ln/>
+        </p:spPr>
+        <p:txBody>
+          <a:bodyPr wrap="square" lIns="0" tIns="0" rIns="0" bIns="0" rtlCol="0" anchor="t"/>
+          <a:lstStyle/>
+          <a:p>
+            <a:pPr indent="0" marL="0">
+              <a:buNone/>
+            </a:pPr>
+            <a:r>
+              <a:rPr lang="en-US" sz="2000" b="1" dirty="0">
+                <a:solidFill>
+                  <a:schemeClr val="tx1"/>
+                </a:solidFill>
+              </a:rPr>
+              <a:t>Next steps</a:t>
+            </a:r>
+            <a:endParaRPr lang="en-US" sz="2000" dirty="0"/>
+          </a:p>
+        </p:txBody>
+      </p:sp>
+      <p:sp>
+        <p:nvSpPr>
+          <p:cNvPr id="12" name="Text 8"/>
+          <p:cNvSpPr txBox="1"/>
+          <p:nvPr/>
+        </p:nvSpPr>
+        <p:spPr>
+          <a:xfrm>
+            <a:off x="6492240" y="2423160"/>
+            <a:ext cx="4846320" cy="3291840"/>
+          </a:xfrm>
+          <a:prstGeom prst="rect">
+            <a:avLst/>
+          </a:prstGeom>
+          <a:noFill/>
+          <a:ln/>
+        </p:spPr>
+        <p:txBody>
+          <a:bodyPr wrap="square" lIns="0" tIns="0" rIns="0" bIns="0" rtlCol="0" anchor="t"/>
+          <a:lstStyle/>
+          <a:p>
+            <a:pPr marL="342900" indent="-342900">
+              <a:spcAft>
+                <a:spcPts val="1000"/>
+              </a:spcAft>
+              <a:buSzPct val="100000"/>
+              <a:buChar char="•"/>
+            </a:pPr>
+            <a:r>
+              <a:rPr lang="en-US" sz="1500" dirty="0">
+                <a:solidFill>
+                  <a:schemeClr val="tx1"/>
+                </a:solidFill>
+              </a:rPr>
+              <a:t>Amazon RDS instead of in-cluster Postgres</a:t>
+            </a:r>
+            <a:endParaRPr lang="en-US" sz="1500" dirty="0"/>
+          </a:p>
+          <a:p>
+            <a:pPr marL="342900" indent="-342900">
+              <a:spcAft>
+                <a:spcPts val="1000"/>
+              </a:spcAft>
+              <a:buSzPct val="100000"/>
+              <a:buChar char="•"/>
+            </a:pPr>
+            <a:r>
+              <a:rPr lang="en-US" sz="1500" dirty="0">
+                <a:solidFill>
+                  <a:schemeClr val="tx1"/>
+                </a:solidFill>
+              </a:rPr>
+              <a:t>External Secrets + AWS Secrets Manager</a:t>
+            </a:r>
+            <a:endParaRPr lang="en-US" sz="1500" dirty="0"/>
+          </a:p>
+          <a:p>
+            <a:pPr marL="342900" indent="-342900">
+              <a:spcAft>
+                <a:spcPts val="1000"/>
+              </a:spcAft>
+              <a:buSzPct val="100000"/>
+              <a:buChar char="•"/>
+            </a:pPr>
+            <a:r>
+              <a:rPr lang="en-US" sz="1500" dirty="0">
+                <a:solidFill>
+                  <a:schemeClr val="tx1"/>
+                </a:solidFill>
+              </a:rPr>
+              <a:t>cert-manager TLS on the Ingress</a:t>
+            </a:r>
+            <a:endParaRPr lang="en-US" sz="1500" dirty="0"/>
+          </a:p>
+          <a:p>
+            <a:pPr marL="342900" indent="-342900">
+              <a:spcAft>
+                <a:spcPts val="1000"/>
+              </a:spcAft>
+              <a:buSzPct val="100000"/>
+              <a:buChar char="•"/>
+            </a:pPr>
+            <a:r>
+              <a:rPr lang="en-US" sz="1500" dirty="0">
+                <a:solidFill>
+                  <a:schemeClr val="tx1"/>
+                </a:solidFill>
+              </a:rPr>
+              <a:t>S3 remote state with locking for Terraform</a:t>
+            </a:r>
+            <a:endParaRPr lang="en-US" sz="1500" dirty="0"/>
+          </a:p>
+          <a:p>
+            <a:pPr marL="342900" indent="-342900">
+              <a:spcAft>
+                <a:spcPts val="1000"/>
+              </a:spcAft>
+              <a:buSzPct val="100000"/>
+              <a:buChar char="•"/>
+            </a:pPr>
+            <a:r>
+              <a:rPr lang="en-US" sz="1500" dirty="0">
+                <a:solidFill>
+                  <a:schemeClr val="tx1"/>
+                </a:solidFill>
+              </a:rPr>
+              <a:t>App authentication; alerting rules in Alertmanager</a:t>
+            </a:r>
+            <a:endParaRPr lang="en-US" sz="1500" dirty="0"/>
+          </a:p>
+        </p:txBody>
+      </p:sp>
+      <p:sp>
+        <p:nvSpPr>
+          <p:cNvPr id="25" name="Slide Number Placeholder 0"/>
+          <p:cNvSpPr>
+            <a:spLocks noGrp="1"/>
+          </p:cNvSpPr>
+          <p:nvPr>
+            <p:ph type="sldNum" sz="quarter" idx="4294967295"/>
+          </p:nvPr>
+        </p:nvSpPr>
+        <p:spPr>
+          <a:xfrm>
+            <a:off x="11094415" y="6446520"/>
+            <a:ext cx="548640" cy="274320"/>
+          </a:xfrm>
+          <a:prstGeom prst="rect">
+            <a:avLst/>
+          </a:prstGeom>
+          <a:extLst>
+            <a:ext uri="{C572A759-6A51-4108-AA02-DFA0A04FC94B}">
+              <ma14:wrappingTextBoxFlag xmlns:ma14="http://schemas.microsoft.com/office/mac/drawingml/2011/main" val="0"/>
+            </a:ext>
+          </a:extLst>
+        </p:spPr>
+        <p:txBody>
+          <a:bodyPr/>
+          <a:lstStyle>
+            <a:lvl1pPr>
+              <a:defRPr sz="1000">
+                <a:solidFill>
+                  <a:schemeClr val="accent6"/>
+                </a:solidFill>
+              </a:defRPr>
+            </a:lvl1pPr>
+          </a:lstStyle>
+          <a:p>
+            <a:pPr algn="r"/>
+            <a:fld id="{F7021451-1387-4CA6-816F-3879F97B5CBC}" type="slidenum">
+              <a:rPr b="0" lang="en-US"/>
+              <a:t>16</a:t>
+            </a:fld>
+            <a:endParaRPr lang="en-US"/>
+          </a:p>
+        </p:txBody>
+      </p:sp>
+    </p:spTree>
+  </p:cSld>
+  <p:clrMapOvr>
+    <a:masterClrMapping/>
+  </p:clrMapOvr>
+</p:sld>
+</file>
+
+<file path=ppt/slides/slide17.xml><?xml version="1.0" encoding="utf-8"?>
+<p:sld xmlns:a="http://schemas.openxmlformats.org/drawingml/2006/main" xmlns:r="http://schemas.openxmlformats.org/officeDocument/2006/relationships" xmlns:p="http://schemas.openxmlformats.org/presentationml/2006/main">
+  <p:cSld name="Slide 17">
     <p:spTree>
       <p:nvGrpSpPr>
         <p:cNvPr id="1" name=""/>

--- a/demo/TaskBoard-DevSecOps-Capstone.pptx
+++ b/demo/TaskBoard-DevSecOps-Capstone.pptx
@@ -123,31 +123,31 @@
   <p:extLst>
     <p:ext uri="{521415D9-36F7-43E2-AB2F-B90AF26B5E84}">
       <p14:sectionLst xmlns:p14="http://schemas.microsoft.com/office/powerpoint/2010/main">
-        <p14:section name="Introduction" id="{96f4f4f8-3579-4469-6ac4-6e4979d4c20d}">
+        <p14:section name="Introduction" id="{8043cffe-dbd8-8bb0-e7d6-f529f65beec9}">
           <p14:sldIdLst>
             <p14:sldId id="256"/>
             <p14:sldId id="257"/>
           </p14:sldIdLst>
         </p14:section>
-        <p14:section name="Application" id="{7d9ead86-f8c9-90a9-bc47-9b0e95316413}">
+        <p14:section name="Application" id="{31c6d1f9-f7d1-d43e-5826-28fe3738fec0}">
           <p14:sldIdLst>
             <p14:sldId id="258"/>
             <p14:sldId id="259"/>
           </p14:sldIdLst>
         </p14:section>
-        <p14:section name="Architecture" id="{1fa83653-1428-7f1b-1ae5-3850d904af5e}">
+        <p14:section name="Architecture" id="{f4b56cba-cf8e-7861-41c9-0f9b5b7a406d}">
           <p14:sldIdLst>
             <p14:sldId id="260"/>
           </p14:sldIdLst>
         </p14:section>
-        <p14:section name="Pipeline" id="{199c6b95-5b84-f90d-bd71-e5ce8ec91264}">
+        <p14:section name="Pipeline" id="{a448d9ec-ff34-935f-dc28-3e34cd0c05fb}">
           <p14:sldIdLst>
             <p14:sldId id="261"/>
             <p14:sldId id="262"/>
             <p14:sldId id="263"/>
           </p14:sldIdLst>
         </p14:section>
-        <p14:section name="Infrastructure" id="{8705b8ec-2e1f-5ebb-52ed-c8cab0be671f}">
+        <p14:section name="Infrastructure" id="{9194fbf2-f2fe-9022-58ed-d1e1f94456ff}">
           <p14:sldIdLst>
             <p14:sldId id="264"/>
             <p14:sldId id="265"/>
@@ -155,7 +155,7 @@
             <p14:sldId id="267"/>
           </p14:sldIdLst>
         </p14:section>
-        <p14:section name="Operations" id="{91075b5e-b320-692e-8027-6eb8dba709dc}">
+        <p14:section name="Operations" id="{bf80f5dd-01bc-e87a-6e7a-9f55214b52d9}">
           <p14:sldIdLst>
             <p14:sldId id="268"/>
             <p14:sldId id="269"/>

--- a/demo/TaskBoard-DevSecOps-Capstone.pptx
+++ b/demo/TaskBoard-DevSecOps-Capstone.pptx
@@ -22,9 +22,10 @@
     <p:sldId id="270" r:id="rId16"/>
     <p:sldId id="271" r:id="rId17"/>
     <p:sldId id="272" r:id="rId18"/>
+    <p:sldId id="273" r:id="rId19"/>
   </p:sldIdLst>
   <p:notesMasterIdLst>
-    <p:notesMasterId r:id="rId19"/>
+    <p:notesMasterId r:id="rId20"/>
   </p:notesMasterIdLst>
   <p:sldSz cx="12192000" cy="6858000"/>
   <p:notesSz cx="6858000" cy="12192000"/>
@@ -123,45 +124,46 @@
   <p:extLst>
     <p:ext uri="{521415D9-36F7-43E2-AB2F-B90AF26B5E84}">
       <p14:sectionLst xmlns:p14="http://schemas.microsoft.com/office/powerpoint/2010/main">
-        <p14:section name="Introduction" id="{8043cffe-dbd8-8bb0-e7d6-f529f65beec9}">
+        <p14:section name="Introduction" id="{1ccd97e2-b77d-abf9-a987-dce896f287b0}">
           <p14:sldIdLst>
             <p14:sldId id="256"/>
             <p14:sldId id="257"/>
           </p14:sldIdLst>
         </p14:section>
-        <p14:section name="Application" id="{31c6d1f9-f7d1-d43e-5826-28fe3738fec0}">
+        <p14:section name="Application" id="{6d044e63-d344-605e-ac92-b17541e0a6be}">
           <p14:sldIdLst>
             <p14:sldId id="258"/>
             <p14:sldId id="259"/>
           </p14:sldIdLst>
         </p14:section>
-        <p14:section name="Architecture" id="{f4b56cba-cf8e-7861-41c9-0f9b5b7a406d}">
+        <p14:section name="Architecture" id="{6542358f-a8cc-0e4c-68f7-431d10ab0717}">
           <p14:sldIdLst>
             <p14:sldId id="260"/>
           </p14:sldIdLst>
         </p14:section>
-        <p14:section name="Pipeline" id="{a448d9ec-ff34-935f-dc28-3e34cd0c05fb}">
+        <p14:section name="Pipeline" id="{4dc41958-6eb0-d678-7c0c-465096826a11}">
           <p14:sldIdLst>
             <p14:sldId id="261"/>
             <p14:sldId id="262"/>
             <p14:sldId id="263"/>
           </p14:sldIdLst>
         </p14:section>
-        <p14:section name="Infrastructure" id="{9194fbf2-f2fe-9022-58ed-d1e1f94456ff}">
+        <p14:section name="Infrastructure" id="{bcb503c6-7020-405e-8ace-4034a8a26053}">
           <p14:sldIdLst>
             <p14:sldId id="264"/>
             <p14:sldId id="265"/>
             <p14:sldId id="266"/>
             <p14:sldId id="267"/>
+            <p14:sldId id="268"/>
           </p14:sldIdLst>
         </p14:section>
-        <p14:section name="Operations" id="{bf80f5dd-01bc-e87a-6e7a-9f55214b52d9}">
+        <p14:section name="Operations" id="{d7b59aa0-7c98-9ed6-54fd-9685297cf841}">
           <p14:sldIdLst>
-            <p14:sldId id="268"/>
             <p14:sldId id="269"/>
             <p14:sldId id="270"/>
             <p14:sldId id="271"/>
             <p14:sldId id="272"/>
+            <p14:sldId id="273"/>
           </p14:sldIdLst>
         </p14:section>
       </p14:sectionLst>
@@ -920,7 +922,7 @@
           <a:p>
             <a:r>
               <a:rPr lang="en-US" dirty="0"/>
-              <a:t>The backend exposes Prometheus metrics. A ServiceMonitor in the Helm chart tells the Prometheus Operator to scrape every backend pod — when the autoscaler added pods, they appeared as targets automatically. The Grafana dashboard is code inside the chart, loaded by Grafana's sidecar. During the demo, run the load test and watch request rate and latency move live.</a:t>
+              <a:t>This is the production path, running on the EKS cluster Terraform created. Traffic comes in through an AWS Network Load Balancer to Traefik, which routes slash to the frontend and slash-api to the backend. Argo CD deployed the same SHA-tagged images the pipeline published, and the autoscaler added a backend pod under load.</a:t>
             </a:r>
             <a:endParaRPr lang="en-US" dirty="0"/>
           </a:p>
@@ -1008,7 +1010,7 @@
           <a:p>
             <a:r>
               <a:rPr lang="en-US" dirty="0"/>
-              <a:t>These are the real HPA events from the local cluster. Under the load test, CPU crossed the 60 percent target and the autoscaler added a third and then a fourth backend pod. Show kubectl get hpa during the demo.</a:t>
+              <a:t>The backend exposes Prometheus metrics. A ServiceMonitor in the Helm chart tells the Prometheus Operator to scrape every backend pod — when the autoscaler added pods, they appeared as targets automatically. The Grafana dashboard is code inside the chart, loaded by Grafana's sidecar. During the demo, run the load test and watch request rate and latency move live.</a:t>
             </a:r>
             <a:endParaRPr lang="en-US" dirty="0"/>
           </a:p>
@@ -1096,7 +1098,7 @@
           <a:p>
             <a:r>
               <a:rPr lang="en-US" dirty="0"/>
-              <a:t>The starting repository looked complete but would not have run end to end. These are twelve concrete defects I found by actually running every layer, each with its fix. Pick two or three to tell as stories — for example the init container that waited forever because the container user had no passwd entry, or the React modal that never closed because the event's currentTarget is cleared after an await.</a:t>
+              <a:t>These are the real HPA events from the local cluster. Under the load test, CPU crossed the 60 percent target and the autoscaler added a third and then a fourth backend pod. Show kubectl get hpa during the demo.</a:t>
             </a:r>
             <a:endParaRPr lang="en-US" dirty="0"/>
           </a:p>
@@ -1184,7 +1186,7 @@
           <a:p>
             <a:r>
               <a:rPr lang="en-US" dirty="0"/>
-              <a:t>Close with what I'd take to a real team, and what I'd do next to make this production-grade.</a:t>
+              <a:t>The starting repository looked complete but would not have run end to end. These are twelve concrete defects I found by actually running every layer, each with its fix. Pick two or three to tell as stories — for example the init container that waited forever because the container user had no passwd entry, or the React modal that never closed because the event's currentTarget is cleared after an await.</a:t>
             </a:r>
             <a:endParaRPr lang="en-US" dirty="0"/>
           </a:p>
@@ -1272,7 +1274,7 @@
           <a:p>
             <a:r>
               <a:rPr lang="en-US" dirty="0"/>
-              <a:t>Switch to the live walkthrough in this order: push a commit and show the Actions run, then terraform plan and the AWS console, Argo CD, kubectl, Prometheus targets and Grafana with the load test running.</a:t>
+              <a:t>Close with what I'd take to a real team, and what I'd do next to make this production-grade.</a:t>
             </a:r>
             <a:endParaRPr lang="en-US" dirty="0"/>
           </a:p>
@@ -1296,6 +1298,94 @@
             <a:fld id="{F7021451-1387-4CA6-816F-3879F97B5CBC}" type="slidenum">
               <a:rPr lang="en-US"/>
               <a:t>17</a:t>
+            </a:fld>
+            <a:endParaRPr lang="en-US"/>
+          </a:p>
+        </p:txBody>
+      </p:sp>
+    </p:spTree>
+    <p:extLst>
+      <p:ext uri="{BB962C8B-B14F-4D97-AF65-F5344CB8AC3E}">
+        <p14:creationId xmlns:p14="http://schemas.microsoft.com/office/powerpoint/2010/main" val="1024086991"/>
+      </p:ext>
+    </p:extLst>
+  </p:cSld>
+  <p:clrMapOvr>
+    <a:masterClrMapping/>
+  </p:clrMapOvr>
+</p:notes>
+</file>
+
+<file path=ppt/notesSlides/notesSlide18.xml><?xml version="1.0" encoding="utf-8"?>
+<p:notes xmlns:a="http://schemas.openxmlformats.org/drawingml/2006/main" xmlns:r="http://schemas.openxmlformats.org/officeDocument/2006/relationships" xmlns:p="http://schemas.openxmlformats.org/presentationml/2006/main">
+  <p:cSld>
+    <p:spTree>
+      <p:nvGrpSpPr>
+        <p:cNvPr id="1" name=""/>
+        <p:cNvGrpSpPr/>
+        <p:nvPr/>
+      </p:nvGrpSpPr>
+      <p:grpSpPr>
+        <a:xfrm>
+          <a:off x="0" y="0"/>
+          <a:ext cx="0" cy="0"/>
+          <a:chOff x="0" y="0"/>
+          <a:chExt cx="0" cy="0"/>
+        </a:xfrm>
+      </p:grpSpPr>
+      <p:sp>
+        <p:nvSpPr>
+          <p:cNvPr id="2" name="Slide Image Placeholder 1"/>
+          <p:cNvSpPr>
+            <a:spLocks noGrp="1" noRot="1" noChangeAspect="1"/>
+          </p:cNvSpPr>
+          <p:nvPr>
+            <p:ph type="sldImg"/>
+          </p:nvPr>
+        </p:nvSpPr>
+        <p:spPr/>
+      </p:sp>
+      <p:sp>
+        <p:nvSpPr>
+          <p:cNvPr id="3" name="Notes Placeholder 2"/>
+          <p:cNvSpPr>
+            <a:spLocks noGrp="1"/>
+          </p:cNvSpPr>
+          <p:nvPr>
+            <p:ph type="body" idx="1"/>
+          </p:nvPr>
+        </p:nvSpPr>
+        <p:spPr/>
+        <p:txBody>
+          <a:bodyPr/>
+          <a:lstStyle/>
+          <a:p>
+            <a:r>
+              <a:rPr lang="en-US" dirty="0"/>
+              <a:t>Switch to the live walkthrough in this order: push a commit and show the Actions run, then terraform plan and the AWS console, Argo CD, kubectl, Prometheus targets and Grafana with the load test running.</a:t>
+            </a:r>
+            <a:endParaRPr lang="en-US" dirty="0"/>
+          </a:p>
+        </p:txBody>
+      </p:sp>
+      <p:sp>
+        <p:nvSpPr>
+          <p:cNvPr id="4" name="Slide Number Placeholder 3"/>
+          <p:cNvSpPr>
+            <a:spLocks noGrp="1"/>
+          </p:cNvSpPr>
+          <p:nvPr>
+            <p:ph type="sldNum" sz="quarter" idx="10"/>
+          </p:nvPr>
+        </p:nvSpPr>
+        <p:spPr/>
+        <p:txBody>
+          <a:bodyPr/>
+          <a:lstStyle/>
+          <a:p>
+            <a:fld id="{F7021451-1387-4CA6-816F-3879F97B5CBC}" type="slidenum">
+              <a:rPr lang="en-US"/>
+              <a:t>18</a:t>
             </a:fld>
             <a:endParaRPr lang="en-US"/>
           </a:p>
@@ -5467,7 +5557,7 @@
                   <a:schemeClr val="tx1"/>
                 </a:solidFill>
               </a:rPr>
-              <a:t>Observability: Prometheus + Grafana</a:t>
+              <a:t>Live on AWS EKS: same chart, same images</a:t>
             </a:r>
             <a:endParaRPr lang="en-US" sz="3400" dirty="0"/>
           </a:p>
@@ -5475,7 +5565,7 @@
       </p:sp>
       <p:pic>
         <p:nvPicPr>
-          <p:cNvPr id="3" name="grafana-screenshot" descr="/Users/healthbay/Desktop/capstone/devsecops-python/demo/screenshots/grafana-dashboard.png">    </p:cNvPr>
+          <p:cNvPr id="3" name="eks-app-screenshot" descr="/Users/healthbay/Desktop/capstone/devsecops-python/demo/screenshots/eks-app-load-balancer.png">    </p:cNvPr>
           <p:cNvPicPr>
             <a:picLocks noChangeAspect="1"/>
           </p:cNvPicPr>
@@ -5490,7 +5580,7 @@
         <p:spPr>
           <a:xfrm>
             <a:off x="548640" y="1371600"/>
-            <a:ext cx="6949440" cy="4343400"/>
+            <a:ext cx="5120640" cy="3200400"/>
           </a:xfrm>
           <a:prstGeom prst="rect">
             <a:avLst/>
@@ -5504,34 +5594,9 @@
           </a:effectLst>
         </p:spPr>
       </p:pic>
-      <p:sp>
-        <p:nvSpPr>
-          <p:cNvPr id="4" name="obs-badge-0-circle"/>
-          <p:cNvSpPr/>
-          <p:nvPr/>
-        </p:nvSpPr>
-        <p:spPr>
-          <a:xfrm>
-            <a:off x="7863840" y="1371600"/>
-            <a:ext cx="502920" cy="502920"/>
-          </a:xfrm>
-          <a:prstGeom prst="ellipse">
-            <a:avLst/>
-          </a:prstGeom>
-          <a:solidFill>
-            <a:schemeClr val="accent2"/>
-          </a:solidFill>
-          <a:ln w="12700">
-            <a:solidFill>
-              <a:schemeClr val="accent2"/>
-            </a:solidFill>
-            <a:prstDash val="solid"/>
-          </a:ln>
-        </p:spPr>
-      </p:sp>
       <p:pic>
         <p:nvPicPr>
-          <p:cNvPr id="5" name="obs-badge-0-icon" descr="preencoded.png">    </p:cNvPr>
+          <p:cNvPr id="4" name="eks-kubectl-screenshot" descr="/Users/healthbay/Desktop/capstone/devsecops-python/demo/screenshots/eks-kubectl.png">    </p:cNvPr>
           <p:cNvPicPr>
             <a:picLocks noChangeAspect="1"/>
           </p:cNvPicPr>
@@ -5545,24 +5610,78 @@
         </p:blipFill>
         <p:spPr>
           <a:xfrm>
-            <a:off x="7989570" y="1497330"/>
-            <a:ext cx="251460" cy="251460"/>
-          </a:xfrm>
-          <a:prstGeom prst="rect">
-            <a:avLst/>
-          </a:prstGeom>
+            <a:off x="5989320" y="1371600"/>
+            <a:ext cx="5650992" cy="2293173"/>
+          </a:xfrm>
+          <a:prstGeom prst="rect">
+            <a:avLst/>
+          </a:prstGeom>
+          <a:effectLst>
+            <a:outerShdw sx="100000" sy="100000" kx="0" ky="0" algn="bl" rotWithShape="0" blurRad="152400" dist="38100" dir="5400000">
+              <a:srgbClr val="101828">
+                <a:alpha val="25000"/>
+              </a:srgbClr>
+            </a:outerShdw>
+          </a:effectLst>
         </p:spPr>
       </p:pic>
       <p:sp>
         <p:nvSpPr>
+          <p:cNvPr id="5" name="Text 1"/>
+          <p:cNvSpPr txBox="1"/>
+          <p:nvPr/>
+        </p:nvSpPr>
+        <p:spPr>
+          <a:xfrm>
+            <a:off x="548640" y="4846320"/>
+            <a:ext cx="11064240" cy="365760"/>
+          </a:xfrm>
+          <a:prstGeom prst="rect">
+            <a:avLst/>
+          </a:prstGeom>
+          <a:noFill/>
+          <a:ln/>
+        </p:spPr>
+        <p:txBody>
+          <a:bodyPr wrap="square" lIns="0" tIns="0" rIns="0" bIns="0" rtlCol="0" anchor="t"/>
+          <a:lstStyle/>
+          <a:p>
+            <a:pPr indent="0" marL="0">
+              <a:buNone/>
+            </a:pPr>
+            <a:r>
+              <a:rPr lang="en-US" sz="1300" b="1" dirty="0">
+                <a:solidFill>
+                  <a:schemeClr val="tx1"/>
+                </a:solidFill>
+              </a:rPr>
+              <a:t>terraform apply: </a:t>
+            </a:r>
+            <a:pPr indent="0" marL="0">
+              <a:buNone/>
+            </a:pPr>
+            <a:r>
+              <a:rPr lang="en-US" sz="1300" dirty="0">
+                <a:solidFill>
+                  <a:schemeClr val="tx2"/>
+                </a:solidFill>
+              </a:rPr>
+              <a:t>61 resources in ap-south-1 · EKS 1.35, 2× t3.medium (AL2023)</a:t>
+            </a:r>
+            <a:endParaRPr lang="en-US" sz="1300" dirty="0"/>
+          </a:p>
+        </p:txBody>
+      </p:sp>
+      <p:sp>
+        <p:nvSpPr>
           <p:cNvPr id="6" name="Text 2"/>
           <p:cNvSpPr txBox="1"/>
           <p:nvPr/>
         </p:nvSpPr>
         <p:spPr>
           <a:xfrm>
-            <a:off x="8549640" y="1353312"/>
-            <a:ext cx="3108960" cy="320040"/>
+            <a:off x="548640" y="5303520"/>
+            <a:ext cx="11064240" cy="548640"/>
           </a:xfrm>
           <a:prstGeom prst="rect">
             <a:avLst/>
@@ -5578,328 +5697,25 @@
               <a:buNone/>
             </a:pPr>
             <a:r>
-              <a:rPr lang="en-US" sz="1500" b="1" dirty="0">
+              <a:rPr lang="en-US" sz="1300" b="1" dirty="0">
                 <a:solidFill>
                   <a:schemeClr val="tx1"/>
                 </a:solidFill>
               </a:rPr>
-              <a:t>/metrics</a:t>
-            </a:r>
-            <a:endParaRPr lang="en-US" sz="1500" dirty="0"/>
-          </a:p>
-        </p:txBody>
-      </p:sp>
-      <p:sp>
-        <p:nvSpPr>
-          <p:cNvPr id="7" name="Text 3"/>
-          <p:cNvSpPr txBox="1"/>
-          <p:nvPr/>
-        </p:nvSpPr>
-        <p:spPr>
-          <a:xfrm>
-            <a:off x="8549640" y="1700784"/>
-            <a:ext cx="3108960" cy="1005840"/>
-          </a:xfrm>
-          <a:prstGeom prst="rect">
-            <a:avLst/>
-          </a:prstGeom>
-          <a:noFill/>
-          <a:ln/>
-        </p:spPr>
-        <p:txBody>
-          <a:bodyPr wrap="square" lIns="0" tIns="0" rIns="0" bIns="0" rtlCol="0" anchor="t"/>
-          <a:lstStyle/>
-          <a:p>
-            <a:pPr indent="0" marL="0">
-              <a:buNone/>
-            </a:pPr>
-            <a:r>
-              <a:rPr lang="en-US" sz="1250" dirty="0">
+              <a:t>Traffic path: </a:t>
+            </a:r>
+            <a:pPr indent="0" marL="0">
+              <a:buNone/>
+            </a:pPr>
+            <a:r>
+              <a:rPr lang="en-US" sz="1300" dirty="0">
                 <a:solidFill>
                   <a:schemeClr val="tx2"/>
                 </a:solidFill>
               </a:rPr>
-              <a:t>request count + latency histograms, and a business counter taskboard_task_events_total</a:t>
-            </a:r>
-            <a:endParaRPr lang="en-US" sz="1250" dirty="0"/>
-          </a:p>
-        </p:txBody>
-      </p:sp>
-      <p:sp>
-        <p:nvSpPr>
-          <p:cNvPr id="8" name="obs-badge-1-circle"/>
-          <p:cNvSpPr/>
-          <p:nvPr/>
-        </p:nvSpPr>
-        <p:spPr>
-          <a:xfrm>
-            <a:off x="7863840" y="2834640"/>
-            <a:ext cx="502920" cy="502920"/>
-          </a:xfrm>
-          <a:prstGeom prst="ellipse">
-            <a:avLst/>
-          </a:prstGeom>
-          <a:solidFill>
-            <a:schemeClr val="accent2"/>
-          </a:solidFill>
-          <a:ln w="12700">
-            <a:solidFill>
-              <a:schemeClr val="accent2"/>
-            </a:solidFill>
-            <a:prstDash val="solid"/>
-          </a:ln>
-        </p:spPr>
-      </p:sp>
-      <p:pic>
-        <p:nvPicPr>
-          <p:cNvPr id="9" name="obs-badge-1-icon" descr="preencoded.png">    </p:cNvPr>
-          <p:cNvPicPr>
-            <a:picLocks noChangeAspect="1"/>
-          </p:cNvPicPr>
-          <p:nvPr/>
-        </p:nvPicPr>
-        <p:blipFill>
-          <a:blip r:embed="rId3"/>
-          <a:stretch>
-            <a:fillRect/>
-          </a:stretch>
-        </p:blipFill>
-        <p:spPr>
-          <a:xfrm>
-            <a:off x="7989570" y="2960370"/>
-            <a:ext cx="251460" cy="251460"/>
-          </a:xfrm>
-          <a:prstGeom prst="rect">
-            <a:avLst/>
-          </a:prstGeom>
-        </p:spPr>
-      </p:pic>
-      <p:sp>
-        <p:nvSpPr>
-          <p:cNvPr id="10" name="Text 5"/>
-          <p:cNvSpPr txBox="1"/>
-          <p:nvPr/>
-        </p:nvSpPr>
-        <p:spPr>
-          <a:xfrm>
-            <a:off x="8549640" y="2816352"/>
-            <a:ext cx="3108960" cy="320040"/>
-          </a:xfrm>
-          <a:prstGeom prst="rect">
-            <a:avLst/>
-          </a:prstGeom>
-          <a:noFill/>
-          <a:ln/>
-        </p:spPr>
-        <p:txBody>
-          <a:bodyPr wrap="square" lIns="0" tIns="0" rIns="0" bIns="0" rtlCol="0" anchor="t"/>
-          <a:lstStyle/>
-          <a:p>
-            <a:pPr indent="0" marL="0">
-              <a:buNone/>
-            </a:pPr>
-            <a:r>
-              <a:rPr lang="en-US" sz="1500" b="1" dirty="0">
-                <a:solidFill>
-                  <a:schemeClr val="tx1"/>
-                </a:solidFill>
-              </a:rPr>
-              <a:t>ServiceMonitor</a:t>
-            </a:r>
-            <a:endParaRPr lang="en-US" sz="1500" dirty="0"/>
-          </a:p>
-        </p:txBody>
-      </p:sp>
-      <p:sp>
-        <p:nvSpPr>
-          <p:cNvPr id="11" name="Text 6"/>
-          <p:cNvSpPr txBox="1"/>
-          <p:nvPr/>
-        </p:nvSpPr>
-        <p:spPr>
-          <a:xfrm>
-            <a:off x="8549640" y="3163824"/>
-            <a:ext cx="3108960" cy="1005840"/>
-          </a:xfrm>
-          <a:prstGeom prst="rect">
-            <a:avLst/>
-          </a:prstGeom>
-          <a:noFill/>
-          <a:ln/>
-        </p:spPr>
-        <p:txBody>
-          <a:bodyPr wrap="square" lIns="0" tIns="0" rIns="0" bIns="0" rtlCol="0" anchor="t"/>
-          <a:lstStyle/>
-          <a:p>
-            <a:pPr indent="0" marL="0">
-              <a:buNone/>
-            </a:pPr>
-            <a:r>
-              <a:rPr lang="en-US" sz="1250" dirty="0">
-                <a:solidFill>
-                  <a:schemeClr val="tx2"/>
-                </a:solidFill>
-              </a:rPr>
-              <a:t>Prometheus Operator discovers every backend pod automatically — 4/4 targets UP after scaling</a:t>
-            </a:r>
-            <a:endParaRPr lang="en-US" sz="1250" dirty="0"/>
-          </a:p>
-        </p:txBody>
-      </p:sp>
-      <p:sp>
-        <p:nvSpPr>
-          <p:cNvPr id="12" name="obs-badge-2-circle"/>
-          <p:cNvSpPr/>
-          <p:nvPr/>
-        </p:nvSpPr>
-        <p:spPr>
-          <a:xfrm>
-            <a:off x="7863840" y="4297680"/>
-            <a:ext cx="502920" cy="502920"/>
-          </a:xfrm>
-          <a:prstGeom prst="ellipse">
-            <a:avLst/>
-          </a:prstGeom>
-          <a:solidFill>
-            <a:schemeClr val="accent2"/>
-          </a:solidFill>
-          <a:ln w="12700">
-            <a:solidFill>
-              <a:schemeClr val="accent2"/>
-            </a:solidFill>
-            <a:prstDash val="solid"/>
-          </a:ln>
-        </p:spPr>
-      </p:sp>
-      <p:pic>
-        <p:nvPicPr>
-          <p:cNvPr id="13" name="obs-badge-2-icon" descr="preencoded.png">    </p:cNvPr>
-          <p:cNvPicPr>
-            <a:picLocks noChangeAspect="1"/>
-          </p:cNvPicPr>
-          <p:nvPr/>
-        </p:nvPicPr>
-        <p:blipFill>
-          <a:blip r:embed="rId4"/>
-          <a:stretch>
-            <a:fillRect/>
-          </a:stretch>
-        </p:blipFill>
-        <p:spPr>
-          <a:xfrm>
-            <a:off x="7989570" y="4423410"/>
-            <a:ext cx="251460" cy="251460"/>
-          </a:xfrm>
-          <a:prstGeom prst="rect">
-            <a:avLst/>
-          </a:prstGeom>
-        </p:spPr>
-      </p:pic>
-      <p:sp>
-        <p:nvSpPr>
-          <p:cNvPr id="14" name="Text 8"/>
-          <p:cNvSpPr txBox="1"/>
-          <p:nvPr/>
-        </p:nvSpPr>
-        <p:spPr>
-          <a:xfrm>
-            <a:off x="8549640" y="4279392"/>
-            <a:ext cx="3108960" cy="320040"/>
-          </a:xfrm>
-          <a:prstGeom prst="rect">
-            <a:avLst/>
-          </a:prstGeom>
-          <a:noFill/>
-          <a:ln/>
-        </p:spPr>
-        <p:txBody>
-          <a:bodyPr wrap="square" lIns="0" tIns="0" rIns="0" bIns="0" rtlCol="0" anchor="t"/>
-          <a:lstStyle/>
-          <a:p>
-            <a:pPr indent="0" marL="0">
-              <a:buNone/>
-            </a:pPr>
-            <a:r>
-              <a:rPr lang="en-US" sz="1500" b="1" dirty="0">
-                <a:solidFill>
-                  <a:schemeClr val="tx1"/>
-                </a:solidFill>
-              </a:rPr>
-              <a:t>Dashboard as code</a:t>
-            </a:r>
-            <a:endParaRPr lang="en-US" sz="1500" dirty="0"/>
-          </a:p>
-        </p:txBody>
-      </p:sp>
-      <p:sp>
-        <p:nvSpPr>
-          <p:cNvPr id="15" name="Text 9"/>
-          <p:cNvSpPr txBox="1"/>
-          <p:nvPr/>
-        </p:nvSpPr>
-        <p:spPr>
-          <a:xfrm>
-            <a:off x="8549640" y="4626864"/>
-            <a:ext cx="3108960" cy="1005840"/>
-          </a:xfrm>
-          <a:prstGeom prst="rect">
-            <a:avLst/>
-          </a:prstGeom>
-          <a:noFill/>
-          <a:ln/>
-        </p:spPr>
-        <p:txBody>
-          <a:bodyPr wrap="square" lIns="0" tIns="0" rIns="0" bIns="0" rtlCol="0" anchor="t"/>
-          <a:lstStyle/>
-          <a:p>
-            <a:pPr indent="0" marL="0">
-              <a:buNone/>
-            </a:pPr>
-            <a:r>
-              <a:rPr lang="en-US" sz="1250" dirty="0">
-                <a:solidFill>
-                  <a:schemeClr val="tx2"/>
-                </a:solidFill>
-              </a:rPr>
-              <a:t>Grafana JSON ships in the Helm chart; the sidecar loads it, no clicking</a:t>
-            </a:r>
-            <a:endParaRPr lang="en-US" sz="1250" dirty="0"/>
-          </a:p>
-        </p:txBody>
-      </p:sp>
-      <p:sp>
-        <p:nvSpPr>
-          <p:cNvPr id="16" name="Text 10"/>
-          <p:cNvSpPr txBox="1"/>
-          <p:nvPr/>
-        </p:nvSpPr>
-        <p:spPr>
-          <a:xfrm>
-            <a:off x="548640" y="5806440"/>
-            <a:ext cx="6949440" cy="411480"/>
-          </a:xfrm>
-          <a:prstGeom prst="rect">
-            <a:avLst/>
-          </a:prstGeom>
-          <a:noFill/>
-          <a:ln/>
-        </p:spPr>
-        <p:txBody>
-          <a:bodyPr wrap="square" lIns="0" tIns="0" rIns="0" bIns="0" rtlCol="0" anchor="t"/>
-          <a:lstStyle/>
-          <a:p>
-            <a:pPr indent="0" marL="0">
-              <a:buNone/>
-            </a:pPr>
-            <a:r>
-              <a:rPr lang="en-US" sz="1100" i="1" dirty="0">
-                <a:solidFill>
-                  <a:schemeClr val="tx2"/>
-                </a:solidFill>
-              </a:rPr>
-              <a:t>Live panels: request rate, p95 latency, 5xx ratio, targets UP, per-endpoint traffic, status classes, CPU per pod</a:t>
-            </a:r>
-            <a:endParaRPr lang="en-US" sz="1100" dirty="0"/>
+              <a:t>AWS NLB → Traefik Ingress → frontend / backend pods · Argo CD Synced/Healthy · HPA scaled 2 → 3 under load</a:t>
+            </a:r>
+            <a:endParaRPr lang="en-US" sz="1300" dirty="0"/>
           </a:p>
         </p:txBody>
       </p:sp>
@@ -6005,106 +5821,223 @@
                   <a:schemeClr val="tx1"/>
                 </a:solidFill>
               </a:rPr>
-              <a:t>Autoscaling in action: 2 → 4 pods under load</a:t>
+              <a:t>Observability: Prometheus + Grafana</a:t>
             </a:r>
             <a:endParaRPr lang="en-US" sz="3400" dirty="0"/>
           </a:p>
         </p:txBody>
       </p:sp>
-      <p:sp>
-        <p:nvSpPr>
-          <p:cNvPr id="3" name="timeline"/>
+      <p:pic>
+        <p:nvPicPr>
+          <p:cNvPr id="3" name="grafana-screenshot" descr="/Users/healthbay/Desktop/capstone/devsecops-python/demo/screenshots/grafana-dashboard.png">    </p:cNvPr>
+          <p:cNvPicPr>
+            <a:picLocks noChangeAspect="1"/>
+          </p:cNvPicPr>
+          <p:nvPr/>
+        </p:nvPicPr>
+        <p:blipFill>
+          <a:blip r:embed="rId1"/>
+          <a:stretch>
+            <a:fillRect/>
+          </a:stretch>
+        </p:blipFill>
+        <p:spPr>
+          <a:xfrm>
+            <a:off x="548640" y="1371600"/>
+            <a:ext cx="6949440" cy="4343400"/>
+          </a:xfrm>
+          <a:prstGeom prst="rect">
+            <a:avLst/>
+          </a:prstGeom>
+          <a:effectLst>
+            <a:outerShdw sx="100000" sy="100000" kx="0" ky="0" algn="bl" rotWithShape="0" blurRad="152400" dist="38100" dir="5400000">
+              <a:srgbClr val="101828">
+                <a:alpha val="25000"/>
+              </a:srgbClr>
+            </a:outerShdw>
+          </a:effectLst>
+        </p:spPr>
+      </p:pic>
+      <p:sp>
+        <p:nvSpPr>
+          <p:cNvPr id="4" name="obs-badge-0-circle"/>
           <p:cNvSpPr/>
           <p:nvPr/>
         </p:nvSpPr>
         <p:spPr>
           <a:xfrm>
-            <a:off x="960120" y="2057400"/>
-            <a:ext cx="0" cy="3017520"/>
-          </a:xfrm>
-          <a:prstGeom prst="line">
-            <a:avLst/>
-          </a:prstGeom>
-          <a:noFill/>
-          <a:ln w="25400">
+            <a:off x="7863840" y="1371600"/>
+            <a:ext cx="502920" cy="502920"/>
+          </a:xfrm>
+          <a:prstGeom prst="ellipse">
+            <a:avLst/>
+          </a:prstGeom>
+          <a:solidFill>
+            <a:schemeClr val="accent2"/>
+          </a:solidFill>
+          <a:ln w="12700">
             <a:solidFill>
-              <a:schemeClr val="accent6"/>
+              <a:schemeClr val="accent2"/>
             </a:solidFill>
             <a:prstDash val="solid"/>
           </a:ln>
         </p:spPr>
       </p:sp>
-      <p:sp>
-        <p:nvSpPr>
-          <p:cNvPr id="4" name="replica-dot-0"/>
+      <p:pic>
+        <p:nvPicPr>
+          <p:cNvPr id="5" name="obs-badge-0-icon" descr="preencoded.png">    </p:cNvPr>
+          <p:cNvPicPr>
+            <a:picLocks noChangeAspect="1"/>
+          </p:cNvPicPr>
+          <p:nvPr/>
+        </p:nvPicPr>
+        <p:blipFill>
+          <a:blip r:embed="rId2"/>
+          <a:stretch>
+            <a:fillRect/>
+          </a:stretch>
+        </p:blipFill>
+        <p:spPr>
+          <a:xfrm>
+            <a:off x="7989570" y="1497330"/>
+            <a:ext cx="251460" cy="251460"/>
+          </a:xfrm>
+          <a:prstGeom prst="rect">
+            <a:avLst/>
+          </a:prstGeom>
+        </p:spPr>
+      </p:pic>
+      <p:sp>
+        <p:nvSpPr>
+          <p:cNvPr id="6" name="Text 2"/>
+          <p:cNvSpPr txBox="1"/>
+          <p:nvPr/>
+        </p:nvSpPr>
+        <p:spPr>
+          <a:xfrm>
+            <a:off x="8549640" y="1353312"/>
+            <a:ext cx="3108960" cy="320040"/>
+          </a:xfrm>
+          <a:prstGeom prst="rect">
+            <a:avLst/>
+          </a:prstGeom>
+          <a:noFill/>
+          <a:ln/>
+        </p:spPr>
+        <p:txBody>
+          <a:bodyPr wrap="square" lIns="0" tIns="0" rIns="0" bIns="0" rtlCol="0" anchor="t"/>
+          <a:lstStyle/>
+          <a:p>
+            <a:pPr indent="0" marL="0">
+              <a:buNone/>
+            </a:pPr>
+            <a:r>
+              <a:rPr lang="en-US" sz="1500" b="1" dirty="0">
+                <a:solidFill>
+                  <a:schemeClr val="tx1"/>
+                </a:solidFill>
+              </a:rPr>
+              <a:t>/metrics</a:t>
+            </a:r>
+            <a:endParaRPr lang="en-US" sz="1500" dirty="0"/>
+          </a:p>
+        </p:txBody>
+      </p:sp>
+      <p:sp>
+        <p:nvSpPr>
+          <p:cNvPr id="7" name="Text 3"/>
+          <p:cNvSpPr txBox="1"/>
+          <p:nvPr/>
+        </p:nvSpPr>
+        <p:spPr>
+          <a:xfrm>
+            <a:off x="8549640" y="1700784"/>
+            <a:ext cx="3108960" cy="1005840"/>
+          </a:xfrm>
+          <a:prstGeom prst="rect">
+            <a:avLst/>
+          </a:prstGeom>
+          <a:noFill/>
+          <a:ln/>
+        </p:spPr>
+        <p:txBody>
+          <a:bodyPr wrap="square" lIns="0" tIns="0" rIns="0" bIns="0" rtlCol="0" anchor="t"/>
+          <a:lstStyle/>
+          <a:p>
+            <a:pPr indent="0" marL="0">
+              <a:buNone/>
+            </a:pPr>
+            <a:r>
+              <a:rPr lang="en-US" sz="1250" dirty="0">
+                <a:solidFill>
+                  <a:schemeClr val="tx2"/>
+                </a:solidFill>
+              </a:rPr>
+              <a:t>request count + latency histograms, and a business counter taskboard_task_events_total</a:t>
+            </a:r>
+            <a:endParaRPr lang="en-US" sz="1250" dirty="0"/>
+          </a:p>
+        </p:txBody>
+      </p:sp>
+      <p:sp>
+        <p:nvSpPr>
+          <p:cNvPr id="8" name="obs-badge-1-circle"/>
           <p:cNvSpPr/>
           <p:nvPr/>
         </p:nvSpPr>
         <p:spPr>
           <a:xfrm>
-            <a:off x="548640" y="1463040"/>
-            <a:ext cx="822960" cy="822960"/>
+            <a:off x="7863840" y="2834640"/>
+            <a:ext cx="502920" cy="502920"/>
           </a:xfrm>
           <a:prstGeom prst="ellipse">
             <a:avLst/>
           </a:prstGeom>
           <a:solidFill>
-            <a:schemeClr val="accent6"/>
+            <a:schemeClr val="accent2"/>
           </a:solidFill>
-          <a:ln w="38100">
+          <a:ln w="12700">
             <a:solidFill>
-              <a:schemeClr val="bg1"/>
+              <a:schemeClr val="accent2"/>
             </a:solidFill>
             <a:prstDash val="solid"/>
           </a:ln>
         </p:spPr>
       </p:sp>
-      <p:sp>
-        <p:nvSpPr>
-          <p:cNvPr id="5" name="Text 3"/>
-          <p:cNvSpPr txBox="1"/>
-          <p:nvPr/>
-        </p:nvSpPr>
-        <p:spPr>
-          <a:xfrm>
-            <a:off x="548640" y="1463040"/>
-            <a:ext cx="822960" cy="822960"/>
-          </a:xfrm>
-          <a:prstGeom prst="rect">
-            <a:avLst/>
-          </a:prstGeom>
-          <a:noFill/>
-          <a:ln/>
-        </p:spPr>
-        <p:txBody>
-          <a:bodyPr wrap="square" lIns="0" tIns="0" rIns="0" bIns="0" rtlCol="0" anchor="ctr"/>
-          <a:lstStyle/>
-          <a:p>
-            <a:pPr algn="ctr" indent="0" marL="0">
-              <a:buNone/>
-            </a:pPr>
-            <a:r>
-              <a:rPr lang="en-US" sz="2600" b="1" dirty="0">
-                <a:solidFill>
-                  <a:schemeClr val="bg1"/>
-                </a:solidFill>
-              </a:rPr>
-              <a:t>2</a:t>
-            </a:r>
-            <a:endParaRPr lang="en-US" sz="2600" dirty="0"/>
-          </a:p>
-        </p:txBody>
-      </p:sp>
-      <p:sp>
-        <p:nvSpPr>
-          <p:cNvPr id="6" name="Text 4"/>
-          <p:cNvSpPr txBox="1"/>
-          <p:nvPr/>
-        </p:nvSpPr>
-        <p:spPr>
-          <a:xfrm>
-            <a:off x="1600200" y="1508760"/>
-            <a:ext cx="2743200" cy="320040"/>
+      <p:pic>
+        <p:nvPicPr>
+          <p:cNvPr id="9" name="obs-badge-1-icon" descr="preencoded.png">    </p:cNvPr>
+          <p:cNvPicPr>
+            <a:picLocks noChangeAspect="1"/>
+          </p:cNvPicPr>
+          <p:nvPr/>
+        </p:nvPicPr>
+        <p:blipFill>
+          <a:blip r:embed="rId3"/>
+          <a:stretch>
+            <a:fillRect/>
+          </a:stretch>
+        </p:blipFill>
+        <p:spPr>
+          <a:xfrm>
+            <a:off x="7989570" y="2960370"/>
+            <a:ext cx="251460" cy="251460"/>
+          </a:xfrm>
+          <a:prstGeom prst="rect">
+            <a:avLst/>
+          </a:prstGeom>
+        </p:spPr>
+      </p:pic>
+      <p:sp>
+        <p:nvSpPr>
+          <p:cNvPr id="10" name="Text 5"/>
+          <p:cNvSpPr txBox="1"/>
+          <p:nvPr/>
+        </p:nvSpPr>
+        <p:spPr>
+          <a:xfrm>
+            <a:off x="8549640" y="2816352"/>
+            <a:ext cx="3108960" cy="320040"/>
           </a:xfrm>
           <a:prstGeom prst="rect">
             <a:avLst/>
@@ -6125,7 +6058,7 @@
                   <a:schemeClr val="tx1"/>
                 </a:solidFill>
               </a:rPr>
-              <a:t>baseline</a:t>
+              <a:t>ServiceMonitor</a:t>
             </a:r>
             <a:endParaRPr lang="en-US" sz="1500" dirty="0"/>
           </a:p>
@@ -6133,14 +6066,14 @@
       </p:sp>
       <p:sp>
         <p:nvSpPr>
-          <p:cNvPr id="7" name="Text 5"/>
-          <p:cNvSpPr txBox="1"/>
-          <p:nvPr/>
-        </p:nvSpPr>
-        <p:spPr>
-          <a:xfrm>
-            <a:off x="1600200" y="1847088"/>
-            <a:ext cx="4754880" cy="365760"/>
+          <p:cNvPr id="11" name="Text 6"/>
+          <p:cNvSpPr txBox="1"/>
+          <p:nvPr/>
+        </p:nvSpPr>
+        <p:spPr>
+          <a:xfrm>
+            <a:off x="8549640" y="3163824"/>
+            <a:ext cx="3108960" cy="1005840"/>
           </a:xfrm>
           <a:prstGeom prst="rect">
             <a:avLst/>
@@ -6160,11 +6093,8 @@
                 <a:solidFill>
                   <a:schemeClr val="tx2"/>
                 </a:solidFill>
-                <a:latin typeface="Courier New" pitchFamily="34" charset="0"/>
-                <a:ea typeface="Courier New" pitchFamily="34" charset="-122"/>
-                <a:cs typeface="Courier New" pitchFamily="34" charset="-120"/>
-              </a:rPr>
-              <a:t>New size: 2; replicas below Spec.MinReplicas</a:t>
+              </a:rPr>
+              <a:t>Prometheus Operator discovers every backend pod automatically — 4/4 targets UP after scaling</a:t>
             </a:r>
             <a:endParaRPr lang="en-US" sz="1250" dirty="0"/>
           </a:p>
@@ -6172,14 +6102,14 @@
       </p:sp>
       <p:sp>
         <p:nvSpPr>
-          <p:cNvPr id="8" name="replica-dot-1"/>
+          <p:cNvPr id="12" name="obs-badge-2-circle"/>
           <p:cNvSpPr/>
           <p:nvPr/>
         </p:nvSpPr>
         <p:spPr>
           <a:xfrm>
-            <a:off x="548640" y="2880360"/>
-            <a:ext cx="822960" cy="822960"/>
+            <a:off x="7863840" y="4297680"/>
+            <a:ext cx="502920" cy="502920"/>
           </a:xfrm>
           <a:prstGeom prst="ellipse">
             <a:avLst/>
@@ -6187,60 +6117,48 @@
           <a:solidFill>
             <a:schemeClr val="accent2"/>
           </a:solidFill>
-          <a:ln w="38100">
+          <a:ln w="12700">
             <a:solidFill>
-              <a:schemeClr val="bg1"/>
+              <a:schemeClr val="accent2"/>
             </a:solidFill>
             <a:prstDash val="solid"/>
           </a:ln>
         </p:spPr>
       </p:sp>
-      <p:sp>
-        <p:nvSpPr>
-          <p:cNvPr id="9" name="Text 7"/>
-          <p:cNvSpPr txBox="1"/>
-          <p:nvPr/>
-        </p:nvSpPr>
-        <p:spPr>
-          <a:xfrm>
-            <a:off x="548640" y="2880360"/>
-            <a:ext cx="822960" cy="822960"/>
-          </a:xfrm>
-          <a:prstGeom prst="rect">
-            <a:avLst/>
-          </a:prstGeom>
-          <a:noFill/>
-          <a:ln/>
-        </p:spPr>
-        <p:txBody>
-          <a:bodyPr wrap="square" lIns="0" tIns="0" rIns="0" bIns="0" rtlCol="0" anchor="ctr"/>
-          <a:lstStyle/>
-          <a:p>
-            <a:pPr algn="ctr" indent="0" marL="0">
-              <a:buNone/>
-            </a:pPr>
-            <a:r>
-              <a:rPr lang="en-US" sz="2600" b="1" dirty="0">
-                <a:solidFill>
-                  <a:schemeClr val="bg1"/>
-                </a:solidFill>
-              </a:rPr>
-              <a:t>3</a:t>
-            </a:r>
-            <a:endParaRPr lang="en-US" sz="2600" dirty="0"/>
-          </a:p>
-        </p:txBody>
-      </p:sp>
-      <p:sp>
-        <p:nvSpPr>
-          <p:cNvPr id="10" name="Text 8"/>
-          <p:cNvSpPr txBox="1"/>
-          <p:nvPr/>
-        </p:nvSpPr>
-        <p:spPr>
-          <a:xfrm>
-            <a:off x="1600200" y="2926080"/>
-            <a:ext cx="2743200" cy="320040"/>
+      <p:pic>
+        <p:nvPicPr>
+          <p:cNvPr id="13" name="obs-badge-2-icon" descr="preencoded.png">    </p:cNvPr>
+          <p:cNvPicPr>
+            <a:picLocks noChangeAspect="1"/>
+          </p:cNvPicPr>
+          <p:nvPr/>
+        </p:nvPicPr>
+        <p:blipFill>
+          <a:blip r:embed="rId4"/>
+          <a:stretch>
+            <a:fillRect/>
+          </a:stretch>
+        </p:blipFill>
+        <p:spPr>
+          <a:xfrm>
+            <a:off x="7989570" y="4423410"/>
+            <a:ext cx="251460" cy="251460"/>
+          </a:xfrm>
+          <a:prstGeom prst="rect">
+            <a:avLst/>
+          </a:prstGeom>
+        </p:spPr>
+      </p:pic>
+      <p:sp>
+        <p:nvSpPr>
+          <p:cNvPr id="14" name="Text 8"/>
+          <p:cNvSpPr txBox="1"/>
+          <p:nvPr/>
+        </p:nvSpPr>
+        <p:spPr>
+          <a:xfrm>
+            <a:off x="8549640" y="4279392"/>
+            <a:ext cx="3108960" cy="320040"/>
           </a:xfrm>
           <a:prstGeom prst="rect">
             <a:avLst/>
@@ -6261,7 +6179,7 @@
                   <a:schemeClr val="tx1"/>
                 </a:solidFill>
               </a:rPr>
-              <a:t>+4m45s</a:t>
+              <a:t>Dashboard as code</a:t>
             </a:r>
             <a:endParaRPr lang="en-US" sz="1500" dirty="0"/>
           </a:p>
@@ -6269,14 +6187,14 @@
       </p:sp>
       <p:sp>
         <p:nvSpPr>
-          <p:cNvPr id="11" name="Text 9"/>
-          <p:cNvSpPr txBox="1"/>
-          <p:nvPr/>
-        </p:nvSpPr>
-        <p:spPr>
-          <a:xfrm>
-            <a:off x="1600200" y="3264408"/>
-            <a:ext cx="4754880" cy="365760"/>
+          <p:cNvPr id="15" name="Text 9"/>
+          <p:cNvSpPr txBox="1"/>
+          <p:nvPr/>
+        </p:nvSpPr>
+        <p:spPr>
+          <a:xfrm>
+            <a:off x="8549640" y="4626864"/>
+            <a:ext cx="3108960" cy="1005840"/>
           </a:xfrm>
           <a:prstGeom prst="rect">
             <a:avLst/>
@@ -6296,11 +6214,8 @@
                 <a:solidFill>
                   <a:schemeClr val="tx2"/>
                 </a:solidFill>
-                <a:latin typeface="Courier New" pitchFamily="34" charset="0"/>
-                <a:ea typeface="Courier New" pitchFamily="34" charset="-122"/>
-                <a:cs typeface="Courier New" pitchFamily="34" charset="-120"/>
-              </a:rPr>
-              <a:t>New size: 3; cpu utilization above target</a:t>
+              </a:rPr>
+              <a:t>Grafana JSON ships in the Helm chart; the sidecar loads it, no clicking</a:t>
             </a:r>
             <a:endParaRPr lang="en-US" sz="1250" dirty="0"/>
           </a:p>
@@ -6308,75 +6223,14 @@
       </p:sp>
       <p:sp>
         <p:nvSpPr>
-          <p:cNvPr id="12" name="replica-dot-2"/>
-          <p:cNvSpPr/>
-          <p:nvPr/>
-        </p:nvSpPr>
-        <p:spPr>
-          <a:xfrm>
-            <a:off x="548640" y="4297680"/>
-            <a:ext cx="822960" cy="822960"/>
-          </a:xfrm>
-          <a:prstGeom prst="ellipse">
-            <a:avLst/>
-          </a:prstGeom>
-          <a:solidFill>
-            <a:schemeClr val="accent1"/>
-          </a:solidFill>
-          <a:ln w="38100">
-            <a:solidFill>
-              <a:schemeClr val="bg1"/>
-            </a:solidFill>
-            <a:prstDash val="solid"/>
-          </a:ln>
-        </p:spPr>
-      </p:sp>
-      <p:sp>
-        <p:nvSpPr>
-          <p:cNvPr id="13" name="Text 11"/>
-          <p:cNvSpPr txBox="1"/>
-          <p:nvPr/>
-        </p:nvSpPr>
-        <p:spPr>
-          <a:xfrm>
-            <a:off x="548640" y="4297680"/>
-            <a:ext cx="822960" cy="822960"/>
-          </a:xfrm>
-          <a:prstGeom prst="rect">
-            <a:avLst/>
-          </a:prstGeom>
-          <a:noFill/>
-          <a:ln/>
-        </p:spPr>
-        <p:txBody>
-          <a:bodyPr wrap="square" lIns="0" tIns="0" rIns="0" bIns="0" rtlCol="0" anchor="ctr"/>
-          <a:lstStyle/>
-          <a:p>
-            <a:pPr algn="ctr" indent="0" marL="0">
-              <a:buNone/>
-            </a:pPr>
-            <a:r>
-              <a:rPr lang="en-US" sz="2600" b="1" dirty="0">
-                <a:solidFill>
-                  <a:schemeClr val="bg1"/>
-                </a:solidFill>
-              </a:rPr>
-              <a:t>4</a:t>
-            </a:r>
-            <a:endParaRPr lang="en-US" sz="2600" dirty="0"/>
-          </a:p>
-        </p:txBody>
-      </p:sp>
-      <p:sp>
-        <p:nvSpPr>
-          <p:cNvPr id="14" name="Text 12"/>
-          <p:cNvSpPr txBox="1"/>
-          <p:nvPr/>
-        </p:nvSpPr>
-        <p:spPr>
-          <a:xfrm>
-            <a:off x="1600200" y="4343400"/>
-            <a:ext cx="2743200" cy="320040"/>
+          <p:cNvPr id="16" name="Text 10"/>
+          <p:cNvSpPr txBox="1"/>
+          <p:nvPr/>
+        </p:nvSpPr>
+        <p:spPr>
+          <a:xfrm>
+            <a:off x="548640" y="5806440"/>
+            <a:ext cx="6949440" cy="411480"/>
           </a:xfrm>
           <a:prstGeom prst="rect">
             <a:avLst/>
@@ -6392,246 +6246,12 @@
               <a:buNone/>
             </a:pPr>
             <a:r>
-              <a:rPr lang="en-US" sz="1500" b="1" dirty="0">
-                <a:solidFill>
-                  <a:schemeClr val="tx1"/>
-                </a:solidFill>
-              </a:rPr>
-              <a:t>+6m31s</a:t>
-            </a:r>
-            <a:endParaRPr lang="en-US" sz="1500" dirty="0"/>
-          </a:p>
-        </p:txBody>
-      </p:sp>
-      <p:sp>
-        <p:nvSpPr>
-          <p:cNvPr id="15" name="Text 13"/>
-          <p:cNvSpPr txBox="1"/>
-          <p:nvPr/>
-        </p:nvSpPr>
-        <p:spPr>
-          <a:xfrm>
-            <a:off x="1600200" y="4681728"/>
-            <a:ext cx="4754880" cy="365760"/>
-          </a:xfrm>
-          <a:prstGeom prst="rect">
-            <a:avLst/>
-          </a:prstGeom>
-          <a:noFill/>
-          <a:ln/>
-        </p:spPr>
-        <p:txBody>
-          <a:bodyPr wrap="square" lIns="0" tIns="0" rIns="0" bIns="0" rtlCol="0" anchor="t"/>
-          <a:lstStyle/>
-          <a:p>
-            <a:pPr indent="0" marL="0">
-              <a:buNone/>
-            </a:pPr>
-            <a:r>
-              <a:rPr lang="en-US" sz="1250" dirty="0">
+              <a:rPr lang="en-US" sz="1100" i="1" dirty="0">
                 <a:solidFill>
                   <a:schemeClr val="tx2"/>
                 </a:solidFill>
-                <a:latin typeface="Courier New" pitchFamily="34" charset="0"/>
-                <a:ea typeface="Courier New" pitchFamily="34" charset="-122"/>
-                <a:cs typeface="Courier New" pitchFamily="34" charset="-120"/>
-              </a:rPr>
-              <a:t>New size: 4; cpu utilization above target</a:t>
-            </a:r>
-            <a:endParaRPr lang="en-US" sz="1250" dirty="0"/>
-          </a:p>
-        </p:txBody>
-      </p:sp>
-      <p:sp>
-        <p:nvSpPr>
-          <p:cNvPr id="16" name="hpa-card"/>
-          <p:cNvSpPr/>
-          <p:nvPr/>
-        </p:nvSpPr>
-        <p:spPr>
-          <a:xfrm>
-            <a:off x="6766560" y="1463040"/>
-            <a:ext cx="4873752" cy="4023360"/>
-          </a:xfrm>
-          <a:prstGeom prst="roundRect">
-            <a:avLst>
-              <a:gd name="adj" fmla="val 2727"/>
-            </a:avLst>
-          </a:prstGeom>
-          <a:solidFill>
-            <a:schemeClr val="bg2"/>
-          </a:solidFill>
-          <a:ln w="12700">
-            <a:solidFill>
-              <a:schemeClr val="bg2"/>
-            </a:solidFill>
-            <a:prstDash val="solid"/>
-          </a:ln>
-        </p:spPr>
-      </p:sp>
-      <p:sp>
-        <p:nvSpPr>
-          <p:cNvPr id="17" name="Text 15"/>
-          <p:cNvSpPr txBox="1"/>
-          <p:nvPr/>
-        </p:nvSpPr>
-        <p:spPr>
-          <a:xfrm>
-            <a:off x="7086600" y="1737360"/>
-            <a:ext cx="4297680" cy="3566160"/>
-          </a:xfrm>
-          <a:prstGeom prst="rect">
-            <a:avLst/>
-          </a:prstGeom>
-          <a:noFill/>
-          <a:ln/>
-        </p:spPr>
-        <p:txBody>
-          <a:bodyPr wrap="square" lIns="0" tIns="0" rIns="0" bIns="0" rtlCol="0" anchor="t"/>
-          <a:lstStyle/>
-          <a:p>
-            <a:pPr indent="0" marL="0">
-              <a:spcAft>
-                <a:spcPts val="800"/>
-              </a:spcAft>
-              <a:buNone/>
-            </a:pPr>
-            <a:r>
-              <a:rPr lang="en-US" sz="1800" b="1" dirty="0">
-                <a:solidFill>
-                  <a:schemeClr val="tx1"/>
-                </a:solidFill>
-              </a:rPr>
-              <a:t>How it works</a:t>
-            </a:r>
-            <a:endParaRPr lang="en-US" sz="1400" dirty="0"/>
-          </a:p>
-          <a:p>
-            <a:pPr marL="342900" indent="-342900">
-              <a:spcAft>
-                <a:spcPts val="800"/>
-              </a:spcAft>
-              <a:buSzPct val="100000"/>
-              <a:buChar char="•"/>
-            </a:pPr>
-            <a:r>
-              <a:rPr lang="en-US" sz="1400" dirty="0">
-                <a:solidFill>
-                  <a:schemeClr val="tx2"/>
-                </a:solidFill>
-              </a:rPr>
-              <a:t>metrics-server reports pod CPU against the 100m request</a:t>
-            </a:r>
-            <a:endParaRPr lang="en-US" sz="1400" dirty="0"/>
-          </a:p>
-          <a:p>
-            <a:pPr marL="342900" indent="-342900">
-              <a:spcAft>
-                <a:spcPts val="800"/>
-              </a:spcAft>
-              <a:buSzPct val="100000"/>
-              <a:buChar char="•"/>
-            </a:pPr>
-            <a:r>
-              <a:rPr lang="en-US" sz="1400" dirty="0">
-                <a:solidFill>
-                  <a:schemeClr val="tx2"/>
-                </a:solidFill>
-              </a:rPr>
-              <a:t>HPA targets 60 % average utilisation, min 2, max 6</a:t>
-            </a:r>
-            <a:endParaRPr lang="en-US" sz="1400" dirty="0"/>
-          </a:p>
-          <a:p>
-            <a:pPr marL="342900" indent="-342900">
-              <a:spcAft>
-                <a:spcPts val="800"/>
-              </a:spcAft>
-              <a:buSzPct val="100000"/>
-              <a:buChar char="•"/>
-            </a:pPr>
-            <a:r>
-              <a:rPr lang="en-US" sz="1400" dirty="0">
-                <a:solidFill>
-                  <a:schemeClr val="tx2"/>
-                </a:solidFill>
-              </a:rPr>
-              <a:t>scripts/load-test.sh drives /api traffic through the Ingress</a:t>
-            </a:r>
-            <a:endParaRPr lang="en-US" sz="1400" dirty="0"/>
-          </a:p>
-          <a:p>
-            <a:pPr marL="342900" indent="-342900">
-              <a:spcAft>
-                <a:spcPts val="800"/>
-              </a:spcAft>
-              <a:buSzPct val="100000"/>
-              <a:buChar char="•"/>
-            </a:pPr>
-            <a:r>
-              <a:rPr lang="en-US" sz="1400" dirty="0">
-                <a:solidFill>
-                  <a:schemeClr val="tx2"/>
-                </a:solidFill>
-              </a:rPr>
-              <a:t>Prometheus picked up each new pod as a target with no config change</a:t>
-            </a:r>
-            <a:endParaRPr lang="en-US" sz="1400" dirty="0"/>
-          </a:p>
-          <a:p>
-            <a:pPr marL="342900" indent="-342900">
-              <a:spcAft>
-                <a:spcPts val="800"/>
-              </a:spcAft>
-              <a:buSzPct val="100000"/>
-              <a:buChar char="•"/>
-            </a:pPr>
-            <a:r>
-              <a:rPr lang="en-US" sz="1400" dirty="0">
-                <a:solidFill>
-                  <a:schemeClr val="tx2"/>
-                </a:solidFill>
-              </a:rPr>
-              <a:t>Scale-down waits 5 minutes (stabilisation window)</a:t>
-            </a:r>
-            <a:endParaRPr lang="en-US" sz="1400" dirty="0"/>
-          </a:p>
-        </p:txBody>
-      </p:sp>
-      <p:sp>
-        <p:nvSpPr>
-          <p:cNvPr id="18" name="Text 16"/>
-          <p:cNvSpPr txBox="1"/>
-          <p:nvPr/>
-        </p:nvSpPr>
-        <p:spPr>
-          <a:xfrm>
-            <a:off x="548640" y="5760720"/>
-            <a:ext cx="8229600" cy="320040"/>
-          </a:xfrm>
-          <a:prstGeom prst="rect">
-            <a:avLst/>
-          </a:prstGeom>
-          <a:noFill/>
-          <a:ln/>
-        </p:spPr>
-        <p:txBody>
-          <a:bodyPr wrap="square" lIns="0" tIns="0" rIns="0" bIns="0" rtlCol="0" anchor="t"/>
-          <a:lstStyle/>
-          <a:p>
-            <a:pPr indent="0" marL="0">
-              <a:buNone/>
-            </a:pPr>
-            <a:r>
-              <a:rPr lang="en-US" sz="1100" i="1" dirty="0">
-                <a:solidFill>
-                  <a:schemeClr val="tx2"/>
-                </a:solidFill>
-                <a:latin typeface="Courier New" pitchFamily="34" charset="0"/>
-                <a:ea typeface="Courier New" pitchFamily="34" charset="-122"/>
-                <a:cs typeface="Courier New" pitchFamily="34" charset="-120"/>
-              </a:rPr>
-              <a:t>kubectl get events -n taskboard --field-selector reason=SuccessfulRescale</a:t>
+              </a:rPr>
+              <a:t>Live panels: request rate, p95 latency, 5xx ratio, targets UP, per-endpoint traffic, status classes, CPU per pod</a:t>
             </a:r>
             <a:endParaRPr lang="en-US" sz="1100" dirty="0"/>
           </a:p>
@@ -6739,7 +6359,7 @@
                   <a:schemeClr val="tx1"/>
                 </a:solidFill>
               </a:rPr>
-              <a:t>Making it work: 12 defects found and fixed</a:t>
+              <a:t>Autoscaling in action: 2 → 4 pods under load</a:t>
             </a:r>
             <a:endParaRPr lang="en-US" sz="3400" dirty="0"/>
           </a:p>
@@ -6747,18 +6367,449 @@
       </p:sp>
       <p:sp>
         <p:nvSpPr>
-          <p:cNvPr id="3" name="bug-card-0"/>
+          <p:cNvPr id="3" name="timeline"/>
           <p:cNvSpPr/>
           <p:nvPr/>
         </p:nvSpPr>
         <p:spPr>
           <a:xfrm>
-            <a:off x="548640" y="1371600"/>
-            <a:ext cx="3566160" cy="1005840"/>
+            <a:off x="960120" y="2057400"/>
+            <a:ext cx="0" cy="3017520"/>
+          </a:xfrm>
+          <a:prstGeom prst="line">
+            <a:avLst/>
+          </a:prstGeom>
+          <a:noFill/>
+          <a:ln w="25400">
+            <a:solidFill>
+              <a:schemeClr val="accent6"/>
+            </a:solidFill>
+            <a:prstDash val="solid"/>
+          </a:ln>
+        </p:spPr>
+      </p:sp>
+      <p:sp>
+        <p:nvSpPr>
+          <p:cNvPr id="4" name="replica-dot-0"/>
+          <p:cNvSpPr/>
+          <p:nvPr/>
+        </p:nvSpPr>
+        <p:spPr>
+          <a:xfrm>
+            <a:off x="548640" y="1463040"/>
+            <a:ext cx="822960" cy="822960"/>
+          </a:xfrm>
+          <a:prstGeom prst="ellipse">
+            <a:avLst/>
+          </a:prstGeom>
+          <a:solidFill>
+            <a:schemeClr val="accent6"/>
+          </a:solidFill>
+          <a:ln w="38100">
+            <a:solidFill>
+              <a:schemeClr val="bg1"/>
+            </a:solidFill>
+            <a:prstDash val="solid"/>
+          </a:ln>
+        </p:spPr>
+      </p:sp>
+      <p:sp>
+        <p:nvSpPr>
+          <p:cNvPr id="5" name="Text 3"/>
+          <p:cNvSpPr txBox="1"/>
+          <p:nvPr/>
+        </p:nvSpPr>
+        <p:spPr>
+          <a:xfrm>
+            <a:off x="548640" y="1463040"/>
+            <a:ext cx="822960" cy="822960"/>
+          </a:xfrm>
+          <a:prstGeom prst="rect">
+            <a:avLst/>
+          </a:prstGeom>
+          <a:noFill/>
+          <a:ln/>
+        </p:spPr>
+        <p:txBody>
+          <a:bodyPr wrap="square" lIns="0" tIns="0" rIns="0" bIns="0" rtlCol="0" anchor="ctr"/>
+          <a:lstStyle/>
+          <a:p>
+            <a:pPr algn="ctr" indent="0" marL="0">
+              <a:buNone/>
+            </a:pPr>
+            <a:r>
+              <a:rPr lang="en-US" sz="2600" b="1" dirty="0">
+                <a:solidFill>
+                  <a:schemeClr val="bg1"/>
+                </a:solidFill>
+              </a:rPr>
+              <a:t>2</a:t>
+            </a:r>
+            <a:endParaRPr lang="en-US" sz="2600" dirty="0"/>
+          </a:p>
+        </p:txBody>
+      </p:sp>
+      <p:sp>
+        <p:nvSpPr>
+          <p:cNvPr id="6" name="Text 4"/>
+          <p:cNvSpPr txBox="1"/>
+          <p:nvPr/>
+        </p:nvSpPr>
+        <p:spPr>
+          <a:xfrm>
+            <a:off x="1600200" y="1508760"/>
+            <a:ext cx="2743200" cy="320040"/>
+          </a:xfrm>
+          <a:prstGeom prst="rect">
+            <a:avLst/>
+          </a:prstGeom>
+          <a:noFill/>
+          <a:ln/>
+        </p:spPr>
+        <p:txBody>
+          <a:bodyPr wrap="square" lIns="0" tIns="0" rIns="0" bIns="0" rtlCol="0" anchor="t"/>
+          <a:lstStyle/>
+          <a:p>
+            <a:pPr indent="0" marL="0">
+              <a:buNone/>
+            </a:pPr>
+            <a:r>
+              <a:rPr lang="en-US" sz="1500" b="1" dirty="0">
+                <a:solidFill>
+                  <a:schemeClr val="tx1"/>
+                </a:solidFill>
+              </a:rPr>
+              <a:t>baseline</a:t>
+            </a:r>
+            <a:endParaRPr lang="en-US" sz="1500" dirty="0"/>
+          </a:p>
+        </p:txBody>
+      </p:sp>
+      <p:sp>
+        <p:nvSpPr>
+          <p:cNvPr id="7" name="Text 5"/>
+          <p:cNvSpPr txBox="1"/>
+          <p:nvPr/>
+        </p:nvSpPr>
+        <p:spPr>
+          <a:xfrm>
+            <a:off x="1600200" y="1847088"/>
+            <a:ext cx="4754880" cy="365760"/>
+          </a:xfrm>
+          <a:prstGeom prst="rect">
+            <a:avLst/>
+          </a:prstGeom>
+          <a:noFill/>
+          <a:ln/>
+        </p:spPr>
+        <p:txBody>
+          <a:bodyPr wrap="square" lIns="0" tIns="0" rIns="0" bIns="0" rtlCol="0" anchor="t"/>
+          <a:lstStyle/>
+          <a:p>
+            <a:pPr indent="0" marL="0">
+              <a:buNone/>
+            </a:pPr>
+            <a:r>
+              <a:rPr lang="en-US" sz="1250" dirty="0">
+                <a:solidFill>
+                  <a:schemeClr val="tx2"/>
+                </a:solidFill>
+                <a:latin typeface="Courier New" pitchFamily="34" charset="0"/>
+                <a:ea typeface="Courier New" pitchFamily="34" charset="-122"/>
+                <a:cs typeface="Courier New" pitchFamily="34" charset="-120"/>
+              </a:rPr>
+              <a:t>New size: 2; replicas below Spec.MinReplicas</a:t>
+            </a:r>
+            <a:endParaRPr lang="en-US" sz="1250" dirty="0"/>
+          </a:p>
+        </p:txBody>
+      </p:sp>
+      <p:sp>
+        <p:nvSpPr>
+          <p:cNvPr id="8" name="replica-dot-1"/>
+          <p:cNvSpPr/>
+          <p:nvPr/>
+        </p:nvSpPr>
+        <p:spPr>
+          <a:xfrm>
+            <a:off x="548640" y="2880360"/>
+            <a:ext cx="822960" cy="822960"/>
+          </a:xfrm>
+          <a:prstGeom prst="ellipse">
+            <a:avLst/>
+          </a:prstGeom>
+          <a:solidFill>
+            <a:schemeClr val="accent2"/>
+          </a:solidFill>
+          <a:ln w="38100">
+            <a:solidFill>
+              <a:schemeClr val="bg1"/>
+            </a:solidFill>
+            <a:prstDash val="solid"/>
+          </a:ln>
+        </p:spPr>
+      </p:sp>
+      <p:sp>
+        <p:nvSpPr>
+          <p:cNvPr id="9" name="Text 7"/>
+          <p:cNvSpPr txBox="1"/>
+          <p:nvPr/>
+        </p:nvSpPr>
+        <p:spPr>
+          <a:xfrm>
+            <a:off x="548640" y="2880360"/>
+            <a:ext cx="822960" cy="822960"/>
+          </a:xfrm>
+          <a:prstGeom prst="rect">
+            <a:avLst/>
+          </a:prstGeom>
+          <a:noFill/>
+          <a:ln/>
+        </p:spPr>
+        <p:txBody>
+          <a:bodyPr wrap="square" lIns="0" tIns="0" rIns="0" bIns="0" rtlCol="0" anchor="ctr"/>
+          <a:lstStyle/>
+          <a:p>
+            <a:pPr algn="ctr" indent="0" marL="0">
+              <a:buNone/>
+            </a:pPr>
+            <a:r>
+              <a:rPr lang="en-US" sz="2600" b="1" dirty="0">
+                <a:solidFill>
+                  <a:schemeClr val="bg1"/>
+                </a:solidFill>
+              </a:rPr>
+              <a:t>3</a:t>
+            </a:r>
+            <a:endParaRPr lang="en-US" sz="2600" dirty="0"/>
+          </a:p>
+        </p:txBody>
+      </p:sp>
+      <p:sp>
+        <p:nvSpPr>
+          <p:cNvPr id="10" name="Text 8"/>
+          <p:cNvSpPr txBox="1"/>
+          <p:nvPr/>
+        </p:nvSpPr>
+        <p:spPr>
+          <a:xfrm>
+            <a:off x="1600200" y="2926080"/>
+            <a:ext cx="2743200" cy="320040"/>
+          </a:xfrm>
+          <a:prstGeom prst="rect">
+            <a:avLst/>
+          </a:prstGeom>
+          <a:noFill/>
+          <a:ln/>
+        </p:spPr>
+        <p:txBody>
+          <a:bodyPr wrap="square" lIns="0" tIns="0" rIns="0" bIns="0" rtlCol="0" anchor="t"/>
+          <a:lstStyle/>
+          <a:p>
+            <a:pPr indent="0" marL="0">
+              <a:buNone/>
+            </a:pPr>
+            <a:r>
+              <a:rPr lang="en-US" sz="1500" b="1" dirty="0">
+                <a:solidFill>
+                  <a:schemeClr val="tx1"/>
+                </a:solidFill>
+              </a:rPr>
+              <a:t>+4m45s</a:t>
+            </a:r>
+            <a:endParaRPr lang="en-US" sz="1500" dirty="0"/>
+          </a:p>
+        </p:txBody>
+      </p:sp>
+      <p:sp>
+        <p:nvSpPr>
+          <p:cNvPr id="11" name="Text 9"/>
+          <p:cNvSpPr txBox="1"/>
+          <p:nvPr/>
+        </p:nvSpPr>
+        <p:spPr>
+          <a:xfrm>
+            <a:off x="1600200" y="3264408"/>
+            <a:ext cx="4754880" cy="365760"/>
+          </a:xfrm>
+          <a:prstGeom prst="rect">
+            <a:avLst/>
+          </a:prstGeom>
+          <a:noFill/>
+          <a:ln/>
+        </p:spPr>
+        <p:txBody>
+          <a:bodyPr wrap="square" lIns="0" tIns="0" rIns="0" bIns="0" rtlCol="0" anchor="t"/>
+          <a:lstStyle/>
+          <a:p>
+            <a:pPr indent="0" marL="0">
+              <a:buNone/>
+            </a:pPr>
+            <a:r>
+              <a:rPr lang="en-US" sz="1250" dirty="0">
+                <a:solidFill>
+                  <a:schemeClr val="tx2"/>
+                </a:solidFill>
+                <a:latin typeface="Courier New" pitchFamily="34" charset="0"/>
+                <a:ea typeface="Courier New" pitchFamily="34" charset="-122"/>
+                <a:cs typeface="Courier New" pitchFamily="34" charset="-120"/>
+              </a:rPr>
+              <a:t>New size: 3; cpu utilization above target</a:t>
+            </a:r>
+            <a:endParaRPr lang="en-US" sz="1250" dirty="0"/>
+          </a:p>
+        </p:txBody>
+      </p:sp>
+      <p:sp>
+        <p:nvSpPr>
+          <p:cNvPr id="12" name="replica-dot-2"/>
+          <p:cNvSpPr/>
+          <p:nvPr/>
+        </p:nvSpPr>
+        <p:spPr>
+          <a:xfrm>
+            <a:off x="548640" y="4297680"/>
+            <a:ext cx="822960" cy="822960"/>
+          </a:xfrm>
+          <a:prstGeom prst="ellipse">
+            <a:avLst/>
+          </a:prstGeom>
+          <a:solidFill>
+            <a:schemeClr val="accent1"/>
+          </a:solidFill>
+          <a:ln w="38100">
+            <a:solidFill>
+              <a:schemeClr val="bg1"/>
+            </a:solidFill>
+            <a:prstDash val="solid"/>
+          </a:ln>
+        </p:spPr>
+      </p:sp>
+      <p:sp>
+        <p:nvSpPr>
+          <p:cNvPr id="13" name="Text 11"/>
+          <p:cNvSpPr txBox="1"/>
+          <p:nvPr/>
+        </p:nvSpPr>
+        <p:spPr>
+          <a:xfrm>
+            <a:off x="548640" y="4297680"/>
+            <a:ext cx="822960" cy="822960"/>
+          </a:xfrm>
+          <a:prstGeom prst="rect">
+            <a:avLst/>
+          </a:prstGeom>
+          <a:noFill/>
+          <a:ln/>
+        </p:spPr>
+        <p:txBody>
+          <a:bodyPr wrap="square" lIns="0" tIns="0" rIns="0" bIns="0" rtlCol="0" anchor="ctr"/>
+          <a:lstStyle/>
+          <a:p>
+            <a:pPr algn="ctr" indent="0" marL="0">
+              <a:buNone/>
+            </a:pPr>
+            <a:r>
+              <a:rPr lang="en-US" sz="2600" b="1" dirty="0">
+                <a:solidFill>
+                  <a:schemeClr val="bg1"/>
+                </a:solidFill>
+              </a:rPr>
+              <a:t>4</a:t>
+            </a:r>
+            <a:endParaRPr lang="en-US" sz="2600" dirty="0"/>
+          </a:p>
+        </p:txBody>
+      </p:sp>
+      <p:sp>
+        <p:nvSpPr>
+          <p:cNvPr id="14" name="Text 12"/>
+          <p:cNvSpPr txBox="1"/>
+          <p:nvPr/>
+        </p:nvSpPr>
+        <p:spPr>
+          <a:xfrm>
+            <a:off x="1600200" y="4343400"/>
+            <a:ext cx="2743200" cy="320040"/>
+          </a:xfrm>
+          <a:prstGeom prst="rect">
+            <a:avLst/>
+          </a:prstGeom>
+          <a:noFill/>
+          <a:ln/>
+        </p:spPr>
+        <p:txBody>
+          <a:bodyPr wrap="square" lIns="0" tIns="0" rIns="0" bIns="0" rtlCol="0" anchor="t"/>
+          <a:lstStyle/>
+          <a:p>
+            <a:pPr indent="0" marL="0">
+              <a:buNone/>
+            </a:pPr>
+            <a:r>
+              <a:rPr lang="en-US" sz="1500" b="1" dirty="0">
+                <a:solidFill>
+                  <a:schemeClr val="tx1"/>
+                </a:solidFill>
+              </a:rPr>
+              <a:t>+6m31s</a:t>
+            </a:r>
+            <a:endParaRPr lang="en-US" sz="1500" dirty="0"/>
+          </a:p>
+        </p:txBody>
+      </p:sp>
+      <p:sp>
+        <p:nvSpPr>
+          <p:cNvPr id="15" name="Text 13"/>
+          <p:cNvSpPr txBox="1"/>
+          <p:nvPr/>
+        </p:nvSpPr>
+        <p:spPr>
+          <a:xfrm>
+            <a:off x="1600200" y="4681728"/>
+            <a:ext cx="4754880" cy="365760"/>
+          </a:xfrm>
+          <a:prstGeom prst="rect">
+            <a:avLst/>
+          </a:prstGeom>
+          <a:noFill/>
+          <a:ln/>
+        </p:spPr>
+        <p:txBody>
+          <a:bodyPr wrap="square" lIns="0" tIns="0" rIns="0" bIns="0" rtlCol="0" anchor="t"/>
+          <a:lstStyle/>
+          <a:p>
+            <a:pPr indent="0" marL="0">
+              <a:buNone/>
+            </a:pPr>
+            <a:r>
+              <a:rPr lang="en-US" sz="1250" dirty="0">
+                <a:solidFill>
+                  <a:schemeClr val="tx2"/>
+                </a:solidFill>
+                <a:latin typeface="Courier New" pitchFamily="34" charset="0"/>
+                <a:ea typeface="Courier New" pitchFamily="34" charset="-122"/>
+                <a:cs typeface="Courier New" pitchFamily="34" charset="-120"/>
+              </a:rPr>
+              <a:t>New size: 4; cpu utilization above target</a:t>
+            </a:r>
+            <a:endParaRPr lang="en-US" sz="1250" dirty="0"/>
+          </a:p>
+        </p:txBody>
+      </p:sp>
+      <p:sp>
+        <p:nvSpPr>
+          <p:cNvPr id="16" name="hpa-card"/>
+          <p:cNvSpPr/>
+          <p:nvPr/>
+        </p:nvSpPr>
+        <p:spPr>
+          <a:xfrm>
+            <a:off x="6766560" y="1463040"/>
+            <a:ext cx="4873752" cy="4023360"/>
           </a:xfrm>
           <a:prstGeom prst="roundRect">
             <a:avLst>
-              <a:gd name="adj" fmla="val 10909"/>
+              <a:gd name="adj" fmla="val 2727"/>
             </a:avLst>
           </a:prstGeom>
           <a:solidFill>
@@ -6774,63 +6825,14 @@
       </p:sp>
       <p:sp>
         <p:nvSpPr>
-          <p:cNvPr id="4" name="bug-badge-0-circle"/>
-          <p:cNvSpPr/>
-          <p:nvPr/>
-        </p:nvSpPr>
-        <p:spPr>
-          <a:xfrm>
-            <a:off x="731520" y="1645920"/>
-            <a:ext cx="411480" cy="411480"/>
-          </a:xfrm>
-          <a:prstGeom prst="ellipse">
-            <a:avLst/>
-          </a:prstGeom>
-          <a:solidFill>
-            <a:schemeClr val="accent1"/>
-          </a:solidFill>
-          <a:ln w="12700">
-            <a:solidFill>
-              <a:schemeClr val="accent1"/>
-            </a:solidFill>
-            <a:prstDash val="solid"/>
-          </a:ln>
-        </p:spPr>
-      </p:sp>
-      <p:pic>
-        <p:nvPicPr>
-          <p:cNvPr id="5" name="bug-badge-0-icon" descr="preencoded.png">    </p:cNvPr>
-          <p:cNvPicPr>
-            <a:picLocks noChangeAspect="1"/>
-          </p:cNvPicPr>
-          <p:nvPr/>
-        </p:nvPicPr>
-        <p:blipFill>
-          <a:blip r:embed="rId1"/>
-          <a:stretch>
-            <a:fillRect/>
-          </a:stretch>
-        </p:blipFill>
-        <p:spPr>
-          <a:xfrm>
-            <a:off x="834390" y="1748790"/>
-            <a:ext cx="205740" cy="205740"/>
-          </a:xfrm>
-          <a:prstGeom prst="rect">
-            <a:avLst/>
-          </a:prstGeom>
-        </p:spPr>
-      </p:pic>
-      <p:sp>
-        <p:nvSpPr>
-          <p:cNvPr id="6" name="Text 3"/>
-          <p:cNvSpPr txBox="1"/>
-          <p:nvPr/>
-        </p:nvSpPr>
-        <p:spPr>
-          <a:xfrm>
-            <a:off x="1280160" y="1527048"/>
-            <a:ext cx="2697480" cy="347472"/>
+          <p:cNvPr id="17" name="Text 15"/>
+          <p:cNvSpPr txBox="1"/>
+          <p:nvPr/>
+        </p:nvSpPr>
+        <p:spPr>
+          <a:xfrm>
+            <a:off x="7086600" y="1737360"/>
+            <a:ext cx="4297680" cy="3566160"/>
           </a:xfrm>
           <a:prstGeom prst="rect">
             <a:avLst/>
@@ -6843,30 +6845,123 @@
           <a:lstStyle/>
           <a:p>
             <a:pPr indent="0" marL="0">
-              <a:buNone/>
-            </a:pPr>
-            <a:r>
-              <a:rPr lang="en-US" sz="1300" b="1" dirty="0">
+              <a:spcAft>
+                <a:spcPts val="800"/>
+              </a:spcAft>
+              <a:buNone/>
+            </a:pPr>
+            <a:r>
+              <a:rPr lang="en-US" sz="1800" b="1" dirty="0">
                 <a:solidFill>
                   <a:schemeClr val="tx1"/>
                 </a:solidFill>
               </a:rPr>
-              <a:t>Terraform HCL did not parse</a:t>
-            </a:r>
-            <a:endParaRPr lang="en-US" sz="1300" dirty="0"/>
-          </a:p>
-        </p:txBody>
-      </p:sp>
-      <p:sp>
-        <p:nvSpPr>
-          <p:cNvPr id="7" name="Text 4"/>
-          <p:cNvSpPr txBox="1"/>
-          <p:nvPr/>
-        </p:nvSpPr>
-        <p:spPr>
-          <a:xfrm>
-            <a:off x="1280160" y="1892808"/>
-            <a:ext cx="2697480" cy="347472"/>
+              <a:t>How it works</a:t>
+            </a:r>
+            <a:endParaRPr lang="en-US" sz="1400" dirty="0"/>
+          </a:p>
+          <a:p>
+            <a:pPr marL="342900" indent="-342900">
+              <a:spcAft>
+                <a:spcPts val="800"/>
+              </a:spcAft>
+              <a:buSzPct val="100000"/>
+              <a:buChar char="•"/>
+            </a:pPr>
+            <a:r>
+              <a:rPr lang="en-US" sz="1400" dirty="0">
+                <a:solidFill>
+                  <a:schemeClr val="tx2"/>
+                </a:solidFill>
+              </a:rPr>
+              <a:t>metrics-server reports pod CPU against the 100m request</a:t>
+            </a:r>
+            <a:endParaRPr lang="en-US" sz="1400" dirty="0"/>
+          </a:p>
+          <a:p>
+            <a:pPr marL="342900" indent="-342900">
+              <a:spcAft>
+                <a:spcPts val="800"/>
+              </a:spcAft>
+              <a:buSzPct val="100000"/>
+              <a:buChar char="•"/>
+            </a:pPr>
+            <a:r>
+              <a:rPr lang="en-US" sz="1400" dirty="0">
+                <a:solidFill>
+                  <a:schemeClr val="tx2"/>
+                </a:solidFill>
+              </a:rPr>
+              <a:t>HPA targets 60 % average utilisation, min 2, max 6</a:t>
+            </a:r>
+            <a:endParaRPr lang="en-US" sz="1400" dirty="0"/>
+          </a:p>
+          <a:p>
+            <a:pPr marL="342900" indent="-342900">
+              <a:spcAft>
+                <a:spcPts val="800"/>
+              </a:spcAft>
+              <a:buSzPct val="100000"/>
+              <a:buChar char="•"/>
+            </a:pPr>
+            <a:r>
+              <a:rPr lang="en-US" sz="1400" dirty="0">
+                <a:solidFill>
+                  <a:schemeClr val="tx2"/>
+                </a:solidFill>
+              </a:rPr>
+              <a:t>scripts/load-test.sh drives /api traffic through the Ingress</a:t>
+            </a:r>
+            <a:endParaRPr lang="en-US" sz="1400" dirty="0"/>
+          </a:p>
+          <a:p>
+            <a:pPr marL="342900" indent="-342900">
+              <a:spcAft>
+                <a:spcPts val="800"/>
+              </a:spcAft>
+              <a:buSzPct val="100000"/>
+              <a:buChar char="•"/>
+            </a:pPr>
+            <a:r>
+              <a:rPr lang="en-US" sz="1400" dirty="0">
+                <a:solidFill>
+                  <a:schemeClr val="tx2"/>
+                </a:solidFill>
+              </a:rPr>
+              <a:t>Prometheus picked up each new pod as a target with no config change</a:t>
+            </a:r>
+            <a:endParaRPr lang="en-US" sz="1400" dirty="0"/>
+          </a:p>
+          <a:p>
+            <a:pPr marL="342900" indent="-342900">
+              <a:spcAft>
+                <a:spcPts val="800"/>
+              </a:spcAft>
+              <a:buSzPct val="100000"/>
+              <a:buChar char="•"/>
+            </a:pPr>
+            <a:r>
+              <a:rPr lang="en-US" sz="1400" dirty="0">
+                <a:solidFill>
+                  <a:schemeClr val="tx2"/>
+                </a:solidFill>
+              </a:rPr>
+              <a:t>Scale-down waits 5 minutes (stabilisation window)</a:t>
+            </a:r>
+            <a:endParaRPr lang="en-US" sz="1400" dirty="0"/>
+          </a:p>
+        </p:txBody>
+      </p:sp>
+      <p:sp>
+        <p:nvSpPr>
+          <p:cNvPr id="18" name="Text 16"/>
+          <p:cNvSpPr txBox="1"/>
+          <p:nvPr/>
+        </p:nvSpPr>
+        <p:spPr>
+          <a:xfrm>
+            <a:off x="548640" y="5760720"/>
+            <a:ext cx="8229600" cy="320040"/>
           </a:xfrm>
           <a:prstGeom prst="rect">
             <a:avLst/>
@@ -6882,1642 +6977,17 @@
               <a:buNone/>
             </a:pPr>
             <a:r>
-              <a:rPr lang="en-US" sz="1150" dirty="0">
+              <a:rPr lang="en-US" sz="1100" i="1" dirty="0">
                 <a:solidFill>
                   <a:schemeClr val="tx2"/>
                 </a:solidFill>
-              </a:rPr>
-              <a:t>multi-attribute one-line blocks</a:t>
-            </a:r>
-            <a:endParaRPr lang="en-US" sz="1150" dirty="0"/>
-          </a:p>
-        </p:txBody>
-      </p:sp>
-      <p:sp>
-        <p:nvSpPr>
-          <p:cNvPr id="8" name="bug-card-1"/>
-          <p:cNvSpPr/>
-          <p:nvPr/>
-        </p:nvSpPr>
-        <p:spPr>
-          <a:xfrm>
-            <a:off x="4297680" y="1371600"/>
-            <a:ext cx="3566160" cy="1005840"/>
-          </a:xfrm>
-          <a:prstGeom prst="roundRect">
-            <a:avLst>
-              <a:gd name="adj" fmla="val 10909"/>
-            </a:avLst>
-          </a:prstGeom>
-          <a:solidFill>
-            <a:schemeClr val="bg2"/>
-          </a:solidFill>
-          <a:ln w="12700">
-            <a:solidFill>
-              <a:schemeClr val="bg2"/>
-            </a:solidFill>
-            <a:prstDash val="solid"/>
-          </a:ln>
-        </p:spPr>
-      </p:sp>
-      <p:sp>
-        <p:nvSpPr>
-          <p:cNvPr id="9" name="bug-badge-1-circle"/>
-          <p:cNvSpPr/>
-          <p:nvPr/>
-        </p:nvSpPr>
-        <p:spPr>
-          <a:xfrm>
-            <a:off x="4480560" y="1645920"/>
-            <a:ext cx="411480" cy="411480"/>
-          </a:xfrm>
-          <a:prstGeom prst="ellipse">
-            <a:avLst/>
-          </a:prstGeom>
-          <a:solidFill>
-            <a:schemeClr val="accent1"/>
-          </a:solidFill>
-          <a:ln w="12700">
-            <a:solidFill>
-              <a:schemeClr val="accent1"/>
-            </a:solidFill>
-            <a:prstDash val="solid"/>
-          </a:ln>
-        </p:spPr>
-      </p:sp>
-      <p:pic>
-        <p:nvPicPr>
-          <p:cNvPr id="10" name="bug-badge-1-icon" descr="preencoded.png">    </p:cNvPr>
-          <p:cNvPicPr>
-            <a:picLocks noChangeAspect="1"/>
-          </p:cNvPicPr>
-          <p:nvPr/>
-        </p:nvPicPr>
-        <p:blipFill>
-          <a:blip r:embed="rId2"/>
-          <a:stretch>
-            <a:fillRect/>
-          </a:stretch>
-        </p:blipFill>
-        <p:spPr>
-          <a:xfrm>
-            <a:off x="4583430" y="1748790"/>
-            <a:ext cx="205740" cy="205740"/>
-          </a:xfrm>
-          <a:prstGeom prst="rect">
-            <a:avLst/>
-          </a:prstGeom>
-        </p:spPr>
-      </p:pic>
-      <p:sp>
-        <p:nvSpPr>
-          <p:cNvPr id="11" name="Text 7"/>
-          <p:cNvSpPr txBox="1"/>
-          <p:nvPr/>
-        </p:nvSpPr>
-        <p:spPr>
-          <a:xfrm>
-            <a:off x="5029200" y="1527048"/>
-            <a:ext cx="2697480" cy="347472"/>
-          </a:xfrm>
-          <a:prstGeom prst="rect">
-            <a:avLst/>
-          </a:prstGeom>
-          <a:noFill/>
-          <a:ln/>
-        </p:spPr>
-        <p:txBody>
-          <a:bodyPr wrap="square" lIns="0" tIns="0" rIns="0" bIns="0" rtlCol="0" anchor="t"/>
-          <a:lstStyle/>
-          <a:p>
-            <a:pPr indent="0" marL="0">
-              <a:buNone/>
-            </a:pPr>
-            <a:r>
-              <a:rPr lang="en-US" sz="1300" b="1" dirty="0">
-                <a:solidFill>
-                  <a:schemeClr val="tx1"/>
-                </a:solidFill>
-              </a:rPr>
-              <a:t>EKS 1.31 no longer offered</a:t>
-            </a:r>
-            <a:endParaRPr lang="en-US" sz="1300" dirty="0"/>
-          </a:p>
-        </p:txBody>
-      </p:sp>
-      <p:sp>
-        <p:nvSpPr>
-          <p:cNvPr id="12" name="Text 8"/>
-          <p:cNvSpPr txBox="1"/>
-          <p:nvPr/>
-        </p:nvSpPr>
-        <p:spPr>
-          <a:xfrm>
-            <a:off x="5029200" y="1892808"/>
-            <a:ext cx="2697480" cy="347472"/>
-          </a:xfrm>
-          <a:prstGeom prst="rect">
-            <a:avLst/>
-          </a:prstGeom>
-          <a:noFill/>
-          <a:ln/>
-        </p:spPr>
-        <p:txBody>
-          <a:bodyPr wrap="square" lIns="0" tIns="0" rIns="0" bIns="0" rtlCol="0" anchor="t"/>
-          <a:lstStyle/>
-          <a:p>
-            <a:pPr indent="0" marL="0">
-              <a:buNone/>
-            </a:pPr>
-            <a:r>
-              <a:rPr lang="en-US" sz="1150" dirty="0">
-                <a:solidFill>
-                  <a:schemeClr val="tx2"/>
-                </a:solidFill>
-              </a:rPr>
-              <a:t>moved to 1.35 + AL2023 nodes</a:t>
-            </a:r>
-            <a:endParaRPr lang="en-US" sz="1150" dirty="0"/>
-          </a:p>
-        </p:txBody>
-      </p:sp>
-      <p:sp>
-        <p:nvSpPr>
-          <p:cNvPr id="13" name="bug-card-2"/>
-          <p:cNvSpPr/>
-          <p:nvPr/>
-        </p:nvSpPr>
-        <p:spPr>
-          <a:xfrm>
-            <a:off x="8046720" y="1371600"/>
-            <a:ext cx="3566160" cy="1005840"/>
-          </a:xfrm>
-          <a:prstGeom prst="roundRect">
-            <a:avLst>
-              <a:gd name="adj" fmla="val 10909"/>
-            </a:avLst>
-          </a:prstGeom>
-          <a:solidFill>
-            <a:schemeClr val="bg2"/>
-          </a:solidFill>
-          <a:ln w="12700">
-            <a:solidFill>
-              <a:schemeClr val="bg2"/>
-            </a:solidFill>
-            <a:prstDash val="solid"/>
-          </a:ln>
-        </p:spPr>
-      </p:sp>
-      <p:sp>
-        <p:nvSpPr>
-          <p:cNvPr id="14" name="bug-badge-2-circle"/>
-          <p:cNvSpPr/>
-          <p:nvPr/>
-        </p:nvSpPr>
-        <p:spPr>
-          <a:xfrm>
-            <a:off x="8229600" y="1645920"/>
-            <a:ext cx="411480" cy="411480"/>
-          </a:xfrm>
-          <a:prstGeom prst="ellipse">
-            <a:avLst/>
-          </a:prstGeom>
-          <a:solidFill>
-            <a:schemeClr val="accent1"/>
-          </a:solidFill>
-          <a:ln w="12700">
-            <a:solidFill>
-              <a:schemeClr val="accent1"/>
-            </a:solidFill>
-            <a:prstDash val="solid"/>
-          </a:ln>
-        </p:spPr>
-      </p:sp>
-      <p:pic>
-        <p:nvPicPr>
-          <p:cNvPr id="15" name="bug-badge-2-icon" descr="preencoded.png">    </p:cNvPr>
-          <p:cNvPicPr>
-            <a:picLocks noChangeAspect="1"/>
-          </p:cNvPicPr>
-          <p:nvPr/>
-        </p:nvPicPr>
-        <p:blipFill>
-          <a:blip r:embed="rId3"/>
-          <a:stretch>
-            <a:fillRect/>
-          </a:stretch>
-        </p:blipFill>
-        <p:spPr>
-          <a:xfrm>
-            <a:off x="8332470" y="1748790"/>
-            <a:ext cx="205740" cy="205740"/>
-          </a:xfrm>
-          <a:prstGeom prst="rect">
-            <a:avLst/>
-          </a:prstGeom>
-        </p:spPr>
-      </p:pic>
-      <p:sp>
-        <p:nvSpPr>
-          <p:cNvPr id="16" name="Text 11"/>
-          <p:cNvSpPr txBox="1"/>
-          <p:nvPr/>
-        </p:nvSpPr>
-        <p:spPr>
-          <a:xfrm>
-            <a:off x="8778240" y="1527048"/>
-            <a:ext cx="2697480" cy="347472"/>
-          </a:xfrm>
-          <a:prstGeom prst="rect">
-            <a:avLst/>
-          </a:prstGeom>
-          <a:noFill/>
-          <a:ln/>
-        </p:spPr>
-        <p:txBody>
-          <a:bodyPr wrap="square" lIns="0" tIns="0" rIns="0" bIns="0" rtlCol="0" anchor="t"/>
-          <a:lstStyle/>
-          <a:p>
-            <a:pPr indent="0" marL="0">
-              <a:buNone/>
-            </a:pPr>
-            <a:r>
-              <a:rPr lang="en-US" sz="1300" b="1" dirty="0">
-                <a:solidFill>
-                  <a:schemeClr val="tx1"/>
-                </a:solidFill>
-              </a:rPr>
-              <a:t>Ingress → wrong Service and port</a:t>
-            </a:r>
-            <a:endParaRPr lang="en-US" sz="1300" dirty="0"/>
-          </a:p>
-        </p:txBody>
-      </p:sp>
-      <p:sp>
-        <p:nvSpPr>
-          <p:cNvPr id="17" name="Text 12"/>
-          <p:cNvSpPr txBox="1"/>
-          <p:nvPr/>
-        </p:nvSpPr>
-        <p:spPr>
-          <a:xfrm>
-            <a:off x="8778240" y="1892808"/>
-            <a:ext cx="2697480" cy="347472"/>
-          </a:xfrm>
-          <a:prstGeom prst="rect">
-            <a:avLst/>
-          </a:prstGeom>
-          <a:noFill/>
-          <a:ln/>
-        </p:spPr>
-        <p:txBody>
-          <a:bodyPr wrap="square" lIns="0" tIns="0" rIns="0" bIns="0" rtlCol="0" anchor="t"/>
-          <a:lstStyle/>
-          <a:p>
-            <a:pPr indent="0" marL="0">
-              <a:buNone/>
-            </a:pPr>
-            <a:r>
-              <a:rPr lang="en-US" sz="1150" dirty="0">
-                <a:solidFill>
-                  <a:schemeClr val="tx2"/>
-                </a:solidFill>
-              </a:rPr>
-              <a:t>taskboard-backend:8080 didn't exist</a:t>
-            </a:r>
-            <a:endParaRPr lang="en-US" sz="1150" dirty="0"/>
-          </a:p>
-        </p:txBody>
-      </p:sp>
-      <p:sp>
-        <p:nvSpPr>
-          <p:cNvPr id="18" name="bug-card-3"/>
-          <p:cNvSpPr/>
-          <p:nvPr/>
-        </p:nvSpPr>
-        <p:spPr>
-          <a:xfrm>
-            <a:off x="548640" y="2542032"/>
-            <a:ext cx="3566160" cy="1005840"/>
-          </a:xfrm>
-          <a:prstGeom prst="roundRect">
-            <a:avLst>
-              <a:gd name="adj" fmla="val 10909"/>
-            </a:avLst>
-          </a:prstGeom>
-          <a:solidFill>
-            <a:schemeClr val="bg2"/>
-          </a:solidFill>
-          <a:ln w="12700">
-            <a:solidFill>
-              <a:schemeClr val="bg2"/>
-            </a:solidFill>
-            <a:prstDash val="solid"/>
-          </a:ln>
-        </p:spPr>
-      </p:sp>
-      <p:sp>
-        <p:nvSpPr>
-          <p:cNvPr id="19" name="bug-badge-3-circle"/>
-          <p:cNvSpPr/>
-          <p:nvPr/>
-        </p:nvSpPr>
-        <p:spPr>
-          <a:xfrm>
-            <a:off x="731520" y="2816352"/>
-            <a:ext cx="411480" cy="411480"/>
-          </a:xfrm>
-          <a:prstGeom prst="ellipse">
-            <a:avLst/>
-          </a:prstGeom>
-          <a:solidFill>
-            <a:schemeClr val="accent1"/>
-          </a:solidFill>
-          <a:ln w="12700">
-            <a:solidFill>
-              <a:schemeClr val="accent1"/>
-            </a:solidFill>
-            <a:prstDash val="solid"/>
-          </a:ln>
-        </p:spPr>
-      </p:sp>
-      <p:pic>
-        <p:nvPicPr>
-          <p:cNvPr id="20" name="bug-badge-3-icon" descr="preencoded.png">    </p:cNvPr>
-          <p:cNvPicPr>
-            <a:picLocks noChangeAspect="1"/>
-          </p:cNvPicPr>
-          <p:nvPr/>
-        </p:nvPicPr>
-        <p:blipFill>
-          <a:blip r:embed="rId4"/>
-          <a:stretch>
-            <a:fillRect/>
-          </a:stretch>
-        </p:blipFill>
-        <p:spPr>
-          <a:xfrm>
-            <a:off x="834390" y="2919222"/>
-            <a:ext cx="205740" cy="205740"/>
-          </a:xfrm>
-          <a:prstGeom prst="rect">
-            <a:avLst/>
-          </a:prstGeom>
-        </p:spPr>
-      </p:pic>
-      <p:sp>
-        <p:nvSpPr>
-          <p:cNvPr id="21" name="Text 15"/>
-          <p:cNvSpPr txBox="1"/>
-          <p:nvPr/>
-        </p:nvSpPr>
-        <p:spPr>
-          <a:xfrm>
-            <a:off x="1280160" y="2697480"/>
-            <a:ext cx="2697480" cy="347472"/>
-          </a:xfrm>
-          <a:prstGeom prst="rect">
-            <a:avLst/>
-          </a:prstGeom>
-          <a:noFill/>
-          <a:ln/>
-        </p:spPr>
-        <p:txBody>
-          <a:bodyPr wrap="square" lIns="0" tIns="0" rIns="0" bIns="0" rtlCol="0" anchor="t"/>
-          <a:lstStyle/>
-          <a:p>
-            <a:pPr indent="0" marL="0">
-              <a:buNone/>
-            </a:pPr>
-            <a:r>
-              <a:rPr lang="en-US" sz="1300" b="1" dirty="0">
-                <a:solidFill>
-                  <a:schemeClr val="tx1"/>
-                </a:solidFill>
-              </a:rPr>
-              <a:t>Nginx proxied to host 'backend'</a:t>
-            </a:r>
-            <a:endParaRPr lang="en-US" sz="1300" dirty="0"/>
-          </a:p>
-        </p:txBody>
-      </p:sp>
-      <p:sp>
-        <p:nvSpPr>
-          <p:cNvPr id="22" name="Text 16"/>
-          <p:cNvSpPr txBox="1"/>
-          <p:nvPr/>
-        </p:nvSpPr>
-        <p:spPr>
-          <a:xfrm>
-            <a:off x="1280160" y="3063240"/>
-            <a:ext cx="2697480" cy="347472"/>
-          </a:xfrm>
-          <a:prstGeom prst="rect">
-            <a:avLst/>
-          </a:prstGeom>
-          <a:noFill/>
-          <a:ln/>
-        </p:spPr>
-        <p:txBody>
-          <a:bodyPr wrap="square" lIns="0" tIns="0" rIns="0" bIns="0" rtlCol="0" anchor="t"/>
-          <a:lstStyle/>
-          <a:p>
-            <a:pPr indent="0" marL="0">
-              <a:buNone/>
-            </a:pPr>
-            <a:r>
-              <a:rPr lang="en-US" sz="1150" dirty="0">
-                <a:solidFill>
-                  <a:schemeClr val="tx2"/>
-                </a:solidFill>
-              </a:rPr>
-              <a:t>templated BACKEND_URL per environment</a:t>
-            </a:r>
-            <a:endParaRPr lang="en-US" sz="1150" dirty="0"/>
-          </a:p>
-        </p:txBody>
-      </p:sp>
-      <p:sp>
-        <p:nvSpPr>
-          <p:cNvPr id="23" name="bug-card-4"/>
-          <p:cNvSpPr/>
-          <p:nvPr/>
-        </p:nvSpPr>
-        <p:spPr>
-          <a:xfrm>
-            <a:off x="4297680" y="2542032"/>
-            <a:ext cx="3566160" cy="1005840"/>
-          </a:xfrm>
-          <a:prstGeom prst="roundRect">
-            <a:avLst>
-              <a:gd name="adj" fmla="val 10909"/>
-            </a:avLst>
-          </a:prstGeom>
-          <a:solidFill>
-            <a:schemeClr val="bg2"/>
-          </a:solidFill>
-          <a:ln w="12700">
-            <a:solidFill>
-              <a:schemeClr val="bg2"/>
-            </a:solidFill>
-            <a:prstDash val="solid"/>
-          </a:ln>
-        </p:spPr>
-      </p:sp>
-      <p:sp>
-        <p:nvSpPr>
-          <p:cNvPr id="24" name="bug-badge-4-circle"/>
-          <p:cNvSpPr/>
-          <p:nvPr/>
-        </p:nvSpPr>
-        <p:spPr>
-          <a:xfrm>
-            <a:off x="4480560" y="2816352"/>
-            <a:ext cx="411480" cy="411480"/>
-          </a:xfrm>
-          <a:prstGeom prst="ellipse">
-            <a:avLst/>
-          </a:prstGeom>
-          <a:solidFill>
-            <a:schemeClr val="accent1"/>
-          </a:solidFill>
-          <a:ln w="12700">
-            <a:solidFill>
-              <a:schemeClr val="accent1"/>
-            </a:solidFill>
-            <a:prstDash val="solid"/>
-          </a:ln>
-        </p:spPr>
-      </p:sp>
-      <p:pic>
-        <p:nvPicPr>
-          <p:cNvPr id="25" name="bug-badge-4-icon" descr="preencoded.png">    </p:cNvPr>
-          <p:cNvPicPr>
-            <a:picLocks noChangeAspect="1"/>
-          </p:cNvPicPr>
-          <p:nvPr/>
-        </p:nvPicPr>
-        <p:blipFill>
-          <a:blip r:embed="rId5"/>
-          <a:stretch>
-            <a:fillRect/>
-          </a:stretch>
-        </p:blipFill>
-        <p:spPr>
-          <a:xfrm>
-            <a:off x="4583430" y="2919222"/>
-            <a:ext cx="205740" cy="205740"/>
-          </a:xfrm>
-          <a:prstGeom prst="rect">
-            <a:avLst/>
-          </a:prstGeom>
-        </p:spPr>
-      </p:pic>
-      <p:sp>
-        <p:nvSpPr>
-          <p:cNvPr id="26" name="Text 19"/>
-          <p:cNvSpPr txBox="1"/>
-          <p:nvPr/>
-        </p:nvSpPr>
-        <p:spPr>
-          <a:xfrm>
-            <a:off x="5029200" y="2697480"/>
-            <a:ext cx="2697480" cy="347472"/>
-          </a:xfrm>
-          <a:prstGeom prst="rect">
-            <a:avLst/>
-          </a:prstGeom>
-          <a:noFill/>
-          <a:ln/>
-        </p:spPr>
-        <p:txBody>
-          <a:bodyPr wrap="square" lIns="0" tIns="0" rIns="0" bIns="0" rtlCol="0" anchor="t"/>
-          <a:lstStyle/>
-          <a:p>
-            <a:pPr indent="0" marL="0">
-              <a:buNone/>
-            </a:pPr>
-            <a:r>
-              <a:rPr lang="en-US" sz="1300" b="1" dirty="0">
-                <a:solidFill>
-                  <a:schemeClr val="tx1"/>
-                </a:solidFill>
-              </a:rPr>
-              <a:t>Pipeline never pushed to GHCR</a:t>
-            </a:r>
-            <a:endParaRPr lang="en-US" sz="1300" dirty="0"/>
-          </a:p>
-        </p:txBody>
-      </p:sp>
-      <p:sp>
-        <p:nvSpPr>
-          <p:cNvPr id="27" name="Text 20"/>
-          <p:cNvSpPr txBox="1"/>
-          <p:nvPr/>
-        </p:nvSpPr>
-        <p:spPr>
-          <a:xfrm>
-            <a:off x="5029200" y="3063240"/>
-            <a:ext cx="2697480" cy="347472"/>
-          </a:xfrm>
-          <a:prstGeom prst="rect">
-            <a:avLst/>
-          </a:prstGeom>
-          <a:noFill/>
-          <a:ln/>
-        </p:spPr>
-        <p:txBody>
-          <a:bodyPr wrap="square" lIns="0" tIns="0" rIns="0" bIns="0" rtlCol="0" anchor="t"/>
-          <a:lstStyle/>
-          <a:p>
-            <a:pPr indent="0" marL="0">
-              <a:buNone/>
-            </a:pPr>
-            <a:r>
-              <a:rPr lang="en-US" sz="1150" dirty="0">
-                <a:solidFill>
-                  <a:schemeClr val="tx2"/>
-                </a:solidFill>
-              </a:rPr>
-              <a:t>Docker Hub, :latest tags, 3 rebuilds</a:t>
-            </a:r>
-            <a:endParaRPr lang="en-US" sz="1150" dirty="0"/>
-          </a:p>
-        </p:txBody>
-      </p:sp>
-      <p:sp>
-        <p:nvSpPr>
-          <p:cNvPr id="28" name="bug-card-5"/>
-          <p:cNvSpPr/>
-          <p:nvPr/>
-        </p:nvSpPr>
-        <p:spPr>
-          <a:xfrm>
-            <a:off x="8046720" y="2542032"/>
-            <a:ext cx="3566160" cy="1005840"/>
-          </a:xfrm>
-          <a:prstGeom prst="roundRect">
-            <a:avLst>
-              <a:gd name="adj" fmla="val 10909"/>
-            </a:avLst>
-          </a:prstGeom>
-          <a:solidFill>
-            <a:schemeClr val="bg2"/>
-          </a:solidFill>
-          <a:ln w="12700">
-            <a:solidFill>
-              <a:schemeClr val="bg2"/>
-            </a:solidFill>
-            <a:prstDash val="solid"/>
-          </a:ln>
-        </p:spPr>
-      </p:sp>
-      <p:sp>
-        <p:nvSpPr>
-          <p:cNvPr id="29" name="bug-badge-5-circle"/>
-          <p:cNvSpPr/>
-          <p:nvPr/>
-        </p:nvSpPr>
-        <p:spPr>
-          <a:xfrm>
-            <a:off x="8229600" y="2816352"/>
-            <a:ext cx="411480" cy="411480"/>
-          </a:xfrm>
-          <a:prstGeom prst="ellipse">
-            <a:avLst/>
-          </a:prstGeom>
-          <a:solidFill>
-            <a:schemeClr val="accent1"/>
-          </a:solidFill>
-          <a:ln w="12700">
-            <a:solidFill>
-              <a:schemeClr val="accent1"/>
-            </a:solidFill>
-            <a:prstDash val="solid"/>
-          </a:ln>
-        </p:spPr>
-      </p:sp>
-      <p:pic>
-        <p:nvPicPr>
-          <p:cNvPr id="30" name="bug-badge-5-icon" descr="preencoded.png">    </p:cNvPr>
-          <p:cNvPicPr>
-            <a:picLocks noChangeAspect="1"/>
-          </p:cNvPicPr>
-          <p:nvPr/>
-        </p:nvPicPr>
-        <p:blipFill>
-          <a:blip r:embed="rId6"/>
-          <a:stretch>
-            <a:fillRect/>
-          </a:stretch>
-        </p:blipFill>
-        <p:spPr>
-          <a:xfrm>
-            <a:off x="8332470" y="2919222"/>
-            <a:ext cx="205740" cy="205740"/>
-          </a:xfrm>
-          <a:prstGeom prst="rect">
-            <a:avLst/>
-          </a:prstGeom>
-        </p:spPr>
-      </p:pic>
-      <p:sp>
-        <p:nvSpPr>
-          <p:cNvPr id="31" name="Text 23"/>
-          <p:cNvSpPr txBox="1"/>
-          <p:nvPr/>
-        </p:nvSpPr>
-        <p:spPr>
-          <a:xfrm>
-            <a:off x="8778240" y="2697480"/>
-            <a:ext cx="2697480" cy="347472"/>
-          </a:xfrm>
-          <a:prstGeom prst="rect">
-            <a:avLst/>
-          </a:prstGeom>
-          <a:noFill/>
-          <a:ln/>
-        </p:spPr>
-        <p:txBody>
-          <a:bodyPr wrap="square" lIns="0" tIns="0" rIns="0" bIns="0" rtlCol="0" anchor="t"/>
-          <a:lstStyle/>
-          <a:p>
-            <a:pPr indent="0" marL="0">
-              <a:buNone/>
-            </a:pPr>
-            <a:r>
-              <a:rPr lang="en-US" sz="1300" b="1" dirty="0">
-                <a:solidFill>
-                  <a:schemeClr val="tx1"/>
-                </a:solidFill>
-              </a:rPr>
-              <a:t>Trivy could never fail the build</a:t>
-            </a:r>
-            <a:endParaRPr lang="en-US" sz="1300" dirty="0"/>
-          </a:p>
-        </p:txBody>
-      </p:sp>
-      <p:sp>
-        <p:nvSpPr>
-          <p:cNvPr id="32" name="Text 24"/>
-          <p:cNvSpPr txBox="1"/>
-          <p:nvPr/>
-        </p:nvSpPr>
-        <p:spPr>
-          <a:xfrm>
-            <a:off x="8778240" y="3063240"/>
-            <a:ext cx="2697480" cy="347472"/>
-          </a:xfrm>
-          <a:prstGeom prst="rect">
-            <a:avLst/>
-          </a:prstGeom>
-          <a:noFill/>
-          <a:ln/>
-        </p:spPr>
-        <p:txBody>
-          <a:bodyPr wrap="square" lIns="0" tIns="0" rIns="0" bIns="0" rtlCol="0" anchor="t"/>
-          <a:lstStyle/>
-          <a:p>
-            <a:pPr indent="0" marL="0">
-              <a:buNone/>
-            </a:pPr>
-            <a:r>
-              <a:rPr lang="en-US" sz="1150" dirty="0">
-                <a:solidFill>
-                  <a:schemeClr val="tx2"/>
-                </a:solidFill>
-              </a:rPr>
-              <a:t>added --exit-code 1</a:t>
-            </a:r>
-            <a:endParaRPr lang="en-US" sz="1150" dirty="0"/>
-          </a:p>
-        </p:txBody>
-      </p:sp>
-      <p:sp>
-        <p:nvSpPr>
-          <p:cNvPr id="33" name="bug-card-6"/>
-          <p:cNvSpPr/>
-          <p:nvPr/>
-        </p:nvSpPr>
-        <p:spPr>
-          <a:xfrm>
-            <a:off x="548640" y="3712464"/>
-            <a:ext cx="3566160" cy="1005840"/>
-          </a:xfrm>
-          <a:prstGeom prst="roundRect">
-            <a:avLst>
-              <a:gd name="adj" fmla="val 10909"/>
-            </a:avLst>
-          </a:prstGeom>
-          <a:solidFill>
-            <a:schemeClr val="bg2"/>
-          </a:solidFill>
-          <a:ln w="12700">
-            <a:solidFill>
-              <a:schemeClr val="bg2"/>
-            </a:solidFill>
-            <a:prstDash val="solid"/>
-          </a:ln>
-        </p:spPr>
-      </p:sp>
-      <p:sp>
-        <p:nvSpPr>
-          <p:cNvPr id="34" name="bug-badge-6-circle"/>
-          <p:cNvSpPr/>
-          <p:nvPr/>
-        </p:nvSpPr>
-        <p:spPr>
-          <a:xfrm>
-            <a:off x="731520" y="3986784"/>
-            <a:ext cx="411480" cy="411480"/>
-          </a:xfrm>
-          <a:prstGeom prst="ellipse">
-            <a:avLst/>
-          </a:prstGeom>
-          <a:solidFill>
-            <a:schemeClr val="accent1"/>
-          </a:solidFill>
-          <a:ln w="12700">
-            <a:solidFill>
-              <a:schemeClr val="accent1"/>
-            </a:solidFill>
-            <a:prstDash val="solid"/>
-          </a:ln>
-        </p:spPr>
-      </p:sp>
-      <p:pic>
-        <p:nvPicPr>
-          <p:cNvPr id="35" name="bug-badge-6-icon" descr="preencoded.png">    </p:cNvPr>
-          <p:cNvPicPr>
-            <a:picLocks noChangeAspect="1"/>
-          </p:cNvPicPr>
-          <p:nvPr/>
-        </p:nvPicPr>
-        <p:blipFill>
-          <a:blip r:embed="rId7"/>
-          <a:stretch>
-            <a:fillRect/>
-          </a:stretch>
-        </p:blipFill>
-        <p:spPr>
-          <a:xfrm>
-            <a:off x="834390" y="4089654"/>
-            <a:ext cx="205740" cy="205740"/>
-          </a:xfrm>
-          <a:prstGeom prst="rect">
-            <a:avLst/>
-          </a:prstGeom>
-        </p:spPr>
-      </p:pic>
-      <p:sp>
-        <p:nvSpPr>
-          <p:cNvPr id="36" name="Text 27"/>
-          <p:cNvSpPr txBox="1"/>
-          <p:nvPr/>
-        </p:nvSpPr>
-        <p:spPr>
-          <a:xfrm>
-            <a:off x="1280160" y="3867912"/>
-            <a:ext cx="2697480" cy="347472"/>
-          </a:xfrm>
-          <a:prstGeom prst="rect">
-            <a:avLst/>
-          </a:prstGeom>
-          <a:noFill/>
-          <a:ln/>
-        </p:spPr>
-        <p:txBody>
-          <a:bodyPr wrap="square" lIns="0" tIns="0" rIns="0" bIns="0" rtlCol="0" anchor="t"/>
-          <a:lstStyle/>
-          <a:p>
-            <a:pPr indent="0" marL="0">
-              <a:buNone/>
-            </a:pPr>
-            <a:r>
-              <a:rPr lang="en-US" sz="1300" b="1" dirty="0">
-                <a:solidFill>
-                  <a:schemeClr val="tx1"/>
-                </a:solidFill>
-              </a:rPr>
-              <a:t>Frontend ran Nginx as root</a:t>
-            </a:r>
-            <a:endParaRPr lang="en-US" sz="1300" dirty="0"/>
-          </a:p>
-        </p:txBody>
-      </p:sp>
-      <p:sp>
-        <p:nvSpPr>
-          <p:cNvPr id="37" name="Text 28"/>
-          <p:cNvSpPr txBox="1"/>
-          <p:nvPr/>
-        </p:nvSpPr>
-        <p:spPr>
-          <a:xfrm>
-            <a:off x="1280160" y="4233672"/>
-            <a:ext cx="2697480" cy="347472"/>
-          </a:xfrm>
-          <a:prstGeom prst="rect">
-            <a:avLst/>
-          </a:prstGeom>
-          <a:noFill/>
-          <a:ln/>
-        </p:spPr>
-        <p:txBody>
-          <a:bodyPr wrap="square" lIns="0" tIns="0" rIns="0" bIns="0" rtlCol="0" anchor="t"/>
-          <a:lstStyle/>
-          <a:p>
-            <a:pPr indent="0" marL="0">
-              <a:buNone/>
-            </a:pPr>
-            <a:r>
-              <a:rPr lang="en-US" sz="1150" dirty="0">
-                <a:solidFill>
-                  <a:schemeClr val="tx2"/>
-                </a:solidFill>
-              </a:rPr>
-              <a:t>unprivileged image on :8080</a:t>
-            </a:r>
-            <a:endParaRPr lang="en-US" sz="1150" dirty="0"/>
-          </a:p>
-        </p:txBody>
-      </p:sp>
-      <p:sp>
-        <p:nvSpPr>
-          <p:cNvPr id="38" name="bug-card-7"/>
-          <p:cNvSpPr/>
-          <p:nvPr/>
-        </p:nvSpPr>
-        <p:spPr>
-          <a:xfrm>
-            <a:off x="4297680" y="3712464"/>
-            <a:ext cx="3566160" cy="1005840"/>
-          </a:xfrm>
-          <a:prstGeom prst="roundRect">
-            <a:avLst>
-              <a:gd name="adj" fmla="val 10909"/>
-            </a:avLst>
-          </a:prstGeom>
-          <a:solidFill>
-            <a:schemeClr val="bg2"/>
-          </a:solidFill>
-          <a:ln w="12700">
-            <a:solidFill>
-              <a:schemeClr val="bg2"/>
-            </a:solidFill>
-            <a:prstDash val="solid"/>
-          </a:ln>
-        </p:spPr>
-      </p:sp>
-      <p:sp>
-        <p:nvSpPr>
-          <p:cNvPr id="39" name="bug-badge-7-circle"/>
-          <p:cNvSpPr/>
-          <p:nvPr/>
-        </p:nvSpPr>
-        <p:spPr>
-          <a:xfrm>
-            <a:off x="4480560" y="3986784"/>
-            <a:ext cx="411480" cy="411480"/>
-          </a:xfrm>
-          <a:prstGeom prst="ellipse">
-            <a:avLst/>
-          </a:prstGeom>
-          <a:solidFill>
-            <a:schemeClr val="accent1"/>
-          </a:solidFill>
-          <a:ln w="12700">
-            <a:solidFill>
-              <a:schemeClr val="accent1"/>
-            </a:solidFill>
-            <a:prstDash val="solid"/>
-          </a:ln>
-        </p:spPr>
-      </p:sp>
-      <p:pic>
-        <p:nvPicPr>
-          <p:cNvPr id="40" name="bug-badge-7-icon" descr="preencoded.png">    </p:cNvPr>
-          <p:cNvPicPr>
-            <a:picLocks noChangeAspect="1"/>
-          </p:cNvPicPr>
-          <p:nvPr/>
-        </p:nvPicPr>
-        <p:blipFill>
-          <a:blip r:embed="rId8"/>
-          <a:stretch>
-            <a:fillRect/>
-          </a:stretch>
-        </p:blipFill>
-        <p:spPr>
-          <a:xfrm>
-            <a:off x="4583430" y="4089654"/>
-            <a:ext cx="205740" cy="205740"/>
-          </a:xfrm>
-          <a:prstGeom prst="rect">
-            <a:avLst/>
-          </a:prstGeom>
-        </p:spPr>
-      </p:pic>
-      <p:sp>
-        <p:nvSpPr>
-          <p:cNvPr id="41" name="Text 31"/>
-          <p:cNvSpPr txBox="1"/>
-          <p:nvPr/>
-        </p:nvSpPr>
-        <p:spPr>
-          <a:xfrm>
-            <a:off x="5029200" y="3867912"/>
-            <a:ext cx="2697480" cy="347472"/>
-          </a:xfrm>
-          <a:prstGeom prst="rect">
-            <a:avLst/>
-          </a:prstGeom>
-          <a:noFill/>
-          <a:ln/>
-        </p:spPr>
-        <p:txBody>
-          <a:bodyPr wrap="square" lIns="0" tIns="0" rIns="0" bIns="0" rtlCol="0" anchor="t"/>
-          <a:lstStyle/>
-          <a:p>
-            <a:pPr indent="0" marL="0">
-              <a:buNone/>
-            </a:pPr>
-            <a:r>
-              <a:rPr lang="en-US" sz="1300" b="1" dirty="0">
-                <a:solidFill>
-                  <a:schemeClr val="tx1"/>
-                </a:solidFill>
-              </a:rPr>
-              <a:t>Init container waited forever</a:t>
-            </a:r>
-            <a:endParaRPr lang="en-US" sz="1300" dirty="0"/>
-          </a:p>
-        </p:txBody>
-      </p:sp>
-      <p:sp>
-        <p:nvSpPr>
-          <p:cNvPr id="42" name="Text 32"/>
-          <p:cNvSpPr txBox="1"/>
-          <p:nvPr/>
-        </p:nvSpPr>
-        <p:spPr>
-          <a:xfrm>
-            <a:off x="5029200" y="4233672"/>
-            <a:ext cx="2697480" cy="347472"/>
-          </a:xfrm>
-          <a:prstGeom prst="rect">
-            <a:avLst/>
-          </a:prstGeom>
-          <a:noFill/>
-          <a:ln/>
-        </p:spPr>
-        <p:txBody>
-          <a:bodyPr wrap="square" lIns="0" tIns="0" rIns="0" bIns="0" rtlCol="0" anchor="t"/>
-          <a:lstStyle/>
-          <a:p>
-            <a:pPr indent="0" marL="0">
-              <a:buNone/>
-            </a:pPr>
-            <a:r>
-              <a:rPr lang="en-US" sz="1150" dirty="0">
-                <a:solidFill>
-                  <a:schemeClr val="tx2"/>
-                </a:solidFill>
-              </a:rPr>
-              <a:t>pg_isready as uid 10001: pass -U/-d</a:t>
-            </a:r>
-            <a:endParaRPr lang="en-US" sz="1150" dirty="0"/>
-          </a:p>
-        </p:txBody>
-      </p:sp>
-      <p:sp>
-        <p:nvSpPr>
-          <p:cNvPr id="43" name="bug-card-8"/>
-          <p:cNvSpPr/>
-          <p:nvPr/>
-        </p:nvSpPr>
-        <p:spPr>
-          <a:xfrm>
-            <a:off x="8046720" y="3712464"/>
-            <a:ext cx="3566160" cy="1005840"/>
-          </a:xfrm>
-          <a:prstGeom prst="roundRect">
-            <a:avLst>
-              <a:gd name="adj" fmla="val 10909"/>
-            </a:avLst>
-          </a:prstGeom>
-          <a:solidFill>
-            <a:schemeClr val="bg2"/>
-          </a:solidFill>
-          <a:ln w="12700">
-            <a:solidFill>
-              <a:schemeClr val="bg2"/>
-            </a:solidFill>
-            <a:prstDash val="solid"/>
-          </a:ln>
-        </p:spPr>
-      </p:sp>
-      <p:sp>
-        <p:nvSpPr>
-          <p:cNvPr id="44" name="bug-badge-8-circle"/>
-          <p:cNvSpPr/>
-          <p:nvPr/>
-        </p:nvSpPr>
-        <p:spPr>
-          <a:xfrm>
-            <a:off x="8229600" y="3986784"/>
-            <a:ext cx="411480" cy="411480"/>
-          </a:xfrm>
-          <a:prstGeom prst="ellipse">
-            <a:avLst/>
-          </a:prstGeom>
-          <a:solidFill>
-            <a:schemeClr val="accent1"/>
-          </a:solidFill>
-          <a:ln w="12700">
-            <a:solidFill>
-              <a:schemeClr val="accent1"/>
-            </a:solidFill>
-            <a:prstDash val="solid"/>
-          </a:ln>
-        </p:spPr>
-      </p:sp>
-      <p:pic>
-        <p:nvPicPr>
-          <p:cNvPr id="45" name="bug-badge-8-icon" descr="preencoded.png">    </p:cNvPr>
-          <p:cNvPicPr>
-            <a:picLocks noChangeAspect="1"/>
-          </p:cNvPicPr>
-          <p:nvPr/>
-        </p:nvPicPr>
-        <p:blipFill>
-          <a:blip r:embed="rId9"/>
-          <a:stretch>
-            <a:fillRect/>
-          </a:stretch>
-        </p:blipFill>
-        <p:spPr>
-          <a:xfrm>
-            <a:off x="8332470" y="4089654"/>
-            <a:ext cx="205740" cy="205740"/>
-          </a:xfrm>
-          <a:prstGeom prst="rect">
-            <a:avLst/>
-          </a:prstGeom>
-        </p:spPr>
-      </p:pic>
-      <p:sp>
-        <p:nvSpPr>
-          <p:cNvPr id="46" name="Text 35"/>
-          <p:cNvSpPr txBox="1"/>
-          <p:nvPr/>
-        </p:nvSpPr>
-        <p:spPr>
-          <a:xfrm>
-            <a:off x="8778240" y="3867912"/>
-            <a:ext cx="2697480" cy="347472"/>
-          </a:xfrm>
-          <a:prstGeom prst="rect">
-            <a:avLst/>
-          </a:prstGeom>
-          <a:noFill/>
-          <a:ln/>
-        </p:spPr>
-        <p:txBody>
-          <a:bodyPr wrap="square" lIns="0" tIns="0" rIns="0" bIns="0" rtlCol="0" anchor="t"/>
-          <a:lstStyle/>
-          <a:p>
-            <a:pPr indent="0" marL="0">
-              <a:buNone/>
-            </a:pPr>
-            <a:r>
-              <a:rPr lang="en-US" sz="1300" b="1" dirty="0">
-                <a:solidFill>
-                  <a:schemeClr val="tx1"/>
-                </a:solidFill>
-              </a:rPr>
-              <a:t>Create-task modal never closed</a:t>
-            </a:r>
-            <a:endParaRPr lang="en-US" sz="1300" dirty="0"/>
-          </a:p>
-        </p:txBody>
-      </p:sp>
-      <p:sp>
-        <p:nvSpPr>
-          <p:cNvPr id="47" name="Text 36"/>
-          <p:cNvSpPr txBox="1"/>
-          <p:nvPr/>
-        </p:nvSpPr>
-        <p:spPr>
-          <a:xfrm>
-            <a:off x="8778240" y="4233672"/>
-            <a:ext cx="2697480" cy="347472"/>
-          </a:xfrm>
-          <a:prstGeom prst="rect">
-            <a:avLst/>
-          </a:prstGeom>
-          <a:noFill/>
-          <a:ln/>
-        </p:spPr>
-        <p:txBody>
-          <a:bodyPr wrap="square" lIns="0" tIns="0" rIns="0" bIns="0" rtlCol="0" anchor="t"/>
-          <a:lstStyle/>
-          <a:p>
-            <a:pPr indent="0" marL="0">
-              <a:buNone/>
-            </a:pPr>
-            <a:r>
-              <a:rPr lang="en-US" sz="1150" dirty="0">
-                <a:solidFill>
-                  <a:schemeClr val="tx2"/>
-                </a:solidFill>
-              </a:rPr>
-              <a:t>React currentTarget is null after await</a:t>
-            </a:r>
-            <a:endParaRPr lang="en-US" sz="1150" dirty="0"/>
-          </a:p>
-        </p:txBody>
-      </p:sp>
-      <p:sp>
-        <p:nvSpPr>
-          <p:cNvPr id="48" name="bug-card-9"/>
-          <p:cNvSpPr/>
-          <p:nvPr/>
-        </p:nvSpPr>
-        <p:spPr>
-          <a:xfrm>
-            <a:off x="548640" y="4882896"/>
-            <a:ext cx="3566160" cy="1005840"/>
-          </a:xfrm>
-          <a:prstGeom prst="roundRect">
-            <a:avLst>
-              <a:gd name="adj" fmla="val 10909"/>
-            </a:avLst>
-          </a:prstGeom>
-          <a:solidFill>
-            <a:schemeClr val="bg2"/>
-          </a:solidFill>
-          <a:ln w="12700">
-            <a:solidFill>
-              <a:schemeClr val="bg2"/>
-            </a:solidFill>
-            <a:prstDash val="solid"/>
-          </a:ln>
-        </p:spPr>
-      </p:sp>
-      <p:sp>
-        <p:nvSpPr>
-          <p:cNvPr id="49" name="bug-badge-9-circle"/>
-          <p:cNvSpPr/>
-          <p:nvPr/>
-        </p:nvSpPr>
-        <p:spPr>
-          <a:xfrm>
-            <a:off x="731520" y="5157216"/>
-            <a:ext cx="411480" cy="411480"/>
-          </a:xfrm>
-          <a:prstGeom prst="ellipse">
-            <a:avLst/>
-          </a:prstGeom>
-          <a:solidFill>
-            <a:schemeClr val="accent1"/>
-          </a:solidFill>
-          <a:ln w="12700">
-            <a:solidFill>
-              <a:schemeClr val="accent1"/>
-            </a:solidFill>
-            <a:prstDash val="solid"/>
-          </a:ln>
-        </p:spPr>
-      </p:sp>
-      <p:pic>
-        <p:nvPicPr>
-          <p:cNvPr id="50" name="bug-badge-9-icon" descr="preencoded.png">    </p:cNvPr>
-          <p:cNvPicPr>
-            <a:picLocks noChangeAspect="1"/>
-          </p:cNvPicPr>
-          <p:nvPr/>
-        </p:nvPicPr>
-        <p:blipFill>
-          <a:blip r:embed="rId10"/>
-          <a:stretch>
-            <a:fillRect/>
-          </a:stretch>
-        </p:blipFill>
-        <p:spPr>
-          <a:xfrm>
-            <a:off x="834390" y="5260086"/>
-            <a:ext cx="205740" cy="205740"/>
-          </a:xfrm>
-          <a:prstGeom prst="rect">
-            <a:avLst/>
-          </a:prstGeom>
-        </p:spPr>
-      </p:pic>
-      <p:sp>
-        <p:nvSpPr>
-          <p:cNvPr id="51" name="Text 39"/>
-          <p:cNvSpPr txBox="1"/>
-          <p:nvPr/>
-        </p:nvSpPr>
-        <p:spPr>
-          <a:xfrm>
-            <a:off x="1280160" y="5038344"/>
-            <a:ext cx="2697480" cy="347472"/>
-          </a:xfrm>
-          <a:prstGeom prst="rect">
-            <a:avLst/>
-          </a:prstGeom>
-          <a:noFill/>
-          <a:ln/>
-        </p:spPr>
-        <p:txBody>
-          <a:bodyPr wrap="square" lIns="0" tIns="0" rIns="0" bIns="0" rtlCol="0" anchor="t"/>
-          <a:lstStyle/>
-          <a:p>
-            <a:pPr indent="0" marL="0">
-              <a:buNone/>
-            </a:pPr>
-            <a:r>
-              <a:rPr lang="en-US" sz="1300" b="1" dirty="0">
-                <a:solidFill>
-                  <a:schemeClr val="tx1"/>
-                </a:solidFill>
-              </a:rPr>
-              <a:t>Postgres initdb fails on EBS</a:t>
-            </a:r>
-            <a:endParaRPr lang="en-US" sz="1300" dirty="0"/>
-          </a:p>
-        </p:txBody>
-      </p:sp>
-      <p:sp>
-        <p:nvSpPr>
-          <p:cNvPr id="52" name="Text 40"/>
-          <p:cNvSpPr txBox="1"/>
-          <p:nvPr/>
-        </p:nvSpPr>
-        <p:spPr>
-          <a:xfrm>
-            <a:off x="1280160" y="5404104"/>
-            <a:ext cx="2697480" cy="347472"/>
-          </a:xfrm>
-          <a:prstGeom prst="rect">
-            <a:avLst/>
-          </a:prstGeom>
-          <a:noFill/>
-          <a:ln/>
-        </p:spPr>
-        <p:txBody>
-          <a:bodyPr wrap="square" lIns="0" tIns="0" rIns="0" bIns="0" rtlCol="0" anchor="t"/>
-          <a:lstStyle/>
-          <a:p>
-            <a:pPr indent="0" marL="0">
-              <a:buNone/>
-            </a:pPr>
-            <a:r>
-              <a:rPr lang="en-US" sz="1150" dirty="0">
-                <a:solidFill>
-                  <a:schemeClr val="tx2"/>
-                </a:solidFill>
-              </a:rPr>
-              <a:t>lost+found → PGDATA subdirectory</a:t>
-            </a:r>
-            <a:endParaRPr lang="en-US" sz="1150" dirty="0"/>
-          </a:p>
-        </p:txBody>
-      </p:sp>
-      <p:sp>
-        <p:nvSpPr>
-          <p:cNvPr id="53" name="bug-card-10"/>
-          <p:cNvSpPr/>
-          <p:nvPr/>
-        </p:nvSpPr>
-        <p:spPr>
-          <a:xfrm>
-            <a:off x="4297680" y="4882896"/>
-            <a:ext cx="3566160" cy="1005840"/>
-          </a:xfrm>
-          <a:prstGeom prst="roundRect">
-            <a:avLst>
-              <a:gd name="adj" fmla="val 10909"/>
-            </a:avLst>
-          </a:prstGeom>
-          <a:solidFill>
-            <a:schemeClr val="bg2"/>
-          </a:solidFill>
-          <a:ln w="12700">
-            <a:solidFill>
-              <a:schemeClr val="bg2"/>
-            </a:solidFill>
-            <a:prstDash val="solid"/>
-          </a:ln>
-        </p:spPr>
-      </p:sp>
-      <p:sp>
-        <p:nvSpPr>
-          <p:cNvPr id="54" name="bug-badge-10-circle"/>
-          <p:cNvSpPr/>
-          <p:nvPr/>
-        </p:nvSpPr>
-        <p:spPr>
-          <a:xfrm>
-            <a:off x="4480560" y="5157216"/>
-            <a:ext cx="411480" cy="411480"/>
-          </a:xfrm>
-          <a:prstGeom prst="ellipse">
-            <a:avLst/>
-          </a:prstGeom>
-          <a:solidFill>
-            <a:schemeClr val="accent1"/>
-          </a:solidFill>
-          <a:ln w="12700">
-            <a:solidFill>
-              <a:schemeClr val="accent1"/>
-            </a:solidFill>
-            <a:prstDash val="solid"/>
-          </a:ln>
-        </p:spPr>
-      </p:sp>
-      <p:pic>
-        <p:nvPicPr>
-          <p:cNvPr id="55" name="bug-badge-10-icon" descr="preencoded.png">    </p:cNvPr>
-          <p:cNvPicPr>
-            <a:picLocks noChangeAspect="1"/>
-          </p:cNvPicPr>
-          <p:nvPr/>
-        </p:nvPicPr>
-        <p:blipFill>
-          <a:blip r:embed="rId11"/>
-          <a:stretch>
-            <a:fillRect/>
-          </a:stretch>
-        </p:blipFill>
-        <p:spPr>
-          <a:xfrm>
-            <a:off x="4583430" y="5260086"/>
-            <a:ext cx="205740" cy="205740"/>
-          </a:xfrm>
-          <a:prstGeom prst="rect">
-            <a:avLst/>
-          </a:prstGeom>
-        </p:spPr>
-      </p:pic>
-      <p:sp>
-        <p:nvSpPr>
-          <p:cNvPr id="56" name="Text 43"/>
-          <p:cNvSpPr txBox="1"/>
-          <p:nvPr/>
-        </p:nvSpPr>
-        <p:spPr>
-          <a:xfrm>
-            <a:off x="5029200" y="5038344"/>
-            <a:ext cx="2697480" cy="347472"/>
-          </a:xfrm>
-          <a:prstGeom prst="rect">
-            <a:avLst/>
-          </a:prstGeom>
-          <a:noFill/>
-          <a:ln/>
-        </p:spPr>
-        <p:txBody>
-          <a:bodyPr wrap="square" lIns="0" tIns="0" rIns="0" bIns="0" rtlCol="0" anchor="t"/>
-          <a:lstStyle/>
-          <a:p>
-            <a:pPr indent="0" marL="0">
-              <a:buNone/>
-            </a:pPr>
-            <a:r>
-              <a:rPr lang="en-US" sz="1300" b="1" dirty="0">
-                <a:solidFill>
-                  <a:schemeClr val="tx1"/>
-                </a:solidFill>
-              </a:rPr>
-              <a:t>Compose start-up races</a:t>
-            </a:r>
-            <a:endParaRPr lang="en-US" sz="1300" dirty="0"/>
-          </a:p>
-        </p:txBody>
-      </p:sp>
-      <p:sp>
-        <p:nvSpPr>
-          <p:cNvPr id="57" name="Text 44"/>
-          <p:cNvSpPr txBox="1"/>
-          <p:nvPr/>
-        </p:nvSpPr>
-        <p:spPr>
-          <a:xfrm>
-            <a:off x="5029200" y="5404104"/>
-            <a:ext cx="2697480" cy="347472"/>
-          </a:xfrm>
-          <a:prstGeom prst="rect">
-            <a:avLst/>
-          </a:prstGeom>
-          <a:noFill/>
-          <a:ln/>
-        </p:spPr>
-        <p:txBody>
-          <a:bodyPr wrap="square" lIns="0" tIns="0" rIns="0" bIns="0" rtlCol="0" anchor="t"/>
-          <a:lstStyle/>
-          <a:p>
-            <a:pPr indent="0" marL="0">
-              <a:buNone/>
-            </a:pPr>
-            <a:r>
-              <a:rPr lang="en-US" sz="1150" dirty="0">
-                <a:solidFill>
-                  <a:schemeClr val="tx2"/>
-                </a:solidFill>
-              </a:rPr>
-              <a:t>health-gated depends_on</a:t>
-            </a:r>
-            <a:endParaRPr lang="en-US" sz="1150" dirty="0"/>
-          </a:p>
-        </p:txBody>
-      </p:sp>
-      <p:sp>
-        <p:nvSpPr>
-          <p:cNvPr id="58" name="bug-card-11"/>
-          <p:cNvSpPr/>
-          <p:nvPr/>
-        </p:nvSpPr>
-        <p:spPr>
-          <a:xfrm>
-            <a:off x="8046720" y="4882896"/>
-            <a:ext cx="3566160" cy="1005840"/>
-          </a:xfrm>
-          <a:prstGeom prst="roundRect">
-            <a:avLst>
-              <a:gd name="adj" fmla="val 10909"/>
-            </a:avLst>
-          </a:prstGeom>
-          <a:solidFill>
-            <a:schemeClr val="bg2"/>
-          </a:solidFill>
-          <a:ln w="12700">
-            <a:solidFill>
-              <a:schemeClr val="bg2"/>
-            </a:solidFill>
-            <a:prstDash val="solid"/>
-          </a:ln>
-        </p:spPr>
-      </p:sp>
-      <p:sp>
-        <p:nvSpPr>
-          <p:cNvPr id="59" name="bug-badge-11-circle"/>
-          <p:cNvSpPr/>
-          <p:nvPr/>
-        </p:nvSpPr>
-        <p:spPr>
-          <a:xfrm>
-            <a:off x="8229600" y="5157216"/>
-            <a:ext cx="411480" cy="411480"/>
-          </a:xfrm>
-          <a:prstGeom prst="ellipse">
-            <a:avLst/>
-          </a:prstGeom>
-          <a:solidFill>
-            <a:schemeClr val="accent1"/>
-          </a:solidFill>
-          <a:ln w="12700">
-            <a:solidFill>
-              <a:schemeClr val="accent1"/>
-            </a:solidFill>
-            <a:prstDash val="solid"/>
-          </a:ln>
-        </p:spPr>
-      </p:sp>
-      <p:pic>
-        <p:nvPicPr>
-          <p:cNvPr id="60" name="bug-badge-11-icon" descr="preencoded.png">    </p:cNvPr>
-          <p:cNvPicPr>
-            <a:picLocks noChangeAspect="1"/>
-          </p:cNvPicPr>
-          <p:nvPr/>
-        </p:nvPicPr>
-        <p:blipFill>
-          <a:blip r:embed="rId12"/>
-          <a:stretch>
-            <a:fillRect/>
-          </a:stretch>
-        </p:blipFill>
-        <p:spPr>
-          <a:xfrm>
-            <a:off x="8332470" y="5260086"/>
-            <a:ext cx="205740" cy="205740"/>
-          </a:xfrm>
-          <a:prstGeom prst="rect">
-            <a:avLst/>
-          </a:prstGeom>
-        </p:spPr>
-      </p:pic>
-      <p:sp>
-        <p:nvSpPr>
-          <p:cNvPr id="61" name="Text 47"/>
-          <p:cNvSpPr txBox="1"/>
-          <p:nvPr/>
-        </p:nvSpPr>
-        <p:spPr>
-          <a:xfrm>
-            <a:off x="8778240" y="5038344"/>
-            <a:ext cx="2697480" cy="347472"/>
-          </a:xfrm>
-          <a:prstGeom prst="rect">
-            <a:avLst/>
-          </a:prstGeom>
-          <a:noFill/>
-          <a:ln/>
-        </p:spPr>
-        <p:txBody>
-          <a:bodyPr wrap="square" lIns="0" tIns="0" rIns="0" bIns="0" rtlCol="0" anchor="t"/>
-          <a:lstStyle/>
-          <a:p>
-            <a:pPr indent="0" marL="0">
-              <a:buNone/>
-            </a:pPr>
-            <a:r>
-              <a:rPr lang="en-US" sz="1300" b="1" dirty="0">
-                <a:solidFill>
-                  <a:schemeClr val="tx1"/>
-                </a:solidFill>
-              </a:rPr>
-              <a:t>ingress-nginx retired (2026)</a:t>
-            </a:r>
-            <a:endParaRPr lang="en-US" sz="1300" dirty="0"/>
-          </a:p>
-        </p:txBody>
-      </p:sp>
-      <p:sp>
-        <p:nvSpPr>
-          <p:cNvPr id="62" name="Text 48"/>
-          <p:cNvSpPr txBox="1"/>
-          <p:nvPr/>
-        </p:nvSpPr>
-        <p:spPr>
-          <a:xfrm>
-            <a:off x="8778240" y="5404104"/>
-            <a:ext cx="2697480" cy="347472"/>
-          </a:xfrm>
-          <a:prstGeom prst="rect">
-            <a:avLst/>
-          </a:prstGeom>
-          <a:noFill/>
-          <a:ln/>
-        </p:spPr>
-        <p:txBody>
-          <a:bodyPr wrap="square" lIns="0" tIns="0" rIns="0" bIns="0" rtlCol="0" anchor="t"/>
-          <a:lstStyle/>
-          <a:p>
-            <a:pPr indent="0" marL="0">
-              <a:buNone/>
-            </a:pPr>
-            <a:r>
-              <a:rPr lang="en-US" sz="1150" dirty="0">
-                <a:solidFill>
-                  <a:schemeClr val="tx2"/>
-                </a:solidFill>
-              </a:rPr>
-              <a:t>switched to Traefik</a:t>
-            </a:r>
-            <a:endParaRPr lang="en-US" sz="1150" dirty="0"/>
+                <a:latin typeface="Courier New" pitchFamily="34" charset="0"/>
+                <a:ea typeface="Courier New" pitchFamily="34" charset="-122"/>
+                <a:cs typeface="Courier New" pitchFamily="34" charset="-120"/>
+              </a:rPr>
+              <a:t>kubectl get events -n taskboard --field-selector reason=SuccessfulRescale</a:t>
+            </a:r>
+            <a:endParaRPr lang="en-US" sz="1100" dirty="0"/>
           </a:p>
         </p:txBody>
       </p:sp>
@@ -8623,7 +7093,7 @@
                   <a:schemeClr val="tx1"/>
                 </a:solidFill>
               </a:rPr>
-              <a:t>Key learnings and next steps</a:t>
+              <a:t>Making it work: 12 defects found and fixed</a:t>
             </a:r>
             <a:endParaRPr lang="en-US" sz="3400" dirty="0"/>
           </a:p>
@@ -8631,18 +7101,18 @@
       </p:sp>
       <p:sp>
         <p:nvSpPr>
-          <p:cNvPr id="3" name="learn-card-0"/>
+          <p:cNvPr id="3" name="bug-card-0"/>
           <p:cNvSpPr/>
           <p:nvPr/>
         </p:nvSpPr>
         <p:spPr>
           <a:xfrm>
             <a:off x="548640" y="1371600"/>
-            <a:ext cx="5394960" cy="4526280"/>
+            <a:ext cx="3566160" cy="1005840"/>
           </a:xfrm>
           <a:prstGeom prst="roundRect">
             <a:avLst>
-              <a:gd name="adj" fmla="val 2424"/>
+              <a:gd name="adj" fmla="val 10909"/>
             </a:avLst>
           </a:prstGeom>
           <a:solidFill>
@@ -8658,14 +7128,14 @@
       </p:sp>
       <p:sp>
         <p:nvSpPr>
-          <p:cNvPr id="4" name="learn-badge-0-circle"/>
+          <p:cNvPr id="4" name="bug-badge-0-circle"/>
           <p:cNvSpPr/>
           <p:nvPr/>
         </p:nvSpPr>
         <p:spPr>
           <a:xfrm>
-            <a:off x="822960" y="1645920"/>
-            <a:ext cx="548640" cy="548640"/>
+            <a:off x="731520" y="1645920"/>
+            <a:ext cx="411480" cy="411480"/>
           </a:xfrm>
           <a:prstGeom prst="ellipse">
             <a:avLst/>
@@ -8683,7 +7153,7 @@
       </p:sp>
       <p:pic>
         <p:nvPicPr>
-          <p:cNvPr id="5" name="learn-badge-0-icon" descr="preencoded.png">    </p:cNvPr>
+          <p:cNvPr id="5" name="bug-badge-0-icon" descr="preencoded.png">    </p:cNvPr>
           <p:cNvPicPr>
             <a:picLocks noChangeAspect="1"/>
           </p:cNvPicPr>
@@ -8697,8 +7167,8 @@
         </p:blipFill>
         <p:spPr>
           <a:xfrm>
-            <a:off x="960120" y="1783080"/>
-            <a:ext cx="274320" cy="274320"/>
+            <a:off x="834390" y="1748790"/>
+            <a:ext cx="205740" cy="205740"/>
           </a:xfrm>
           <a:prstGeom prst="rect">
             <a:avLst/>
@@ -8713,8 +7183,8 @@
         </p:nvSpPr>
         <p:spPr>
           <a:xfrm>
-            <a:off x="1554480" y="1719072"/>
-            <a:ext cx="3657600" cy="411480"/>
+            <a:off x="1280160" y="1527048"/>
+            <a:ext cx="2697480" cy="347472"/>
           </a:xfrm>
           <a:prstGeom prst="rect">
             <a:avLst/>
@@ -8730,14 +7200,14 @@
               <a:buNone/>
             </a:pPr>
             <a:r>
-              <a:rPr lang="en-US" sz="2000" b="1" dirty="0">
+              <a:rPr lang="en-US" sz="1300" b="1" dirty="0">
                 <a:solidFill>
                   <a:schemeClr val="tx1"/>
                 </a:solidFill>
               </a:rPr>
-              <a:t>Learnings</a:t>
-            </a:r>
-            <a:endParaRPr lang="en-US" sz="2000" dirty="0"/>
+              <a:t>Terraform HCL did not parse</a:t>
+            </a:r>
+            <a:endParaRPr lang="en-US" sz="1300" dirty="0"/>
           </a:p>
         </p:txBody>
       </p:sp>
@@ -8749,8 +7219,8 @@
         </p:nvSpPr>
         <p:spPr>
           <a:xfrm>
-            <a:off x="822960" y="2423160"/>
-            <a:ext cx="4846320" cy="3291840"/>
+            <a:off x="1280160" y="1892808"/>
+            <a:ext cx="2697480" cy="347472"/>
           </a:xfrm>
           <a:prstGeom prst="rect">
             <a:avLst/>
@@ -8762,111 +7232,35 @@
           <a:bodyPr wrap="square" lIns="0" tIns="0" rIns="0" bIns="0" rtlCol="0" anchor="t"/>
           <a:lstStyle/>
           <a:p>
-            <a:pPr marL="342900" indent="-342900">
-              <a:spcAft>
-                <a:spcPts val="1000"/>
-              </a:spcAft>
-              <a:buSzPct val="100000"/>
-              <a:buChar char="•"/>
-            </a:pPr>
-            <a:r>
-              <a:rPr lang="en-US" sz="1500" dirty="0">
-                <a:solidFill>
-                  <a:schemeClr val="tx1"/>
-                </a:solidFill>
-              </a:rPr>
-              <a:t>Run every layer for real; reading YAML hides broken wiring</a:t>
-            </a:r>
-            <a:endParaRPr lang="en-US" sz="1500" dirty="0"/>
-          </a:p>
-          <a:p>
-            <a:pPr marL="342900" indent="-342900">
-              <a:spcAft>
-                <a:spcPts val="1000"/>
-              </a:spcAft>
-              <a:buSzPct val="100000"/>
-              <a:buChar char="•"/>
-            </a:pPr>
-            <a:r>
-              <a:rPr lang="en-US" sz="1500" dirty="0">
-                <a:solidFill>
-                  <a:schemeClr val="tx1"/>
-                </a:solidFill>
-              </a:rPr>
-              <a:t>Gates must be able to fail: a scanner without --exit-code is decoration</a:t>
-            </a:r>
-            <a:endParaRPr lang="en-US" sz="1500" dirty="0"/>
-          </a:p>
-          <a:p>
-            <a:pPr marL="342900" indent="-342900">
-              <a:spcAft>
-                <a:spcPts val="1000"/>
-              </a:spcAft>
-              <a:buSzPct val="100000"/>
-              <a:buChar char="•"/>
-            </a:pPr>
-            <a:r>
-              <a:rPr lang="en-US" sz="1500" dirty="0">
-                <a:solidFill>
-                  <a:schemeClr val="tx1"/>
-                </a:solidFill>
-              </a:rPr>
-              <a:t>Liveness ≠ readiness: a DB outage should drain pods, not restart them</a:t>
-            </a:r>
-            <a:endParaRPr lang="en-US" sz="1500" dirty="0"/>
-          </a:p>
-          <a:p>
-            <a:pPr marL="342900" indent="-342900">
-              <a:spcAft>
-                <a:spcPts val="1000"/>
-              </a:spcAft>
-              <a:buSzPct val="100000"/>
-              <a:buChar char="•"/>
-            </a:pPr>
-            <a:r>
-              <a:rPr lang="en-US" sz="1500" dirty="0">
-                <a:solidFill>
-                  <a:schemeClr val="tx1"/>
-                </a:solidFill>
-              </a:rPr>
-              <a:t>Pin versions and keep them current: EKS, AMIs and Ingress controllers retire</a:t>
-            </a:r>
-            <a:endParaRPr lang="en-US" sz="1500" dirty="0"/>
-          </a:p>
-          <a:p>
-            <a:pPr marL="342900" indent="-342900">
-              <a:spcAft>
-                <a:spcPts val="1000"/>
-              </a:spcAft>
-              <a:buSzPct val="100000"/>
-              <a:buChar char="•"/>
-            </a:pPr>
-            <a:r>
-              <a:rPr lang="en-US" sz="1500" dirty="0">
-                <a:solidFill>
-                  <a:schemeClr val="tx1"/>
-                </a:solidFill>
-              </a:rPr>
-              <a:t>Git as the deployment API makes rollback a git revert</a:t>
-            </a:r>
-            <a:endParaRPr lang="en-US" sz="1500" dirty="0"/>
-          </a:p>
-        </p:txBody>
-      </p:sp>
-      <p:sp>
-        <p:nvSpPr>
-          <p:cNvPr id="8" name="learn-card-1"/>
+            <a:pPr indent="0" marL="0">
+              <a:buNone/>
+            </a:pPr>
+            <a:r>
+              <a:rPr lang="en-US" sz="1150" dirty="0">
+                <a:solidFill>
+                  <a:schemeClr val="tx2"/>
+                </a:solidFill>
+              </a:rPr>
+              <a:t>multi-attribute one-line blocks</a:t>
+            </a:r>
+            <a:endParaRPr lang="en-US" sz="1150" dirty="0"/>
+          </a:p>
+        </p:txBody>
+      </p:sp>
+      <p:sp>
+        <p:nvSpPr>
+          <p:cNvPr id="8" name="bug-card-1"/>
           <p:cNvSpPr/>
           <p:nvPr/>
         </p:nvSpPr>
         <p:spPr>
           <a:xfrm>
-            <a:off x="6217920" y="1371600"/>
-            <a:ext cx="5394960" cy="4526280"/>
+            <a:off x="4297680" y="1371600"/>
+            <a:ext cx="3566160" cy="1005840"/>
           </a:xfrm>
           <a:prstGeom prst="roundRect">
             <a:avLst>
-              <a:gd name="adj" fmla="val 2424"/>
+              <a:gd name="adj" fmla="val 10909"/>
             </a:avLst>
           </a:prstGeom>
           <a:solidFill>
@@ -8882,24 +7276,24 @@
       </p:sp>
       <p:sp>
         <p:nvSpPr>
-          <p:cNvPr id="9" name="learn-badge-1-circle"/>
+          <p:cNvPr id="9" name="bug-badge-1-circle"/>
           <p:cNvSpPr/>
           <p:nvPr/>
         </p:nvSpPr>
         <p:spPr>
           <a:xfrm>
-            <a:off x="6492240" y="1645920"/>
-            <a:ext cx="548640" cy="548640"/>
+            <a:off x="4480560" y="1645920"/>
+            <a:ext cx="411480" cy="411480"/>
           </a:xfrm>
           <a:prstGeom prst="ellipse">
             <a:avLst/>
           </a:prstGeom>
           <a:solidFill>
-            <a:schemeClr val="accent3"/>
+            <a:schemeClr val="accent1"/>
           </a:solidFill>
           <a:ln w="12700">
             <a:solidFill>
-              <a:schemeClr val="accent3"/>
+              <a:schemeClr val="accent1"/>
             </a:solidFill>
             <a:prstDash val="solid"/>
           </a:ln>
@@ -8907,7 +7301,7 @@
       </p:sp>
       <p:pic>
         <p:nvPicPr>
-          <p:cNvPr id="10" name="learn-badge-1-icon" descr="preencoded.png">    </p:cNvPr>
+          <p:cNvPr id="10" name="bug-badge-1-icon" descr="preencoded.png">    </p:cNvPr>
           <p:cNvPicPr>
             <a:picLocks noChangeAspect="1"/>
           </p:cNvPicPr>
@@ -8921,8 +7315,8 @@
         </p:blipFill>
         <p:spPr>
           <a:xfrm>
-            <a:off x="6629400" y="1783080"/>
-            <a:ext cx="274320" cy="274320"/>
+            <a:off x="4583430" y="1748790"/>
+            <a:ext cx="205740" cy="205740"/>
           </a:xfrm>
           <a:prstGeom prst="rect">
             <a:avLst/>
@@ -8937,8 +7331,8 @@
         </p:nvSpPr>
         <p:spPr>
           <a:xfrm>
-            <a:off x="7223760" y="1719072"/>
-            <a:ext cx="3657600" cy="411480"/>
+            <a:off x="5029200" y="1527048"/>
+            <a:ext cx="2697480" cy="347472"/>
           </a:xfrm>
           <a:prstGeom prst="rect">
             <a:avLst/>
@@ -8954,14 +7348,14 @@
               <a:buNone/>
             </a:pPr>
             <a:r>
-              <a:rPr lang="en-US" sz="2000" b="1" dirty="0">
+              <a:rPr lang="en-US" sz="1300" b="1" dirty="0">
                 <a:solidFill>
                   <a:schemeClr val="tx1"/>
                 </a:solidFill>
               </a:rPr>
-              <a:t>Next steps</a:t>
-            </a:r>
-            <a:endParaRPr lang="en-US" sz="2000" dirty="0"/>
+              <a:t>EKS 1.31 no longer offered</a:t>
+            </a:r>
+            <a:endParaRPr lang="en-US" sz="1300" dirty="0"/>
           </a:p>
         </p:txBody>
       </p:sp>
@@ -8973,8 +7367,8 @@
         </p:nvSpPr>
         <p:spPr>
           <a:xfrm>
-            <a:off x="6492240" y="2423160"/>
-            <a:ext cx="4846320" cy="3291840"/>
+            <a:off x="5029200" y="1892808"/>
+            <a:ext cx="2697480" cy="347472"/>
           </a:xfrm>
           <a:prstGeom prst="rect">
             <a:avLst/>
@@ -8986,94 +7380,1498 @@
           <a:bodyPr wrap="square" lIns="0" tIns="0" rIns="0" bIns="0" rtlCol="0" anchor="t"/>
           <a:lstStyle/>
           <a:p>
-            <a:pPr marL="342900" indent="-342900">
-              <a:spcAft>
-                <a:spcPts val="1000"/>
-              </a:spcAft>
-              <a:buSzPct val="100000"/>
-              <a:buChar char="•"/>
-            </a:pPr>
-            <a:r>
-              <a:rPr lang="en-US" sz="1500" dirty="0">
+            <a:pPr indent="0" marL="0">
+              <a:buNone/>
+            </a:pPr>
+            <a:r>
+              <a:rPr lang="en-US" sz="1150" dirty="0">
+                <a:solidFill>
+                  <a:schemeClr val="tx2"/>
+                </a:solidFill>
+              </a:rPr>
+              <a:t>moved to 1.35 + AL2023 nodes</a:t>
+            </a:r>
+            <a:endParaRPr lang="en-US" sz="1150" dirty="0"/>
+          </a:p>
+        </p:txBody>
+      </p:sp>
+      <p:sp>
+        <p:nvSpPr>
+          <p:cNvPr id="13" name="bug-card-2"/>
+          <p:cNvSpPr/>
+          <p:nvPr/>
+        </p:nvSpPr>
+        <p:spPr>
+          <a:xfrm>
+            <a:off x="8046720" y="1371600"/>
+            <a:ext cx="3566160" cy="1005840"/>
+          </a:xfrm>
+          <a:prstGeom prst="roundRect">
+            <a:avLst>
+              <a:gd name="adj" fmla="val 10909"/>
+            </a:avLst>
+          </a:prstGeom>
+          <a:solidFill>
+            <a:schemeClr val="bg2"/>
+          </a:solidFill>
+          <a:ln w="12700">
+            <a:solidFill>
+              <a:schemeClr val="bg2"/>
+            </a:solidFill>
+            <a:prstDash val="solid"/>
+          </a:ln>
+        </p:spPr>
+      </p:sp>
+      <p:sp>
+        <p:nvSpPr>
+          <p:cNvPr id="14" name="bug-badge-2-circle"/>
+          <p:cNvSpPr/>
+          <p:nvPr/>
+        </p:nvSpPr>
+        <p:spPr>
+          <a:xfrm>
+            <a:off x="8229600" y="1645920"/>
+            <a:ext cx="411480" cy="411480"/>
+          </a:xfrm>
+          <a:prstGeom prst="ellipse">
+            <a:avLst/>
+          </a:prstGeom>
+          <a:solidFill>
+            <a:schemeClr val="accent1"/>
+          </a:solidFill>
+          <a:ln w="12700">
+            <a:solidFill>
+              <a:schemeClr val="accent1"/>
+            </a:solidFill>
+            <a:prstDash val="solid"/>
+          </a:ln>
+        </p:spPr>
+      </p:sp>
+      <p:pic>
+        <p:nvPicPr>
+          <p:cNvPr id="15" name="bug-badge-2-icon" descr="preencoded.png">    </p:cNvPr>
+          <p:cNvPicPr>
+            <a:picLocks noChangeAspect="1"/>
+          </p:cNvPicPr>
+          <p:nvPr/>
+        </p:nvPicPr>
+        <p:blipFill>
+          <a:blip r:embed="rId3"/>
+          <a:stretch>
+            <a:fillRect/>
+          </a:stretch>
+        </p:blipFill>
+        <p:spPr>
+          <a:xfrm>
+            <a:off x="8332470" y="1748790"/>
+            <a:ext cx="205740" cy="205740"/>
+          </a:xfrm>
+          <a:prstGeom prst="rect">
+            <a:avLst/>
+          </a:prstGeom>
+        </p:spPr>
+      </p:pic>
+      <p:sp>
+        <p:nvSpPr>
+          <p:cNvPr id="16" name="Text 11"/>
+          <p:cNvSpPr txBox="1"/>
+          <p:nvPr/>
+        </p:nvSpPr>
+        <p:spPr>
+          <a:xfrm>
+            <a:off x="8778240" y="1527048"/>
+            <a:ext cx="2697480" cy="347472"/>
+          </a:xfrm>
+          <a:prstGeom prst="rect">
+            <a:avLst/>
+          </a:prstGeom>
+          <a:noFill/>
+          <a:ln/>
+        </p:spPr>
+        <p:txBody>
+          <a:bodyPr wrap="square" lIns="0" tIns="0" rIns="0" bIns="0" rtlCol="0" anchor="t"/>
+          <a:lstStyle/>
+          <a:p>
+            <a:pPr indent="0" marL="0">
+              <a:buNone/>
+            </a:pPr>
+            <a:r>
+              <a:rPr lang="en-US" sz="1300" b="1" dirty="0">
                 <a:solidFill>
                   <a:schemeClr val="tx1"/>
                 </a:solidFill>
               </a:rPr>
-              <a:t>Amazon RDS instead of in-cluster Postgres</a:t>
-            </a:r>
-            <a:endParaRPr lang="en-US" sz="1500" dirty="0"/>
-          </a:p>
-          <a:p>
-            <a:pPr marL="342900" indent="-342900">
-              <a:spcAft>
-                <a:spcPts val="1000"/>
-              </a:spcAft>
-              <a:buSzPct val="100000"/>
-              <a:buChar char="•"/>
-            </a:pPr>
-            <a:r>
-              <a:rPr lang="en-US" sz="1500" dirty="0">
+              <a:t>Ingress → wrong Service and port</a:t>
+            </a:r>
+            <a:endParaRPr lang="en-US" sz="1300" dirty="0"/>
+          </a:p>
+        </p:txBody>
+      </p:sp>
+      <p:sp>
+        <p:nvSpPr>
+          <p:cNvPr id="17" name="Text 12"/>
+          <p:cNvSpPr txBox="1"/>
+          <p:nvPr/>
+        </p:nvSpPr>
+        <p:spPr>
+          <a:xfrm>
+            <a:off x="8778240" y="1892808"/>
+            <a:ext cx="2697480" cy="347472"/>
+          </a:xfrm>
+          <a:prstGeom prst="rect">
+            <a:avLst/>
+          </a:prstGeom>
+          <a:noFill/>
+          <a:ln/>
+        </p:spPr>
+        <p:txBody>
+          <a:bodyPr wrap="square" lIns="0" tIns="0" rIns="0" bIns="0" rtlCol="0" anchor="t"/>
+          <a:lstStyle/>
+          <a:p>
+            <a:pPr indent="0" marL="0">
+              <a:buNone/>
+            </a:pPr>
+            <a:r>
+              <a:rPr lang="en-US" sz="1150" dirty="0">
+                <a:solidFill>
+                  <a:schemeClr val="tx2"/>
+                </a:solidFill>
+              </a:rPr>
+              <a:t>taskboard-backend:8080 didn't exist</a:t>
+            </a:r>
+            <a:endParaRPr lang="en-US" sz="1150" dirty="0"/>
+          </a:p>
+        </p:txBody>
+      </p:sp>
+      <p:sp>
+        <p:nvSpPr>
+          <p:cNvPr id="18" name="bug-card-3"/>
+          <p:cNvSpPr/>
+          <p:nvPr/>
+        </p:nvSpPr>
+        <p:spPr>
+          <a:xfrm>
+            <a:off x="548640" y="2542032"/>
+            <a:ext cx="3566160" cy="1005840"/>
+          </a:xfrm>
+          <a:prstGeom prst="roundRect">
+            <a:avLst>
+              <a:gd name="adj" fmla="val 10909"/>
+            </a:avLst>
+          </a:prstGeom>
+          <a:solidFill>
+            <a:schemeClr val="bg2"/>
+          </a:solidFill>
+          <a:ln w="12700">
+            <a:solidFill>
+              <a:schemeClr val="bg2"/>
+            </a:solidFill>
+            <a:prstDash val="solid"/>
+          </a:ln>
+        </p:spPr>
+      </p:sp>
+      <p:sp>
+        <p:nvSpPr>
+          <p:cNvPr id="19" name="bug-badge-3-circle"/>
+          <p:cNvSpPr/>
+          <p:nvPr/>
+        </p:nvSpPr>
+        <p:spPr>
+          <a:xfrm>
+            <a:off x="731520" y="2816352"/>
+            <a:ext cx="411480" cy="411480"/>
+          </a:xfrm>
+          <a:prstGeom prst="ellipse">
+            <a:avLst/>
+          </a:prstGeom>
+          <a:solidFill>
+            <a:schemeClr val="accent1"/>
+          </a:solidFill>
+          <a:ln w="12700">
+            <a:solidFill>
+              <a:schemeClr val="accent1"/>
+            </a:solidFill>
+            <a:prstDash val="solid"/>
+          </a:ln>
+        </p:spPr>
+      </p:sp>
+      <p:pic>
+        <p:nvPicPr>
+          <p:cNvPr id="20" name="bug-badge-3-icon" descr="preencoded.png">    </p:cNvPr>
+          <p:cNvPicPr>
+            <a:picLocks noChangeAspect="1"/>
+          </p:cNvPicPr>
+          <p:nvPr/>
+        </p:nvPicPr>
+        <p:blipFill>
+          <a:blip r:embed="rId4"/>
+          <a:stretch>
+            <a:fillRect/>
+          </a:stretch>
+        </p:blipFill>
+        <p:spPr>
+          <a:xfrm>
+            <a:off x="834390" y="2919222"/>
+            <a:ext cx="205740" cy="205740"/>
+          </a:xfrm>
+          <a:prstGeom prst="rect">
+            <a:avLst/>
+          </a:prstGeom>
+        </p:spPr>
+      </p:pic>
+      <p:sp>
+        <p:nvSpPr>
+          <p:cNvPr id="21" name="Text 15"/>
+          <p:cNvSpPr txBox="1"/>
+          <p:nvPr/>
+        </p:nvSpPr>
+        <p:spPr>
+          <a:xfrm>
+            <a:off x="1280160" y="2697480"/>
+            <a:ext cx="2697480" cy="347472"/>
+          </a:xfrm>
+          <a:prstGeom prst="rect">
+            <a:avLst/>
+          </a:prstGeom>
+          <a:noFill/>
+          <a:ln/>
+        </p:spPr>
+        <p:txBody>
+          <a:bodyPr wrap="square" lIns="0" tIns="0" rIns="0" bIns="0" rtlCol="0" anchor="t"/>
+          <a:lstStyle/>
+          <a:p>
+            <a:pPr indent="0" marL="0">
+              <a:buNone/>
+            </a:pPr>
+            <a:r>
+              <a:rPr lang="en-US" sz="1300" b="1" dirty="0">
                 <a:solidFill>
                   <a:schemeClr val="tx1"/>
                 </a:solidFill>
               </a:rPr>
-              <a:t>External Secrets + AWS Secrets Manager</a:t>
-            </a:r>
-            <a:endParaRPr lang="en-US" sz="1500" dirty="0"/>
-          </a:p>
-          <a:p>
-            <a:pPr marL="342900" indent="-342900">
-              <a:spcAft>
-                <a:spcPts val="1000"/>
-              </a:spcAft>
-              <a:buSzPct val="100000"/>
-              <a:buChar char="•"/>
-            </a:pPr>
-            <a:r>
-              <a:rPr lang="en-US" sz="1500" dirty="0">
+              <a:t>Nginx proxied to host 'backend'</a:t>
+            </a:r>
+            <a:endParaRPr lang="en-US" sz="1300" dirty="0"/>
+          </a:p>
+        </p:txBody>
+      </p:sp>
+      <p:sp>
+        <p:nvSpPr>
+          <p:cNvPr id="22" name="Text 16"/>
+          <p:cNvSpPr txBox="1"/>
+          <p:nvPr/>
+        </p:nvSpPr>
+        <p:spPr>
+          <a:xfrm>
+            <a:off x="1280160" y="3063240"/>
+            <a:ext cx="2697480" cy="347472"/>
+          </a:xfrm>
+          <a:prstGeom prst="rect">
+            <a:avLst/>
+          </a:prstGeom>
+          <a:noFill/>
+          <a:ln/>
+        </p:spPr>
+        <p:txBody>
+          <a:bodyPr wrap="square" lIns="0" tIns="0" rIns="0" bIns="0" rtlCol="0" anchor="t"/>
+          <a:lstStyle/>
+          <a:p>
+            <a:pPr indent="0" marL="0">
+              <a:buNone/>
+            </a:pPr>
+            <a:r>
+              <a:rPr lang="en-US" sz="1150" dirty="0">
+                <a:solidFill>
+                  <a:schemeClr val="tx2"/>
+                </a:solidFill>
+              </a:rPr>
+              <a:t>templated BACKEND_URL per environment</a:t>
+            </a:r>
+            <a:endParaRPr lang="en-US" sz="1150" dirty="0"/>
+          </a:p>
+        </p:txBody>
+      </p:sp>
+      <p:sp>
+        <p:nvSpPr>
+          <p:cNvPr id="23" name="bug-card-4"/>
+          <p:cNvSpPr/>
+          <p:nvPr/>
+        </p:nvSpPr>
+        <p:spPr>
+          <a:xfrm>
+            <a:off x="4297680" y="2542032"/>
+            <a:ext cx="3566160" cy="1005840"/>
+          </a:xfrm>
+          <a:prstGeom prst="roundRect">
+            <a:avLst>
+              <a:gd name="adj" fmla="val 10909"/>
+            </a:avLst>
+          </a:prstGeom>
+          <a:solidFill>
+            <a:schemeClr val="bg2"/>
+          </a:solidFill>
+          <a:ln w="12700">
+            <a:solidFill>
+              <a:schemeClr val="bg2"/>
+            </a:solidFill>
+            <a:prstDash val="solid"/>
+          </a:ln>
+        </p:spPr>
+      </p:sp>
+      <p:sp>
+        <p:nvSpPr>
+          <p:cNvPr id="24" name="bug-badge-4-circle"/>
+          <p:cNvSpPr/>
+          <p:nvPr/>
+        </p:nvSpPr>
+        <p:spPr>
+          <a:xfrm>
+            <a:off x="4480560" y="2816352"/>
+            <a:ext cx="411480" cy="411480"/>
+          </a:xfrm>
+          <a:prstGeom prst="ellipse">
+            <a:avLst/>
+          </a:prstGeom>
+          <a:solidFill>
+            <a:schemeClr val="accent1"/>
+          </a:solidFill>
+          <a:ln w="12700">
+            <a:solidFill>
+              <a:schemeClr val="accent1"/>
+            </a:solidFill>
+            <a:prstDash val="solid"/>
+          </a:ln>
+        </p:spPr>
+      </p:sp>
+      <p:pic>
+        <p:nvPicPr>
+          <p:cNvPr id="25" name="bug-badge-4-icon" descr="preencoded.png">    </p:cNvPr>
+          <p:cNvPicPr>
+            <a:picLocks noChangeAspect="1"/>
+          </p:cNvPicPr>
+          <p:nvPr/>
+        </p:nvPicPr>
+        <p:blipFill>
+          <a:blip r:embed="rId5"/>
+          <a:stretch>
+            <a:fillRect/>
+          </a:stretch>
+        </p:blipFill>
+        <p:spPr>
+          <a:xfrm>
+            <a:off x="4583430" y="2919222"/>
+            <a:ext cx="205740" cy="205740"/>
+          </a:xfrm>
+          <a:prstGeom prst="rect">
+            <a:avLst/>
+          </a:prstGeom>
+        </p:spPr>
+      </p:pic>
+      <p:sp>
+        <p:nvSpPr>
+          <p:cNvPr id="26" name="Text 19"/>
+          <p:cNvSpPr txBox="1"/>
+          <p:nvPr/>
+        </p:nvSpPr>
+        <p:spPr>
+          <a:xfrm>
+            <a:off x="5029200" y="2697480"/>
+            <a:ext cx="2697480" cy="347472"/>
+          </a:xfrm>
+          <a:prstGeom prst="rect">
+            <a:avLst/>
+          </a:prstGeom>
+          <a:noFill/>
+          <a:ln/>
+        </p:spPr>
+        <p:txBody>
+          <a:bodyPr wrap="square" lIns="0" tIns="0" rIns="0" bIns="0" rtlCol="0" anchor="t"/>
+          <a:lstStyle/>
+          <a:p>
+            <a:pPr indent="0" marL="0">
+              <a:buNone/>
+            </a:pPr>
+            <a:r>
+              <a:rPr lang="en-US" sz="1300" b="1" dirty="0">
                 <a:solidFill>
                   <a:schemeClr val="tx1"/>
                 </a:solidFill>
               </a:rPr>
-              <a:t>cert-manager TLS on the Ingress</a:t>
-            </a:r>
-            <a:endParaRPr lang="en-US" sz="1500" dirty="0"/>
-          </a:p>
-          <a:p>
-            <a:pPr marL="342900" indent="-342900">
-              <a:spcAft>
-                <a:spcPts val="1000"/>
-              </a:spcAft>
-              <a:buSzPct val="100000"/>
-              <a:buChar char="•"/>
-            </a:pPr>
-            <a:r>
-              <a:rPr lang="en-US" sz="1500" dirty="0">
+              <a:t>Pipeline never pushed to GHCR</a:t>
+            </a:r>
+            <a:endParaRPr lang="en-US" sz="1300" dirty="0"/>
+          </a:p>
+        </p:txBody>
+      </p:sp>
+      <p:sp>
+        <p:nvSpPr>
+          <p:cNvPr id="27" name="Text 20"/>
+          <p:cNvSpPr txBox="1"/>
+          <p:nvPr/>
+        </p:nvSpPr>
+        <p:spPr>
+          <a:xfrm>
+            <a:off x="5029200" y="3063240"/>
+            <a:ext cx="2697480" cy="347472"/>
+          </a:xfrm>
+          <a:prstGeom prst="rect">
+            <a:avLst/>
+          </a:prstGeom>
+          <a:noFill/>
+          <a:ln/>
+        </p:spPr>
+        <p:txBody>
+          <a:bodyPr wrap="square" lIns="0" tIns="0" rIns="0" bIns="0" rtlCol="0" anchor="t"/>
+          <a:lstStyle/>
+          <a:p>
+            <a:pPr indent="0" marL="0">
+              <a:buNone/>
+            </a:pPr>
+            <a:r>
+              <a:rPr lang="en-US" sz="1150" dirty="0">
+                <a:solidFill>
+                  <a:schemeClr val="tx2"/>
+                </a:solidFill>
+              </a:rPr>
+              <a:t>Docker Hub, :latest tags, 3 rebuilds</a:t>
+            </a:r>
+            <a:endParaRPr lang="en-US" sz="1150" dirty="0"/>
+          </a:p>
+        </p:txBody>
+      </p:sp>
+      <p:sp>
+        <p:nvSpPr>
+          <p:cNvPr id="28" name="bug-card-5"/>
+          <p:cNvSpPr/>
+          <p:nvPr/>
+        </p:nvSpPr>
+        <p:spPr>
+          <a:xfrm>
+            <a:off x="8046720" y="2542032"/>
+            <a:ext cx="3566160" cy="1005840"/>
+          </a:xfrm>
+          <a:prstGeom prst="roundRect">
+            <a:avLst>
+              <a:gd name="adj" fmla="val 10909"/>
+            </a:avLst>
+          </a:prstGeom>
+          <a:solidFill>
+            <a:schemeClr val="bg2"/>
+          </a:solidFill>
+          <a:ln w="12700">
+            <a:solidFill>
+              <a:schemeClr val="bg2"/>
+            </a:solidFill>
+            <a:prstDash val="solid"/>
+          </a:ln>
+        </p:spPr>
+      </p:sp>
+      <p:sp>
+        <p:nvSpPr>
+          <p:cNvPr id="29" name="bug-badge-5-circle"/>
+          <p:cNvSpPr/>
+          <p:nvPr/>
+        </p:nvSpPr>
+        <p:spPr>
+          <a:xfrm>
+            <a:off x="8229600" y="2816352"/>
+            <a:ext cx="411480" cy="411480"/>
+          </a:xfrm>
+          <a:prstGeom prst="ellipse">
+            <a:avLst/>
+          </a:prstGeom>
+          <a:solidFill>
+            <a:schemeClr val="accent1"/>
+          </a:solidFill>
+          <a:ln w="12700">
+            <a:solidFill>
+              <a:schemeClr val="accent1"/>
+            </a:solidFill>
+            <a:prstDash val="solid"/>
+          </a:ln>
+        </p:spPr>
+      </p:sp>
+      <p:pic>
+        <p:nvPicPr>
+          <p:cNvPr id="30" name="bug-badge-5-icon" descr="preencoded.png">    </p:cNvPr>
+          <p:cNvPicPr>
+            <a:picLocks noChangeAspect="1"/>
+          </p:cNvPicPr>
+          <p:nvPr/>
+        </p:nvPicPr>
+        <p:blipFill>
+          <a:blip r:embed="rId6"/>
+          <a:stretch>
+            <a:fillRect/>
+          </a:stretch>
+        </p:blipFill>
+        <p:spPr>
+          <a:xfrm>
+            <a:off x="8332470" y="2919222"/>
+            <a:ext cx="205740" cy="205740"/>
+          </a:xfrm>
+          <a:prstGeom prst="rect">
+            <a:avLst/>
+          </a:prstGeom>
+        </p:spPr>
+      </p:pic>
+      <p:sp>
+        <p:nvSpPr>
+          <p:cNvPr id="31" name="Text 23"/>
+          <p:cNvSpPr txBox="1"/>
+          <p:nvPr/>
+        </p:nvSpPr>
+        <p:spPr>
+          <a:xfrm>
+            <a:off x="8778240" y="2697480"/>
+            <a:ext cx="2697480" cy="347472"/>
+          </a:xfrm>
+          <a:prstGeom prst="rect">
+            <a:avLst/>
+          </a:prstGeom>
+          <a:noFill/>
+          <a:ln/>
+        </p:spPr>
+        <p:txBody>
+          <a:bodyPr wrap="square" lIns="0" tIns="0" rIns="0" bIns="0" rtlCol="0" anchor="t"/>
+          <a:lstStyle/>
+          <a:p>
+            <a:pPr indent="0" marL="0">
+              <a:buNone/>
+            </a:pPr>
+            <a:r>
+              <a:rPr lang="en-US" sz="1300" b="1" dirty="0">
                 <a:solidFill>
                   <a:schemeClr val="tx1"/>
                 </a:solidFill>
               </a:rPr>
-              <a:t>S3 remote state with locking for Terraform</a:t>
-            </a:r>
-            <a:endParaRPr lang="en-US" sz="1500" dirty="0"/>
-          </a:p>
-          <a:p>
-            <a:pPr marL="342900" indent="-342900">
-              <a:spcAft>
-                <a:spcPts val="1000"/>
-              </a:spcAft>
-              <a:buSzPct val="100000"/>
-              <a:buChar char="•"/>
-            </a:pPr>
-            <a:r>
-              <a:rPr lang="en-US" sz="1500" dirty="0">
+              <a:t>Trivy could never fail the build</a:t>
+            </a:r>
+            <a:endParaRPr lang="en-US" sz="1300" dirty="0"/>
+          </a:p>
+        </p:txBody>
+      </p:sp>
+      <p:sp>
+        <p:nvSpPr>
+          <p:cNvPr id="32" name="Text 24"/>
+          <p:cNvSpPr txBox="1"/>
+          <p:nvPr/>
+        </p:nvSpPr>
+        <p:spPr>
+          <a:xfrm>
+            <a:off x="8778240" y="3063240"/>
+            <a:ext cx="2697480" cy="347472"/>
+          </a:xfrm>
+          <a:prstGeom prst="rect">
+            <a:avLst/>
+          </a:prstGeom>
+          <a:noFill/>
+          <a:ln/>
+        </p:spPr>
+        <p:txBody>
+          <a:bodyPr wrap="square" lIns="0" tIns="0" rIns="0" bIns="0" rtlCol="0" anchor="t"/>
+          <a:lstStyle/>
+          <a:p>
+            <a:pPr indent="0" marL="0">
+              <a:buNone/>
+            </a:pPr>
+            <a:r>
+              <a:rPr lang="en-US" sz="1150" dirty="0">
+                <a:solidFill>
+                  <a:schemeClr val="tx2"/>
+                </a:solidFill>
+              </a:rPr>
+              <a:t>added --exit-code 1</a:t>
+            </a:r>
+            <a:endParaRPr lang="en-US" sz="1150" dirty="0"/>
+          </a:p>
+        </p:txBody>
+      </p:sp>
+      <p:sp>
+        <p:nvSpPr>
+          <p:cNvPr id="33" name="bug-card-6"/>
+          <p:cNvSpPr/>
+          <p:nvPr/>
+        </p:nvSpPr>
+        <p:spPr>
+          <a:xfrm>
+            <a:off x="548640" y="3712464"/>
+            <a:ext cx="3566160" cy="1005840"/>
+          </a:xfrm>
+          <a:prstGeom prst="roundRect">
+            <a:avLst>
+              <a:gd name="adj" fmla="val 10909"/>
+            </a:avLst>
+          </a:prstGeom>
+          <a:solidFill>
+            <a:schemeClr val="bg2"/>
+          </a:solidFill>
+          <a:ln w="12700">
+            <a:solidFill>
+              <a:schemeClr val="bg2"/>
+            </a:solidFill>
+            <a:prstDash val="solid"/>
+          </a:ln>
+        </p:spPr>
+      </p:sp>
+      <p:sp>
+        <p:nvSpPr>
+          <p:cNvPr id="34" name="bug-badge-6-circle"/>
+          <p:cNvSpPr/>
+          <p:nvPr/>
+        </p:nvSpPr>
+        <p:spPr>
+          <a:xfrm>
+            <a:off x="731520" y="3986784"/>
+            <a:ext cx="411480" cy="411480"/>
+          </a:xfrm>
+          <a:prstGeom prst="ellipse">
+            <a:avLst/>
+          </a:prstGeom>
+          <a:solidFill>
+            <a:schemeClr val="accent1"/>
+          </a:solidFill>
+          <a:ln w="12700">
+            <a:solidFill>
+              <a:schemeClr val="accent1"/>
+            </a:solidFill>
+            <a:prstDash val="solid"/>
+          </a:ln>
+        </p:spPr>
+      </p:sp>
+      <p:pic>
+        <p:nvPicPr>
+          <p:cNvPr id="35" name="bug-badge-6-icon" descr="preencoded.png">    </p:cNvPr>
+          <p:cNvPicPr>
+            <a:picLocks noChangeAspect="1"/>
+          </p:cNvPicPr>
+          <p:nvPr/>
+        </p:nvPicPr>
+        <p:blipFill>
+          <a:blip r:embed="rId7"/>
+          <a:stretch>
+            <a:fillRect/>
+          </a:stretch>
+        </p:blipFill>
+        <p:spPr>
+          <a:xfrm>
+            <a:off x="834390" y="4089654"/>
+            <a:ext cx="205740" cy="205740"/>
+          </a:xfrm>
+          <a:prstGeom prst="rect">
+            <a:avLst/>
+          </a:prstGeom>
+        </p:spPr>
+      </p:pic>
+      <p:sp>
+        <p:nvSpPr>
+          <p:cNvPr id="36" name="Text 27"/>
+          <p:cNvSpPr txBox="1"/>
+          <p:nvPr/>
+        </p:nvSpPr>
+        <p:spPr>
+          <a:xfrm>
+            <a:off x="1280160" y="3867912"/>
+            <a:ext cx="2697480" cy="347472"/>
+          </a:xfrm>
+          <a:prstGeom prst="rect">
+            <a:avLst/>
+          </a:prstGeom>
+          <a:noFill/>
+          <a:ln/>
+        </p:spPr>
+        <p:txBody>
+          <a:bodyPr wrap="square" lIns="0" tIns="0" rIns="0" bIns="0" rtlCol="0" anchor="t"/>
+          <a:lstStyle/>
+          <a:p>
+            <a:pPr indent="0" marL="0">
+              <a:buNone/>
+            </a:pPr>
+            <a:r>
+              <a:rPr lang="en-US" sz="1300" b="1" dirty="0">
                 <a:solidFill>
                   <a:schemeClr val="tx1"/>
                 </a:solidFill>
               </a:rPr>
-              <a:t>App authentication; alerting rules in Alertmanager</a:t>
-            </a:r>
-            <a:endParaRPr lang="en-US" sz="1500" dirty="0"/>
+              <a:t>Frontend ran Nginx as root</a:t>
+            </a:r>
+            <a:endParaRPr lang="en-US" sz="1300" dirty="0"/>
+          </a:p>
+        </p:txBody>
+      </p:sp>
+      <p:sp>
+        <p:nvSpPr>
+          <p:cNvPr id="37" name="Text 28"/>
+          <p:cNvSpPr txBox="1"/>
+          <p:nvPr/>
+        </p:nvSpPr>
+        <p:spPr>
+          <a:xfrm>
+            <a:off x="1280160" y="4233672"/>
+            <a:ext cx="2697480" cy="347472"/>
+          </a:xfrm>
+          <a:prstGeom prst="rect">
+            <a:avLst/>
+          </a:prstGeom>
+          <a:noFill/>
+          <a:ln/>
+        </p:spPr>
+        <p:txBody>
+          <a:bodyPr wrap="square" lIns="0" tIns="0" rIns="0" bIns="0" rtlCol="0" anchor="t"/>
+          <a:lstStyle/>
+          <a:p>
+            <a:pPr indent="0" marL="0">
+              <a:buNone/>
+            </a:pPr>
+            <a:r>
+              <a:rPr lang="en-US" sz="1150" dirty="0">
+                <a:solidFill>
+                  <a:schemeClr val="tx2"/>
+                </a:solidFill>
+              </a:rPr>
+              <a:t>unprivileged image on :8080</a:t>
+            </a:r>
+            <a:endParaRPr lang="en-US" sz="1150" dirty="0"/>
+          </a:p>
+        </p:txBody>
+      </p:sp>
+      <p:sp>
+        <p:nvSpPr>
+          <p:cNvPr id="38" name="bug-card-7"/>
+          <p:cNvSpPr/>
+          <p:nvPr/>
+        </p:nvSpPr>
+        <p:spPr>
+          <a:xfrm>
+            <a:off x="4297680" y="3712464"/>
+            <a:ext cx="3566160" cy="1005840"/>
+          </a:xfrm>
+          <a:prstGeom prst="roundRect">
+            <a:avLst>
+              <a:gd name="adj" fmla="val 10909"/>
+            </a:avLst>
+          </a:prstGeom>
+          <a:solidFill>
+            <a:schemeClr val="bg2"/>
+          </a:solidFill>
+          <a:ln w="12700">
+            <a:solidFill>
+              <a:schemeClr val="bg2"/>
+            </a:solidFill>
+            <a:prstDash val="solid"/>
+          </a:ln>
+        </p:spPr>
+      </p:sp>
+      <p:sp>
+        <p:nvSpPr>
+          <p:cNvPr id="39" name="bug-badge-7-circle"/>
+          <p:cNvSpPr/>
+          <p:nvPr/>
+        </p:nvSpPr>
+        <p:spPr>
+          <a:xfrm>
+            <a:off x="4480560" y="3986784"/>
+            <a:ext cx="411480" cy="411480"/>
+          </a:xfrm>
+          <a:prstGeom prst="ellipse">
+            <a:avLst/>
+          </a:prstGeom>
+          <a:solidFill>
+            <a:schemeClr val="accent1"/>
+          </a:solidFill>
+          <a:ln w="12700">
+            <a:solidFill>
+              <a:schemeClr val="accent1"/>
+            </a:solidFill>
+            <a:prstDash val="solid"/>
+          </a:ln>
+        </p:spPr>
+      </p:sp>
+      <p:pic>
+        <p:nvPicPr>
+          <p:cNvPr id="40" name="bug-badge-7-icon" descr="preencoded.png">    </p:cNvPr>
+          <p:cNvPicPr>
+            <a:picLocks noChangeAspect="1"/>
+          </p:cNvPicPr>
+          <p:nvPr/>
+        </p:nvPicPr>
+        <p:blipFill>
+          <a:blip r:embed="rId8"/>
+          <a:stretch>
+            <a:fillRect/>
+          </a:stretch>
+        </p:blipFill>
+        <p:spPr>
+          <a:xfrm>
+            <a:off x="4583430" y="4089654"/>
+            <a:ext cx="205740" cy="205740"/>
+          </a:xfrm>
+          <a:prstGeom prst="rect">
+            <a:avLst/>
+          </a:prstGeom>
+        </p:spPr>
+      </p:pic>
+      <p:sp>
+        <p:nvSpPr>
+          <p:cNvPr id="41" name="Text 31"/>
+          <p:cNvSpPr txBox="1"/>
+          <p:nvPr/>
+        </p:nvSpPr>
+        <p:spPr>
+          <a:xfrm>
+            <a:off x="5029200" y="3867912"/>
+            <a:ext cx="2697480" cy="347472"/>
+          </a:xfrm>
+          <a:prstGeom prst="rect">
+            <a:avLst/>
+          </a:prstGeom>
+          <a:noFill/>
+          <a:ln/>
+        </p:spPr>
+        <p:txBody>
+          <a:bodyPr wrap="square" lIns="0" tIns="0" rIns="0" bIns="0" rtlCol="0" anchor="t"/>
+          <a:lstStyle/>
+          <a:p>
+            <a:pPr indent="0" marL="0">
+              <a:buNone/>
+            </a:pPr>
+            <a:r>
+              <a:rPr lang="en-US" sz="1300" b="1" dirty="0">
+                <a:solidFill>
+                  <a:schemeClr val="tx1"/>
+                </a:solidFill>
+              </a:rPr>
+              <a:t>Init container waited forever</a:t>
+            </a:r>
+            <a:endParaRPr lang="en-US" sz="1300" dirty="0"/>
+          </a:p>
+        </p:txBody>
+      </p:sp>
+      <p:sp>
+        <p:nvSpPr>
+          <p:cNvPr id="42" name="Text 32"/>
+          <p:cNvSpPr txBox="1"/>
+          <p:nvPr/>
+        </p:nvSpPr>
+        <p:spPr>
+          <a:xfrm>
+            <a:off x="5029200" y="4233672"/>
+            <a:ext cx="2697480" cy="347472"/>
+          </a:xfrm>
+          <a:prstGeom prst="rect">
+            <a:avLst/>
+          </a:prstGeom>
+          <a:noFill/>
+          <a:ln/>
+        </p:spPr>
+        <p:txBody>
+          <a:bodyPr wrap="square" lIns="0" tIns="0" rIns="0" bIns="0" rtlCol="0" anchor="t"/>
+          <a:lstStyle/>
+          <a:p>
+            <a:pPr indent="0" marL="0">
+              <a:buNone/>
+            </a:pPr>
+            <a:r>
+              <a:rPr lang="en-US" sz="1150" dirty="0">
+                <a:solidFill>
+                  <a:schemeClr val="tx2"/>
+                </a:solidFill>
+              </a:rPr>
+              <a:t>pg_isready as uid 10001: pass -U/-d</a:t>
+            </a:r>
+            <a:endParaRPr lang="en-US" sz="1150" dirty="0"/>
+          </a:p>
+        </p:txBody>
+      </p:sp>
+      <p:sp>
+        <p:nvSpPr>
+          <p:cNvPr id="43" name="bug-card-8"/>
+          <p:cNvSpPr/>
+          <p:nvPr/>
+        </p:nvSpPr>
+        <p:spPr>
+          <a:xfrm>
+            <a:off x="8046720" y="3712464"/>
+            <a:ext cx="3566160" cy="1005840"/>
+          </a:xfrm>
+          <a:prstGeom prst="roundRect">
+            <a:avLst>
+              <a:gd name="adj" fmla="val 10909"/>
+            </a:avLst>
+          </a:prstGeom>
+          <a:solidFill>
+            <a:schemeClr val="bg2"/>
+          </a:solidFill>
+          <a:ln w="12700">
+            <a:solidFill>
+              <a:schemeClr val="bg2"/>
+            </a:solidFill>
+            <a:prstDash val="solid"/>
+          </a:ln>
+        </p:spPr>
+      </p:sp>
+      <p:sp>
+        <p:nvSpPr>
+          <p:cNvPr id="44" name="bug-badge-8-circle"/>
+          <p:cNvSpPr/>
+          <p:nvPr/>
+        </p:nvSpPr>
+        <p:spPr>
+          <a:xfrm>
+            <a:off x="8229600" y="3986784"/>
+            <a:ext cx="411480" cy="411480"/>
+          </a:xfrm>
+          <a:prstGeom prst="ellipse">
+            <a:avLst/>
+          </a:prstGeom>
+          <a:solidFill>
+            <a:schemeClr val="accent1"/>
+          </a:solidFill>
+          <a:ln w="12700">
+            <a:solidFill>
+              <a:schemeClr val="accent1"/>
+            </a:solidFill>
+            <a:prstDash val="solid"/>
+          </a:ln>
+        </p:spPr>
+      </p:sp>
+      <p:pic>
+        <p:nvPicPr>
+          <p:cNvPr id="45" name="bug-badge-8-icon" descr="preencoded.png">    </p:cNvPr>
+          <p:cNvPicPr>
+            <a:picLocks noChangeAspect="1"/>
+          </p:cNvPicPr>
+          <p:nvPr/>
+        </p:nvPicPr>
+        <p:blipFill>
+          <a:blip r:embed="rId9"/>
+          <a:stretch>
+            <a:fillRect/>
+          </a:stretch>
+        </p:blipFill>
+        <p:spPr>
+          <a:xfrm>
+            <a:off x="8332470" y="4089654"/>
+            <a:ext cx="205740" cy="205740"/>
+          </a:xfrm>
+          <a:prstGeom prst="rect">
+            <a:avLst/>
+          </a:prstGeom>
+        </p:spPr>
+      </p:pic>
+      <p:sp>
+        <p:nvSpPr>
+          <p:cNvPr id="46" name="Text 35"/>
+          <p:cNvSpPr txBox="1"/>
+          <p:nvPr/>
+        </p:nvSpPr>
+        <p:spPr>
+          <a:xfrm>
+            <a:off x="8778240" y="3867912"/>
+            <a:ext cx="2697480" cy="347472"/>
+          </a:xfrm>
+          <a:prstGeom prst="rect">
+            <a:avLst/>
+          </a:prstGeom>
+          <a:noFill/>
+          <a:ln/>
+        </p:spPr>
+        <p:txBody>
+          <a:bodyPr wrap="square" lIns="0" tIns="0" rIns="0" bIns="0" rtlCol="0" anchor="t"/>
+          <a:lstStyle/>
+          <a:p>
+            <a:pPr indent="0" marL="0">
+              <a:buNone/>
+            </a:pPr>
+            <a:r>
+              <a:rPr lang="en-US" sz="1300" b="1" dirty="0">
+                <a:solidFill>
+                  <a:schemeClr val="tx1"/>
+                </a:solidFill>
+              </a:rPr>
+              <a:t>Create-task modal never closed</a:t>
+            </a:r>
+            <a:endParaRPr lang="en-US" sz="1300" dirty="0"/>
+          </a:p>
+        </p:txBody>
+      </p:sp>
+      <p:sp>
+        <p:nvSpPr>
+          <p:cNvPr id="47" name="Text 36"/>
+          <p:cNvSpPr txBox="1"/>
+          <p:nvPr/>
+        </p:nvSpPr>
+        <p:spPr>
+          <a:xfrm>
+            <a:off x="8778240" y="4233672"/>
+            <a:ext cx="2697480" cy="347472"/>
+          </a:xfrm>
+          <a:prstGeom prst="rect">
+            <a:avLst/>
+          </a:prstGeom>
+          <a:noFill/>
+          <a:ln/>
+        </p:spPr>
+        <p:txBody>
+          <a:bodyPr wrap="square" lIns="0" tIns="0" rIns="0" bIns="0" rtlCol="0" anchor="t"/>
+          <a:lstStyle/>
+          <a:p>
+            <a:pPr indent="0" marL="0">
+              <a:buNone/>
+            </a:pPr>
+            <a:r>
+              <a:rPr lang="en-US" sz="1150" dirty="0">
+                <a:solidFill>
+                  <a:schemeClr val="tx2"/>
+                </a:solidFill>
+              </a:rPr>
+              <a:t>React currentTarget is null after await</a:t>
+            </a:r>
+            <a:endParaRPr lang="en-US" sz="1150" dirty="0"/>
+          </a:p>
+        </p:txBody>
+      </p:sp>
+      <p:sp>
+        <p:nvSpPr>
+          <p:cNvPr id="48" name="bug-card-9"/>
+          <p:cNvSpPr/>
+          <p:nvPr/>
+        </p:nvSpPr>
+        <p:spPr>
+          <a:xfrm>
+            <a:off x="548640" y="4882896"/>
+            <a:ext cx="3566160" cy="1005840"/>
+          </a:xfrm>
+          <a:prstGeom prst="roundRect">
+            <a:avLst>
+              <a:gd name="adj" fmla="val 10909"/>
+            </a:avLst>
+          </a:prstGeom>
+          <a:solidFill>
+            <a:schemeClr val="bg2"/>
+          </a:solidFill>
+          <a:ln w="12700">
+            <a:solidFill>
+              <a:schemeClr val="bg2"/>
+            </a:solidFill>
+            <a:prstDash val="solid"/>
+          </a:ln>
+        </p:spPr>
+      </p:sp>
+      <p:sp>
+        <p:nvSpPr>
+          <p:cNvPr id="49" name="bug-badge-9-circle"/>
+          <p:cNvSpPr/>
+          <p:nvPr/>
+        </p:nvSpPr>
+        <p:spPr>
+          <a:xfrm>
+            <a:off x="731520" y="5157216"/>
+            <a:ext cx="411480" cy="411480"/>
+          </a:xfrm>
+          <a:prstGeom prst="ellipse">
+            <a:avLst/>
+          </a:prstGeom>
+          <a:solidFill>
+            <a:schemeClr val="accent1"/>
+          </a:solidFill>
+          <a:ln w="12700">
+            <a:solidFill>
+              <a:schemeClr val="accent1"/>
+            </a:solidFill>
+            <a:prstDash val="solid"/>
+          </a:ln>
+        </p:spPr>
+      </p:sp>
+      <p:pic>
+        <p:nvPicPr>
+          <p:cNvPr id="50" name="bug-badge-9-icon" descr="preencoded.png">    </p:cNvPr>
+          <p:cNvPicPr>
+            <a:picLocks noChangeAspect="1"/>
+          </p:cNvPicPr>
+          <p:nvPr/>
+        </p:nvPicPr>
+        <p:blipFill>
+          <a:blip r:embed="rId10"/>
+          <a:stretch>
+            <a:fillRect/>
+          </a:stretch>
+        </p:blipFill>
+        <p:spPr>
+          <a:xfrm>
+            <a:off x="834390" y="5260086"/>
+            <a:ext cx="205740" cy="205740"/>
+          </a:xfrm>
+          <a:prstGeom prst="rect">
+            <a:avLst/>
+          </a:prstGeom>
+        </p:spPr>
+      </p:pic>
+      <p:sp>
+        <p:nvSpPr>
+          <p:cNvPr id="51" name="Text 39"/>
+          <p:cNvSpPr txBox="1"/>
+          <p:nvPr/>
+        </p:nvSpPr>
+        <p:spPr>
+          <a:xfrm>
+            <a:off x="1280160" y="5038344"/>
+            <a:ext cx="2697480" cy="347472"/>
+          </a:xfrm>
+          <a:prstGeom prst="rect">
+            <a:avLst/>
+          </a:prstGeom>
+          <a:noFill/>
+          <a:ln/>
+        </p:spPr>
+        <p:txBody>
+          <a:bodyPr wrap="square" lIns="0" tIns="0" rIns="0" bIns="0" rtlCol="0" anchor="t"/>
+          <a:lstStyle/>
+          <a:p>
+            <a:pPr indent="0" marL="0">
+              <a:buNone/>
+            </a:pPr>
+            <a:r>
+              <a:rPr lang="en-US" sz="1300" b="1" dirty="0">
+                <a:solidFill>
+                  <a:schemeClr val="tx1"/>
+                </a:solidFill>
+              </a:rPr>
+              <a:t>Postgres initdb fails on EBS</a:t>
+            </a:r>
+            <a:endParaRPr lang="en-US" sz="1300" dirty="0"/>
+          </a:p>
+        </p:txBody>
+      </p:sp>
+      <p:sp>
+        <p:nvSpPr>
+          <p:cNvPr id="52" name="Text 40"/>
+          <p:cNvSpPr txBox="1"/>
+          <p:nvPr/>
+        </p:nvSpPr>
+        <p:spPr>
+          <a:xfrm>
+            <a:off x="1280160" y="5404104"/>
+            <a:ext cx="2697480" cy="347472"/>
+          </a:xfrm>
+          <a:prstGeom prst="rect">
+            <a:avLst/>
+          </a:prstGeom>
+          <a:noFill/>
+          <a:ln/>
+        </p:spPr>
+        <p:txBody>
+          <a:bodyPr wrap="square" lIns="0" tIns="0" rIns="0" bIns="0" rtlCol="0" anchor="t"/>
+          <a:lstStyle/>
+          <a:p>
+            <a:pPr indent="0" marL="0">
+              <a:buNone/>
+            </a:pPr>
+            <a:r>
+              <a:rPr lang="en-US" sz="1150" dirty="0">
+                <a:solidFill>
+                  <a:schemeClr val="tx2"/>
+                </a:solidFill>
+              </a:rPr>
+              <a:t>lost+found → PGDATA subdirectory</a:t>
+            </a:r>
+            <a:endParaRPr lang="en-US" sz="1150" dirty="0"/>
+          </a:p>
+        </p:txBody>
+      </p:sp>
+      <p:sp>
+        <p:nvSpPr>
+          <p:cNvPr id="53" name="bug-card-10"/>
+          <p:cNvSpPr/>
+          <p:nvPr/>
+        </p:nvSpPr>
+        <p:spPr>
+          <a:xfrm>
+            <a:off x="4297680" y="4882896"/>
+            <a:ext cx="3566160" cy="1005840"/>
+          </a:xfrm>
+          <a:prstGeom prst="roundRect">
+            <a:avLst>
+              <a:gd name="adj" fmla="val 10909"/>
+            </a:avLst>
+          </a:prstGeom>
+          <a:solidFill>
+            <a:schemeClr val="bg2"/>
+          </a:solidFill>
+          <a:ln w="12700">
+            <a:solidFill>
+              <a:schemeClr val="bg2"/>
+            </a:solidFill>
+            <a:prstDash val="solid"/>
+          </a:ln>
+        </p:spPr>
+      </p:sp>
+      <p:sp>
+        <p:nvSpPr>
+          <p:cNvPr id="54" name="bug-badge-10-circle"/>
+          <p:cNvSpPr/>
+          <p:nvPr/>
+        </p:nvSpPr>
+        <p:spPr>
+          <a:xfrm>
+            <a:off x="4480560" y="5157216"/>
+            <a:ext cx="411480" cy="411480"/>
+          </a:xfrm>
+          <a:prstGeom prst="ellipse">
+            <a:avLst/>
+          </a:prstGeom>
+          <a:solidFill>
+            <a:schemeClr val="accent1"/>
+          </a:solidFill>
+          <a:ln w="12700">
+            <a:solidFill>
+              <a:schemeClr val="accent1"/>
+            </a:solidFill>
+            <a:prstDash val="solid"/>
+          </a:ln>
+        </p:spPr>
+      </p:sp>
+      <p:pic>
+        <p:nvPicPr>
+          <p:cNvPr id="55" name="bug-badge-10-icon" descr="preencoded.png">    </p:cNvPr>
+          <p:cNvPicPr>
+            <a:picLocks noChangeAspect="1"/>
+          </p:cNvPicPr>
+          <p:nvPr/>
+        </p:nvPicPr>
+        <p:blipFill>
+          <a:blip r:embed="rId11"/>
+          <a:stretch>
+            <a:fillRect/>
+          </a:stretch>
+        </p:blipFill>
+        <p:spPr>
+          <a:xfrm>
+            <a:off x="4583430" y="5260086"/>
+            <a:ext cx="205740" cy="205740"/>
+          </a:xfrm>
+          <a:prstGeom prst="rect">
+            <a:avLst/>
+          </a:prstGeom>
+        </p:spPr>
+      </p:pic>
+      <p:sp>
+        <p:nvSpPr>
+          <p:cNvPr id="56" name="Text 43"/>
+          <p:cNvSpPr txBox="1"/>
+          <p:nvPr/>
+        </p:nvSpPr>
+        <p:spPr>
+          <a:xfrm>
+            <a:off x="5029200" y="5038344"/>
+            <a:ext cx="2697480" cy="347472"/>
+          </a:xfrm>
+          <a:prstGeom prst="rect">
+            <a:avLst/>
+          </a:prstGeom>
+          <a:noFill/>
+          <a:ln/>
+        </p:spPr>
+        <p:txBody>
+          <a:bodyPr wrap="square" lIns="0" tIns="0" rIns="0" bIns="0" rtlCol="0" anchor="t"/>
+          <a:lstStyle/>
+          <a:p>
+            <a:pPr indent="0" marL="0">
+              <a:buNone/>
+            </a:pPr>
+            <a:r>
+              <a:rPr lang="en-US" sz="1300" b="1" dirty="0">
+                <a:solidFill>
+                  <a:schemeClr val="tx1"/>
+                </a:solidFill>
+              </a:rPr>
+              <a:t>Compose start-up races</a:t>
+            </a:r>
+            <a:endParaRPr lang="en-US" sz="1300" dirty="0"/>
+          </a:p>
+        </p:txBody>
+      </p:sp>
+      <p:sp>
+        <p:nvSpPr>
+          <p:cNvPr id="57" name="Text 44"/>
+          <p:cNvSpPr txBox="1"/>
+          <p:nvPr/>
+        </p:nvSpPr>
+        <p:spPr>
+          <a:xfrm>
+            <a:off x="5029200" y="5404104"/>
+            <a:ext cx="2697480" cy="347472"/>
+          </a:xfrm>
+          <a:prstGeom prst="rect">
+            <a:avLst/>
+          </a:prstGeom>
+          <a:noFill/>
+          <a:ln/>
+        </p:spPr>
+        <p:txBody>
+          <a:bodyPr wrap="square" lIns="0" tIns="0" rIns="0" bIns="0" rtlCol="0" anchor="t"/>
+          <a:lstStyle/>
+          <a:p>
+            <a:pPr indent="0" marL="0">
+              <a:buNone/>
+            </a:pPr>
+            <a:r>
+              <a:rPr lang="en-US" sz="1150" dirty="0">
+                <a:solidFill>
+                  <a:schemeClr val="tx2"/>
+                </a:solidFill>
+              </a:rPr>
+              <a:t>health-gated depends_on</a:t>
+            </a:r>
+            <a:endParaRPr lang="en-US" sz="1150" dirty="0"/>
+          </a:p>
+        </p:txBody>
+      </p:sp>
+      <p:sp>
+        <p:nvSpPr>
+          <p:cNvPr id="58" name="bug-card-11"/>
+          <p:cNvSpPr/>
+          <p:nvPr/>
+        </p:nvSpPr>
+        <p:spPr>
+          <a:xfrm>
+            <a:off x="8046720" y="4882896"/>
+            <a:ext cx="3566160" cy="1005840"/>
+          </a:xfrm>
+          <a:prstGeom prst="roundRect">
+            <a:avLst>
+              <a:gd name="adj" fmla="val 10909"/>
+            </a:avLst>
+          </a:prstGeom>
+          <a:solidFill>
+            <a:schemeClr val="bg2"/>
+          </a:solidFill>
+          <a:ln w="12700">
+            <a:solidFill>
+              <a:schemeClr val="bg2"/>
+            </a:solidFill>
+            <a:prstDash val="solid"/>
+          </a:ln>
+        </p:spPr>
+      </p:sp>
+      <p:sp>
+        <p:nvSpPr>
+          <p:cNvPr id="59" name="bug-badge-11-circle"/>
+          <p:cNvSpPr/>
+          <p:nvPr/>
+        </p:nvSpPr>
+        <p:spPr>
+          <a:xfrm>
+            <a:off x="8229600" y="5157216"/>
+            <a:ext cx="411480" cy="411480"/>
+          </a:xfrm>
+          <a:prstGeom prst="ellipse">
+            <a:avLst/>
+          </a:prstGeom>
+          <a:solidFill>
+            <a:schemeClr val="accent1"/>
+          </a:solidFill>
+          <a:ln w="12700">
+            <a:solidFill>
+              <a:schemeClr val="accent1"/>
+            </a:solidFill>
+            <a:prstDash val="solid"/>
+          </a:ln>
+        </p:spPr>
+      </p:sp>
+      <p:pic>
+        <p:nvPicPr>
+          <p:cNvPr id="60" name="bug-badge-11-icon" descr="preencoded.png">    </p:cNvPr>
+          <p:cNvPicPr>
+            <a:picLocks noChangeAspect="1"/>
+          </p:cNvPicPr>
+          <p:nvPr/>
+        </p:nvPicPr>
+        <p:blipFill>
+          <a:blip r:embed="rId12"/>
+          <a:stretch>
+            <a:fillRect/>
+          </a:stretch>
+        </p:blipFill>
+        <p:spPr>
+          <a:xfrm>
+            <a:off x="8332470" y="5260086"/>
+            <a:ext cx="205740" cy="205740"/>
+          </a:xfrm>
+          <a:prstGeom prst="rect">
+            <a:avLst/>
+          </a:prstGeom>
+        </p:spPr>
+      </p:pic>
+      <p:sp>
+        <p:nvSpPr>
+          <p:cNvPr id="61" name="Text 47"/>
+          <p:cNvSpPr txBox="1"/>
+          <p:nvPr/>
+        </p:nvSpPr>
+        <p:spPr>
+          <a:xfrm>
+            <a:off x="8778240" y="5038344"/>
+            <a:ext cx="2697480" cy="347472"/>
+          </a:xfrm>
+          <a:prstGeom prst="rect">
+            <a:avLst/>
+          </a:prstGeom>
+          <a:noFill/>
+          <a:ln/>
+        </p:spPr>
+        <p:txBody>
+          <a:bodyPr wrap="square" lIns="0" tIns="0" rIns="0" bIns="0" rtlCol="0" anchor="t"/>
+          <a:lstStyle/>
+          <a:p>
+            <a:pPr indent="0" marL="0">
+              <a:buNone/>
+            </a:pPr>
+            <a:r>
+              <a:rPr lang="en-US" sz="1300" b="1" dirty="0">
+                <a:solidFill>
+                  <a:schemeClr val="tx1"/>
+                </a:solidFill>
+              </a:rPr>
+              <a:t>ingress-nginx retired (2026)</a:t>
+            </a:r>
+            <a:endParaRPr lang="en-US" sz="1300" dirty="0"/>
+          </a:p>
+        </p:txBody>
+      </p:sp>
+      <p:sp>
+        <p:nvSpPr>
+          <p:cNvPr id="62" name="Text 48"/>
+          <p:cNvSpPr txBox="1"/>
+          <p:nvPr/>
+        </p:nvSpPr>
+        <p:spPr>
+          <a:xfrm>
+            <a:off x="8778240" y="5404104"/>
+            <a:ext cx="2697480" cy="347472"/>
+          </a:xfrm>
+          <a:prstGeom prst="rect">
+            <a:avLst/>
+          </a:prstGeom>
+          <a:noFill/>
+          <a:ln/>
+        </p:spPr>
+        <p:txBody>
+          <a:bodyPr wrap="square" lIns="0" tIns="0" rIns="0" bIns="0" rtlCol="0" anchor="t"/>
+          <a:lstStyle/>
+          <a:p>
+            <a:pPr indent="0" marL="0">
+              <a:buNone/>
+            </a:pPr>
+            <a:r>
+              <a:rPr lang="en-US" sz="1150" dirty="0">
+                <a:solidFill>
+                  <a:schemeClr val="tx2"/>
+                </a:solidFill>
+              </a:rPr>
+              <a:t>switched to Traefik</a:t>
+            </a:r>
+            <a:endParaRPr lang="en-US" sz="1150" dirty="0"/>
           </a:p>
         </p:txBody>
       </p:sp>
@@ -9133,6 +8931,562 @@
 <file path=ppt/slides/slide17.xml><?xml version="1.0" encoding="utf-8"?>
 <p:sld xmlns:a="http://schemas.openxmlformats.org/drawingml/2006/main" xmlns:r="http://schemas.openxmlformats.org/officeDocument/2006/relationships" xmlns:p="http://schemas.openxmlformats.org/presentationml/2006/main">
   <p:cSld name="Slide 17">
+    <p:spTree>
+      <p:nvGrpSpPr>
+        <p:cNvPr id="1" name=""/>
+        <p:cNvGrpSpPr/>
+        <p:nvPr/>
+      </p:nvGrpSpPr>
+      <p:grpSpPr>
+        <a:xfrm>
+          <a:off x="0" y="0"/>
+          <a:ext cx="0" cy="0"/>
+          <a:chOff x="0" y="0"/>
+          <a:chExt cx="0" cy="0"/>
+        </a:xfrm>
+      </p:grpSpPr>
+      <p:sp>
+        <p:nvSpPr>
+          <p:cNvPr id="2" name="Text 0"/>
+          <p:cNvSpPr/>
+          <p:nvPr>
+            <p:ph idx="100" type="title" hasCustomPrompt="1"/>
+          </p:nvPr>
+        </p:nvSpPr>
+        <p:spPr>
+          <a:xfrm>
+            <a:off x="548640" y="365760"/>
+            <a:ext cx="11094415" cy="777240"/>
+          </a:xfrm>
+          <a:prstGeom prst="rect">
+            <a:avLst/>
+          </a:prstGeom>
+          <a:noFill/>
+          <a:ln/>
+        </p:spPr>
+        <p:txBody>
+          <a:bodyPr wrap="square" lIns="0" tIns="0" rIns="0" bIns="0" rtlCol="0" anchor="ctr"/>
+          <a:lstStyle/>
+          <a:p>
+            <a:pPr algn="l" indent="0" marL="0">
+              <a:buNone/>
+            </a:pPr>
+            <a:r>
+              <a:rPr lang="en-US" sz="3400" b="1" dirty="0">
+                <a:solidFill>
+                  <a:schemeClr val="tx1"/>
+                </a:solidFill>
+              </a:rPr>
+              <a:t>Key learnings and next steps</a:t>
+            </a:r>
+            <a:endParaRPr lang="en-US" sz="3400" dirty="0"/>
+          </a:p>
+        </p:txBody>
+      </p:sp>
+      <p:sp>
+        <p:nvSpPr>
+          <p:cNvPr id="3" name="learn-card-0"/>
+          <p:cNvSpPr/>
+          <p:nvPr/>
+        </p:nvSpPr>
+        <p:spPr>
+          <a:xfrm>
+            <a:off x="548640" y="1371600"/>
+            <a:ext cx="5394960" cy="4526280"/>
+          </a:xfrm>
+          <a:prstGeom prst="roundRect">
+            <a:avLst>
+              <a:gd name="adj" fmla="val 2424"/>
+            </a:avLst>
+          </a:prstGeom>
+          <a:solidFill>
+            <a:schemeClr val="bg2"/>
+          </a:solidFill>
+          <a:ln w="12700">
+            <a:solidFill>
+              <a:schemeClr val="bg2"/>
+            </a:solidFill>
+            <a:prstDash val="solid"/>
+          </a:ln>
+        </p:spPr>
+      </p:sp>
+      <p:sp>
+        <p:nvSpPr>
+          <p:cNvPr id="4" name="learn-badge-0-circle"/>
+          <p:cNvSpPr/>
+          <p:nvPr/>
+        </p:nvSpPr>
+        <p:spPr>
+          <a:xfrm>
+            <a:off x="822960" y="1645920"/>
+            <a:ext cx="548640" cy="548640"/>
+          </a:xfrm>
+          <a:prstGeom prst="ellipse">
+            <a:avLst/>
+          </a:prstGeom>
+          <a:solidFill>
+            <a:schemeClr val="accent1"/>
+          </a:solidFill>
+          <a:ln w="12700">
+            <a:solidFill>
+              <a:schemeClr val="accent1"/>
+            </a:solidFill>
+            <a:prstDash val="solid"/>
+          </a:ln>
+        </p:spPr>
+      </p:sp>
+      <p:pic>
+        <p:nvPicPr>
+          <p:cNvPr id="5" name="learn-badge-0-icon" descr="preencoded.png">    </p:cNvPr>
+          <p:cNvPicPr>
+            <a:picLocks noChangeAspect="1"/>
+          </p:cNvPicPr>
+          <p:nvPr/>
+        </p:nvPicPr>
+        <p:blipFill>
+          <a:blip r:embed="rId1"/>
+          <a:stretch>
+            <a:fillRect/>
+          </a:stretch>
+        </p:blipFill>
+        <p:spPr>
+          <a:xfrm>
+            <a:off x="960120" y="1783080"/>
+            <a:ext cx="274320" cy="274320"/>
+          </a:xfrm>
+          <a:prstGeom prst="rect">
+            <a:avLst/>
+          </a:prstGeom>
+        </p:spPr>
+      </p:pic>
+      <p:sp>
+        <p:nvSpPr>
+          <p:cNvPr id="6" name="Text 3"/>
+          <p:cNvSpPr txBox="1"/>
+          <p:nvPr/>
+        </p:nvSpPr>
+        <p:spPr>
+          <a:xfrm>
+            <a:off x="1554480" y="1719072"/>
+            <a:ext cx="3657600" cy="411480"/>
+          </a:xfrm>
+          <a:prstGeom prst="rect">
+            <a:avLst/>
+          </a:prstGeom>
+          <a:noFill/>
+          <a:ln/>
+        </p:spPr>
+        <p:txBody>
+          <a:bodyPr wrap="square" lIns="0" tIns="0" rIns="0" bIns="0" rtlCol="0" anchor="t"/>
+          <a:lstStyle/>
+          <a:p>
+            <a:pPr indent="0" marL="0">
+              <a:buNone/>
+            </a:pPr>
+            <a:r>
+              <a:rPr lang="en-US" sz="2000" b="1" dirty="0">
+                <a:solidFill>
+                  <a:schemeClr val="tx1"/>
+                </a:solidFill>
+              </a:rPr>
+              <a:t>Learnings</a:t>
+            </a:r>
+            <a:endParaRPr lang="en-US" sz="2000" dirty="0"/>
+          </a:p>
+        </p:txBody>
+      </p:sp>
+      <p:sp>
+        <p:nvSpPr>
+          <p:cNvPr id="7" name="Text 4"/>
+          <p:cNvSpPr txBox="1"/>
+          <p:nvPr/>
+        </p:nvSpPr>
+        <p:spPr>
+          <a:xfrm>
+            <a:off x="822960" y="2423160"/>
+            <a:ext cx="4846320" cy="3291840"/>
+          </a:xfrm>
+          <a:prstGeom prst="rect">
+            <a:avLst/>
+          </a:prstGeom>
+          <a:noFill/>
+          <a:ln/>
+        </p:spPr>
+        <p:txBody>
+          <a:bodyPr wrap="square" lIns="0" tIns="0" rIns="0" bIns="0" rtlCol="0" anchor="t"/>
+          <a:lstStyle/>
+          <a:p>
+            <a:pPr marL="342900" indent="-342900">
+              <a:spcAft>
+                <a:spcPts val="1000"/>
+              </a:spcAft>
+              <a:buSzPct val="100000"/>
+              <a:buChar char="•"/>
+            </a:pPr>
+            <a:r>
+              <a:rPr lang="en-US" sz="1500" dirty="0">
+                <a:solidFill>
+                  <a:schemeClr val="tx1"/>
+                </a:solidFill>
+              </a:rPr>
+              <a:t>Run every layer for real; reading YAML hides broken wiring</a:t>
+            </a:r>
+            <a:endParaRPr lang="en-US" sz="1500" dirty="0"/>
+          </a:p>
+          <a:p>
+            <a:pPr marL="342900" indent="-342900">
+              <a:spcAft>
+                <a:spcPts val="1000"/>
+              </a:spcAft>
+              <a:buSzPct val="100000"/>
+              <a:buChar char="•"/>
+            </a:pPr>
+            <a:r>
+              <a:rPr lang="en-US" sz="1500" dirty="0">
+                <a:solidFill>
+                  <a:schemeClr val="tx1"/>
+                </a:solidFill>
+              </a:rPr>
+              <a:t>Gates must be able to fail: a scanner without --exit-code is decoration</a:t>
+            </a:r>
+            <a:endParaRPr lang="en-US" sz="1500" dirty="0"/>
+          </a:p>
+          <a:p>
+            <a:pPr marL="342900" indent="-342900">
+              <a:spcAft>
+                <a:spcPts val="1000"/>
+              </a:spcAft>
+              <a:buSzPct val="100000"/>
+              <a:buChar char="•"/>
+            </a:pPr>
+            <a:r>
+              <a:rPr lang="en-US" sz="1500" dirty="0">
+                <a:solidFill>
+                  <a:schemeClr val="tx1"/>
+                </a:solidFill>
+              </a:rPr>
+              <a:t>Liveness ≠ readiness: a DB outage should drain pods, not restart them</a:t>
+            </a:r>
+            <a:endParaRPr lang="en-US" sz="1500" dirty="0"/>
+          </a:p>
+          <a:p>
+            <a:pPr marL="342900" indent="-342900">
+              <a:spcAft>
+                <a:spcPts val="1000"/>
+              </a:spcAft>
+              <a:buSzPct val="100000"/>
+              <a:buChar char="•"/>
+            </a:pPr>
+            <a:r>
+              <a:rPr lang="en-US" sz="1500" dirty="0">
+                <a:solidFill>
+                  <a:schemeClr val="tx1"/>
+                </a:solidFill>
+              </a:rPr>
+              <a:t>Pin versions and keep them current: EKS, AMIs and Ingress controllers retire</a:t>
+            </a:r>
+            <a:endParaRPr lang="en-US" sz="1500" dirty="0"/>
+          </a:p>
+          <a:p>
+            <a:pPr marL="342900" indent="-342900">
+              <a:spcAft>
+                <a:spcPts val="1000"/>
+              </a:spcAft>
+              <a:buSzPct val="100000"/>
+              <a:buChar char="•"/>
+            </a:pPr>
+            <a:r>
+              <a:rPr lang="en-US" sz="1500" dirty="0">
+                <a:solidFill>
+                  <a:schemeClr val="tx1"/>
+                </a:solidFill>
+              </a:rPr>
+              <a:t>Git as the deployment API makes rollback a git revert</a:t>
+            </a:r>
+            <a:endParaRPr lang="en-US" sz="1500" dirty="0"/>
+          </a:p>
+        </p:txBody>
+      </p:sp>
+      <p:sp>
+        <p:nvSpPr>
+          <p:cNvPr id="8" name="learn-card-1"/>
+          <p:cNvSpPr/>
+          <p:nvPr/>
+        </p:nvSpPr>
+        <p:spPr>
+          <a:xfrm>
+            <a:off x="6217920" y="1371600"/>
+            <a:ext cx="5394960" cy="4526280"/>
+          </a:xfrm>
+          <a:prstGeom prst="roundRect">
+            <a:avLst>
+              <a:gd name="adj" fmla="val 2424"/>
+            </a:avLst>
+          </a:prstGeom>
+          <a:solidFill>
+            <a:schemeClr val="bg2"/>
+          </a:solidFill>
+          <a:ln w="12700">
+            <a:solidFill>
+              <a:schemeClr val="bg2"/>
+            </a:solidFill>
+            <a:prstDash val="solid"/>
+          </a:ln>
+        </p:spPr>
+      </p:sp>
+      <p:sp>
+        <p:nvSpPr>
+          <p:cNvPr id="9" name="learn-badge-1-circle"/>
+          <p:cNvSpPr/>
+          <p:nvPr/>
+        </p:nvSpPr>
+        <p:spPr>
+          <a:xfrm>
+            <a:off x="6492240" y="1645920"/>
+            <a:ext cx="548640" cy="548640"/>
+          </a:xfrm>
+          <a:prstGeom prst="ellipse">
+            <a:avLst/>
+          </a:prstGeom>
+          <a:solidFill>
+            <a:schemeClr val="accent3"/>
+          </a:solidFill>
+          <a:ln w="12700">
+            <a:solidFill>
+              <a:schemeClr val="accent3"/>
+            </a:solidFill>
+            <a:prstDash val="solid"/>
+          </a:ln>
+        </p:spPr>
+      </p:sp>
+      <p:pic>
+        <p:nvPicPr>
+          <p:cNvPr id="10" name="learn-badge-1-icon" descr="preencoded.png">    </p:cNvPr>
+          <p:cNvPicPr>
+            <a:picLocks noChangeAspect="1"/>
+          </p:cNvPicPr>
+          <p:nvPr/>
+        </p:nvPicPr>
+        <p:blipFill>
+          <a:blip r:embed="rId2"/>
+          <a:stretch>
+            <a:fillRect/>
+          </a:stretch>
+        </p:blipFill>
+        <p:spPr>
+          <a:xfrm>
+            <a:off x="6629400" y="1783080"/>
+            <a:ext cx="274320" cy="274320"/>
+          </a:xfrm>
+          <a:prstGeom prst="rect">
+            <a:avLst/>
+          </a:prstGeom>
+        </p:spPr>
+      </p:pic>
+      <p:sp>
+        <p:nvSpPr>
+          <p:cNvPr id="11" name="Text 7"/>
+          <p:cNvSpPr txBox="1"/>
+          <p:nvPr/>
+        </p:nvSpPr>
+        <p:spPr>
+          <a:xfrm>
+            <a:off x="7223760" y="1719072"/>
+            <a:ext cx="3657600" cy="411480"/>
+          </a:xfrm>
+          <a:prstGeom prst="rect">
+            <a:avLst/>
+          </a:prstGeom>
+          <a:noFill/>
+          <a:ln/>
+        </p:spPr>
+        <p:txBody>
+          <a:bodyPr wrap="square" lIns="0" tIns="0" rIns="0" bIns="0" rtlCol="0" anchor="t"/>
+          <a:lstStyle/>
+          <a:p>
+            <a:pPr indent="0" marL="0">
+              <a:buNone/>
+            </a:pPr>
+            <a:r>
+              <a:rPr lang="en-US" sz="2000" b="1" dirty="0">
+                <a:solidFill>
+                  <a:schemeClr val="tx1"/>
+                </a:solidFill>
+              </a:rPr>
+              <a:t>Next steps</a:t>
+            </a:r>
+            <a:endParaRPr lang="en-US" sz="2000" dirty="0"/>
+          </a:p>
+        </p:txBody>
+      </p:sp>
+      <p:sp>
+        <p:nvSpPr>
+          <p:cNvPr id="12" name="Text 8"/>
+          <p:cNvSpPr txBox="1"/>
+          <p:nvPr/>
+        </p:nvSpPr>
+        <p:spPr>
+          <a:xfrm>
+            <a:off x="6492240" y="2423160"/>
+            <a:ext cx="4846320" cy="3291840"/>
+          </a:xfrm>
+          <a:prstGeom prst="rect">
+            <a:avLst/>
+          </a:prstGeom>
+          <a:noFill/>
+          <a:ln/>
+        </p:spPr>
+        <p:txBody>
+          <a:bodyPr wrap="square" lIns="0" tIns="0" rIns="0" bIns="0" rtlCol="0" anchor="t"/>
+          <a:lstStyle/>
+          <a:p>
+            <a:pPr marL="342900" indent="-342900">
+              <a:spcAft>
+                <a:spcPts val="1000"/>
+              </a:spcAft>
+              <a:buSzPct val="100000"/>
+              <a:buChar char="•"/>
+            </a:pPr>
+            <a:r>
+              <a:rPr lang="en-US" sz="1500" dirty="0">
+                <a:solidFill>
+                  <a:schemeClr val="tx1"/>
+                </a:solidFill>
+              </a:rPr>
+              <a:t>Amazon RDS instead of in-cluster Postgres</a:t>
+            </a:r>
+            <a:endParaRPr lang="en-US" sz="1500" dirty="0"/>
+          </a:p>
+          <a:p>
+            <a:pPr marL="342900" indent="-342900">
+              <a:spcAft>
+                <a:spcPts val="1000"/>
+              </a:spcAft>
+              <a:buSzPct val="100000"/>
+              <a:buChar char="•"/>
+            </a:pPr>
+            <a:r>
+              <a:rPr lang="en-US" sz="1500" dirty="0">
+                <a:solidFill>
+                  <a:schemeClr val="tx1"/>
+                </a:solidFill>
+              </a:rPr>
+              <a:t>External Secrets + AWS Secrets Manager</a:t>
+            </a:r>
+            <a:endParaRPr lang="en-US" sz="1500" dirty="0"/>
+          </a:p>
+          <a:p>
+            <a:pPr marL="342900" indent="-342900">
+              <a:spcAft>
+                <a:spcPts val="1000"/>
+              </a:spcAft>
+              <a:buSzPct val="100000"/>
+              <a:buChar char="•"/>
+            </a:pPr>
+            <a:r>
+              <a:rPr lang="en-US" sz="1500" dirty="0">
+                <a:solidFill>
+                  <a:schemeClr val="tx1"/>
+                </a:solidFill>
+              </a:rPr>
+              <a:t>cert-manager TLS on the Ingress</a:t>
+            </a:r>
+            <a:endParaRPr lang="en-US" sz="1500" dirty="0"/>
+          </a:p>
+          <a:p>
+            <a:pPr marL="342900" indent="-342900">
+              <a:spcAft>
+                <a:spcPts val="1000"/>
+              </a:spcAft>
+              <a:buSzPct val="100000"/>
+              <a:buChar char="•"/>
+            </a:pPr>
+            <a:r>
+              <a:rPr lang="en-US" sz="1500" dirty="0">
+                <a:solidFill>
+                  <a:schemeClr val="tx1"/>
+                </a:solidFill>
+              </a:rPr>
+              <a:t>S3 remote state with locking for Terraform</a:t>
+            </a:r>
+            <a:endParaRPr lang="en-US" sz="1500" dirty="0"/>
+          </a:p>
+          <a:p>
+            <a:pPr marL="342900" indent="-342900">
+              <a:spcAft>
+                <a:spcPts val="1000"/>
+              </a:spcAft>
+              <a:buSzPct val="100000"/>
+              <a:buChar char="•"/>
+            </a:pPr>
+            <a:r>
+              <a:rPr lang="en-US" sz="1500" dirty="0">
+                <a:solidFill>
+                  <a:schemeClr val="tx1"/>
+                </a:solidFill>
+              </a:rPr>
+              <a:t>App authentication; alerting rules in Alertmanager</a:t>
+            </a:r>
+            <a:endParaRPr lang="en-US" sz="1500" dirty="0"/>
+          </a:p>
+        </p:txBody>
+      </p:sp>
+      <p:sp>
+        <p:nvSpPr>
+          <p:cNvPr id="25" name="Slide Number Placeholder 0"/>
+          <p:cNvSpPr>
+            <a:spLocks noGrp="1"/>
+          </p:cNvSpPr>
+          <p:nvPr>
+            <p:ph type="sldNum" sz="quarter" idx="4294967295"/>
+          </p:nvPr>
+        </p:nvSpPr>
+        <p:spPr>
+          <a:xfrm>
+            <a:off x="11094415" y="6446520"/>
+            <a:ext cx="548640" cy="274320"/>
+          </a:xfrm>
+          <a:prstGeom prst="rect">
+            <a:avLst/>
+          </a:prstGeom>
+          <a:extLst>
+            <a:ext uri="{C572A759-6A51-4108-AA02-DFA0A04FC94B}">
+              <ma14:wrappingTextBoxFlag xmlns:ma14="http://schemas.microsoft.com/office/mac/drawingml/2011/main" val="0"/>
+            </a:ext>
+          </a:extLst>
+        </p:spPr>
+        <p:txBody>
+          <a:bodyPr/>
+          <a:lstStyle>
+            <a:lvl1pPr>
+              <a:defRPr sz="1000">
+                <a:solidFill>
+                  <a:schemeClr val="accent6"/>
+                </a:solidFill>
+              </a:defRPr>
+            </a:lvl1pPr>
+          </a:lstStyle>
+          <a:p>
+            <a:pPr algn="r"/>
+            <a:fld id="{F7021451-1387-4CA6-816F-3879F97B5CBC}" type="slidenum">
+              <a:rPr b="0" lang="en-US"/>
+              <a:t>17</a:t>
+            </a:fld>
+            <a:endParaRPr lang="en-US"/>
+          </a:p>
+        </p:txBody>
+      </p:sp>
+    </p:spTree>
+  </p:cSld>
+  <p:clrMapOvr>
+    <a:masterClrMapping/>
+  </p:clrMapOvr>
+</p:sld>
+</file>
+
+<file path=ppt/slides/slide18.xml><?xml version="1.0" encoding="utf-8"?>
+<p:sld xmlns:a="http://schemas.openxmlformats.org/drawingml/2006/main" xmlns:r="http://schemas.openxmlformats.org/officeDocument/2006/relationships" xmlns:p="http://schemas.openxmlformats.org/presentationml/2006/main">
+  <p:cSld name="Slide 18">
     <p:spTree>
       <p:nvGrpSpPr>
         <p:cNvPr id="1" name=""/>
